--- a/docs/paper/presentation.pptx
+++ b/docs/paper/presentation.pptx
@@ -19,12 +19,9 @@
     <p:sldId id="267" r:id="rId13"/>
     <p:sldId id="268" r:id="rId14"/>
     <p:sldId id="269" r:id="rId15"/>
-    <p:sldId id="270" r:id="rId16"/>
-    <p:sldId id="271" r:id="rId17"/>
-    <p:sldId id="272" r:id="rId18"/>
   </p:sldIdLst>
   <p:notesMasterIdLst>
-    <p:notesMasterId r:id="rId19"/>
+    <p:notesMasterId r:id="rId16"/>
   </p:notesMasterIdLst>
   <p:sldSz cx="9144000" cy="5143500"/>
   <p:notesSz cx="5143500" cy="9144000"/>
@@ -518,7 +515,7 @@
           <a:p>
             <a:r>
               <a:rPr lang="en-US" dirty="0"/>
-              <a:t>Two things in fifteen minutes: why the planning latency of JEPA world models is a systems problem rather than a modelling problem, and what happens when you treat it as one. The title is the claim: a world-model planner fast enough for a control loop, with the model and the planner unchanged.</a:t>
+              <a:t>This project asks why a robot that plans with an AI world model is slow, finds the answer in data, and fixes it. The title is the outcome: planning fast enough for a control loop, with the same model and the same success.</a:t>
             </a:r>
             <a:endParaRPr lang="en-US" dirty="0"/>
           </a:p>
@@ -606,7 +603,7 @@
           <a:p>
             <a:r>
               <a:rPr lang="en-US" dirty="0"/>
-              <a:t>Four phases. The first predates the H100 work and is why R1 and R2 look the way they do. Say plainly that the budget was extended and nearly used, and that the batch-1 harness is what made it expensive.</a:t>
+              <a:t>The headline. Thirteen times faster than the reference, and almost four times faster than a PyTorch implementation that already uses every standard trick. Just as important for a controller, it is predictable: the spread is under a millisecond.</a:t>
             </a:r>
             <a:endParaRPr lang="en-US" dirty="0"/>
           </a:p>
@@ -694,7 +691,7 @@
           <a:p>
             <a:r>
               <a:rPr lang="en-US" dirty="0"/>
-              <a:t>Read the chart top to bottom. Caching takes 40 per cent off. iCEM in eager PyTorch makes it slightly worse. Compilation and BF16 bring it to 182. The megakernel takes it to 59, and fusing the encoder to 46.5. Note also the spread: the PyTorch rungs spread over a hundred milliseconds, the megakernel rungs over one.</a:t>
+              <a:t>The guard rail. The robot succeeds as often as before, within what 300 paired episodes can resolve, about six points. The kernel's arithmetic error matches the half-precision arithmetic that was already accepted.</a:t>
             </a:r>
             <a:endParaRPr lang="en-US" dirty="0"/>
           </a:p>
@@ -782,7 +779,7 @@
           <a:p>
             <a:r>
               <a:rPr lang="en-US" dirty="0"/>
-              <a:t>This is the result I did not expect. iCEM evaluates three times fewer candidates, and in eager PyTorch it is slightly slower, because each cost call is launch-bound and costs the same at any population size. Only once the execution stops being launch-bound does the population matter. The order of the ladder matters for the accounting.</a:t>
+              <a:t>The objectives were met, and the limits are stated with them. The speed-up is large and stable; the claim about success is bounded by the sample size; the numbers are specific to this model and GPU even though the mechanism is general.</a:t>
             </a:r>
             <a:endParaRPr lang="en-US" dirty="0"/>
           </a:p>
@@ -870,7 +867,7 @@
           <a:p>
             <a:r>
               <a:rPr lang="en-US" dirty="0"/>
-              <a:t>Where R4's 46.5 milliseconds go: 41 in the solve, 1.3 in the encoder, about 4 in host glue. And how the solve got to 41: the biggest single win was the memory ordering of one barrier, not a GEMM. That is the signature of a latency-bound workload.</a:t>
+              <a:t>Four directions. The first is the immediate payoff: a fast planner can afford a bigger search. The others push latency further, test generality, and take the result to a real robot.</a:t>
             </a:r>
             <a:endParaRPr lang="en-US" dirty="0"/>
           </a:p>
@@ -958,7 +955,7 @@
           <a:p>
             <a:r>
               <a:rPr lang="en-US" dirty="0"/>
-              <a:t>The guard rail held. No step changed success detectably, and the discordance between rungs is the size you get from redrawing the random candidates alone. The honest framing is 'no detectable change at six points', not 'identical'.</a:t>
+              <a:t>Three sentences to end on, then questions.</a:t>
             </a:r>
             <a:endParaRPr lang="en-US" dirty="0"/>
           </a:p>
@@ -982,270 +979,6 @@
             <a:fld id="{F7021451-1387-4CA6-816F-3879F97B5CBC}" type="slidenum">
               <a:rPr lang="en-US"/>
               <a:t>14</a:t>
-            </a:fld>
-            <a:endParaRPr lang="en-US"/>
-          </a:p>
-        </p:txBody>
-      </p:sp>
-    </p:spTree>
-    <p:extLst>
-      <p:ext uri="{BB962C8B-B14F-4D97-AF65-F5344CB8AC3E}">
-        <p14:creationId xmlns:p14="http://schemas.microsoft.com/office/powerpoint/2010/main" val="1024086991"/>
-      </p:ext>
-    </p:extLst>
-  </p:cSld>
-  <p:clrMapOvr>
-    <a:masterClrMapping/>
-  </p:clrMapOvr>
-</p:notes>
-</file>
-
-<file path=ppt/notesSlides/notesSlide15.xml><?xml version="1.0" encoding="utf-8"?>
-<p:notes xmlns:a="http://schemas.openxmlformats.org/drawingml/2006/main" xmlns:r="http://schemas.openxmlformats.org/officeDocument/2006/relationships" xmlns:p="http://schemas.openxmlformats.org/presentationml/2006/main">
-  <p:cSld>
-    <p:spTree>
-      <p:nvGrpSpPr>
-        <p:cNvPr id="1" name=""/>
-        <p:cNvGrpSpPr/>
-        <p:nvPr/>
-      </p:nvGrpSpPr>
-      <p:grpSpPr>
-        <a:xfrm>
-          <a:off x="0" y="0"/>
-          <a:ext cx="0" cy="0"/>
-          <a:chOff x="0" y="0"/>
-          <a:chExt cx="0" cy="0"/>
-        </a:xfrm>
-      </p:grpSpPr>
-      <p:sp>
-        <p:nvSpPr>
-          <p:cNvPr id="2" name="Slide Image Placeholder 1"/>
-          <p:cNvSpPr>
-            <a:spLocks noGrp="1" noRot="1" noChangeAspect="1"/>
-          </p:cNvSpPr>
-          <p:nvPr>
-            <p:ph type="sldImg"/>
-          </p:nvPr>
-        </p:nvSpPr>
-        <p:spPr/>
-      </p:sp>
-      <p:sp>
-        <p:nvSpPr>
-          <p:cNvPr id="3" name="Notes Placeholder 2"/>
-          <p:cNvSpPr>
-            <a:spLocks noGrp="1"/>
-          </p:cNvSpPr>
-          <p:nvPr>
-            <p:ph type="body" idx="1"/>
-          </p:nvPr>
-        </p:nvSpPr>
-        <p:spPr/>
-        <p:txBody>
-          <a:bodyPr/>
-          <a:lstStyle/>
-          <a:p>
-            <a:r>
-              <a:rPr lang="en-US" dirty="0"/>
-              <a:t>Answers to the four questions, and the limits in the same breath. The speed-up is robust; the accuracy claim is bounded by the sample size; the factors are specific to this model and this GPU, even if the mechanism is not.</a:t>
-            </a:r>
-            <a:endParaRPr lang="en-US" dirty="0"/>
-          </a:p>
-        </p:txBody>
-      </p:sp>
-      <p:sp>
-        <p:nvSpPr>
-          <p:cNvPr id="4" name="Slide Number Placeholder 3"/>
-          <p:cNvSpPr>
-            <a:spLocks noGrp="1"/>
-          </p:cNvSpPr>
-          <p:nvPr>
-            <p:ph type="sldNum" sz="quarter" idx="10"/>
-          </p:nvPr>
-        </p:nvSpPr>
-        <p:spPr/>
-        <p:txBody>
-          <a:bodyPr/>
-          <a:lstStyle/>
-          <a:p>
-            <a:fld id="{F7021451-1387-4CA6-816F-3879F97B5CBC}" type="slidenum">
-              <a:rPr lang="en-US"/>
-              <a:t>15</a:t>
-            </a:fld>
-            <a:endParaRPr lang="en-US"/>
-          </a:p>
-        </p:txBody>
-      </p:sp>
-    </p:spTree>
-    <p:extLst>
-      <p:ext uri="{BB962C8B-B14F-4D97-AF65-F5344CB8AC3E}">
-        <p14:creationId xmlns:p14="http://schemas.microsoft.com/office/powerpoint/2010/main" val="1024086991"/>
-      </p:ext>
-    </p:extLst>
-  </p:cSld>
-  <p:clrMapOvr>
-    <a:masterClrMapping/>
-  </p:clrMapOvr>
-</p:notes>
-</file>
-
-<file path=ppt/notesSlides/notesSlide16.xml><?xml version="1.0" encoding="utf-8"?>
-<p:notes xmlns:a="http://schemas.openxmlformats.org/drawingml/2006/main" xmlns:r="http://schemas.openxmlformats.org/officeDocument/2006/relationships" xmlns:p="http://schemas.openxmlformats.org/presentationml/2006/main">
-  <p:cSld>
-    <p:spTree>
-      <p:nvGrpSpPr>
-        <p:cNvPr id="1" name=""/>
-        <p:cNvGrpSpPr/>
-        <p:nvPr/>
-      </p:nvGrpSpPr>
-      <p:grpSpPr>
-        <a:xfrm>
-          <a:off x="0" y="0"/>
-          <a:ext cx="0" cy="0"/>
-          <a:chOff x="0" y="0"/>
-          <a:chExt cx="0" cy="0"/>
-        </a:xfrm>
-      </p:grpSpPr>
-      <p:sp>
-        <p:nvSpPr>
-          <p:cNvPr id="2" name="Slide Image Placeholder 1"/>
-          <p:cNvSpPr>
-            <a:spLocks noGrp="1" noRot="1" noChangeAspect="1"/>
-          </p:cNvSpPr>
-          <p:nvPr>
-            <p:ph type="sldImg"/>
-          </p:nvPr>
-        </p:nvSpPr>
-        <p:spPr/>
-      </p:sp>
-      <p:sp>
-        <p:nvSpPr>
-          <p:cNvPr id="3" name="Notes Placeholder 2"/>
-          <p:cNvSpPr>
-            <a:spLocks noGrp="1"/>
-          </p:cNvSpPr>
-          <p:nvPr>
-            <p:ph type="body" idx="1"/>
-          </p:nvPr>
-        </p:nvSpPr>
-        <p:spPr/>
-        <p:txBody>
-          <a:bodyPr/>
-          <a:lstStyle/>
-          <a:p>
-            <a:r>
-              <a:rPr lang="en-US" dirty="0"/>
-              <a:t>Five directions in the order I would take them. The first is the most immediate payoff: a fast planner can afford a bigger search. The second and third push latency further. The fourth asks whether the result generalises beyond the most favourable model. The fifth turns compute into control.</a:t>
-            </a:r>
-            <a:endParaRPr lang="en-US" dirty="0"/>
-          </a:p>
-        </p:txBody>
-      </p:sp>
-      <p:sp>
-        <p:nvSpPr>
-          <p:cNvPr id="4" name="Slide Number Placeholder 3"/>
-          <p:cNvSpPr>
-            <a:spLocks noGrp="1"/>
-          </p:cNvSpPr>
-          <p:nvPr>
-            <p:ph type="sldNum" sz="quarter" idx="10"/>
-          </p:nvPr>
-        </p:nvSpPr>
-        <p:spPr/>
-        <p:txBody>
-          <a:bodyPr/>
-          <a:lstStyle/>
-          <a:p>
-            <a:fld id="{F7021451-1387-4CA6-816F-3879F97B5CBC}" type="slidenum">
-              <a:rPr lang="en-US"/>
-              <a:t>16</a:t>
-            </a:fld>
-            <a:endParaRPr lang="en-US"/>
-          </a:p>
-        </p:txBody>
-      </p:sp>
-    </p:spTree>
-    <p:extLst>
-      <p:ext uri="{BB962C8B-B14F-4D97-AF65-F5344CB8AC3E}">
-        <p14:creationId xmlns:p14="http://schemas.microsoft.com/office/powerpoint/2010/main" val="1024086991"/>
-      </p:ext>
-    </p:extLst>
-  </p:cSld>
-  <p:clrMapOvr>
-    <a:masterClrMapping/>
-  </p:clrMapOvr>
-</p:notes>
-</file>
-
-<file path=ppt/notesSlides/notesSlide17.xml><?xml version="1.0" encoding="utf-8"?>
-<p:notes xmlns:a="http://schemas.openxmlformats.org/drawingml/2006/main" xmlns:r="http://schemas.openxmlformats.org/officeDocument/2006/relationships" xmlns:p="http://schemas.openxmlformats.org/presentationml/2006/main">
-  <p:cSld>
-    <p:spTree>
-      <p:nvGrpSpPr>
-        <p:cNvPr id="1" name=""/>
-        <p:cNvGrpSpPr/>
-        <p:nvPr/>
-      </p:nvGrpSpPr>
-      <p:grpSpPr>
-        <a:xfrm>
-          <a:off x="0" y="0"/>
-          <a:ext cx="0" cy="0"/>
-          <a:chOff x="0" y="0"/>
-          <a:chExt cx="0" cy="0"/>
-        </a:xfrm>
-      </p:grpSpPr>
-      <p:sp>
-        <p:nvSpPr>
-          <p:cNvPr id="2" name="Slide Image Placeholder 1"/>
-          <p:cNvSpPr>
-            <a:spLocks noGrp="1" noRot="1" noChangeAspect="1"/>
-          </p:cNvSpPr>
-          <p:nvPr>
-            <p:ph type="sldImg"/>
-          </p:nvPr>
-        </p:nvSpPr>
-        <p:spPr/>
-      </p:sp>
-      <p:sp>
-        <p:nvSpPr>
-          <p:cNvPr id="3" name="Notes Placeholder 2"/>
-          <p:cNvSpPr>
-            <a:spLocks noGrp="1"/>
-          </p:cNvSpPr>
-          <p:nvPr>
-            <p:ph type="body" idx="1"/>
-          </p:nvPr>
-        </p:nvSpPr>
-        <p:spPr/>
-        <p:txBody>
-          <a:bodyPr/>
-          <a:lstStyle/>
-          <a:p>
-            <a:r>
-              <a:rPr lang="en-US" dirty="0"/>
-              <a:t>Three sentences to end on, then questions.</a:t>
-            </a:r>
-            <a:endParaRPr lang="en-US" dirty="0"/>
-          </a:p>
-        </p:txBody>
-      </p:sp>
-      <p:sp>
-        <p:nvSpPr>
-          <p:cNvPr id="4" name="Slide Number Placeholder 3"/>
-          <p:cNvSpPr>
-            <a:spLocks noGrp="1"/>
-          </p:cNvSpPr>
-          <p:nvPr>
-            <p:ph type="sldNum" sz="quarter" idx="10"/>
-          </p:nvPr>
-        </p:nvSpPr>
-        <p:spPr/>
-        <p:txBody>
-          <a:bodyPr/>
-          <a:lstStyle/>
-          <a:p>
-            <a:fld id="{F7021451-1387-4CA6-816F-3879F97B5CBC}" type="slidenum">
-              <a:rPr lang="en-US"/>
-              <a:t>17</a:t>
             </a:fld>
             <a:endParaRPr lang="en-US"/>
           </a:p>
@@ -1310,7 +1043,7 @@
           <a:p>
             <a:r>
               <a:rPr lang="en-US" dirty="0"/>
-              <a:t>This is the abstract compressed. Keep four numbers in mind: 622 milliseconds for the released planner, 182 for the best PyTorch implementation I had, 46.5 for one kernel launch, and task success that does not move. Everything that follows explains how the 622 becomes 46.5, and why the steps are not the ones you might expect.</a:t>
+              <a:t>Four numbers to keep in mind: 622 milliseconds before, 46.5 after, thirteen times faster, and no change in how often the robot succeeds. The rest of the talk explains how the data led from the first number to the second.</a:t>
             </a:r>
             <a:endParaRPr lang="en-US" dirty="0"/>
           </a:p>
@@ -1398,7 +1131,7 @@
           <a:p>
             <a:r>
               <a:rPr lang="en-US" dirty="0"/>
-              <a:t>The motivation is control. LeWM was designed to make planning cheap by shrinking the representation, and it succeeded: the arithmetic of a plan is trivial for a datacentre GPU. Yet a plan still takes over half a second, because of how the planner is executed. That makes it a systems problem, and that is what this project attacks.</a:t>
+              <a:t>The motivation is control. Larger world models take tens of seconds per plan. LeWM brought that under a second by being small. But a robot needs tens of milliseconds, and a model this small should be able to deliver that.</a:t>
             </a:r>
             <a:endParaRPr lang="en-US" dirty="0"/>
           </a:p>
@@ -1486,7 +1219,7 @@
           <a:p>
             <a:r>
               <a:rPr lang="en-US" dirty="0"/>
-              <a:t>Reflection slide. The project started as a conventional PyTorch optimisation study and ran into a wall: once compilation and BF16 were in, the planner was still dominated by what happens between kernels. That is what pushed me to a megakernel, and the megakernel is what forced the evaluation discipline, because a numeric rewrite of the whole planner needs a paired closed-loop check and an equal-hardware reference.</a:t>
+              <a:t>Four objectives, one per stage of the work. The project is an analytics project about an AI system: the data are timings and outcomes, the pattern discovery is a fitted model of where time goes, and the evaluation is statistical.</a:t>
             </a:r>
             <a:endParaRPr lang="en-US" dirty="0"/>
           </a:p>
@@ -1574,7 +1307,7 @@
           <a:p>
             <a:r>
               <a:rPr lang="en-US" dirty="0"/>
-              <a:t>Three lineages. JEPA world models, where planning latency has always been addressed by changing the model. Sampling-based planners, where iCEM cut the sample count, and CEM-GD already showed that sample count is not wall time. And small-batch inference, where the megakernel is the newest answer but only for language models. The gap is the intersection: an exact, model-preserving systems treatment of world-model planning.</a:t>
+              <a:t>Three lines of work meet here. World models, where speed has been treated as a property of the model. Sampling-based search, where iCEM cut samples but related work warns that samples are not time. And GPU inference, where the megakernel is the newest tool but has only been used for language models.</a:t>
             </a:r>
             <a:endParaRPr lang="en-US" dirty="0"/>
           </a:p>
@@ -1662,7 +1395,7 @@
           <a:p>
             <a:r>
               <a:rPr lang="en-US" dirty="0"/>
-              <a:t>Four questions, one per kind of change: exact, planner-level, execution, numeric. The fourth is the guard rail: none of the speed-ups counts if the robot does worse.</a:t>
+              <a:t>The pipeline. Collect timings and outcomes, prepare them into tidy tables, discover where the time goes, design against it, evaluate, deploy. Probes are configurations that differ in one respect, used only to isolate an effect. Every design change went back through profiling before it was kept.</a:t>
             </a:r>
             <a:endParaRPr lang="en-US" dirty="0"/>
           </a:p>
@@ -1750,7 +1483,7 @@
           <a:p>
             <a:r>
               <a:rPr lang="en-US" dirty="0"/>
-              <a:t>The system on the left: encode the observation and the goal, sample candidates, roll them through the predictor, score, refit, thirty times. The ladder on the right: each rung adds exactly one change, and the side rung prices iCEM inside the kernel.</a:t>
+              <a:t>The profile. A third of the time recomputes something that never changes during a plan. Most of the rest is the search, but at about four hundred microseconds per layer evaluation for a few microseconds of arithmetic, it is not computing most of the time.</a:t>
             </a:r>
             <a:endParaRPr lang="en-US" dirty="0"/>
           </a:p>
@@ -1838,7 +1571,7 @@
           <a:p>
             <a:r>
               <a:rPr lang="en-US" dirty="0"/>
-              <a:t>The kernel. The planner's loop has a static shape once the population schedule is fixed, so the weights it needs and the barriers it crosses are known before it starts. That is what allows a weight stream with no producer warp and a plan with no host involvement.</a:t>
+              <a:t>The key pattern. A straight-line model fitted to latency against workload shows the eager planner's cost is almost entirely fixed: a few hundred kernel launches from Python per call. That also explains why the sample-efficient search algorithm looked useless: it reduces work that was not the cost.</a:t>
             </a:r>
             <a:endParaRPr lang="en-US" dirty="0"/>
           </a:p>
@@ -1926,7 +1659,7 @@
           <a:p>
             <a:r>
               <a:rPr lang="en-US" dirty="0"/>
-              <a:t>Evaluation design. Latency is measured where a deployment feels it, end to end, for one robot. Accuracy is measured on identical episodes so that differences are paired, and the power calculation tells you what the claim of 'unchanged' actually means: no change of six points or more.</a:t>
+              <a:t>Each element answers one finding. Encoding once removes the third. iCEM cuts work once overhead is gone. The persistent kernel removes launches and CPU round trips. Spreading the model across a cluster and streaming weights keeps every step of the long chain as short as the hardware allows.</a:t>
             </a:r>
             <a:endParaRPr lang="en-US" dirty="0"/>
           </a:p>
@@ -2347,7 +2080,7 @@
         <p:spPr>
           <a:xfrm>
             <a:off x="457200" y="1828800"/>
-            <a:ext cx="8229600" cy="914400"/>
+            <a:ext cx="8229600" cy="731520"/>
           </a:xfrm>
           <a:prstGeom prst="rect">
             <a:avLst/>
@@ -2363,7 +2096,7 @@
               <a:buNone/>
             </a:pPr>
             <a:r>
-              <a:rPr lang="en-US" sz="1600" dirty="0">
+              <a:rPr lang="en-US" sz="1800" dirty="0">
                 <a:solidFill>
                   <a:srgbClr val="CADCFC"/>
                 </a:solidFill>
@@ -2371,9 +2104,9 @@
                 <a:ea typeface="Calibri" pitchFamily="34" charset="-122"/>
                 <a:cs typeface="Calibri" pitchFamily="34" charset="-120"/>
               </a:rPr>
-              <a:t>Fusing a JEPA world-model planner into one GPU kernel: an equal-hardware optimisation ladder for LeWorldModel on H100, from exact caching and iCEM to a ThunderKittens megakernel</a:t>
-            </a:r>
-            <a:endParaRPr lang="en-US" sz="1600" dirty="0"/>
+              <a:t>Profiling and fusing world-model robot planning into a single GPU kernel</a:t>
+            </a:r>
+            <a:endParaRPr lang="en-US" sz="1800" dirty="0"/>
           </a:p>
         </p:txBody>
       </p:sp>
@@ -2433,7 +2166,7 @@
                 <a:ea typeface="Calibri" pitchFamily="34" charset="-122"/>
                 <a:cs typeface="Calibri" pitchFamily="34" charset="-120"/>
               </a:rPr>
-              <a:t>Research presentation  ·  [Affiliation]</a:t>
+              <a:t>Project presentation  ·  [Faculty / School], University of Technology Sydney</a:t>
             </a:r>
             <a:endParaRPr lang="en-US" sz="1300" dirty="0"/>
           </a:p>
@@ -2517,26 +2250,50 @@
                 <a:ea typeface="Cambria" pitchFamily="34" charset="-122"/>
                 <a:cs typeface="Cambria" pitchFamily="34" charset="-120"/>
               </a:rPr>
-              <a:t>The plan, and how it ran</a:t>
+              <a:t>Evaluation: 622 ms to 46.5 ms on the same GPU</a:t>
             </a:r>
             <a:endParaRPr lang="en-US" sz="2800" dirty="0"/>
           </a:p>
         </p:txBody>
       </p:sp>
-      <p:sp>
-        <p:nvSpPr>
-          <p:cNvPr id="3" name="Shape 1"/>
+      <p:pic>
+        <p:nvPicPr>
+          <p:cNvPr id="3" name="Image 0" descr="preencoded.png">    </p:cNvPr>
+          <p:cNvPicPr>
+            <a:picLocks noChangeAspect="1"/>
+          </p:cNvPicPr>
+          <p:nvPr/>
+        </p:nvPicPr>
+        <p:blipFill>
+          <a:blip r:embed="rId1"/>
+          <a:stretch>
+            <a:fillRect/>
+          </a:stretch>
+        </p:blipFill>
+        <p:spPr>
+          <a:xfrm>
+            <a:off x="457200" y="1113174"/>
+            <a:ext cx="5669280" cy="1797011"/>
+          </a:xfrm>
+          <a:prstGeom prst="rect">
+            <a:avLst/>
+          </a:prstGeom>
+        </p:spPr>
+      </p:pic>
+      <p:sp>
+        <p:nvSpPr>
+          <p:cNvPr id="4" name="Shape 1"/>
           <p:cNvSpPr/>
           <p:nvPr/>
         </p:nvSpPr>
         <p:spPr>
           <a:xfrm>
-            <a:off x="457200" y="1097280"/>
-            <a:ext cx="1965960" cy="3017520"/>
+            <a:off x="6309360" y="1051560"/>
+            <a:ext cx="1188720" cy="1005840"/>
           </a:xfrm>
           <a:prstGeom prst="roundRect">
             <a:avLst>
-              <a:gd name="adj" fmla="val 3721"/>
+              <a:gd name="adj" fmla="val 7273"/>
             </a:avLst>
           </a:prstGeom>
           <a:solidFill>
@@ -2552,14 +2309,14 @@
       </p:sp>
       <p:sp>
         <p:nvSpPr>
-          <p:cNvPr id="4" name="Text 2"/>
-          <p:cNvSpPr txBox="1"/>
-          <p:nvPr/>
-        </p:nvSpPr>
-        <p:spPr>
-          <a:xfrm>
-            <a:off x="594360" y="1188720"/>
-            <a:ext cx="1737360" cy="320040"/>
+          <p:cNvPr id="5" name="Text 2"/>
+          <p:cNvSpPr txBox="1"/>
+          <p:nvPr/>
+        </p:nvSpPr>
+        <p:spPr>
+          <a:xfrm>
+            <a:off x="6446520" y="1143000"/>
+            <a:ext cx="914400" cy="553212"/>
           </a:xfrm>
           <a:prstGeom prst="rect">
             <a:avLst/>
@@ -2571,73 +2328,34 @@
           <a:bodyPr wrap="square" lIns="0" tIns="0" rIns="0" bIns="0" rtlCol="0" anchor="ctr"/>
           <a:lstStyle/>
           <a:p>
-            <a:pPr indent="0" marL="0">
-              <a:buNone/>
-            </a:pPr>
-            <a:r>
-              <a:rPr lang="en-US" sz="1500" b="1" dirty="0">
-                <a:solidFill>
-                  <a:srgbClr val="14213D"/>
+            <a:pPr algn="ctr" indent="0" marL="0">
+              <a:buNone/>
+            </a:pPr>
+            <a:r>
+              <a:rPr lang="en-US" sz="2400" b="1" dirty="0">
+                <a:solidFill>
+                  <a:srgbClr val="2A78D6"/>
                 </a:solidFill>
                 <a:latin typeface="Cambria" pitchFamily="34" charset="0"/>
                 <a:ea typeface="Cambria" pitchFamily="34" charset="-122"/>
                 <a:cs typeface="Cambria" pitchFamily="34" charset="-120"/>
               </a:rPr>
-              <a:t>Phase 0</a:t>
-            </a:r>
-            <a:endParaRPr lang="en-US" sz="1500" dirty="0"/>
-          </a:p>
-        </p:txBody>
-      </p:sp>
-      <p:sp>
-        <p:nvSpPr>
-          <p:cNvPr id="5" name="Text 3"/>
-          <p:cNvSpPr txBox="1"/>
-          <p:nvPr/>
-        </p:nvSpPr>
-        <p:spPr>
-          <a:xfrm>
-            <a:off x="594360" y="1508760"/>
-            <a:ext cx="1737360" cy="320040"/>
-          </a:xfrm>
-          <a:prstGeom prst="rect">
-            <a:avLst/>
-          </a:prstGeom>
-          <a:noFill/>
-          <a:ln/>
-        </p:spPr>
-        <p:txBody>
-          <a:bodyPr wrap="square" lIns="0" tIns="0" rIns="0" bIns="0" rtlCol="0" anchor="ctr"/>
-          <a:lstStyle/>
-          <a:p>
-            <a:pPr indent="0" marL="0">
-              <a:buNone/>
-            </a:pPr>
-            <a:r>
-              <a:rPr lang="en-US" sz="1200" b="1" dirty="0">
-                <a:solidFill>
-                  <a:srgbClr val="2A78D6"/>
-                </a:solidFill>
-                <a:latin typeface="Calibri" pitchFamily="34" charset="0"/>
-                <a:ea typeface="Calibri" pitchFamily="34" charset="-122"/>
-                <a:cs typeface="Calibri" pitchFamily="34" charset="-120"/>
-              </a:rPr>
-              <a:t>LeWM-Flash (L40S)</a:t>
-            </a:r>
-            <a:endParaRPr lang="en-US" sz="1200" dirty="0"/>
-          </a:p>
-        </p:txBody>
-      </p:sp>
-      <p:sp>
-        <p:nvSpPr>
-          <p:cNvPr id="6" name="Text 4"/>
-          <p:cNvSpPr txBox="1"/>
-          <p:nvPr/>
-        </p:nvSpPr>
-        <p:spPr>
-          <a:xfrm>
-            <a:off x="594360" y="1874520"/>
-            <a:ext cx="1737360" cy="2194560"/>
+              <a:t>13.4×</a:t>
+            </a:r>
+            <a:endParaRPr lang="en-US" sz="2400" dirty="0"/>
+          </a:p>
+        </p:txBody>
+      </p:sp>
+      <p:sp>
+        <p:nvSpPr>
+          <p:cNvPr id="6" name="Text 3"/>
+          <p:cNvSpPr txBox="1"/>
+          <p:nvPr/>
+        </p:nvSpPr>
+        <p:spPr>
+          <a:xfrm>
+            <a:off x="6446520" y="1655064"/>
+            <a:ext cx="914400" cy="382219"/>
           </a:xfrm>
           <a:prstGeom prst="rect">
             <a:avLst/>
@@ -2649,38 +2367,55 @@
           <a:bodyPr wrap="square" lIns="0" tIns="0" rIns="0" bIns="0" rtlCol="0" anchor="t"/>
           <a:lstStyle/>
           <a:p>
-            <a:pPr indent="0" marL="0">
-              <a:buNone/>
-            </a:pPr>
-            <a:r>
-              <a:rPr lang="en-US" sz="1050" dirty="0">
-                <a:solidFill>
-                  <a:srgbClr val="1B1B1B"/>
-                </a:solidFill>
-                <a:latin typeface="Calibri" pitchFamily="34" charset="0"/>
-                <a:ea typeface="Calibri" pitchFamily="34" charset="-122"/>
-                <a:cs typeface="Calibri" pitchFamily="34" charset="-120"/>
-              </a:rPr>
-              <a:t>Paired 300-episode sweeps of PyTorch-level changes. Accepted: caching, no syncs, compile, TF32, iCEM, BF16. Rejected: warm starts (success fell to 34-42%), whole-loop compile, CEM-GD, static BF16.</a:t>
-            </a:r>
-            <a:endParaRPr lang="en-US" sz="1050" dirty="0"/>
-          </a:p>
-        </p:txBody>
-      </p:sp>
-      <p:sp>
-        <p:nvSpPr>
-          <p:cNvPr id="7" name="Shape 5"/>
+            <a:pPr algn="ctr" indent="0" marL="0">
+              <a:buNone/>
+            </a:pPr>
+            <a:r>
+              <a:rPr lang="en-US" sz="1000" dirty="0">
+                <a:solidFill>
+                  <a:srgbClr val="5A5A5A"/>
+                </a:solidFill>
+                <a:latin typeface="Calibri" pitchFamily="34" charset="0"/>
+                <a:ea typeface="Calibri" pitchFamily="34" charset="-122"/>
+                <a:cs typeface="Calibri" pitchFamily="34" charset="-120"/>
+              </a:rPr>
+              <a:t>vs reference</a:t>
+            </a:r>
+            <a:endParaRPr lang="en-US" sz="1000" dirty="0"/>
+          </a:p>
+          <a:p>
+            <a:pPr algn="ctr" indent="0" marL="0">
+              <a:buNone/>
+            </a:pPr>
+            <a:r>
+              <a:rPr lang="en-US" sz="1000" dirty="0">
+                <a:solidFill>
+                  <a:srgbClr val="5A5A5A"/>
+                </a:solidFill>
+                <a:latin typeface="Calibri" pitchFamily="34" charset="0"/>
+                <a:ea typeface="Calibri" pitchFamily="34" charset="-122"/>
+                <a:cs typeface="Calibri" pitchFamily="34" charset="-120"/>
+              </a:rPr>
+              <a:t>[13.0, 13.5]</a:t>
+            </a:r>
+            <a:endParaRPr lang="en-US" sz="1000" dirty="0"/>
+          </a:p>
+        </p:txBody>
+      </p:sp>
+      <p:sp>
+        <p:nvSpPr>
+          <p:cNvPr id="7" name="Shape 4"/>
           <p:cNvSpPr/>
           <p:nvPr/>
         </p:nvSpPr>
         <p:spPr>
           <a:xfrm>
-            <a:off x="2560320" y="1097280"/>
-            <a:ext cx="1965960" cy="3017520"/>
+            <a:off x="7589520" y="1051560"/>
+            <a:ext cx="1188720" cy="1005840"/>
           </a:xfrm>
           <a:prstGeom prst="roundRect">
             <a:avLst>
-              <a:gd name="adj" fmla="val 3721"/>
+              <a:gd name="adj" fmla="val 7273"/>
             </a:avLst>
           </a:prstGeom>
           <a:solidFill>
@@ -2696,14 +2431,14 @@
       </p:sp>
       <p:sp>
         <p:nvSpPr>
-          <p:cNvPr id="8" name="Text 6"/>
-          <p:cNvSpPr txBox="1"/>
-          <p:nvPr/>
-        </p:nvSpPr>
-        <p:spPr>
-          <a:xfrm>
-            <a:off x="2697480" y="1188720"/>
-            <a:ext cx="1737360" cy="320040"/>
+          <p:cNvPr id="8" name="Text 5"/>
+          <p:cNvSpPr txBox="1"/>
+          <p:nvPr/>
+        </p:nvSpPr>
+        <p:spPr>
+          <a:xfrm>
+            <a:off x="7726680" y="1143000"/>
+            <a:ext cx="914400" cy="553212"/>
           </a:xfrm>
           <a:prstGeom prst="rect">
             <a:avLst/>
@@ -2715,34 +2450,175 @@
           <a:bodyPr wrap="square" lIns="0" tIns="0" rIns="0" bIns="0" rtlCol="0" anchor="ctr"/>
           <a:lstStyle/>
           <a:p>
-            <a:pPr indent="0" marL="0">
-              <a:buNone/>
-            </a:pPr>
-            <a:r>
-              <a:rPr lang="en-US" sz="1500" b="1" dirty="0">
-                <a:solidFill>
-                  <a:srgbClr val="14213D"/>
+            <a:pPr algn="ctr" indent="0" marL="0">
+              <a:buNone/>
+            </a:pPr>
+            <a:r>
+              <a:rPr lang="en-US" sz="2400" b="1" dirty="0">
+                <a:solidFill>
+                  <a:srgbClr val="2A78D6"/>
                 </a:solidFill>
                 <a:latin typeface="Cambria" pitchFamily="34" charset="0"/>
                 <a:ea typeface="Cambria" pitchFamily="34" charset="-122"/>
                 <a:cs typeface="Cambria" pitchFamily="34" charset="-120"/>
               </a:rPr>
-              <a:t>Phase 1</a:t>
-            </a:r>
-            <a:endParaRPr lang="en-US" sz="1500" dirty="0"/>
-          </a:p>
-        </p:txBody>
-      </p:sp>
-      <p:sp>
-        <p:nvSpPr>
-          <p:cNvPr id="9" name="Text 7"/>
-          <p:cNvSpPr txBox="1"/>
-          <p:nvPr/>
-        </p:nvSpPr>
-        <p:spPr>
-          <a:xfrm>
-            <a:off x="2697480" y="1508760"/>
-            <a:ext cx="1737360" cy="320040"/>
+              <a:t>3.9×</a:t>
+            </a:r>
+            <a:endParaRPr lang="en-US" sz="2400" dirty="0"/>
+          </a:p>
+        </p:txBody>
+      </p:sp>
+      <p:sp>
+        <p:nvSpPr>
+          <p:cNvPr id="9" name="Text 6"/>
+          <p:cNvSpPr txBox="1"/>
+          <p:nvPr/>
+        </p:nvSpPr>
+        <p:spPr>
+          <a:xfrm>
+            <a:off x="7726680" y="1655064"/>
+            <a:ext cx="914400" cy="382219"/>
+          </a:xfrm>
+          <a:prstGeom prst="rect">
+            <a:avLst/>
+          </a:prstGeom>
+          <a:noFill/>
+          <a:ln/>
+        </p:spPr>
+        <p:txBody>
+          <a:bodyPr wrap="square" lIns="0" tIns="0" rIns="0" bIns="0" rtlCol="0" anchor="t"/>
+          <a:lstStyle/>
+          <a:p>
+            <a:pPr algn="ctr" indent="0" marL="0">
+              <a:buNone/>
+            </a:pPr>
+            <a:r>
+              <a:rPr lang="en-US" sz="1000" dirty="0">
+                <a:solidFill>
+                  <a:srgbClr val="5A5A5A"/>
+                </a:solidFill>
+                <a:latin typeface="Calibri" pitchFamily="34" charset="0"/>
+                <a:ea typeface="Calibri" pitchFamily="34" charset="-122"/>
+                <a:cs typeface="Calibri" pitchFamily="34" charset="-120"/>
+              </a:rPr>
+              <a:t>vs optimised</a:t>
+            </a:r>
+            <a:endParaRPr lang="en-US" sz="1000" dirty="0"/>
+          </a:p>
+          <a:p>
+            <a:pPr algn="ctr" indent="0" marL="0">
+              <a:buNone/>
+            </a:pPr>
+            <a:r>
+              <a:rPr lang="en-US" sz="1000" dirty="0">
+                <a:solidFill>
+                  <a:srgbClr val="5A5A5A"/>
+                </a:solidFill>
+                <a:latin typeface="Calibri" pitchFamily="34" charset="0"/>
+                <a:ea typeface="Calibri" pitchFamily="34" charset="-122"/>
+                <a:cs typeface="Calibri" pitchFamily="34" charset="-120"/>
+              </a:rPr>
+              <a:t>PyTorch</a:t>
+            </a:r>
+            <a:endParaRPr lang="en-US" sz="1000" dirty="0"/>
+          </a:p>
+        </p:txBody>
+      </p:sp>
+      <p:sp>
+        <p:nvSpPr>
+          <p:cNvPr id="10" name="Text 7"/>
+          <p:cNvSpPr txBox="1"/>
+          <p:nvPr/>
+        </p:nvSpPr>
+        <p:spPr>
+          <a:xfrm>
+            <a:off x="6309360" y="2240280"/>
+            <a:ext cx="2468880" cy="2377440"/>
+          </a:xfrm>
+          <a:prstGeom prst="rect">
+            <a:avLst/>
+          </a:prstGeom>
+          <a:noFill/>
+          <a:ln/>
+        </p:spPr>
+        <p:txBody>
+          <a:bodyPr wrap="square" lIns="0" tIns="0" rIns="0" bIns="0" rtlCol="0" anchor="t"/>
+          <a:lstStyle/>
+          <a:p>
+            <a:pPr marL="177800" indent="-177800">
+              <a:spcAft>
+                <a:spcPts val="700"/>
+              </a:spcAft>
+              <a:buSzPct val="100000"/>
+              <a:buChar char="•"/>
+            </a:pPr>
+            <a:r>
+              <a:rPr lang="en-US" sz="1100" dirty="0">
+                <a:solidFill>
+                  <a:srgbClr val="1B1B1B"/>
+                </a:solidFill>
+                <a:latin typeface="Calibri" pitchFamily="34" charset="0"/>
+                <a:ea typeface="Calibri" pitchFamily="34" charset="-122"/>
+                <a:cs typeface="Calibri" pitchFamily="34" charset="-120"/>
+              </a:rPr>
+              <a:t>90th percentile 47.0 ms; interquartile range 0.7 ms wide.</a:t>
+            </a:r>
+            <a:endParaRPr lang="en-US" sz="1100" dirty="0"/>
+          </a:p>
+          <a:p>
+            <a:pPr marL="177800" indent="-177800">
+              <a:spcAft>
+                <a:spcPts val="700"/>
+              </a:spcAft>
+              <a:buSzPct val="100000"/>
+              <a:buChar char="•"/>
+            </a:pPr>
+            <a:r>
+              <a:rPr lang="en-US" sz="1100" dirty="0">
+                <a:solidFill>
+                  <a:srgbClr val="1B1B1B"/>
+                </a:solidFill>
+                <a:latin typeface="Calibri" pitchFamily="34" charset="0"/>
+                <a:ea typeface="Calibri" pitchFamily="34" charset="-122"/>
+                <a:cs typeface="Calibri" pitchFamily="34" charset="-120"/>
+              </a:rPr>
+              <a:t>Fits a 20 Hz control loop at the median.</a:t>
+            </a:r>
+            <a:endParaRPr lang="en-US" sz="1100" dirty="0"/>
+          </a:p>
+          <a:p>
+            <a:pPr marL="177800" indent="-177800">
+              <a:spcAft>
+                <a:spcPts val="700"/>
+              </a:spcAft>
+              <a:buSzPct val="100000"/>
+              <a:buChar char="•"/>
+            </a:pPr>
+            <a:r>
+              <a:rPr lang="en-US" sz="1100" dirty="0">
+                <a:solidFill>
+                  <a:srgbClr val="1B1B1B"/>
+                </a:solidFill>
+                <a:latin typeface="Calibri" pitchFamily="34" charset="0"/>
+                <a:ea typeface="Calibri" pitchFamily="34" charset="-122"/>
+                <a:cs typeface="Calibri" pitchFamily="34" charset="-120"/>
+              </a:rPr>
+              <a:t>Search now 46 µs per layer (was 409); synchronisation about 7% of it.</a:t>
+            </a:r>
+            <a:endParaRPr lang="en-US" sz="1100" dirty="0"/>
+          </a:p>
+        </p:txBody>
+      </p:sp>
+      <p:sp>
+        <p:nvSpPr>
+          <p:cNvPr id="11" name="Text 8"/>
+          <p:cNvSpPr txBox="1"/>
+          <p:nvPr/>
+        </p:nvSpPr>
+        <p:spPr>
+          <a:xfrm>
+            <a:off x="457200" y="3154680"/>
+            <a:ext cx="5669280" cy="274320"/>
           </a:xfrm>
           <a:prstGeom prst="rect">
             <a:avLst/>
@@ -2758,373 +2634,7 @@
               <a:buNone/>
             </a:pPr>
             <a:r>
-              <a:rPr lang="en-US" sz="1200" b="1" dirty="0">
-                <a:solidFill>
-                  <a:srgbClr val="2A78D6"/>
-                </a:solidFill>
-                <a:latin typeface="Calibri" pitchFamily="34" charset="0"/>
-                <a:ea typeface="Calibri" pitchFamily="34" charset="-122"/>
-                <a:cs typeface="Calibri" pitchFamily="34" charset="-120"/>
-              </a:rPr>
-              <a:t>Megakernel (H100)</a:t>
-            </a:r>
-            <a:endParaRPr lang="en-US" sz="1200" dirty="0"/>
-          </a:p>
-        </p:txBody>
-      </p:sp>
-      <p:sp>
-        <p:nvSpPr>
-          <p:cNvPr id="10" name="Text 8"/>
-          <p:cNvSpPr txBox="1"/>
-          <p:nvPr/>
-        </p:nvSpPr>
-        <p:spPr>
-          <a:xfrm>
-            <a:off x="2697480" y="1874520"/>
-            <a:ext cx="1737360" cy="2194560"/>
-          </a:xfrm>
-          <a:prstGeom prst="rect">
-            <a:avLst/>
-          </a:prstGeom>
-          <a:noFill/>
-          <a:ln/>
-        </p:spPr>
-        <p:txBody>
-          <a:bodyPr wrap="square" lIns="0" tIns="0" rIns="0" bIns="0" rtlCol="0" anchor="t"/>
-          <a:lstStyle/>
-          <a:p>
-            <a:pPr indent="0" marL="0">
-              <a:buNone/>
-            </a:pPr>
-            <a:r>
-              <a:rPr lang="en-US" sz="1050" dirty="0">
-                <a:solidFill>
-                  <a:srgbClr val="1B1B1B"/>
-                </a:solidFill>
-                <a:latin typeface="Calibri" pitchFamily="34" charset="0"/>
-                <a:ea typeface="Calibri" pitchFamily="34" charset="-122"/>
-                <a:cs typeface="Calibri" pitchFamily="34" charset="-120"/>
-              </a:rPr>
-              <a:t>Kernel built against FP32 and BF16 references; five tuning steps, 76.9 -&gt; 41.3 ms solve; 300-episode runs of the reference, LeWM-Flash and the kernel on the same GPU.</a:t>
-            </a:r>
-            <a:endParaRPr lang="en-US" sz="1050" dirty="0"/>
-          </a:p>
-        </p:txBody>
-      </p:sp>
-      <p:sp>
-        <p:nvSpPr>
-          <p:cNvPr id="11" name="Shape 9"/>
-          <p:cNvSpPr/>
-          <p:nvPr/>
-        </p:nvSpPr>
-        <p:spPr>
-          <a:xfrm>
-            <a:off x="4663440" y="1097280"/>
-            <a:ext cx="1965960" cy="3017520"/>
-          </a:xfrm>
-          <a:prstGeom prst="roundRect">
-            <a:avLst>
-              <a:gd name="adj" fmla="val 3721"/>
-            </a:avLst>
-          </a:prstGeom>
-          <a:solidFill>
-            <a:srgbClr val="E9F1FC"/>
-          </a:solidFill>
-          <a:ln w="12700">
-            <a:solidFill>
-              <a:srgbClr val="E9F1FC"/>
-            </a:solidFill>
-            <a:prstDash val="solid"/>
-          </a:ln>
-        </p:spPr>
-      </p:sp>
-      <p:sp>
-        <p:nvSpPr>
-          <p:cNvPr id="12" name="Text 10"/>
-          <p:cNvSpPr txBox="1"/>
-          <p:nvPr/>
-        </p:nvSpPr>
-        <p:spPr>
-          <a:xfrm>
-            <a:off x="4800600" y="1188720"/>
-            <a:ext cx="1737360" cy="320040"/>
-          </a:xfrm>
-          <a:prstGeom prst="rect">
-            <a:avLst/>
-          </a:prstGeom>
-          <a:noFill/>
-          <a:ln/>
-        </p:spPr>
-        <p:txBody>
-          <a:bodyPr wrap="square" lIns="0" tIns="0" rIns="0" bIns="0" rtlCol="0" anchor="ctr"/>
-          <a:lstStyle/>
-          <a:p>
-            <a:pPr indent="0" marL="0">
-              <a:buNone/>
-            </a:pPr>
-            <a:r>
-              <a:rPr lang="en-US" sz="1500" b="1" dirty="0">
-                <a:solidFill>
-                  <a:srgbClr val="14213D"/>
-                </a:solidFill>
-                <a:latin typeface="Cambria" pitchFamily="34" charset="0"/>
-                <a:ea typeface="Cambria" pitchFamily="34" charset="-122"/>
-                <a:cs typeface="Cambria" pitchFamily="34" charset="-120"/>
-              </a:rPr>
-              <a:t>Phase A</a:t>
-            </a:r>
-            <a:endParaRPr lang="en-US" sz="1500" dirty="0"/>
-          </a:p>
-        </p:txBody>
-      </p:sp>
-      <p:sp>
-        <p:nvSpPr>
-          <p:cNvPr id="13" name="Text 11"/>
-          <p:cNvSpPr txBox="1"/>
-          <p:nvPr/>
-        </p:nvSpPr>
-        <p:spPr>
-          <a:xfrm>
-            <a:off x="4800600" y="1508760"/>
-            <a:ext cx="1737360" cy="320040"/>
-          </a:xfrm>
-          <a:prstGeom prst="rect">
-            <a:avLst/>
-          </a:prstGeom>
-          <a:noFill/>
-          <a:ln/>
-        </p:spPr>
-        <p:txBody>
-          <a:bodyPr wrap="square" lIns="0" tIns="0" rIns="0" bIns="0" rtlCol="0" anchor="ctr"/>
-          <a:lstStyle/>
-          <a:p>
-            <a:pPr indent="0" marL="0">
-              <a:buNone/>
-            </a:pPr>
-            <a:r>
-              <a:rPr lang="en-US" sz="1200" b="1" dirty="0">
-                <a:solidFill>
-                  <a:srgbClr val="2A78D6"/>
-                </a:solidFill>
-                <a:latin typeface="Calibri" pitchFamily="34" charset="0"/>
-                <a:ea typeface="Calibri" pitchFamily="34" charset="-122"/>
-                <a:cs typeface="Calibri" pitchFamily="34" charset="-120"/>
-              </a:rPr>
-              <a:t>First ladder pass</a:t>
-            </a:r>
-            <a:endParaRPr lang="en-US" sz="1200" dirty="0"/>
-          </a:p>
-        </p:txBody>
-      </p:sp>
-      <p:sp>
-        <p:nvSpPr>
-          <p:cNvPr id="14" name="Text 12"/>
-          <p:cNvSpPr txBox="1"/>
-          <p:nvPr/>
-        </p:nvSpPr>
-        <p:spPr>
-          <a:xfrm>
-            <a:off x="4800600" y="1874520"/>
-            <a:ext cx="1737360" cy="2194560"/>
-          </a:xfrm>
-          <a:prstGeom prst="rect">
-            <a:avLst/>
-          </a:prstGeom>
-          <a:noFill/>
-          <a:ln/>
-        </p:spPr>
-        <p:txBody>
-          <a:bodyPr wrap="square" lIns="0" tIns="0" rIns="0" bIns="0" rtlCol="0" anchor="t"/>
-          <a:lstStyle/>
-          <a:p>
-            <a:pPr indent="0" marL="0">
-              <a:buNone/>
-            </a:pPr>
-            <a:r>
-              <a:rPr lang="en-US" sz="1050" dirty="0">
-                <a:solidFill>
-                  <a:srgbClr val="1B1B1B"/>
-                </a:solidFill>
-                <a:latin typeface="Calibri" pitchFamily="34" charset="0"/>
-                <a:ea typeface="Calibri" pitchFamily="34" charset="-122"/>
-                <a:cs typeface="Calibri" pitchFamily="34" charset="-120"/>
-              </a:rPr>
-              <a:t>Batch-1 latency of R0-R3 and R3-CEM; quality runs of R1 and R2.</a:t>
-            </a:r>
-            <a:endParaRPr lang="en-US" sz="1050" dirty="0"/>
-          </a:p>
-        </p:txBody>
-      </p:sp>
-      <p:sp>
-        <p:nvSpPr>
-          <p:cNvPr id="15" name="Shape 13"/>
-          <p:cNvSpPr/>
-          <p:nvPr/>
-        </p:nvSpPr>
-        <p:spPr>
-          <a:xfrm>
-            <a:off x="6766560" y="1097280"/>
-            <a:ext cx="1965960" cy="3017520"/>
-          </a:xfrm>
-          <a:prstGeom prst="roundRect">
-            <a:avLst>
-              <a:gd name="adj" fmla="val 3721"/>
-            </a:avLst>
-          </a:prstGeom>
-          <a:solidFill>
-            <a:srgbClr val="E9F1FC"/>
-          </a:solidFill>
-          <a:ln w="12700">
-            <a:solidFill>
-              <a:srgbClr val="E9F1FC"/>
-            </a:solidFill>
-            <a:prstDash val="solid"/>
-          </a:ln>
-        </p:spPr>
-      </p:sp>
-      <p:sp>
-        <p:nvSpPr>
-          <p:cNvPr id="16" name="Text 14"/>
-          <p:cNvSpPr txBox="1"/>
-          <p:nvPr/>
-        </p:nvSpPr>
-        <p:spPr>
-          <a:xfrm>
-            <a:off x="6903720" y="1188720"/>
-            <a:ext cx="1737360" cy="320040"/>
-          </a:xfrm>
-          <a:prstGeom prst="rect">
-            <a:avLst/>
-          </a:prstGeom>
-          <a:noFill/>
-          <a:ln/>
-        </p:spPr>
-        <p:txBody>
-          <a:bodyPr wrap="square" lIns="0" tIns="0" rIns="0" bIns="0" rtlCol="0" anchor="ctr"/>
-          <a:lstStyle/>
-          <a:p>
-            <a:pPr indent="0" marL="0">
-              <a:buNone/>
-            </a:pPr>
-            <a:r>
-              <a:rPr lang="en-US" sz="1500" b="1" dirty="0">
-                <a:solidFill>
-                  <a:srgbClr val="14213D"/>
-                </a:solidFill>
-                <a:latin typeface="Cambria" pitchFamily="34" charset="0"/>
-                <a:ea typeface="Cambria" pitchFamily="34" charset="-122"/>
-                <a:cs typeface="Cambria" pitchFamily="34" charset="-120"/>
-              </a:rPr>
-              <a:t>Final</a:t>
-            </a:r>
-            <a:endParaRPr lang="en-US" sz="1500" dirty="0"/>
-          </a:p>
-        </p:txBody>
-      </p:sp>
-      <p:sp>
-        <p:nvSpPr>
-          <p:cNvPr id="17" name="Text 15"/>
-          <p:cNvSpPr txBox="1"/>
-          <p:nvPr/>
-        </p:nvSpPr>
-        <p:spPr>
-          <a:xfrm>
-            <a:off x="6903720" y="1508760"/>
-            <a:ext cx="1737360" cy="320040"/>
-          </a:xfrm>
-          <a:prstGeom prst="rect">
-            <a:avLst/>
-          </a:prstGeom>
-          <a:noFill/>
-          <a:ln/>
-        </p:spPr>
-        <p:txBody>
-          <a:bodyPr wrap="square" lIns="0" tIns="0" rIns="0" bIns="0" rtlCol="0" anchor="ctr"/>
-          <a:lstStyle/>
-          <a:p>
-            <a:pPr indent="0" marL="0">
-              <a:buNone/>
-            </a:pPr>
-            <a:r>
-              <a:rPr lang="en-US" sz="1200" b="1" dirty="0">
-                <a:solidFill>
-                  <a:srgbClr val="2A78D6"/>
-                </a:solidFill>
-                <a:latin typeface="Calibri" pitchFamily="34" charset="0"/>
-                <a:ea typeface="Calibri" pitchFamily="34" charset="-122"/>
-                <a:cs typeface="Calibri" pitchFamily="34" charset="-120"/>
-              </a:rPr>
-              <a:t>Fused encoder + ladder</a:t>
-            </a:r>
-            <a:endParaRPr lang="en-US" sz="1200" dirty="0"/>
-          </a:p>
-        </p:txBody>
-      </p:sp>
-      <p:sp>
-        <p:nvSpPr>
-          <p:cNvPr id="18" name="Text 16"/>
-          <p:cNvSpPr txBox="1"/>
-          <p:nvPr/>
-        </p:nvSpPr>
-        <p:spPr>
-          <a:xfrm>
-            <a:off x="6903720" y="1874520"/>
-            <a:ext cx="1737360" cy="2194560"/>
-          </a:xfrm>
-          <a:prstGeom prst="rect">
-            <a:avLst/>
-          </a:prstGeom>
-          <a:noFill/>
-          <a:ln/>
-        </p:spPr>
-        <p:txBody>
-          <a:bodyPr wrap="square" lIns="0" tIns="0" rIns="0" bIns="0" rtlCol="0" anchor="t"/>
-          <a:lstStyle/>
-          <a:p>
-            <a:pPr indent="0" marL="0">
-              <a:buNone/>
-            </a:pPr>
-            <a:r>
-              <a:rPr lang="en-US" sz="1050" dirty="0">
-                <a:solidFill>
-                  <a:srgbClr val="1B1B1B"/>
-                </a:solidFill>
-                <a:latin typeface="Calibri" pitchFamily="34" charset="0"/>
-                <a:ea typeface="Calibri" pitchFamily="34" charset="-122"/>
-                <a:cs typeface="Calibri" pitchFamily="34" charset="-120"/>
-              </a:rPr>
-              <a:t>Encoder in the kernel, parity checked; second batch-1 pass of all seven rungs; quality runs of R3, R3-CEM and R4.</a:t>
-            </a:r>
-            <a:endParaRPr lang="en-US" sz="1050" dirty="0"/>
-          </a:p>
-        </p:txBody>
-      </p:sp>
-      <p:sp>
-        <p:nvSpPr>
-          <p:cNvPr id="19" name="Text 17"/>
-          <p:cNvSpPr txBox="1"/>
-          <p:nvPr/>
-        </p:nvSpPr>
-        <p:spPr>
-          <a:xfrm>
-            <a:off x="457200" y="4297680"/>
-            <a:ext cx="8229600" cy="274320"/>
-          </a:xfrm>
-          <a:prstGeom prst="rect">
-            <a:avLst/>
-          </a:prstGeom>
-          <a:noFill/>
-          <a:ln/>
-        </p:spPr>
-        <p:txBody>
-          <a:bodyPr wrap="square" lIns="0" tIns="0" rIns="0" bIns="0" rtlCol="0" anchor="ctr"/>
-          <a:lstStyle/>
-          <a:p>
-            <a:pPr indent="0" marL="0">
-              <a:buNone/>
-            </a:pPr>
-            <a:r>
-              <a:rPr lang="en-US" sz="1050" i="1" dirty="0">
+              <a:rPr lang="en-US" sz="1000" i="1" dirty="0">
                 <a:solidFill>
                   <a:srgbClr val="5A5A5A"/>
                 </a:solidFill>
@@ -3132,15 +2642,15 @@
                 <a:ea typeface="Calibri" pitchFamily="34" charset="-122"/>
                 <a:cs typeface="Calibri" pitchFamily="34" charset="-120"/>
               </a:rPr>
-              <a:t>Compute: about $31.50 of H100 time against a $35 budget (extended from $10 when the ladder was added). Each batch-1 pass cost $10-12 because the harness rebuilds the simulator and model for every seed.</a:t>
-            </a:r>
-            <a:endParaRPr lang="en-US" sz="1050" dirty="0"/>
-          </a:p>
-        </p:txBody>
-      </p:sp>
-      <p:sp>
-        <p:nvSpPr>
-          <p:cNvPr id="21" name="Text 18"/>
+              <a:t>End-to-end planning latency, log scale; points are plans, diamonds medians. Baseline already uses compile, CUDA Graphs and BF16.</a:t>
+            </a:r>
+            <a:endParaRPr lang="en-US" sz="1000" dirty="0"/>
+          </a:p>
+        </p:txBody>
+      </p:sp>
+      <p:sp>
+        <p:nvSpPr>
+          <p:cNvPr id="13" name="Text 9"/>
           <p:cNvSpPr txBox="1"/>
           <p:nvPr/>
         </p:nvSpPr>
@@ -3235,7 +2745,7 @@
                 <a:ea typeface="Cambria" pitchFamily="34" charset="-122"/>
                 <a:cs typeface="Cambria" pitchFamily="34" charset="-120"/>
               </a:rPr>
-              <a:t>Result 1: 622 ms to 46.5 ms on the same GPU</a:t>
+              <a:t>Evaluation: the robot succeeds just as often</a:t>
             </a:r>
             <a:endParaRPr lang="en-US" sz="2800" dirty="0"/>
           </a:p>
@@ -3257,8 +2767,8 @@
         </p:blipFill>
         <p:spPr>
           <a:xfrm>
-            <a:off x="457200" y="1322053"/>
-            <a:ext cx="5760720" cy="2385094"/>
+            <a:off x="457200" y="1060164"/>
+            <a:ext cx="5669280" cy="1628712"/>
           </a:xfrm>
           <a:prstGeom prst="rect">
             <a:avLst/>
@@ -3273,8 +2783,8 @@
         </p:nvSpPr>
         <p:spPr>
           <a:xfrm>
-            <a:off x="6400800" y="1051560"/>
-            <a:ext cx="2377440" cy="3566160"/>
+            <a:off x="6309360" y="1051560"/>
+            <a:ext cx="2468880" cy="3657600"/>
           </a:xfrm>
           <a:prstGeom prst="rect">
             <a:avLst/>
@@ -3294,7 +2804,7 @@
               <a:buChar char="•"/>
             </a:pPr>
             <a:r>
-              <a:rPr lang="en-US" sz="1150" dirty="0">
+              <a:rPr lang="en-US" sz="1100" dirty="0">
                 <a:solidFill>
                   <a:srgbClr val="1B1B1B"/>
                 </a:solidFill>
@@ -3302,9 +2812,9 @@
                 <a:ea typeface="Calibri" pitchFamily="34" charset="-122"/>
                 <a:cs typeface="Calibri" pitchFamily="34" charset="-120"/>
               </a:rPr>
-              <a:t>Caching: 1.65x, exact.</a:t>
-            </a:r>
-            <a:endParaRPr lang="en-US" sz="1150" dirty="0"/>
+              <a:t>261 / 261 / 260 successes of 300 for reference, optimised PyTorch and LeWM-MK.</a:t>
+            </a:r>
+            <a:endParaRPr lang="en-US" sz="1100" dirty="0"/>
           </a:p>
           <a:p>
             <a:pPr marL="177800" indent="-177800">
@@ -3315,7 +2825,7 @@
               <a:buChar char="•"/>
             </a:pPr>
             <a:r>
-              <a:rPr lang="en-US" sz="1150" dirty="0">
+              <a:rPr lang="en-US" sz="1100" dirty="0">
                 <a:solidFill>
                   <a:srgbClr val="1B1B1B"/>
                 </a:solidFill>
@@ -3323,9 +2833,9 @@
                 <a:ea typeface="Calibri" pitchFamily="34" charset="-122"/>
                 <a:cs typeface="Calibri" pitchFamily="34" charset="-120"/>
               </a:rPr>
-              <a:t>iCEM in eager PyTorch: 0.92x.</a:t>
-            </a:r>
-            <a:endParaRPr lang="en-US" sz="1150" dirty="0"/>
+              <a:t>LeWM-MK vs reference: 19 won, 20 lost; −0.3 points [−4.3, +3.7]; McNemar p = 1.00.</a:t>
+            </a:r>
+            <a:endParaRPr lang="en-US" sz="1100" dirty="0"/>
           </a:p>
           <a:p>
             <a:pPr marL="177800" indent="-177800">
@@ -3336,7 +2846,7 @@
               <a:buChar char="•"/>
             </a:pPr>
             <a:r>
-              <a:rPr lang="en-US" sz="1150" dirty="0">
+              <a:rPr lang="en-US" sz="1100" dirty="0">
                 <a:solidFill>
                   <a:srgbClr val="1B1B1B"/>
                 </a:solidFill>
@@ -3344,9 +2854,9 @@
                 <a:ea typeface="Calibri" pitchFamily="34" charset="-122"/>
                 <a:cs typeface="Calibri" pitchFamily="34" charset="-120"/>
               </a:rPr>
-              <a:t>LeWM-Flash: 3.4x over the reference.</a:t>
-            </a:r>
-            <a:endParaRPr lang="en-US" sz="1150" dirty="0"/>
+              <a:t>Disagreements are search randomness: the optimised PyTorch planner disagrees on 36.</a:t>
+            </a:r>
+            <a:endParaRPr lang="en-US" sz="1100" dirty="0"/>
           </a:p>
           <a:p>
             <a:pPr marL="177800" indent="-177800">
@@ -3357,7 +2867,7 @@
               <a:buChar char="•"/>
             </a:pPr>
             <a:r>
-              <a:rPr lang="en-US" sz="1150" dirty="0">
+              <a:rPr lang="en-US" sz="1100" dirty="0">
                 <a:solidFill>
                   <a:srgbClr val="1B1B1B"/>
                 </a:solidFill>
@@ -3365,51 +2875,9 @@
                 <a:ea typeface="Calibri" pitchFamily="34" charset="-122"/>
                 <a:cs typeface="Calibri" pitchFamily="34" charset="-120"/>
               </a:rPr>
-              <a:t>Megakernel: 6.9x over eager iCEM, 3.1x over LeWM-Flash.</a:t>
-            </a:r>
-            <a:endParaRPr lang="en-US" sz="1150" dirty="0"/>
-          </a:p>
-          <a:p>
-            <a:pPr marL="177800" indent="-177800">
-              <a:spcAft>
-                <a:spcPts val="700"/>
-              </a:spcAft>
-              <a:buSzPct val="100000"/>
-              <a:buChar char="•"/>
-            </a:pPr>
-            <a:r>
-              <a:rPr lang="en-US" sz="1150" dirty="0">
-                <a:solidFill>
-                  <a:srgbClr val="1B1B1B"/>
-                </a:solidFill>
-                <a:latin typeface="Calibri" pitchFamily="34" charset="0"/>
-                <a:ea typeface="Calibri" pitchFamily="34" charset="-122"/>
-                <a:cs typeface="Calibri" pitchFamily="34" charset="-120"/>
-              </a:rPr>
-              <a:t>Fused encoder: 1.28x more; 13.4x in total, p90 47.0 ms.</a:t>
-            </a:r>
-            <a:endParaRPr lang="en-US" sz="1150" dirty="0"/>
-          </a:p>
-          <a:p>
-            <a:pPr marL="177800" indent="-177800">
-              <a:spcAft>
-                <a:spcPts val="700"/>
-              </a:spcAft>
-              <a:buSzPct val="100000"/>
-              <a:buChar char="•"/>
-            </a:pPr>
-            <a:r>
-              <a:rPr lang="en-US" sz="1150" dirty="0">
-                <a:solidFill>
-                  <a:srgbClr val="1B1B1B"/>
-                </a:solidFill>
-                <a:latin typeface="Calibri" pitchFamily="34" charset="0"/>
-                <a:ea typeface="Calibri" pitchFamily="34" charset="-122"/>
-                <a:cs typeface="Calibri" pitchFamily="34" charset="-120"/>
-              </a:rPr>
-              <a:t>Megakernel rungs are tight: R4's interquartile range is 46.1-46.8 ms.</a:t>
-            </a:r>
-            <a:endParaRPr lang="en-US" sz="1150" dirty="0"/>
+              <a:t>Numerical error vs FP32: 0.06–0.32%, matching accepted BF16 (0.05–0.40%).</a:t>
+            </a:r>
+            <a:endParaRPr lang="en-US" sz="1100" dirty="0"/>
           </a:p>
         </p:txBody>
       </p:sp>
@@ -3421,8 +2889,8 @@
         </p:nvSpPr>
         <p:spPr>
           <a:xfrm>
-            <a:off x="457200" y="4160520"/>
-            <a:ext cx="5760720" cy="274320"/>
+            <a:off x="457200" y="2926080"/>
+            <a:ext cx="5669280" cy="274320"/>
           </a:xfrm>
           <a:prstGeom prst="rect">
             <a:avLst/>
@@ -3446,7 +2914,7 @@
                 <a:ea typeface="Calibri" pitchFamily="34" charset="-122"/>
                 <a:cs typeface="Calibri" pitchFamily="34" charset="-120"/>
               </a:rPr>
-              <a:t>Batch-1 end-to-end plan latency, log scale; small points are individual plans, markers are medians.</a:t>
+              <a:t>Push-T success on the same 300 episodes, Wilson 95% intervals. 300 pairs detect differences of about 6 points.</a:t>
             </a:r>
             <a:endParaRPr lang="en-US" sz="1000" dirty="0"/>
           </a:p>
@@ -3549,50 +3017,338 @@
                 <a:ea typeface="Cambria" pitchFamily="34" charset="-122"/>
                 <a:cs typeface="Cambria" pitchFamily="34" charset="-120"/>
               </a:rPr>
-              <a:t>Result 2: iCEM pays only when execution does</a:t>
+              <a:t>Conclusions, and what I cannot claim</a:t>
             </a:r>
             <a:endParaRPr lang="en-US" sz="2800" dirty="0"/>
           </a:p>
         </p:txBody>
       </p:sp>
-      <p:pic>
-        <p:nvPicPr>
-          <p:cNvPr id="3" name="Image 0" descr="preencoded.png">    </p:cNvPr>
-          <p:cNvPicPr>
-            <a:picLocks noChangeAspect="1"/>
-          </p:cNvPicPr>
-          <p:nvPr/>
-        </p:nvPicPr>
-        <p:blipFill>
-          <a:blip r:embed="rId1"/>
-          <a:stretch>
-            <a:fillRect/>
-          </a:stretch>
-        </p:blipFill>
-        <p:spPr>
-          <a:xfrm>
-            <a:off x="633881" y="960120"/>
-            <a:ext cx="5133039" cy="2377440"/>
-          </a:xfrm>
-          <a:prstGeom prst="rect">
-            <a:avLst/>
-          </a:prstGeom>
-        </p:spPr>
-      </p:pic>
-      <p:sp>
-        <p:nvSpPr>
-          <p:cNvPr id="4" name="Shape 1"/>
+      <p:sp>
+        <p:nvSpPr>
+          <p:cNvPr id="3" name="Text 1"/>
+          <p:cNvSpPr txBox="1"/>
+          <p:nvPr/>
+        </p:nvSpPr>
+        <p:spPr>
+          <a:xfrm>
+            <a:off x="457200" y="1051560"/>
+            <a:ext cx="640080" cy="502920"/>
+          </a:xfrm>
+          <a:prstGeom prst="rect">
+            <a:avLst/>
+          </a:prstGeom>
+          <a:noFill/>
+          <a:ln/>
+        </p:spPr>
+        <p:txBody>
+          <a:bodyPr wrap="square" lIns="0" tIns="0" rIns="0" bIns="0" rtlCol="0" anchor="t"/>
+          <a:lstStyle/>
+          <a:p>
+            <a:pPr indent="0" marL="0">
+              <a:buNone/>
+            </a:pPr>
+            <a:r>
+              <a:rPr lang="en-US" sz="1400" b="1" dirty="0">
+                <a:solidFill>
+                  <a:srgbClr val="2A78D6"/>
+                </a:solidFill>
+                <a:latin typeface="Cambria" pitchFamily="34" charset="0"/>
+                <a:ea typeface="Cambria" pitchFamily="34" charset="-122"/>
+                <a:cs typeface="Cambria" pitchFamily="34" charset="-120"/>
+              </a:rPr>
+              <a:t>O1</a:t>
+            </a:r>
+            <a:endParaRPr lang="en-US" sz="1400" dirty="0"/>
+          </a:p>
+        </p:txBody>
+      </p:sp>
+      <p:sp>
+        <p:nvSpPr>
+          <p:cNvPr id="4" name="Text 2"/>
+          <p:cNvSpPr txBox="1"/>
+          <p:nvPr/>
+        </p:nvSpPr>
+        <p:spPr>
+          <a:xfrm>
+            <a:off x="1143000" y="1051560"/>
+            <a:ext cx="4160520" cy="713232"/>
+          </a:xfrm>
+          <a:prstGeom prst="rect">
+            <a:avLst/>
+          </a:prstGeom>
+          <a:noFill/>
+          <a:ln/>
+        </p:spPr>
+        <p:txBody>
+          <a:bodyPr wrap="square" lIns="0" tIns="0" rIns="0" bIns="0" rtlCol="0" anchor="t"/>
+          <a:lstStyle/>
+          <a:p>
+            <a:pPr indent="0" marL="0">
+              <a:buNone/>
+            </a:pPr>
+            <a:r>
+              <a:rPr lang="en-US" sz="1150" dirty="0">
+                <a:solidFill>
+                  <a:srgbClr val="1B1B1B"/>
+                </a:solidFill>
+                <a:latin typeface="Calibri" pitchFamily="34" charset="0"/>
+                <a:ea typeface="Calibri" pitchFamily="34" charset="-122"/>
+                <a:cs typeface="Calibri" pitchFamily="34" charset="-120"/>
+              </a:rPr>
+              <a:t>The reference's time was overhead: 33% redundant encoding, a search 99% fixed cost per call, 7% CPU waits.</a:t>
+            </a:r>
+            <a:endParaRPr lang="en-US" sz="1150" dirty="0"/>
+          </a:p>
+        </p:txBody>
+      </p:sp>
+      <p:sp>
+        <p:nvSpPr>
+          <p:cNvPr id="5" name="Text 3"/>
+          <p:cNvSpPr txBox="1"/>
+          <p:nvPr/>
+        </p:nvSpPr>
+        <p:spPr>
+          <a:xfrm>
+            <a:off x="457200" y="1801368"/>
+            <a:ext cx="640080" cy="502920"/>
+          </a:xfrm>
+          <a:prstGeom prst="rect">
+            <a:avLst/>
+          </a:prstGeom>
+          <a:noFill/>
+          <a:ln/>
+        </p:spPr>
+        <p:txBody>
+          <a:bodyPr wrap="square" lIns="0" tIns="0" rIns="0" bIns="0" rtlCol="0" anchor="t"/>
+          <a:lstStyle/>
+          <a:p>
+            <a:pPr indent="0" marL="0">
+              <a:buNone/>
+            </a:pPr>
+            <a:r>
+              <a:rPr lang="en-US" sz="1400" b="1" dirty="0">
+                <a:solidFill>
+                  <a:srgbClr val="2A78D6"/>
+                </a:solidFill>
+                <a:latin typeface="Cambria" pitchFamily="34" charset="0"/>
+                <a:ea typeface="Cambria" pitchFamily="34" charset="-122"/>
+                <a:cs typeface="Cambria" pitchFamily="34" charset="-120"/>
+              </a:rPr>
+              <a:t>O2</a:t>
+            </a:r>
+            <a:endParaRPr lang="en-US" sz="1400" dirty="0"/>
+          </a:p>
+        </p:txBody>
+      </p:sp>
+      <p:sp>
+        <p:nvSpPr>
+          <p:cNvPr id="6" name="Text 4"/>
+          <p:cNvSpPr txBox="1"/>
+          <p:nvPr/>
+        </p:nvSpPr>
+        <p:spPr>
+          <a:xfrm>
+            <a:off x="1143000" y="1801368"/>
+            <a:ext cx="4160520" cy="713232"/>
+          </a:xfrm>
+          <a:prstGeom prst="rect">
+            <a:avLst/>
+          </a:prstGeom>
+          <a:noFill/>
+          <a:ln/>
+        </p:spPr>
+        <p:txBody>
+          <a:bodyPr wrap="square" lIns="0" tIns="0" rIns="0" bIns="0" rtlCol="0" anchor="t"/>
+          <a:lstStyle/>
+          <a:p>
+            <a:pPr indent="0" marL="0">
+              <a:buNone/>
+            </a:pPr>
+            <a:r>
+              <a:rPr lang="en-US" sz="1150" dirty="0">
+                <a:solidFill>
+                  <a:srgbClr val="1B1B1B"/>
+                </a:solidFill>
+                <a:latin typeface="Calibri" pitchFamily="34" charset="0"/>
+                <a:ea typeface="Calibri" pitchFamily="34" charset="-122"/>
+                <a:cs typeface="Calibri" pitchFamily="34" charset="-120"/>
+              </a:rPr>
+              <a:t>LeWM-MK removes each bottleneck with the model and search budget unchanged.</a:t>
+            </a:r>
+            <a:endParaRPr lang="en-US" sz="1150" dirty="0"/>
+          </a:p>
+        </p:txBody>
+      </p:sp>
+      <p:sp>
+        <p:nvSpPr>
+          <p:cNvPr id="7" name="Text 5"/>
+          <p:cNvSpPr txBox="1"/>
+          <p:nvPr/>
+        </p:nvSpPr>
+        <p:spPr>
+          <a:xfrm>
+            <a:off x="457200" y="2551176"/>
+            <a:ext cx="640080" cy="502920"/>
+          </a:xfrm>
+          <a:prstGeom prst="rect">
+            <a:avLst/>
+          </a:prstGeom>
+          <a:noFill/>
+          <a:ln/>
+        </p:spPr>
+        <p:txBody>
+          <a:bodyPr wrap="square" lIns="0" tIns="0" rIns="0" bIns="0" rtlCol="0" anchor="t"/>
+          <a:lstStyle/>
+          <a:p>
+            <a:pPr indent="0" marL="0">
+              <a:buNone/>
+            </a:pPr>
+            <a:r>
+              <a:rPr lang="en-US" sz="1400" b="1" dirty="0">
+                <a:solidFill>
+                  <a:srgbClr val="2A78D6"/>
+                </a:solidFill>
+                <a:latin typeface="Cambria" pitchFamily="34" charset="0"/>
+                <a:ea typeface="Cambria" pitchFamily="34" charset="-122"/>
+                <a:cs typeface="Cambria" pitchFamily="34" charset="-120"/>
+              </a:rPr>
+              <a:t>O3</a:t>
+            </a:r>
+            <a:endParaRPr lang="en-US" sz="1400" dirty="0"/>
+          </a:p>
+        </p:txBody>
+      </p:sp>
+      <p:sp>
+        <p:nvSpPr>
+          <p:cNvPr id="8" name="Text 6"/>
+          <p:cNvSpPr txBox="1"/>
+          <p:nvPr/>
+        </p:nvSpPr>
+        <p:spPr>
+          <a:xfrm>
+            <a:off x="1143000" y="2551176"/>
+            <a:ext cx="4160520" cy="713232"/>
+          </a:xfrm>
+          <a:prstGeom prst="rect">
+            <a:avLst/>
+          </a:prstGeom>
+          <a:noFill/>
+          <a:ln/>
+        </p:spPr>
+        <p:txBody>
+          <a:bodyPr wrap="square" lIns="0" tIns="0" rIns="0" bIns="0" rtlCol="0" anchor="t"/>
+          <a:lstStyle/>
+          <a:p>
+            <a:pPr indent="0" marL="0">
+              <a:buNone/>
+            </a:pPr>
+            <a:r>
+              <a:rPr lang="en-US" sz="1150" dirty="0">
+                <a:solidFill>
+                  <a:srgbClr val="1B1B1B"/>
+                </a:solidFill>
+                <a:latin typeface="Calibri" pitchFamily="34" charset="0"/>
+                <a:ea typeface="Calibri" pitchFamily="34" charset="-122"/>
+                <a:cs typeface="Calibri" pitchFamily="34" charset="-120"/>
+              </a:rPr>
+              <a:t>46.5 ms per plan: 13.4× the reference, 3.9× optimised PyTorch; success unchanged (−0.3 pts).</a:t>
+            </a:r>
+            <a:endParaRPr lang="en-US" sz="1150" dirty="0"/>
+          </a:p>
+        </p:txBody>
+      </p:sp>
+      <p:sp>
+        <p:nvSpPr>
+          <p:cNvPr id="9" name="Text 7"/>
+          <p:cNvSpPr txBox="1"/>
+          <p:nvPr/>
+        </p:nvSpPr>
+        <p:spPr>
+          <a:xfrm>
+            <a:off x="457200" y="3300984"/>
+            <a:ext cx="640080" cy="502920"/>
+          </a:xfrm>
+          <a:prstGeom prst="rect">
+            <a:avLst/>
+          </a:prstGeom>
+          <a:noFill/>
+          <a:ln/>
+        </p:spPr>
+        <p:txBody>
+          <a:bodyPr wrap="square" lIns="0" tIns="0" rIns="0" bIns="0" rtlCol="0" anchor="t"/>
+          <a:lstStyle/>
+          <a:p>
+            <a:pPr indent="0" marL="0">
+              <a:buNone/>
+            </a:pPr>
+            <a:r>
+              <a:rPr lang="en-US" sz="1400" b="1" dirty="0">
+                <a:solidFill>
+                  <a:srgbClr val="2A78D6"/>
+                </a:solidFill>
+                <a:latin typeface="Cambria" pitchFamily="34" charset="0"/>
+                <a:ea typeface="Cambria" pitchFamily="34" charset="-122"/>
+                <a:cs typeface="Cambria" pitchFamily="34" charset="-120"/>
+              </a:rPr>
+              <a:t>O4</a:t>
+            </a:r>
+            <a:endParaRPr lang="en-US" sz="1400" dirty="0"/>
+          </a:p>
+        </p:txBody>
+      </p:sp>
+      <p:sp>
+        <p:nvSpPr>
+          <p:cNvPr id="10" name="Text 8"/>
+          <p:cNvSpPr txBox="1"/>
+          <p:nvPr/>
+        </p:nvSpPr>
+        <p:spPr>
+          <a:xfrm>
+            <a:off x="1143000" y="3300984"/>
+            <a:ext cx="4160520" cy="713232"/>
+          </a:xfrm>
+          <a:prstGeom prst="rect">
+            <a:avLst/>
+          </a:prstGeom>
+          <a:noFill/>
+          <a:ln/>
+        </p:spPr>
+        <p:txBody>
+          <a:bodyPr wrap="square" lIns="0" tIns="0" rIns="0" bIns="0" rtlCol="0" anchor="t"/>
+          <a:lstStyle/>
+          <a:p>
+            <a:pPr indent="0" marL="0">
+              <a:buNone/>
+            </a:pPr>
+            <a:r>
+              <a:rPr lang="en-US" sz="1150" dirty="0">
+                <a:solidFill>
+                  <a:srgbClr val="1B1B1B"/>
+                </a:solidFill>
+                <a:latin typeface="Calibri" pitchFamily="34" charset="0"/>
+                <a:ea typeface="Calibri" pitchFamily="34" charset="-122"/>
+                <a:cs typeface="Calibri" pitchFamily="34" charset="-120"/>
+              </a:rPr>
+              <a:t>Planner plug-in; one program regenerates every result from the data.</a:t>
+            </a:r>
+            <a:endParaRPr lang="en-US" sz="1150" dirty="0"/>
+          </a:p>
+        </p:txBody>
+      </p:sp>
+      <p:sp>
+        <p:nvSpPr>
+          <p:cNvPr id="11" name="Shape 9"/>
           <p:cNvSpPr/>
           <p:nvPr/>
         </p:nvSpPr>
         <p:spPr>
           <a:xfrm>
-            <a:off x="6217920" y="1051560"/>
-            <a:ext cx="1234440" cy="1051560"/>
+            <a:off x="5577840" y="1051560"/>
+            <a:ext cx="3108960" cy="3566160"/>
           </a:xfrm>
           <a:prstGeom prst="roundRect">
             <a:avLst>
-              <a:gd name="adj" fmla="val 6957"/>
+              <a:gd name="adj" fmla="val 2353"/>
             </a:avLst>
           </a:prstGeom>
           <a:solidFill>
@@ -3608,14 +3364,14 @@
       </p:sp>
       <p:sp>
         <p:nvSpPr>
-          <p:cNvPr id="5" name="Text 2"/>
-          <p:cNvSpPr txBox="1"/>
-          <p:nvPr/>
-        </p:nvSpPr>
-        <p:spPr>
-          <a:xfrm>
-            <a:off x="6355080" y="1143000"/>
-            <a:ext cx="960120" cy="578358"/>
+          <p:cNvPr id="12" name="Text 10"/>
+          <p:cNvSpPr txBox="1"/>
+          <p:nvPr/>
+        </p:nvSpPr>
+        <p:spPr>
+          <a:xfrm>
+            <a:off x="5760720" y="1161288"/>
+            <a:ext cx="2743200" cy="365760"/>
           </a:xfrm>
           <a:prstGeom prst="rect">
             <a:avLst/>
@@ -3627,212 +3383,34 @@
           <a:bodyPr wrap="square" lIns="0" tIns="0" rIns="0" bIns="0" rtlCol="0" anchor="ctr"/>
           <a:lstStyle/>
           <a:p>
-            <a:pPr algn="ctr" indent="0" marL="0">
-              <a:buNone/>
-            </a:pPr>
-            <a:r>
-              <a:rPr lang="en-US" sz="2400" b="1" dirty="0">
-                <a:solidFill>
-                  <a:srgbClr val="EB6834"/>
+            <a:pPr indent="0" marL="0">
+              <a:buNone/>
+            </a:pPr>
+            <a:r>
+              <a:rPr lang="en-US" sz="1500" b="1" dirty="0">
+                <a:solidFill>
+                  <a:srgbClr val="14213D"/>
                 </a:solidFill>
                 <a:latin typeface="Cambria" pitchFamily="34" charset="0"/>
                 <a:ea typeface="Cambria" pitchFamily="34" charset="-122"/>
                 <a:cs typeface="Cambria" pitchFamily="34" charset="-120"/>
               </a:rPr>
-              <a:t>0.92x</a:t>
-            </a:r>
-            <a:endParaRPr lang="en-US" sz="2400" dirty="0"/>
-          </a:p>
-        </p:txBody>
-      </p:sp>
-      <p:sp>
-        <p:nvSpPr>
-          <p:cNvPr id="6" name="Text 3"/>
-          <p:cNvSpPr txBox="1"/>
-          <p:nvPr/>
-        </p:nvSpPr>
-        <p:spPr>
-          <a:xfrm>
-            <a:off x="6355080" y="1682496"/>
-            <a:ext cx="960120" cy="399593"/>
-          </a:xfrm>
-          <a:prstGeom prst="rect">
-            <a:avLst/>
-          </a:prstGeom>
-          <a:noFill/>
-          <a:ln/>
-        </p:spPr>
-        <p:txBody>
-          <a:bodyPr wrap="square" lIns="0" tIns="0" rIns="0" bIns="0" rtlCol="0" anchor="t"/>
-          <a:lstStyle/>
-          <a:p>
-            <a:pPr algn="ctr" indent="0" marL="0">
-              <a:buNone/>
-            </a:pPr>
-            <a:r>
-              <a:rPr lang="en-US" sz="1000" dirty="0">
-                <a:solidFill>
-                  <a:srgbClr val="5A5A5A"/>
-                </a:solidFill>
-                <a:latin typeface="Calibri" pitchFamily="34" charset="0"/>
-                <a:ea typeface="Calibri" pitchFamily="34" charset="-122"/>
-                <a:cs typeface="Calibri" pitchFamily="34" charset="-120"/>
-              </a:rPr>
-              <a:t>iCEM vs CEM,</a:t>
-            </a:r>
-            <a:endParaRPr lang="en-US" sz="1000" dirty="0"/>
-          </a:p>
-          <a:p>
-            <a:pPr algn="ctr" indent="0" marL="0">
-              <a:buNone/>
-            </a:pPr>
-            <a:r>
-              <a:rPr lang="en-US" sz="1000" dirty="0">
-                <a:solidFill>
-                  <a:srgbClr val="5A5A5A"/>
-                </a:solidFill>
-                <a:latin typeface="Calibri" pitchFamily="34" charset="0"/>
-                <a:ea typeface="Calibri" pitchFamily="34" charset="-122"/>
-                <a:cs typeface="Calibri" pitchFamily="34" charset="-120"/>
-              </a:rPr>
-              <a:t>eager PyTorch</a:t>
-            </a:r>
-            <a:endParaRPr lang="en-US" sz="1000" dirty="0"/>
-          </a:p>
-        </p:txBody>
-      </p:sp>
-      <p:sp>
-        <p:nvSpPr>
-          <p:cNvPr id="7" name="Shape 4"/>
-          <p:cNvSpPr/>
-          <p:nvPr/>
-        </p:nvSpPr>
-        <p:spPr>
-          <a:xfrm>
-            <a:off x="7543800" y="1051560"/>
-            <a:ext cx="1234440" cy="1051560"/>
-          </a:xfrm>
-          <a:prstGeom prst="roundRect">
-            <a:avLst>
-              <a:gd name="adj" fmla="val 6957"/>
-            </a:avLst>
-          </a:prstGeom>
-          <a:solidFill>
-            <a:srgbClr val="F3F4F6"/>
-          </a:solidFill>
-          <a:ln w="12700">
-            <a:solidFill>
-              <a:srgbClr val="F3F4F6"/>
-            </a:solidFill>
-            <a:prstDash val="solid"/>
-          </a:ln>
-        </p:spPr>
-      </p:sp>
-      <p:sp>
-        <p:nvSpPr>
-          <p:cNvPr id="8" name="Text 5"/>
-          <p:cNvSpPr txBox="1"/>
-          <p:nvPr/>
-        </p:nvSpPr>
-        <p:spPr>
-          <a:xfrm>
-            <a:off x="7680960" y="1143000"/>
-            <a:ext cx="960120" cy="578358"/>
-          </a:xfrm>
-          <a:prstGeom prst="rect">
-            <a:avLst/>
-          </a:prstGeom>
-          <a:noFill/>
-          <a:ln/>
-        </p:spPr>
-        <p:txBody>
-          <a:bodyPr wrap="square" lIns="0" tIns="0" rIns="0" bIns="0" rtlCol="0" anchor="ctr"/>
-          <a:lstStyle/>
-          <a:p>
-            <a:pPr algn="ctr" indent="0" marL="0">
-              <a:buNone/>
-            </a:pPr>
-            <a:r>
-              <a:rPr lang="en-US" sz="2400" b="1" dirty="0">
-                <a:solidFill>
-                  <a:srgbClr val="2A78D6"/>
-                </a:solidFill>
-                <a:latin typeface="Cambria" pitchFamily="34" charset="0"/>
-                <a:ea typeface="Cambria" pitchFamily="34" charset="-122"/>
-                <a:cs typeface="Cambria" pitchFamily="34" charset="-120"/>
-              </a:rPr>
-              <a:t>1.38x</a:t>
-            </a:r>
-            <a:endParaRPr lang="en-US" sz="2400" dirty="0"/>
-          </a:p>
-        </p:txBody>
-      </p:sp>
-      <p:sp>
-        <p:nvSpPr>
-          <p:cNvPr id="9" name="Text 6"/>
-          <p:cNvSpPr txBox="1"/>
-          <p:nvPr/>
-        </p:nvSpPr>
-        <p:spPr>
-          <a:xfrm>
-            <a:off x="7680960" y="1682496"/>
-            <a:ext cx="960120" cy="399593"/>
-          </a:xfrm>
-          <a:prstGeom prst="rect">
-            <a:avLst/>
-          </a:prstGeom>
-          <a:noFill/>
-          <a:ln/>
-        </p:spPr>
-        <p:txBody>
-          <a:bodyPr wrap="square" lIns="0" tIns="0" rIns="0" bIns="0" rtlCol="0" anchor="t"/>
-          <a:lstStyle/>
-          <a:p>
-            <a:pPr algn="ctr" indent="0" marL="0">
-              <a:buNone/>
-            </a:pPr>
-            <a:r>
-              <a:rPr lang="en-US" sz="1000" dirty="0">
-                <a:solidFill>
-                  <a:srgbClr val="5A5A5A"/>
-                </a:solidFill>
-                <a:latin typeface="Calibri" pitchFamily="34" charset="0"/>
-                <a:ea typeface="Calibri" pitchFamily="34" charset="-122"/>
-                <a:cs typeface="Calibri" pitchFamily="34" charset="-120"/>
-              </a:rPr>
-              <a:t>iCEM vs CEM,</a:t>
-            </a:r>
-            <a:endParaRPr lang="en-US" sz="1000" dirty="0"/>
-          </a:p>
-          <a:p>
-            <a:pPr algn="ctr" indent="0" marL="0">
-              <a:buNone/>
-            </a:pPr>
-            <a:r>
-              <a:rPr lang="en-US" sz="1000" dirty="0">
-                <a:solidFill>
-                  <a:srgbClr val="5A5A5A"/>
-                </a:solidFill>
-                <a:latin typeface="Calibri" pitchFamily="34" charset="0"/>
-                <a:ea typeface="Calibri" pitchFamily="34" charset="-122"/>
-                <a:cs typeface="Calibri" pitchFamily="34" charset="-120"/>
-              </a:rPr>
-              <a:t>inside the kernel</a:t>
-            </a:r>
-            <a:endParaRPr lang="en-US" sz="1000" dirty="0"/>
-          </a:p>
-        </p:txBody>
-      </p:sp>
-      <p:sp>
-        <p:nvSpPr>
-          <p:cNvPr id="10" name="Text 7"/>
-          <p:cNvSpPr txBox="1"/>
-          <p:nvPr/>
-        </p:nvSpPr>
-        <p:spPr>
-          <a:xfrm>
-            <a:off x="6217920" y="2286000"/>
-            <a:ext cx="2560320" cy="2377440"/>
+              <a:t>Limits</a:t>
+            </a:r>
+            <a:endParaRPr lang="en-US" sz="1500" dirty="0"/>
+          </a:p>
+        </p:txBody>
+      </p:sp>
+      <p:sp>
+        <p:nvSpPr>
+          <p:cNvPr id="13" name="Text 11"/>
+          <p:cNvSpPr txBox="1"/>
+          <p:nvPr/>
+        </p:nvSpPr>
+        <p:spPr>
+          <a:xfrm>
+            <a:off x="5760720" y="1572768"/>
+            <a:ext cx="2788920" cy="3017520"/>
           </a:xfrm>
           <a:prstGeom prst="rect">
             <a:avLst/>
@@ -3860,7 +3438,7 @@
                 <a:ea typeface="Calibri" pitchFamily="34" charset="-122"/>
                 <a:cs typeface="Calibri" pitchFamily="34" charset="-120"/>
               </a:rPr>
-              <a:t>An eager cost call costs 20 ms at 60 candidates and at 300: it is a few hundred launches, not arithmetic.</a:t>
+              <a:t>300 pairs resolve about 6 points of success, no less.</a:t>
             </a:r>
             <a:endParaRPr lang="en-US" sz="1100" dirty="0"/>
           </a:p>
@@ -3881,7 +3459,7 @@
                 <a:ea typeface="Calibri" pitchFamily="34" charset="-122"/>
                 <a:cs typeface="Calibri" pitchFamily="34" charset="-120"/>
               </a:rPr>
-              <a:t>Inside the kernel the call scales with the population, so iCEM's 3.19x fewer rollouts become 1.38x (R3-CEM 82.1 -&gt; R3 59.3 ms).</a:t>
+              <a:t>Some profile stages attributed by difference.</a:t>
             </a:r>
             <a:endParaRPr lang="en-US" sz="1100" dirty="0"/>
           </a:p>
@@ -3902,93 +3480,57 @@
                 <a:ea typeface="Calibri" pitchFamily="34" charset="-122"/>
                 <a:cs typeface="Calibri" pitchFamily="34" charset="-120"/>
               </a:rPr>
-              <a:t>Success unchanged both ways (265 vs 263; 262 vs 261 of 300).</a:t>
+              <a:t>One model, one task, one GPU type; H100-only kernel.</a:t>
             </a:r>
             <a:endParaRPr lang="en-US" sz="1100" dirty="0"/>
           </a:p>
-        </p:txBody>
-      </p:sp>
-      <p:sp>
-        <p:nvSpPr>
-          <p:cNvPr id="11" name="Text 8"/>
-          <p:cNvSpPr txBox="1"/>
-          <p:nvPr/>
-        </p:nvSpPr>
-        <p:spPr>
-          <a:xfrm>
-            <a:off x="457200" y="3429000"/>
-            <a:ext cx="5486400" cy="274320"/>
-          </a:xfrm>
-          <a:prstGeom prst="rect">
-            <a:avLst/>
-          </a:prstGeom>
-          <a:noFill/>
-          <a:ln/>
-        </p:spPr>
-        <p:txBody>
-          <a:bodyPr wrap="square" lIns="0" tIns="0" rIns="0" bIns="0" rtlCol="0" anchor="ctr"/>
-          <a:lstStyle/>
-          <a:p>
-            <a:pPr indent="0" marL="0">
-              <a:buNone/>
-            </a:pPr>
-            <a:r>
-              <a:rPr lang="en-US" sz="1000" i="1" dirty="0">
-                <a:solidFill>
-                  <a:srgbClr val="5A5A5A"/>
-                </a:solidFill>
-                <a:latin typeface="Calibri" pitchFamily="34" charset="0"/>
-                <a:ea typeface="Calibri" pitchFamily="34" charset="-122"/>
-                <a:cs typeface="Calibri" pitchFamily="34" charset="-120"/>
-              </a:rPr>
-              <a:t>One cost call (5-step rollout of every candidate) against the number of candidates, H100.</a:t>
-            </a:r>
-            <a:endParaRPr lang="en-US" sz="1000" dirty="0"/>
-          </a:p>
-        </p:txBody>
-      </p:sp>
-      <p:sp>
-        <p:nvSpPr>
-          <p:cNvPr id="12" name="Text 9"/>
-          <p:cNvSpPr txBox="1"/>
-          <p:nvPr/>
-        </p:nvSpPr>
-        <p:spPr>
-          <a:xfrm>
-            <a:off x="457200" y="3794760"/>
-            <a:ext cx="5486400" cy="822960"/>
-          </a:xfrm>
-          <a:prstGeom prst="rect">
-            <a:avLst/>
-          </a:prstGeom>
-          <a:noFill/>
-          <a:ln/>
-        </p:spPr>
-        <p:txBody>
-          <a:bodyPr wrap="square" lIns="0" tIns="0" rIns="0" bIns="0" rtlCol="0" anchor="t"/>
-          <a:lstStyle/>
-          <a:p>
-            <a:pPr indent="0" marL="0">
-              <a:buNone/>
-            </a:pPr>
-            <a:r>
-              <a:rPr lang="en-US" sz="1150" dirty="0">
-                <a:solidFill>
-                  <a:srgbClr val="14213D"/>
-                </a:solidFill>
-                <a:latin typeface="Calibri" pitchFamily="34" charset="0"/>
-                <a:ea typeface="Calibri" pitchFamily="34" charset="-122"/>
-                <a:cs typeface="Calibri" pitchFamily="34" charset="-120"/>
-              </a:rPr>
-              <a:t>A sample-efficient planner is only as fast as its smallest batch. Measured only in eager PyTorch, iCEM would have been rejected; measured only on the kernel, it would look a third as useful as its evaluation count suggests.</a:t>
-            </a:r>
-            <a:endParaRPr lang="en-US" sz="1150" dirty="0"/>
-          </a:p>
-        </p:txBody>
-      </p:sp>
-      <p:sp>
-        <p:nvSpPr>
-          <p:cNvPr id="14" name="Text 10"/>
+          <a:p>
+            <a:pPr marL="177800" indent="-177800">
+              <a:spcAft>
+                <a:spcPts val="700"/>
+              </a:spcAft>
+              <a:buSzPct val="100000"/>
+              <a:buChar char="•"/>
+            </a:pPr>
+            <a:r>
+              <a:rPr lang="en-US" sz="1100" dirty="0">
+                <a:solidFill>
+                  <a:srgbClr val="1B1B1B"/>
+                </a:solidFill>
+                <a:latin typeface="Calibri" pitchFamily="34" charset="0"/>
+                <a:ea typeface="Calibri" pitchFamily="34" charset="-122"/>
+                <a:cs typeface="Calibri" pitchFamily="34" charset="-120"/>
+              </a:rPr>
+              <a:t>Simulation; only the planning call optimised.</a:t>
+            </a:r>
+            <a:endParaRPr lang="en-US" sz="1100" dirty="0"/>
+          </a:p>
+          <a:p>
+            <a:pPr marL="177800" indent="-177800">
+              <a:spcAft>
+                <a:spcPts val="700"/>
+              </a:spcAft>
+              <a:buSzPct val="100000"/>
+              <a:buChar char="•"/>
+            </a:pPr>
+            <a:r>
+              <a:rPr lang="en-US" sz="1100" dirty="0">
+                <a:solidFill>
+                  <a:srgbClr val="1B1B1B"/>
+                </a:solidFill>
+                <a:latin typeface="Calibri" pitchFamily="34" charset="0"/>
+                <a:ea typeface="Calibri" pitchFamily="34" charset="-122"/>
+                <a:cs typeface="Calibri" pitchFamily="34" charset="-120"/>
+              </a:rPr>
+              <a:t>PyTorch timings vary up to 18% between passes; the kernel's about 2%.</a:t>
+            </a:r>
+            <a:endParaRPr lang="en-US" sz="1100" dirty="0"/>
+          </a:p>
+        </p:txBody>
+      </p:sp>
+      <p:sp>
+        <p:nvSpPr>
+          <p:cNvPr id="15" name="Text 12"/>
           <p:cNvSpPr txBox="1"/>
           <p:nvPr/>
         </p:nvSpPr>
@@ -4083,82 +3625,32 @@
                 <a:ea typeface="Cambria" pitchFamily="34" charset="-122"/>
                 <a:cs typeface="Cambria" pitchFamily="34" charset="-120"/>
               </a:rPr>
-              <a:t>Result 3: where the time goes, and how it fell</a:t>
+              <a:t>Future work</a:t>
             </a:r>
             <a:endParaRPr lang="en-US" sz="2800" dirty="0"/>
           </a:p>
         </p:txBody>
       </p:sp>
-      <p:pic>
-        <p:nvPicPr>
-          <p:cNvPr id="3" name="Image 0" descr="preencoded.png">    </p:cNvPr>
-          <p:cNvPicPr>
-            <a:picLocks noChangeAspect="1"/>
-          </p:cNvPicPr>
-          <p:nvPr/>
-        </p:nvPicPr>
-        <p:blipFill>
-          <a:blip r:embed="rId1"/>
-          <a:stretch>
-            <a:fillRect/>
-          </a:stretch>
-        </p:blipFill>
-        <p:spPr>
-          <a:xfrm>
-            <a:off x="457200" y="1009389"/>
-            <a:ext cx="4206240" cy="1638821"/>
-          </a:xfrm>
-          <a:prstGeom prst="rect">
-            <a:avLst/>
-          </a:prstGeom>
-        </p:spPr>
-      </p:pic>
-      <p:pic>
-        <p:nvPicPr>
-          <p:cNvPr id="4" name="Image 1" descr="preencoded.png">    </p:cNvPr>
-          <p:cNvPicPr>
-            <a:picLocks noChangeAspect="1"/>
-          </p:cNvPicPr>
-          <p:nvPr/>
-        </p:nvPicPr>
-        <p:blipFill>
-          <a:blip r:embed="rId2"/>
-          <a:stretch>
-            <a:fillRect/>
-          </a:stretch>
-        </p:blipFill>
-        <p:spPr>
-          <a:xfrm>
-            <a:off x="457200" y="2815282"/>
-            <a:ext cx="4206240" cy="1776077"/>
-          </a:xfrm>
-          <a:prstGeom prst="rect">
-            <a:avLst/>
-          </a:prstGeom>
-        </p:spPr>
-      </p:pic>
-      <p:sp>
-        <p:nvSpPr>
-          <p:cNvPr id="5" name="Shape 1"/>
+      <p:sp>
+        <p:nvSpPr>
+          <p:cNvPr id="3" name="Shape 1"/>
           <p:cNvSpPr/>
           <p:nvPr/>
         </p:nvSpPr>
         <p:spPr>
           <a:xfrm>
-            <a:off x="4937760" y="1051560"/>
-            <a:ext cx="1234440" cy="1005840"/>
-          </a:xfrm>
-          <a:prstGeom prst="roundRect">
-            <a:avLst>
-              <a:gd name="adj" fmla="val 7273"/>
-            </a:avLst>
+            <a:off x="457200" y="1143000"/>
+            <a:ext cx="365760" cy="365760"/>
+          </a:xfrm>
+          <a:prstGeom prst="ellipse">
+            <a:avLst/>
           </a:prstGeom>
           <a:solidFill>
-            <a:srgbClr val="F3F4F6"/>
+            <a:srgbClr val="2A78D6"/>
           </a:solidFill>
           <a:ln w="12700">
             <a:solidFill>
-              <a:srgbClr val="F3F4F6"/>
+              <a:srgbClr val="FFFFFF"/>
             </a:solidFill>
             <a:prstDash val="solid"/>
           </a:ln>
@@ -4166,14 +3658,14 @@
       </p:sp>
       <p:sp>
         <p:nvSpPr>
-          <p:cNvPr id="6" name="Text 2"/>
-          <p:cNvSpPr txBox="1"/>
-          <p:nvPr/>
-        </p:nvSpPr>
-        <p:spPr>
-          <a:xfrm>
-            <a:off x="5074920" y="1143000"/>
-            <a:ext cx="960120" cy="553212"/>
+          <p:cNvPr id="4" name="Text 2"/>
+          <p:cNvSpPr txBox="1"/>
+          <p:nvPr/>
+        </p:nvSpPr>
+        <p:spPr>
+          <a:xfrm>
+            <a:off x="457200" y="1143000"/>
+            <a:ext cx="365760" cy="365760"/>
           </a:xfrm>
           <a:prstGeom prst="rect">
             <a:avLst/>
@@ -4189,30 +3681,30 @@
               <a:buNone/>
             </a:pPr>
             <a:r>
-              <a:rPr lang="en-US" sz="2000" b="1" dirty="0">
-                <a:solidFill>
-                  <a:srgbClr val="2A78D6"/>
+              <a:rPr lang="en-US" sz="1300" b="1" dirty="0">
+                <a:solidFill>
+                  <a:srgbClr val="FFFFFF"/>
                 </a:solidFill>
                 <a:latin typeface="Cambria" pitchFamily="34" charset="0"/>
                 <a:ea typeface="Cambria" pitchFamily="34" charset="-122"/>
                 <a:cs typeface="Cambria" pitchFamily="34" charset="-120"/>
               </a:rPr>
-              <a:t>41.3 ms</a:t>
-            </a:r>
-            <a:endParaRPr lang="en-US" sz="2000" dirty="0"/>
-          </a:p>
-        </p:txBody>
-      </p:sp>
-      <p:sp>
-        <p:nvSpPr>
-          <p:cNvPr id="7" name="Text 3"/>
-          <p:cNvSpPr txBox="1"/>
-          <p:nvPr/>
-        </p:nvSpPr>
-        <p:spPr>
-          <a:xfrm>
-            <a:off x="5074920" y="1655064"/>
-            <a:ext cx="960120" cy="382219"/>
+              <a:t>1</a:t>
+            </a:r>
+            <a:endParaRPr lang="en-US" sz="1300" dirty="0"/>
+          </a:p>
+        </p:txBody>
+      </p:sp>
+      <p:sp>
+        <p:nvSpPr>
+          <p:cNvPr id="5" name="Text 3"/>
+          <p:cNvSpPr txBox="1"/>
+          <p:nvPr/>
+        </p:nvSpPr>
+        <p:spPr>
+          <a:xfrm>
+            <a:off x="960120" y="1097280"/>
+            <a:ext cx="3566160" cy="1188720"/>
           </a:xfrm>
           <a:prstGeom prst="rect">
             <a:avLst/>
@@ -4224,63 +3716,67 @@
           <a:bodyPr wrap="square" lIns="0" tIns="0" rIns="0" bIns="0" rtlCol="0" anchor="t"/>
           <a:lstStyle/>
           <a:p>
-            <a:pPr algn="ctr" indent="0" marL="0">
-              <a:buNone/>
-            </a:pPr>
-            <a:r>
-              <a:rPr lang="en-US" sz="1000" dirty="0">
-                <a:solidFill>
-                  <a:srgbClr val="5A5A5A"/>
-                </a:solidFill>
-                <a:latin typeface="Calibri" pitchFamily="34" charset="0"/>
-                <a:ea typeface="Calibri" pitchFamily="34" charset="-122"/>
-                <a:cs typeface="Calibri" pitchFamily="34" charset="-120"/>
-              </a:rPr>
-              <a:t>kernel solve</a:t>
-            </a:r>
-            <a:endParaRPr lang="en-US" sz="1000" dirty="0"/>
-          </a:p>
-          <a:p>
-            <a:pPr algn="ctr" indent="0" marL="0">
-              <a:buNone/>
-            </a:pPr>
-            <a:r>
-              <a:rPr lang="en-US" sz="1000" dirty="0">
-                <a:solidFill>
-                  <a:srgbClr val="5A5A5A"/>
-                </a:solidFill>
-                <a:latin typeface="Calibri" pitchFamily="34" charset="0"/>
-                <a:ea typeface="Calibri" pitchFamily="34" charset="-122"/>
-                <a:cs typeface="Calibri" pitchFamily="34" charset="-120"/>
-              </a:rPr>
-              <a:t>(Flash: 82.3)</a:t>
-            </a:r>
-            <a:endParaRPr lang="en-US" sz="1000" dirty="0"/>
-          </a:p>
-        </p:txBody>
-      </p:sp>
-      <p:sp>
-        <p:nvSpPr>
-          <p:cNvPr id="8" name="Shape 4"/>
+            <a:pPr indent="0" marL="0">
+              <a:spcAft>
+                <a:spcPts val="200"/>
+              </a:spcAft>
+              <a:buNone/>
+            </a:pPr>
+            <a:r>
+              <a:rPr lang="en-US" sz="1250" b="1" dirty="0">
+                <a:solidFill>
+                  <a:srgbClr val="14213D"/>
+                </a:solidFill>
+                <a:latin typeface="Calibri" pitchFamily="34" charset="0"/>
+                <a:ea typeface="Calibri" pitchFamily="34" charset="-122"/>
+                <a:cs typeface="Calibri" pitchFamily="34" charset="-120"/>
+              </a:rPr>
+              <a:t>Spend the saved time on better plans</a:t>
+            </a:r>
+            <a:endParaRPr lang="en-US" sz="1250" dirty="0"/>
+          </a:p>
+          <a:p>
+            <a:pPr indent="0" marL="0">
+              <a:spcAft>
+                <a:spcPts val="200"/>
+              </a:spcAft>
+              <a:buNone/>
+            </a:pPr>
+            <a:r>
+              <a:rPr lang="en-US" sz="1250" dirty="0">
+                <a:solidFill>
+                  <a:srgbClr val="1B1B1B"/>
+                </a:solidFill>
+                <a:latin typeface="Calibri" pitchFamily="34" charset="0"/>
+                <a:ea typeface="Calibri" pitchFamily="34" charset="-122"/>
+                <a:cs typeface="Calibri" pitchFamily="34" charset="-120"/>
+              </a:rPr>
+              <a:t>More iterations or candidates still fit a 100 ms period: map the latency-success trade-off.</a:t>
+            </a:r>
+            <a:endParaRPr lang="en-US" sz="1250" dirty="0"/>
+          </a:p>
+        </p:txBody>
+      </p:sp>
+      <p:sp>
+        <p:nvSpPr>
+          <p:cNvPr id="6" name="Shape 4"/>
           <p:cNvSpPr/>
           <p:nvPr/>
         </p:nvSpPr>
         <p:spPr>
           <a:xfrm>
-            <a:off x="6263640" y="1051560"/>
-            <a:ext cx="1234440" cy="1005840"/>
-          </a:xfrm>
-          <a:prstGeom prst="roundRect">
-            <a:avLst>
-              <a:gd name="adj" fmla="val 7273"/>
-            </a:avLst>
+            <a:off x="4663440" y="1143000"/>
+            <a:ext cx="365760" cy="365760"/>
+          </a:xfrm>
+          <a:prstGeom prst="ellipse">
+            <a:avLst/>
           </a:prstGeom>
           <a:solidFill>
-            <a:srgbClr val="F3F4F6"/>
+            <a:srgbClr val="2A78D6"/>
           </a:solidFill>
           <a:ln w="12700">
             <a:solidFill>
-              <a:srgbClr val="F3F4F6"/>
+              <a:srgbClr val="FFFFFF"/>
             </a:solidFill>
             <a:prstDash val="solid"/>
           </a:ln>
@@ -4288,14 +3784,14 @@
       </p:sp>
       <p:sp>
         <p:nvSpPr>
-          <p:cNvPr id="9" name="Text 5"/>
-          <p:cNvSpPr txBox="1"/>
-          <p:nvPr/>
-        </p:nvSpPr>
-        <p:spPr>
-          <a:xfrm>
-            <a:off x="6400800" y="1143000"/>
-            <a:ext cx="960120" cy="553212"/>
+          <p:cNvPr id="7" name="Text 5"/>
+          <p:cNvSpPr txBox="1"/>
+          <p:nvPr/>
+        </p:nvSpPr>
+        <p:spPr>
+          <a:xfrm>
+            <a:off x="4663440" y="1143000"/>
+            <a:ext cx="365760" cy="365760"/>
           </a:xfrm>
           <a:prstGeom prst="rect">
             <a:avLst/>
@@ -4311,30 +3807,30 @@
               <a:buNone/>
             </a:pPr>
             <a:r>
-              <a:rPr lang="en-US" sz="2000" b="1" dirty="0">
-                <a:solidFill>
-                  <a:srgbClr val="2A78D6"/>
+              <a:rPr lang="en-US" sz="1300" b="1" dirty="0">
+                <a:solidFill>
+                  <a:srgbClr val="FFFFFF"/>
                 </a:solidFill>
                 <a:latin typeface="Cambria" pitchFamily="34" charset="0"/>
                 <a:ea typeface="Cambria" pitchFamily="34" charset="-122"/>
                 <a:cs typeface="Cambria" pitchFamily="34" charset="-120"/>
               </a:rPr>
-              <a:t>1.3 ms</a:t>
-            </a:r>
-            <a:endParaRPr lang="en-US" sz="2000" dirty="0"/>
-          </a:p>
-        </p:txBody>
-      </p:sp>
-      <p:sp>
-        <p:nvSpPr>
-          <p:cNvPr id="10" name="Text 6"/>
-          <p:cNvSpPr txBox="1"/>
-          <p:nvPr/>
-        </p:nvSpPr>
-        <p:spPr>
-          <a:xfrm>
-            <a:off x="6400800" y="1655064"/>
-            <a:ext cx="960120" cy="382219"/>
+              <a:t>2</a:t>
+            </a:r>
+            <a:endParaRPr lang="en-US" sz="1300" dirty="0"/>
+          </a:p>
+        </p:txBody>
+      </p:sp>
+      <p:sp>
+        <p:nvSpPr>
+          <p:cNvPr id="8" name="Text 6"/>
+          <p:cNvSpPr txBox="1"/>
+          <p:nvPr/>
+        </p:nvSpPr>
+        <p:spPr>
+          <a:xfrm>
+            <a:off x="5166360" y="1097280"/>
+            <a:ext cx="3566160" cy="1188720"/>
           </a:xfrm>
           <a:prstGeom prst="rect">
             <a:avLst/>
@@ -4346,63 +3842,67 @@
           <a:bodyPr wrap="square" lIns="0" tIns="0" rIns="0" bIns="0" rtlCol="0" anchor="t"/>
           <a:lstStyle/>
           <a:p>
-            <a:pPr algn="ctr" indent="0" marL="0">
-              <a:buNone/>
-            </a:pPr>
-            <a:r>
-              <a:rPr lang="en-US" sz="1000" dirty="0">
-                <a:solidFill>
-                  <a:srgbClr val="5A5A5A"/>
-                </a:solidFill>
-                <a:latin typeface="Calibri" pitchFamily="34" charset="0"/>
-                <a:ea typeface="Calibri" pitchFamily="34" charset="-122"/>
-                <a:cs typeface="Calibri" pitchFamily="34" charset="-120"/>
-              </a:rPr>
-              <a:t>fused encoder</a:t>
-            </a:r>
-            <a:endParaRPr lang="en-US" sz="1000" dirty="0"/>
-          </a:p>
-          <a:p>
-            <a:pPr algn="ctr" indent="0" marL="0">
-              <a:buNone/>
-            </a:pPr>
-            <a:r>
-              <a:rPr lang="en-US" sz="1000" dirty="0">
-                <a:solidFill>
-                  <a:srgbClr val="5A5A5A"/>
-                </a:solidFill>
-                <a:latin typeface="Calibri" pitchFamily="34" charset="0"/>
-                <a:ea typeface="Calibri" pitchFamily="34" charset="-122"/>
-                <a:cs typeface="Calibri" pitchFamily="34" charset="-120"/>
-              </a:rPr>
-              <a:t>(FP32 torch: 6.9)</a:t>
-            </a:r>
-            <a:endParaRPr lang="en-US" sz="1000" dirty="0"/>
-          </a:p>
-        </p:txBody>
-      </p:sp>
-      <p:sp>
-        <p:nvSpPr>
-          <p:cNvPr id="11" name="Shape 7"/>
+            <a:pPr indent="0" marL="0">
+              <a:spcAft>
+                <a:spcPts val="200"/>
+              </a:spcAft>
+              <a:buNone/>
+            </a:pPr>
+            <a:r>
+              <a:rPr lang="en-US" sz="1250" b="1" dirty="0">
+                <a:solidFill>
+                  <a:srgbClr val="14213D"/>
+                </a:solidFill>
+                <a:latin typeface="Calibri" pitchFamily="34" charset="0"/>
+                <a:ea typeface="Calibri" pitchFamily="34" charset="-122"/>
+                <a:cs typeface="Calibri" pitchFamily="34" charset="-120"/>
+              </a:rPr>
+              <a:t>Shorten the remaining chain</a:t>
+            </a:r>
+            <a:endParaRPr lang="en-US" sz="1250" dirty="0"/>
+          </a:p>
+          <a:p>
+            <a:pPr indent="0" marL="0">
+              <a:spcAft>
+                <a:spcPts val="200"/>
+              </a:spcAft>
+              <a:buNone/>
+            </a:pPr>
+            <a:r>
+              <a:rPr lang="en-US" sz="1250" dirty="0">
+                <a:solidFill>
+                  <a:srgbClr val="1B1B1B"/>
+                </a:solidFill>
+                <a:latin typeface="Calibri" pitchFamily="34" charset="0"/>
+                <a:ea typeface="Calibri" pitchFamily="34" charset="-122"/>
+                <a:cs typeface="Calibri" pitchFamily="34" charset="-120"/>
+              </a:rPr>
+              <a:t>Combine with a one-pass rollout model, or one layer per cluster with candidates streaming through.</a:t>
+            </a:r>
+            <a:endParaRPr lang="en-US" sz="1250" dirty="0"/>
+          </a:p>
+        </p:txBody>
+      </p:sp>
+      <p:sp>
+        <p:nvSpPr>
+          <p:cNvPr id="9" name="Shape 7"/>
           <p:cNvSpPr/>
           <p:nvPr/>
         </p:nvSpPr>
         <p:spPr>
           <a:xfrm>
-            <a:off x="7589520" y="1051560"/>
-            <a:ext cx="1188720" cy="1005840"/>
-          </a:xfrm>
-          <a:prstGeom prst="roundRect">
-            <a:avLst>
-              <a:gd name="adj" fmla="val 7273"/>
-            </a:avLst>
+            <a:off x="457200" y="2606040"/>
+            <a:ext cx="365760" cy="365760"/>
+          </a:xfrm>
+          <a:prstGeom prst="ellipse">
+            <a:avLst/>
           </a:prstGeom>
           <a:solidFill>
-            <a:srgbClr val="F3F4F6"/>
+            <a:srgbClr val="2A78D6"/>
           </a:solidFill>
           <a:ln w="12700">
             <a:solidFill>
-              <a:srgbClr val="F3F4F6"/>
+              <a:srgbClr val="FFFFFF"/>
             </a:solidFill>
             <a:prstDash val="solid"/>
           </a:ln>
@@ -4410,14 +3910,14 @@
       </p:sp>
       <p:sp>
         <p:nvSpPr>
-          <p:cNvPr id="12" name="Text 8"/>
-          <p:cNvSpPr txBox="1"/>
-          <p:nvPr/>
-        </p:nvSpPr>
-        <p:spPr>
-          <a:xfrm>
-            <a:off x="7726680" y="1143000"/>
-            <a:ext cx="914400" cy="553212"/>
+          <p:cNvPr id="10" name="Text 8"/>
+          <p:cNvSpPr txBox="1"/>
+          <p:nvPr/>
+        </p:nvSpPr>
+        <p:spPr>
+          <a:xfrm>
+            <a:off x="457200" y="2606040"/>
+            <a:ext cx="365760" cy="365760"/>
           </a:xfrm>
           <a:prstGeom prst="rect">
             <a:avLst/>
@@ -4433,30 +3933,30 @@
               <a:buNone/>
             </a:pPr>
             <a:r>
-              <a:rPr lang="en-US" sz="2000" b="1" dirty="0">
-                <a:solidFill>
-                  <a:srgbClr val="14213D"/>
+              <a:rPr lang="en-US" sz="1300" b="1" dirty="0">
+                <a:solidFill>
+                  <a:srgbClr val="FFFFFF"/>
                 </a:solidFill>
                 <a:latin typeface="Cambria" pitchFamily="34" charset="0"/>
                 <a:ea typeface="Cambria" pitchFamily="34" charset="-122"/>
                 <a:cs typeface="Cambria" pitchFamily="34" charset="-120"/>
               </a:rPr>
-              <a:t>0.65 µs</a:t>
-            </a:r>
-            <a:endParaRPr lang="en-US" sz="2000" dirty="0"/>
-          </a:p>
-        </p:txBody>
-      </p:sp>
-      <p:sp>
-        <p:nvSpPr>
-          <p:cNvPr id="13" name="Text 9"/>
-          <p:cNvSpPr txBox="1"/>
-          <p:nvPr/>
-        </p:nvSpPr>
-        <p:spPr>
-          <a:xfrm>
-            <a:off x="7726680" y="1655064"/>
-            <a:ext cx="914400" cy="382219"/>
+              <a:t>3</a:t>
+            </a:r>
+            <a:endParaRPr lang="en-US" sz="1300" dirty="0"/>
+          </a:p>
+        </p:txBody>
+      </p:sp>
+      <p:sp>
+        <p:nvSpPr>
+          <p:cNvPr id="11" name="Text 9"/>
+          <p:cNvSpPr txBox="1"/>
+          <p:nvPr/>
+        </p:nvSpPr>
+        <p:spPr>
+          <a:xfrm>
+            <a:off x="960120" y="2560320"/>
+            <a:ext cx="3566160" cy="1188720"/>
           </a:xfrm>
           <a:prstGeom prst="rect">
             <a:avLst/>
@@ -4468,51 +3968,121 @@
           <a:bodyPr wrap="square" lIns="0" tIns="0" rIns="0" bIns="0" rtlCol="0" anchor="t"/>
           <a:lstStyle/>
           <a:p>
+            <a:pPr indent="0" marL="0">
+              <a:spcAft>
+                <a:spcPts val="200"/>
+              </a:spcAft>
+              <a:buNone/>
+            </a:pPr>
+            <a:r>
+              <a:rPr lang="en-US" sz="1250" b="1" dirty="0">
+                <a:solidFill>
+                  <a:srgbClr val="14213D"/>
+                </a:solidFill>
+                <a:latin typeface="Calibri" pitchFamily="34" charset="0"/>
+                <a:ea typeface="Calibri" pitchFamily="34" charset="-122"/>
+                <a:cs typeface="Calibri" pitchFamily="34" charset="-120"/>
+              </a:rPr>
+              <a:t>Other models and hardware</a:t>
+            </a:r>
+            <a:endParaRPr lang="en-US" sz="1250" dirty="0"/>
+          </a:p>
+          <a:p>
+            <a:pPr indent="0" marL="0">
+              <a:spcAft>
+                <a:spcPts val="200"/>
+              </a:spcAft>
+              <a:buNone/>
+            </a:pPr>
+            <a:r>
+              <a:rPr lang="en-US" sz="1250" dirty="0">
+                <a:solidFill>
+                  <a:srgbClr val="1B1B1B"/>
+                </a:solidFill>
+                <a:latin typeface="Calibri" pitchFamily="34" charset="0"/>
+                <a:ea typeface="Calibri" pitchFamily="34" charset="-122"/>
+                <a:cs typeface="Calibri" pitchFamily="34" charset="-120"/>
+              </a:rPr>
+              <a:t>Larger world models, onboard robot computers; automatic megakernel compilers.</a:t>
+            </a:r>
+            <a:endParaRPr lang="en-US" sz="1250" dirty="0"/>
+          </a:p>
+        </p:txBody>
+      </p:sp>
+      <p:sp>
+        <p:nvSpPr>
+          <p:cNvPr id="12" name="Shape 10"/>
+          <p:cNvSpPr/>
+          <p:nvPr/>
+        </p:nvSpPr>
+        <p:spPr>
+          <a:xfrm>
+            <a:off x="4663440" y="2606040"/>
+            <a:ext cx="365760" cy="365760"/>
+          </a:xfrm>
+          <a:prstGeom prst="ellipse">
+            <a:avLst/>
+          </a:prstGeom>
+          <a:solidFill>
+            <a:srgbClr val="2A78D6"/>
+          </a:solidFill>
+          <a:ln w="12700">
+            <a:solidFill>
+              <a:srgbClr val="FFFFFF"/>
+            </a:solidFill>
+            <a:prstDash val="solid"/>
+          </a:ln>
+        </p:spPr>
+      </p:sp>
+      <p:sp>
+        <p:nvSpPr>
+          <p:cNvPr id="13" name="Text 11"/>
+          <p:cNvSpPr txBox="1"/>
+          <p:nvPr/>
+        </p:nvSpPr>
+        <p:spPr>
+          <a:xfrm>
+            <a:off x="4663440" y="2606040"/>
+            <a:ext cx="365760" cy="365760"/>
+          </a:xfrm>
+          <a:prstGeom prst="rect">
+            <a:avLst/>
+          </a:prstGeom>
+          <a:noFill/>
+          <a:ln/>
+        </p:spPr>
+        <p:txBody>
+          <a:bodyPr wrap="square" lIns="0" tIns="0" rIns="0" bIns="0" rtlCol="0" anchor="ctr"/>
+          <a:lstStyle/>
+          <a:p>
             <a:pPr algn="ctr" indent="0" marL="0">
               <a:buNone/>
             </a:pPr>
             <a:r>
-              <a:rPr lang="en-US" sz="1000" dirty="0">
-                <a:solidFill>
-                  <a:srgbClr val="5A5A5A"/>
-                </a:solidFill>
-                <a:latin typeface="Calibri" pitchFamily="34" charset="0"/>
-                <a:ea typeface="Calibri" pitchFamily="34" charset="-122"/>
-                <a:cs typeface="Calibri" pitchFamily="34" charset="-120"/>
-              </a:rPr>
-              <a:t>cluster barrier</a:t>
-            </a:r>
-            <a:endParaRPr lang="en-US" sz="1000" dirty="0"/>
-          </a:p>
-          <a:p>
-            <a:pPr algn="ctr" indent="0" marL="0">
-              <a:buNone/>
-            </a:pPr>
-            <a:r>
-              <a:rPr lang="en-US" sz="1000" dirty="0">
-                <a:solidFill>
-                  <a:srgbClr val="5A5A5A"/>
-                </a:solidFill>
-                <a:latin typeface="Calibri" pitchFamily="34" charset="0"/>
-                <a:ea typeface="Calibri" pitchFamily="34" charset="-122"/>
-                <a:cs typeface="Calibri" pitchFamily="34" charset="-120"/>
-              </a:rPr>
-              <a:t>(was 3.6 µs)</a:t>
-            </a:r>
-            <a:endParaRPr lang="en-US" sz="1000" dirty="0"/>
-          </a:p>
-        </p:txBody>
-      </p:sp>
-      <p:sp>
-        <p:nvSpPr>
-          <p:cNvPr id="14" name="Text 10"/>
-          <p:cNvSpPr txBox="1"/>
-          <p:nvPr/>
-        </p:nvSpPr>
-        <p:spPr>
-          <a:xfrm>
-            <a:off x="4937760" y="2286000"/>
-            <a:ext cx="3840480" cy="2468880"/>
+              <a:rPr lang="en-US" sz="1300" b="1" dirty="0">
+                <a:solidFill>
+                  <a:srgbClr val="FFFFFF"/>
+                </a:solidFill>
+                <a:latin typeface="Cambria" pitchFamily="34" charset="0"/>
+                <a:ea typeface="Cambria" pitchFamily="34" charset="-122"/>
+                <a:cs typeface="Cambria" pitchFamily="34" charset="-120"/>
+              </a:rPr>
+              <a:t>4</a:t>
+            </a:r>
+            <a:endParaRPr lang="en-US" sz="1300" dirty="0"/>
+          </a:p>
+        </p:txBody>
+      </p:sp>
+      <p:sp>
+        <p:nvSpPr>
+          <p:cNvPr id="14" name="Text 12"/>
+          <p:cNvSpPr txBox="1"/>
+          <p:nvPr/>
+        </p:nvSpPr>
+        <p:spPr>
+          <a:xfrm>
+            <a:off x="5166360" y="2560320"/>
+            <a:ext cx="3566160" cy="1188720"/>
           </a:xfrm>
           <a:prstGeom prst="rect">
             <a:avLst/>
@@ -4524,15 +4094,34 @@
           <a:bodyPr wrap="square" lIns="0" tIns="0" rIns="0" bIns="0" rtlCol="0" anchor="t"/>
           <a:lstStyle/>
           <a:p>
-            <a:pPr marL="177800" indent="-177800">
+            <a:pPr indent="0" marL="0">
               <a:spcAft>
-                <a:spcPts val="700"/>
+                <a:spcPts val="200"/>
               </a:spcAft>
-              <a:buSzPct val="100000"/>
-              <a:buChar char="•"/>
-            </a:pPr>
-            <a:r>
-              <a:rPr lang="en-US" sz="1100" dirty="0">
+              <a:buNone/>
+            </a:pPr>
+            <a:r>
+              <a:rPr lang="en-US" sz="1250" b="1" dirty="0">
+                <a:solidFill>
+                  <a:srgbClr val="14213D"/>
+                </a:solidFill>
+                <a:latin typeface="Calibri" pitchFamily="34" charset="0"/>
+                <a:ea typeface="Calibri" pitchFamily="34" charset="-122"/>
+                <a:cs typeface="Calibri" pitchFamily="34" charset="-120"/>
+              </a:rPr>
+              <a:t>Evaluate at deployment resolution</a:t>
+            </a:r>
+            <a:endParaRPr lang="en-US" sz="1250" dirty="0"/>
+          </a:p>
+          <a:p>
+            <a:pPr indent="0" marL="0">
+              <a:spcAft>
+                <a:spcPts val="200"/>
+              </a:spcAft>
+              <a:buNone/>
+            </a:pPr>
+            <a:r>
+              <a:rPr lang="en-US" sz="1250" dirty="0">
                 <a:solidFill>
                   <a:srgbClr val="1B1B1B"/>
                 </a:solidFill>
@@ -4540,57 +4129,15 @@
                 <a:ea typeface="Calibri" pitchFamily="34" charset="-122"/>
                 <a:cs typeface="Calibri" pitchFamily="34" charset="-120"/>
               </a:rPr>
-              <a:t>Each tuning step removed latency, not arithmetic: no calls between WGMMAs, relaxed cluster arrives, fast erf, no producer warp.</a:t>
-            </a:r>
-            <a:endParaRPr lang="en-US" sz="1100" dirty="0"/>
-          </a:p>
-          <a:p>
-            <a:pPr marL="177800" indent="-177800">
-              <a:spcAft>
-                <a:spcPts val="700"/>
-              </a:spcAft>
-              <a:buSzPct val="100000"/>
-              <a:buChar char="•"/>
-            </a:pPr>
-            <a:r>
-              <a:rPr lang="en-US" sz="1100" dirty="0">
-                <a:solidFill>
-                  <a:srgbClr val="1B1B1B"/>
-                </a:solidFill>
-                <a:latin typeface="Calibri" pitchFamily="34" charset="0"/>
-                <a:ea typeface="Calibri" pitchFamily="34" charset="-122"/>
-                <a:cs typeface="Calibri" pitchFamily="34" charset="-120"/>
-              </a:rPr>
-              <a:t>Every attempt that raised register pressure (peeling, K/V prefetch, owner prefetch) made the kernel slower.</a:t>
-            </a:r>
-            <a:endParaRPr lang="en-US" sz="1100" dirty="0"/>
-          </a:p>
-          <a:p>
-            <a:pPr marL="177800" indent="-177800">
-              <a:spcAft>
-                <a:spcPts val="700"/>
-              </a:spcAft>
-              <a:buSzPct val="100000"/>
-              <a:buChar char="•"/>
-            </a:pPr>
-            <a:r>
-              <a:rPr lang="en-US" sz="1100" dirty="0">
-                <a:solidFill>
-                  <a:srgbClr val="1B1B1B"/>
-                </a:solidFill>
-                <a:latin typeface="Calibri" pitchFamily="34" charset="0"/>
-                <a:ea typeface="Calibri" pitchFamily="34" charset="-122"/>
-                <a:cs typeface="Calibri" pitchFamily="34" charset="-120"/>
-              </a:rPr>
-              <a:t>What remains is a 900-layer dependent chain; going far below 40 ms needs fewer cross-SM hand-offs per layer, a redesign.</a:t>
-            </a:r>
-            <a:endParaRPr lang="en-US" sz="1100" dirty="0"/>
-          </a:p>
-        </p:txBody>
-      </p:sp>
-      <p:sp>
-        <p:nvSpPr>
-          <p:cNvPr id="16" name="Text 11"/>
+              <a:t>About 2,500 paired episodes for 2 points, now minutes of planning; then a physical robot.</a:t>
+            </a:r>
+            <a:endParaRPr lang="en-US" sz="1250" dirty="0"/>
+          </a:p>
+        </p:txBody>
+      </p:sp>
+      <p:sp>
+        <p:nvSpPr>
+          <p:cNvPr id="16" name="Text 13"/>
           <p:cNvSpPr txBox="1"/>
           <p:nvPr/>
         </p:nvSpPr>
@@ -4638,1679 +4185,6 @@
 <file path=ppt/slides/slide14.xml><?xml version="1.0" encoding="utf-8"?>
 <p:sld xmlns:a="http://schemas.openxmlformats.org/drawingml/2006/main" xmlns:r="http://schemas.openxmlformats.org/officeDocument/2006/relationships" xmlns:p="http://schemas.openxmlformats.org/presentationml/2006/main">
   <p:cSld name="Slide 14">
-    <p:spTree>
-      <p:nvGrpSpPr>
-        <p:cNvPr id="1" name=""/>
-        <p:cNvGrpSpPr/>
-        <p:nvPr/>
-      </p:nvGrpSpPr>
-      <p:grpSpPr>
-        <a:xfrm>
-          <a:off x="0" y="0"/>
-          <a:ext cx="0" cy="0"/>
-          <a:chOff x="0" y="0"/>
-          <a:chExt cx="0" cy="0"/>
-        </a:xfrm>
-      </p:grpSpPr>
-      <p:sp>
-        <p:nvSpPr>
-          <p:cNvPr id="2" name="Text 0"/>
-          <p:cNvSpPr txBox="1"/>
-          <p:nvPr/>
-        </p:nvSpPr>
-        <p:spPr>
-          <a:xfrm>
-            <a:off x="457200" y="292608"/>
-            <a:ext cx="8229600" cy="640080"/>
-          </a:xfrm>
-          <a:prstGeom prst="rect">
-            <a:avLst/>
-          </a:prstGeom>
-          <a:noFill/>
-          <a:ln/>
-        </p:spPr>
-        <p:txBody>
-          <a:bodyPr wrap="square" lIns="0" tIns="0" rIns="0" bIns="0" rtlCol="0" anchor="ctr"/>
-          <a:lstStyle/>
-          <a:p>
-            <a:pPr indent="0" marL="0">
-              <a:buNone/>
-            </a:pPr>
-            <a:r>
-              <a:rPr lang="en-US" sz="2800" b="1" dirty="0">
-                <a:solidFill>
-                  <a:srgbClr val="14213D"/>
-                </a:solidFill>
-                <a:latin typeface="Cambria" pitchFamily="34" charset="0"/>
-                <a:ea typeface="Cambria" pitchFamily="34" charset="-122"/>
-                <a:cs typeface="Cambria" pitchFamily="34" charset="-120"/>
-              </a:rPr>
-              <a:t>Result 4: task success does not move</a:t>
-            </a:r>
-            <a:endParaRPr lang="en-US" sz="2800" dirty="0"/>
-          </a:p>
-        </p:txBody>
-      </p:sp>
-      <p:pic>
-        <p:nvPicPr>
-          <p:cNvPr id="3" name="Image 0" descr="preencoded.png">    </p:cNvPr>
-          <p:cNvPicPr>
-            <a:picLocks noChangeAspect="1"/>
-          </p:cNvPicPr>
-          <p:nvPr/>
-        </p:nvPicPr>
-        <p:blipFill>
-          <a:blip r:embed="rId1"/>
-          <a:stretch>
-            <a:fillRect/>
-          </a:stretch>
-        </p:blipFill>
-        <p:spPr>
-          <a:xfrm>
-            <a:off x="457200" y="1336386"/>
-            <a:ext cx="5760720" cy="1990669"/>
-          </a:xfrm>
-          <a:prstGeom prst="rect">
-            <a:avLst/>
-          </a:prstGeom>
-        </p:spPr>
-      </p:pic>
-      <p:sp>
-        <p:nvSpPr>
-          <p:cNvPr id="4" name="Text 1"/>
-          <p:cNvSpPr txBox="1"/>
-          <p:nvPr/>
-        </p:nvSpPr>
-        <p:spPr>
-          <a:xfrm>
-            <a:off x="6400800" y="1051560"/>
-            <a:ext cx="2377440" cy="3657600"/>
-          </a:xfrm>
-          <a:prstGeom prst="rect">
-            <a:avLst/>
-          </a:prstGeom>
-          <a:noFill/>
-          <a:ln/>
-        </p:spPr>
-        <p:txBody>
-          <a:bodyPr wrap="square" lIns="0" tIns="0" rIns="0" bIns="0" rtlCol="0" anchor="t"/>
-          <a:lstStyle/>
-          <a:p>
-            <a:pPr marL="177800" indent="-177800">
-              <a:spcAft>
-                <a:spcPts val="700"/>
-              </a:spcAft>
-              <a:buSzPct val="100000"/>
-              <a:buChar char="•"/>
-            </a:pPr>
-            <a:r>
-              <a:rPr lang="en-US" sz="1100" dirty="0">
-                <a:solidFill>
-                  <a:srgbClr val="1B1B1B"/>
-                </a:solidFill>
-                <a:latin typeface="Calibri" pitchFamily="34" charset="0"/>
-                <a:ea typeface="Calibri" pitchFamily="34" charset="-122"/>
-                <a:cs typeface="Calibri" pitchFamily="34" charset="-120"/>
-              </a:rPr>
-              <a:t>Every rung: 260-265 of 300; no paired test near significance (smallest p = 0.50).</a:t>
-            </a:r>
-            <a:endParaRPr lang="en-US" sz="1100" dirty="0"/>
-          </a:p>
-          <a:p>
-            <a:pPr marL="177800" indent="-177800">
-              <a:spcAft>
-                <a:spcPts val="700"/>
-              </a:spcAft>
-              <a:buSzPct val="100000"/>
-              <a:buChar char="•"/>
-            </a:pPr>
-            <a:r>
-              <a:rPr lang="en-US" sz="1100" dirty="0">
-                <a:solidFill>
-                  <a:srgbClr val="1B1B1B"/>
-                </a:solidFill>
-                <a:latin typeface="Calibri" pitchFamily="34" charset="0"/>
-                <a:ea typeface="Calibri" pitchFamily="34" charset="-122"/>
-                <a:cs typeface="Calibri" pitchFamily="34" charset="-120"/>
-              </a:rPr>
-              <a:t>Whole ladder, R4 vs R0: 19 won / 20 lost, -0.3 points [-4.3, +3.7].</a:t>
-            </a:r>
-            <a:endParaRPr lang="en-US" sz="1100" dirty="0"/>
-          </a:p>
-          <a:p>
-            <a:pPr marL="177800" indent="-177800">
-              <a:spcAft>
-                <a:spcPts val="700"/>
-              </a:spcAft>
-              <a:buSzPct val="100000"/>
-              <a:buChar char="•"/>
-            </a:pPr>
-            <a:r>
-              <a:rPr lang="en-US" sz="1100" dirty="0">
-                <a:solidFill>
-                  <a:srgbClr val="1B1B1B"/>
-                </a:solidFill>
-                <a:latin typeface="Calibri" pitchFamily="34" charset="0"/>
-                <a:ea typeface="Calibri" pitchFamily="34" charset="-122"/>
-                <a:cs typeface="Calibri" pitchFamily="34" charset="-120"/>
-              </a:rPr>
-              <a:t>The exact rung differs in 2 episodes; any new random stream in 32-39: the size of sampling noise.</a:t>
-            </a:r>
-            <a:endParaRPr lang="en-US" sz="1100" dirty="0"/>
-          </a:p>
-          <a:p>
-            <a:pPr marL="177800" indent="-177800">
-              <a:spcAft>
-                <a:spcPts val="700"/>
-              </a:spcAft>
-              <a:buSzPct val="100000"/>
-              <a:buChar char="•"/>
-            </a:pPr>
-            <a:r>
-              <a:rPr lang="en-US" sz="1100" dirty="0">
-                <a:solidFill>
-                  <a:srgbClr val="1B1B1B"/>
-                </a:solidFill>
-                <a:latin typeface="Calibri" pitchFamily="34" charset="0"/>
-                <a:ea typeface="Calibri" pitchFamily="34" charset="-122"/>
-                <a:cs typeface="Calibri" pitchFamily="34" charset="-120"/>
-              </a:rPr>
-              <a:t>Kernel cost error vs FP32 matches BF16 autocast (max rel. 0.0005-0.0043); fused encoder closer to FP32 than autocast.</a:t>
-            </a:r>
-            <a:endParaRPr lang="en-US" sz="1100" dirty="0"/>
-          </a:p>
-        </p:txBody>
-      </p:sp>
-      <p:sp>
-        <p:nvSpPr>
-          <p:cNvPr id="5" name="Text 2"/>
-          <p:cNvSpPr txBox="1"/>
-          <p:nvPr/>
-        </p:nvSpPr>
-        <p:spPr>
-          <a:xfrm>
-            <a:off x="457200" y="3840480"/>
-            <a:ext cx="5760720" cy="274320"/>
-          </a:xfrm>
-          <a:prstGeom prst="rect">
-            <a:avLst/>
-          </a:prstGeom>
-          <a:noFill/>
-          <a:ln/>
-        </p:spPr>
-        <p:txBody>
-          <a:bodyPr wrap="square" lIns="0" tIns="0" rIns="0" bIns="0" rtlCol="0" anchor="ctr"/>
-          <a:lstStyle/>
-          <a:p>
-            <a:pPr indent="0" marL="0">
-              <a:buNone/>
-            </a:pPr>
-            <a:r>
-              <a:rPr lang="en-US" sz="1000" i="1" dirty="0">
-                <a:solidFill>
-                  <a:srgbClr val="5A5A5A"/>
-                </a:solidFill>
-                <a:latin typeface="Calibri" pitchFamily="34" charset="0"/>
-                <a:ea typeface="Calibri" pitchFamily="34" charset="-122"/>
-                <a:cs typeface="Calibri" pitchFamily="34" charset="-120"/>
-              </a:rPr>
-              <a:t>Grey: episodes only the reference solved; coloured: episodes only the rung solved. Annotation: paired difference, bootstrap 95% CI, exact McNemar p.</a:t>
-            </a:r>
-            <a:endParaRPr lang="en-US" sz="1000" dirty="0"/>
-          </a:p>
-        </p:txBody>
-      </p:sp>
-      <p:sp>
-        <p:nvSpPr>
-          <p:cNvPr id="7" name="Text 3"/>
-          <p:cNvSpPr txBox="1"/>
-          <p:nvPr/>
-        </p:nvSpPr>
-        <p:spPr>
-          <a:xfrm>
-            <a:off x="8229600" y="4796028"/>
-            <a:ext cx="457200" cy="228600"/>
-          </a:xfrm>
-          <a:prstGeom prst="rect">
-            <a:avLst/>
-          </a:prstGeom>
-          <a:noFill/>
-          <a:ln/>
-        </p:spPr>
-        <p:txBody>
-          <a:bodyPr wrap="square" lIns="0" tIns="0" rIns="0" bIns="0" rtlCol="0" anchor="ctr"/>
-          <a:lstStyle/>
-          <a:p>
-            <a:pPr algn="r" indent="0" marL="0">
-              <a:buNone/>
-            </a:pPr>
-            <a:r>
-              <a:rPr lang="en-US" sz="900" dirty="0">
-                <a:solidFill>
-                  <a:srgbClr val="5A5A5A"/>
-                </a:solidFill>
-                <a:latin typeface="Calibri" pitchFamily="34" charset="0"/>
-                <a:ea typeface="Calibri" pitchFamily="34" charset="-122"/>
-                <a:cs typeface="Calibri" pitchFamily="34" charset="-120"/>
-              </a:rPr>
-              <a:t>14</a:t>
-            </a:r>
-            <a:endParaRPr lang="en-US" sz="900" dirty="0"/>
-          </a:p>
-        </p:txBody>
-      </p:sp>
-    </p:spTree>
-  </p:cSld>
-  <p:clrMapOvr>
-    <a:masterClrMapping/>
-  </p:clrMapOvr>
-</p:sld>
-</file>
-
-<file path=ppt/slides/slide15.xml><?xml version="1.0" encoding="utf-8"?>
-<p:sld xmlns:a="http://schemas.openxmlformats.org/drawingml/2006/main" xmlns:r="http://schemas.openxmlformats.org/officeDocument/2006/relationships" xmlns:p="http://schemas.openxmlformats.org/presentationml/2006/main">
-  <p:cSld name="Slide 15">
-    <p:spTree>
-      <p:nvGrpSpPr>
-        <p:cNvPr id="1" name=""/>
-        <p:cNvGrpSpPr/>
-        <p:nvPr/>
-      </p:nvGrpSpPr>
-      <p:grpSpPr>
-        <a:xfrm>
-          <a:off x="0" y="0"/>
-          <a:ext cx="0" cy="0"/>
-          <a:chOff x="0" y="0"/>
-          <a:chExt cx="0" cy="0"/>
-        </a:xfrm>
-      </p:grpSpPr>
-      <p:sp>
-        <p:nvSpPr>
-          <p:cNvPr id="2" name="Text 0"/>
-          <p:cNvSpPr txBox="1"/>
-          <p:nvPr/>
-        </p:nvSpPr>
-        <p:spPr>
-          <a:xfrm>
-            <a:off x="457200" y="292608"/>
-            <a:ext cx="8229600" cy="640080"/>
-          </a:xfrm>
-          <a:prstGeom prst="rect">
-            <a:avLst/>
-          </a:prstGeom>
-          <a:noFill/>
-          <a:ln/>
-        </p:spPr>
-        <p:txBody>
-          <a:bodyPr wrap="square" lIns="0" tIns="0" rIns="0" bIns="0" rtlCol="0" anchor="ctr"/>
-          <a:lstStyle/>
-          <a:p>
-            <a:pPr indent="0" marL="0">
-              <a:buNone/>
-            </a:pPr>
-            <a:r>
-              <a:rPr lang="en-US" sz="2800" b="1" dirty="0">
-                <a:solidFill>
-                  <a:srgbClr val="14213D"/>
-                </a:solidFill>
-                <a:latin typeface="Cambria" pitchFamily="34" charset="0"/>
-                <a:ea typeface="Cambria" pitchFamily="34" charset="-122"/>
-                <a:cs typeface="Cambria" pitchFamily="34" charset="-120"/>
-              </a:rPr>
-              <a:t>Conclusions, and what I cannot claim</a:t>
-            </a:r>
-            <a:endParaRPr lang="en-US" sz="2800" dirty="0"/>
-          </a:p>
-        </p:txBody>
-      </p:sp>
-      <p:sp>
-        <p:nvSpPr>
-          <p:cNvPr id="3" name="Text 1"/>
-          <p:cNvSpPr txBox="1"/>
-          <p:nvPr/>
-        </p:nvSpPr>
-        <p:spPr>
-          <a:xfrm>
-            <a:off x="457200" y="1051560"/>
-            <a:ext cx="640080" cy="502920"/>
-          </a:xfrm>
-          <a:prstGeom prst="rect">
-            <a:avLst/>
-          </a:prstGeom>
-          <a:noFill/>
-          <a:ln/>
-        </p:spPr>
-        <p:txBody>
-          <a:bodyPr wrap="square" lIns="0" tIns="0" rIns="0" bIns="0" rtlCol="0" anchor="t"/>
-          <a:lstStyle/>
-          <a:p>
-            <a:pPr indent="0" marL="0">
-              <a:buNone/>
-            </a:pPr>
-            <a:r>
-              <a:rPr lang="en-US" sz="1400" b="1" dirty="0">
-                <a:solidFill>
-                  <a:srgbClr val="2A78D6"/>
-                </a:solidFill>
-                <a:latin typeface="Cambria" pitchFamily="34" charset="0"/>
-                <a:ea typeface="Cambria" pitchFamily="34" charset="-122"/>
-                <a:cs typeface="Cambria" pitchFamily="34" charset="-120"/>
-              </a:rPr>
-              <a:t>RQ1</a:t>
-            </a:r>
-            <a:endParaRPr lang="en-US" sz="1400" dirty="0"/>
-          </a:p>
-        </p:txBody>
-      </p:sp>
-      <p:sp>
-        <p:nvSpPr>
-          <p:cNvPr id="4" name="Text 2"/>
-          <p:cNvSpPr txBox="1"/>
-          <p:nvPr/>
-        </p:nvSpPr>
-        <p:spPr>
-          <a:xfrm>
-            <a:off x="1143000" y="1051560"/>
-            <a:ext cx="4160520" cy="713232"/>
-          </a:xfrm>
-          <a:prstGeom prst="rect">
-            <a:avLst/>
-          </a:prstGeom>
-          <a:noFill/>
-          <a:ln/>
-        </p:spPr>
-        <p:txBody>
-          <a:bodyPr wrap="square" lIns="0" tIns="0" rIns="0" bIns="0" rtlCol="0" anchor="t"/>
-          <a:lstStyle/>
-          <a:p>
-            <a:pPr indent="0" marL="0">
-              <a:buNone/>
-            </a:pPr>
-            <a:r>
-              <a:rPr lang="en-US" sz="1100" dirty="0">
-                <a:solidFill>
-                  <a:srgbClr val="1B1B1B"/>
-                </a:solidFill>
-                <a:latin typeface="Calibri" pitchFamily="34" charset="0"/>
-                <a:ea typeface="Calibri" pitchFamily="34" charset="-122"/>
-                <a:cs typeface="Calibri" pitchFamily="34" charset="-120"/>
-              </a:rPr>
-              <a:t>About 40% of the reference latency is redundant work: caching and no host syncs, 622 -&gt; 377 ms, exact.</a:t>
-            </a:r>
-            <a:endParaRPr lang="en-US" sz="1100" dirty="0"/>
-          </a:p>
-        </p:txBody>
-      </p:sp>
-      <p:sp>
-        <p:nvSpPr>
-          <p:cNvPr id="5" name="Text 3"/>
-          <p:cNvSpPr txBox="1"/>
-          <p:nvPr/>
-        </p:nvSpPr>
-        <p:spPr>
-          <a:xfrm>
-            <a:off x="457200" y="1801368"/>
-            <a:ext cx="640080" cy="502920"/>
-          </a:xfrm>
-          <a:prstGeom prst="rect">
-            <a:avLst/>
-          </a:prstGeom>
-          <a:noFill/>
-          <a:ln/>
-        </p:spPr>
-        <p:txBody>
-          <a:bodyPr wrap="square" lIns="0" tIns="0" rIns="0" bIns="0" rtlCol="0" anchor="t"/>
-          <a:lstStyle/>
-          <a:p>
-            <a:pPr indent="0" marL="0">
-              <a:buNone/>
-            </a:pPr>
-            <a:r>
-              <a:rPr lang="en-US" sz="1400" b="1" dirty="0">
-                <a:solidFill>
-                  <a:srgbClr val="2A78D6"/>
-                </a:solidFill>
-                <a:latin typeface="Cambria" pitchFamily="34" charset="0"/>
-                <a:ea typeface="Cambria" pitchFamily="34" charset="-122"/>
-                <a:cs typeface="Cambria" pitchFamily="34" charset="-120"/>
-              </a:rPr>
-              <a:t>RQ2</a:t>
-            </a:r>
-            <a:endParaRPr lang="en-US" sz="1400" dirty="0"/>
-          </a:p>
-        </p:txBody>
-      </p:sp>
-      <p:sp>
-        <p:nvSpPr>
-          <p:cNvPr id="6" name="Text 4"/>
-          <p:cNvSpPr txBox="1"/>
-          <p:nvPr/>
-        </p:nvSpPr>
-        <p:spPr>
-          <a:xfrm>
-            <a:off x="1143000" y="1801368"/>
-            <a:ext cx="4160520" cy="713232"/>
-          </a:xfrm>
-          <a:prstGeom prst="rect">
-            <a:avLst/>
-          </a:prstGeom>
-          <a:noFill/>
-          <a:ln/>
-        </p:spPr>
-        <p:txBody>
-          <a:bodyPr wrap="square" lIns="0" tIns="0" rIns="0" bIns="0" rtlCol="0" anchor="t"/>
-          <a:lstStyle/>
-          <a:p>
-            <a:pPr indent="0" marL="0">
-              <a:buNone/>
-            </a:pPr>
-            <a:r>
-              <a:rPr lang="en-US" sz="1100" dirty="0">
-                <a:solidFill>
-                  <a:srgbClr val="1B1B1B"/>
-                </a:solidFill>
-                <a:latin typeface="Calibri" pitchFamily="34" charset="0"/>
-                <a:ea typeface="Calibri" pitchFamily="34" charset="-122"/>
-                <a:cs typeface="Calibri" pitchFamily="34" charset="-120"/>
-              </a:rPr>
-              <a:t>It depends on execution: 0.92x in eager PyTorch, 1.38x in the megakernel; success unchanged either way.</a:t>
-            </a:r>
-            <a:endParaRPr lang="en-US" sz="1100" dirty="0"/>
-          </a:p>
-        </p:txBody>
-      </p:sp>
-      <p:sp>
-        <p:nvSpPr>
-          <p:cNvPr id="7" name="Text 5"/>
-          <p:cNvSpPr txBox="1"/>
-          <p:nvPr/>
-        </p:nvSpPr>
-        <p:spPr>
-          <a:xfrm>
-            <a:off x="457200" y="2551176"/>
-            <a:ext cx="640080" cy="502920"/>
-          </a:xfrm>
-          <a:prstGeom prst="rect">
-            <a:avLst/>
-          </a:prstGeom>
-          <a:noFill/>
-          <a:ln/>
-        </p:spPr>
-        <p:txBody>
-          <a:bodyPr wrap="square" lIns="0" tIns="0" rIns="0" bIns="0" rtlCol="0" anchor="t"/>
-          <a:lstStyle/>
-          <a:p>
-            <a:pPr indent="0" marL="0">
-              <a:buNone/>
-            </a:pPr>
-            <a:r>
-              <a:rPr lang="en-US" sz="1400" b="1" dirty="0">
-                <a:solidFill>
-                  <a:srgbClr val="2A78D6"/>
-                </a:solidFill>
-                <a:latin typeface="Cambria" pitchFamily="34" charset="0"/>
-                <a:ea typeface="Cambria" pitchFamily="34" charset="-122"/>
-                <a:cs typeface="Cambria" pitchFamily="34" charset="-120"/>
-              </a:rPr>
-              <a:t>RQ3</a:t>
-            </a:r>
-            <a:endParaRPr lang="en-US" sz="1400" dirty="0"/>
-          </a:p>
-        </p:txBody>
-      </p:sp>
-      <p:sp>
-        <p:nvSpPr>
-          <p:cNvPr id="8" name="Text 6"/>
-          <p:cNvSpPr txBox="1"/>
-          <p:nvPr/>
-        </p:nvSpPr>
-        <p:spPr>
-          <a:xfrm>
-            <a:off x="1143000" y="2551176"/>
-            <a:ext cx="4160520" cy="713232"/>
-          </a:xfrm>
-          <a:prstGeom prst="rect">
-            <a:avLst/>
-          </a:prstGeom>
-          <a:noFill/>
-          <a:ln/>
-        </p:spPr>
-        <p:txBody>
-          <a:bodyPr wrap="square" lIns="0" tIns="0" rIns="0" bIns="0" rtlCol="0" anchor="t"/>
-          <a:lstStyle/>
-          <a:p>
-            <a:pPr indent="0" marL="0">
-              <a:buNone/>
-            </a:pPr>
-            <a:r>
-              <a:rPr lang="en-US" sz="1100" dirty="0">
-                <a:solidFill>
-                  <a:srgbClr val="1B1B1B"/>
-                </a:solidFill>
-                <a:latin typeface="Calibri" pitchFamily="34" charset="0"/>
-                <a:ea typeface="Calibri" pitchFamily="34" charset="-122"/>
-                <a:cs typeface="Calibri" pitchFamily="34" charset="-120"/>
-              </a:rPr>
-              <a:t>3.1x over the best PyTorch path end to end (2.0x on the solve), 6.9x over eager iCEM, at the same numerics class.</a:t>
-            </a:r>
-            <a:endParaRPr lang="en-US" sz="1100" dirty="0"/>
-          </a:p>
-        </p:txBody>
-      </p:sp>
-      <p:sp>
-        <p:nvSpPr>
-          <p:cNvPr id="9" name="Text 7"/>
-          <p:cNvSpPr txBox="1"/>
-          <p:nvPr/>
-        </p:nvSpPr>
-        <p:spPr>
-          <a:xfrm>
-            <a:off x="457200" y="3300984"/>
-            <a:ext cx="640080" cy="502920"/>
-          </a:xfrm>
-          <a:prstGeom prst="rect">
-            <a:avLst/>
-          </a:prstGeom>
-          <a:noFill/>
-          <a:ln/>
-        </p:spPr>
-        <p:txBody>
-          <a:bodyPr wrap="square" lIns="0" tIns="0" rIns="0" bIns="0" rtlCol="0" anchor="t"/>
-          <a:lstStyle/>
-          <a:p>
-            <a:pPr indent="0" marL="0">
-              <a:buNone/>
-            </a:pPr>
-            <a:r>
-              <a:rPr lang="en-US" sz="1400" b="1" dirty="0">
-                <a:solidFill>
-                  <a:srgbClr val="2A78D6"/>
-                </a:solidFill>
-                <a:latin typeface="Cambria" pitchFamily="34" charset="0"/>
-                <a:ea typeface="Cambria" pitchFamily="34" charset="-122"/>
-                <a:cs typeface="Cambria" pitchFamily="34" charset="-120"/>
-              </a:rPr>
-              <a:t>RQ4</a:t>
-            </a:r>
-            <a:endParaRPr lang="en-US" sz="1400" dirty="0"/>
-          </a:p>
-        </p:txBody>
-      </p:sp>
-      <p:sp>
-        <p:nvSpPr>
-          <p:cNvPr id="10" name="Text 8"/>
-          <p:cNvSpPr txBox="1"/>
-          <p:nvPr/>
-        </p:nvSpPr>
-        <p:spPr>
-          <a:xfrm>
-            <a:off x="1143000" y="3300984"/>
-            <a:ext cx="4160520" cy="713232"/>
-          </a:xfrm>
-          <a:prstGeom prst="rect">
-            <a:avLst/>
-          </a:prstGeom>
-          <a:noFill/>
-          <a:ln/>
-        </p:spPr>
-        <p:txBody>
-          <a:bodyPr wrap="square" lIns="0" tIns="0" rIns="0" bIns="0" rtlCol="0" anchor="t"/>
-          <a:lstStyle/>
-          <a:p>
-            <a:pPr indent="0" marL="0">
-              <a:buNone/>
-            </a:pPr>
-            <a:r>
-              <a:rPr lang="en-US" sz="1100" dirty="0">
-                <a:solidFill>
-                  <a:srgbClr val="1B1B1B"/>
-                </a:solidFill>
-                <a:latin typeface="Calibri" pitchFamily="34" charset="0"/>
-                <a:ea typeface="Calibri" pitchFamily="34" charset="-122"/>
-                <a:cs typeface="Calibri" pitchFamily="34" charset="-120"/>
-              </a:rPr>
-              <a:t>Yes, within resolution: cost error matches BF16 autocast; -0.3 points [-4.3, +3.7] on 300 paired episodes.</a:t>
-            </a:r>
-            <a:endParaRPr lang="en-US" sz="1100" dirty="0"/>
-          </a:p>
-        </p:txBody>
-      </p:sp>
-      <p:sp>
-        <p:nvSpPr>
-          <p:cNvPr id="11" name="Shape 9"/>
-          <p:cNvSpPr/>
-          <p:nvPr/>
-        </p:nvSpPr>
-        <p:spPr>
-          <a:xfrm>
-            <a:off x="5577840" y="1051560"/>
-            <a:ext cx="3108960" cy="3566160"/>
-          </a:xfrm>
-          <a:prstGeom prst="roundRect">
-            <a:avLst>
-              <a:gd name="adj" fmla="val 2353"/>
-            </a:avLst>
-          </a:prstGeom>
-          <a:solidFill>
-            <a:srgbClr val="F3F4F6"/>
-          </a:solidFill>
-          <a:ln w="12700">
-            <a:solidFill>
-              <a:srgbClr val="F3F4F6"/>
-            </a:solidFill>
-            <a:prstDash val="solid"/>
-          </a:ln>
-        </p:spPr>
-      </p:sp>
-      <p:sp>
-        <p:nvSpPr>
-          <p:cNvPr id="12" name="Text 10"/>
-          <p:cNvSpPr txBox="1"/>
-          <p:nvPr/>
-        </p:nvSpPr>
-        <p:spPr>
-          <a:xfrm>
-            <a:off x="5760720" y="1161288"/>
-            <a:ext cx="2743200" cy="365760"/>
-          </a:xfrm>
-          <a:prstGeom prst="rect">
-            <a:avLst/>
-          </a:prstGeom>
-          <a:noFill/>
-          <a:ln/>
-        </p:spPr>
-        <p:txBody>
-          <a:bodyPr wrap="square" lIns="0" tIns="0" rIns="0" bIns="0" rtlCol="0" anchor="ctr"/>
-          <a:lstStyle/>
-          <a:p>
-            <a:pPr indent="0" marL="0">
-              <a:buNone/>
-            </a:pPr>
-            <a:r>
-              <a:rPr lang="en-US" sz="1500" b="1" dirty="0">
-                <a:solidFill>
-                  <a:srgbClr val="14213D"/>
-                </a:solidFill>
-                <a:latin typeface="Cambria" pitchFamily="34" charset="0"/>
-                <a:ea typeface="Cambria" pitchFamily="34" charset="-122"/>
-                <a:cs typeface="Cambria" pitchFamily="34" charset="-120"/>
-              </a:rPr>
-              <a:t>Issues and limits</a:t>
-            </a:r>
-            <a:endParaRPr lang="en-US" sz="1500" dirty="0"/>
-          </a:p>
-        </p:txBody>
-      </p:sp>
-      <p:sp>
-        <p:nvSpPr>
-          <p:cNvPr id="13" name="Text 11"/>
-          <p:cNvSpPr txBox="1"/>
-          <p:nvPr/>
-        </p:nvSpPr>
-        <p:spPr>
-          <a:xfrm>
-            <a:off x="5760720" y="1572768"/>
-            <a:ext cx="2788920" cy="3017520"/>
-          </a:xfrm>
-          <a:prstGeom prst="rect">
-            <a:avLst/>
-          </a:prstGeom>
-          <a:noFill/>
-          <a:ln/>
-        </p:spPr>
-        <p:txBody>
-          <a:bodyPr wrap="square" lIns="0" tIns="0" rIns="0" bIns="0" rtlCol="0" anchor="t"/>
-          <a:lstStyle/>
-          <a:p>
-            <a:pPr marL="177800" indent="-177800">
-              <a:spcAft>
-                <a:spcPts val="700"/>
-              </a:spcAft>
-              <a:buSzPct val="100000"/>
-              <a:buChar char="•"/>
-            </a:pPr>
-            <a:r>
-              <a:rPr lang="en-US" sz="1050" dirty="0">
-                <a:solidFill>
-                  <a:srgbClr val="1B1B1B"/>
-                </a:solidFill>
-                <a:latin typeface="Calibri" pitchFamily="34" charset="0"/>
-                <a:ea typeface="Calibri" pitchFamily="34" charset="-122"/>
-                <a:cs typeface="Calibri" pitchFamily="34" charset="-120"/>
-              </a:rPr>
-              <a:t>300 pairs resolve about 6 points of success, no less.</a:t>
-            </a:r>
-            <a:endParaRPr lang="en-US" sz="1050" dirty="0"/>
-          </a:p>
-          <a:p>
-            <a:pPr marL="177800" indent="-177800">
-              <a:spcAft>
-                <a:spcPts val="700"/>
-              </a:spcAft>
-              <a:buSzPct val="100000"/>
-              <a:buChar char="•"/>
-            </a:pPr>
-            <a:r>
-              <a:rPr lang="en-US" sz="1050" dirty="0">
-                <a:solidFill>
-                  <a:srgbClr val="1B1B1B"/>
-                </a:solidFill>
-                <a:latin typeface="Calibri" pitchFamily="34" charset="0"/>
-                <a:ea typeface="Calibri" pitchFamily="34" charset="-122"/>
-                <a:cs typeface="Calibri" pitchFamily="34" charset="-120"/>
-              </a:rPr>
-              <a:t>PyTorch rungs moved up to 18% between two passes; the kernel rungs under 2%.</a:t>
-            </a:r>
-            <a:endParaRPr lang="en-US" sz="1050" dirty="0"/>
-          </a:p>
-          <a:p>
-            <a:pPr marL="177800" indent="-177800">
-              <a:spcAft>
-                <a:spcPts val="700"/>
-              </a:spcAft>
-              <a:buSzPct val="100000"/>
-              <a:buChar char="•"/>
-            </a:pPr>
-            <a:r>
-              <a:rPr lang="en-US" sz="1050" dirty="0">
-                <a:solidFill>
-                  <a:srgbClr val="1B1B1B"/>
-                </a:solidFill>
-                <a:latin typeface="Calibri" pitchFamily="34" charset="0"/>
-                <a:ea typeface="Calibri" pitchFamily="34" charset="-122"/>
-                <a:cs typeface="Calibri" pitchFamily="34" charset="-120"/>
-              </a:rPr>
-              <a:t>One model, one task, one GPU generation; Hopper-only kernel.</a:t>
-            </a:r>
-            <a:endParaRPr lang="en-US" sz="1050" dirty="0"/>
-          </a:p>
-          <a:p>
-            <a:pPr marL="177800" indent="-177800">
-              <a:spcAft>
-                <a:spcPts val="700"/>
-              </a:spcAft>
-              <a:buSzPct val="100000"/>
-              <a:buChar char="•"/>
-            </a:pPr>
-            <a:r>
-              <a:rPr lang="en-US" sz="1050" dirty="0">
-                <a:solidFill>
-                  <a:srgbClr val="1B1B1B"/>
-                </a:solidFill>
-                <a:latin typeface="Calibri" pitchFamily="34" charset="0"/>
-                <a:ea typeface="Calibri" pitchFamily="34" charset="-122"/>
-                <a:cs typeface="Calibri" pitchFamily="34" charset="-120"/>
-              </a:rPr>
-              <a:t>Simulation only; only the planning call was optimised.</a:t>
-            </a:r>
-            <a:endParaRPr lang="en-US" sz="1050" dirty="0"/>
-          </a:p>
-          <a:p>
-            <a:pPr marL="177800" indent="-177800">
-              <a:spcAft>
-                <a:spcPts val="700"/>
-              </a:spcAft>
-              <a:buSzPct val="100000"/>
-              <a:buChar char="•"/>
-            </a:pPr>
-            <a:r>
-              <a:rPr lang="en-US" sz="1050" dirty="0">
-                <a:solidFill>
-                  <a:srgbClr val="1B1B1B"/>
-                </a:solidFill>
-                <a:latin typeface="Calibri" pitchFamily="34" charset="0"/>
-                <a:ea typeface="Calibri" pitchFamily="34" charset="-122"/>
-                <a:cs typeface="Calibri" pitchFamily="34" charset="-120"/>
-              </a:rPr>
-              <a:t>R2b is bimodal and R4 has one 458 ms outlier, causes not isolated.</a:t>
-            </a:r>
-            <a:endParaRPr lang="en-US" sz="1050" dirty="0"/>
-          </a:p>
-          <a:p>
-            <a:pPr marL="177800" indent="-177800">
-              <a:spcAft>
-                <a:spcPts val="700"/>
-              </a:spcAft>
-              <a:buSzPct val="100000"/>
-              <a:buChar char="•"/>
-            </a:pPr>
-            <a:r>
-              <a:rPr lang="en-US" sz="1050" dirty="0">
-                <a:solidFill>
-                  <a:srgbClr val="1B1B1B"/>
-                </a:solidFill>
-                <a:latin typeface="Calibri" pitchFamily="34" charset="0"/>
-                <a:ea typeface="Calibri" pitchFamily="34" charset="-122"/>
-                <a:cs typeface="Calibri" pitchFamily="34" charset="-120"/>
-              </a:rPr>
-              <a:t>Budget: $31.50 of $35, two latency passes, one quality run per rung.</a:t>
-            </a:r>
-            <a:endParaRPr lang="en-US" sz="1050" dirty="0"/>
-          </a:p>
-        </p:txBody>
-      </p:sp>
-      <p:sp>
-        <p:nvSpPr>
-          <p:cNvPr id="15" name="Text 12"/>
-          <p:cNvSpPr txBox="1"/>
-          <p:nvPr/>
-        </p:nvSpPr>
-        <p:spPr>
-          <a:xfrm>
-            <a:off x="8229600" y="4796028"/>
-            <a:ext cx="457200" cy="228600"/>
-          </a:xfrm>
-          <a:prstGeom prst="rect">
-            <a:avLst/>
-          </a:prstGeom>
-          <a:noFill/>
-          <a:ln/>
-        </p:spPr>
-        <p:txBody>
-          <a:bodyPr wrap="square" lIns="0" tIns="0" rIns="0" bIns="0" rtlCol="0" anchor="ctr"/>
-          <a:lstStyle/>
-          <a:p>
-            <a:pPr algn="r" indent="0" marL="0">
-              <a:buNone/>
-            </a:pPr>
-            <a:r>
-              <a:rPr lang="en-US" sz="900" dirty="0">
-                <a:solidFill>
-                  <a:srgbClr val="5A5A5A"/>
-                </a:solidFill>
-                <a:latin typeface="Calibri" pitchFamily="34" charset="0"/>
-                <a:ea typeface="Calibri" pitchFamily="34" charset="-122"/>
-                <a:cs typeface="Calibri" pitchFamily="34" charset="-120"/>
-              </a:rPr>
-              <a:t>15</a:t>
-            </a:r>
-            <a:endParaRPr lang="en-US" sz="900" dirty="0"/>
-          </a:p>
-        </p:txBody>
-      </p:sp>
-    </p:spTree>
-  </p:cSld>
-  <p:clrMapOvr>
-    <a:masterClrMapping/>
-  </p:clrMapOvr>
-</p:sld>
-</file>
-
-<file path=ppt/slides/slide16.xml><?xml version="1.0" encoding="utf-8"?>
-<p:sld xmlns:a="http://schemas.openxmlformats.org/drawingml/2006/main" xmlns:r="http://schemas.openxmlformats.org/officeDocument/2006/relationships" xmlns:p="http://schemas.openxmlformats.org/presentationml/2006/main">
-  <p:cSld name="Slide 16">
-    <p:spTree>
-      <p:nvGrpSpPr>
-        <p:cNvPr id="1" name=""/>
-        <p:cNvGrpSpPr/>
-        <p:nvPr/>
-      </p:nvGrpSpPr>
-      <p:grpSpPr>
-        <a:xfrm>
-          <a:off x="0" y="0"/>
-          <a:ext cx="0" cy="0"/>
-          <a:chOff x="0" y="0"/>
-          <a:chExt cx="0" cy="0"/>
-        </a:xfrm>
-      </p:grpSpPr>
-      <p:sp>
-        <p:nvSpPr>
-          <p:cNvPr id="2" name="Text 0"/>
-          <p:cNvSpPr txBox="1"/>
-          <p:nvPr/>
-        </p:nvSpPr>
-        <p:spPr>
-          <a:xfrm>
-            <a:off x="457200" y="292608"/>
-            <a:ext cx="8229600" cy="640080"/>
-          </a:xfrm>
-          <a:prstGeom prst="rect">
-            <a:avLst/>
-          </a:prstGeom>
-          <a:noFill/>
-          <a:ln/>
-        </p:spPr>
-        <p:txBody>
-          <a:bodyPr wrap="square" lIns="0" tIns="0" rIns="0" bIns="0" rtlCol="0" anchor="ctr"/>
-          <a:lstStyle/>
-          <a:p>
-            <a:pPr indent="0" marL="0">
-              <a:buNone/>
-            </a:pPr>
-            <a:r>
-              <a:rPr lang="en-US" sz="2800" b="1" dirty="0">
-                <a:solidFill>
-                  <a:srgbClr val="14213D"/>
-                </a:solidFill>
-                <a:latin typeface="Cambria" pitchFamily="34" charset="0"/>
-                <a:ea typeface="Cambria" pitchFamily="34" charset="-122"/>
-                <a:cs typeface="Cambria" pitchFamily="34" charset="-120"/>
-              </a:rPr>
-              <a:t>Future work: towards a research programme</a:t>
-            </a:r>
-            <a:endParaRPr lang="en-US" sz="2800" dirty="0"/>
-          </a:p>
-        </p:txBody>
-      </p:sp>
-      <p:sp>
-        <p:nvSpPr>
-          <p:cNvPr id="3" name="Shape 1"/>
-          <p:cNvSpPr/>
-          <p:nvPr/>
-        </p:nvSpPr>
-        <p:spPr>
-          <a:xfrm>
-            <a:off x="457200" y="1097280"/>
-            <a:ext cx="365760" cy="365760"/>
-          </a:xfrm>
-          <a:prstGeom prst="ellipse">
-            <a:avLst/>
-          </a:prstGeom>
-          <a:solidFill>
-            <a:srgbClr val="2A78D6"/>
-          </a:solidFill>
-          <a:ln w="12700">
-            <a:solidFill>
-              <a:srgbClr val="FFFFFF"/>
-            </a:solidFill>
-            <a:prstDash val="solid"/>
-          </a:ln>
-        </p:spPr>
-      </p:sp>
-      <p:sp>
-        <p:nvSpPr>
-          <p:cNvPr id="4" name="Text 2"/>
-          <p:cNvSpPr txBox="1"/>
-          <p:nvPr/>
-        </p:nvSpPr>
-        <p:spPr>
-          <a:xfrm>
-            <a:off x="457200" y="1097280"/>
-            <a:ext cx="365760" cy="365760"/>
-          </a:xfrm>
-          <a:prstGeom prst="rect">
-            <a:avLst/>
-          </a:prstGeom>
-          <a:noFill/>
-          <a:ln/>
-        </p:spPr>
-        <p:txBody>
-          <a:bodyPr wrap="square" lIns="0" tIns="0" rIns="0" bIns="0" rtlCol="0" anchor="ctr"/>
-          <a:lstStyle/>
-          <a:p>
-            <a:pPr algn="ctr" indent="0" marL="0">
-              <a:buNone/>
-            </a:pPr>
-            <a:r>
-              <a:rPr lang="en-US" sz="1300" b="1" dirty="0">
-                <a:solidFill>
-                  <a:srgbClr val="FFFFFF"/>
-                </a:solidFill>
-                <a:latin typeface="Cambria" pitchFamily="34" charset="0"/>
-                <a:ea typeface="Cambria" pitchFamily="34" charset="-122"/>
-                <a:cs typeface="Cambria" pitchFamily="34" charset="-120"/>
-              </a:rPr>
-              <a:t>1</a:t>
-            </a:r>
-            <a:endParaRPr lang="en-US" sz="1300" dirty="0"/>
-          </a:p>
-        </p:txBody>
-      </p:sp>
-      <p:sp>
-        <p:nvSpPr>
-          <p:cNvPr id="5" name="Text 3"/>
-          <p:cNvSpPr txBox="1"/>
-          <p:nvPr/>
-        </p:nvSpPr>
-        <p:spPr>
-          <a:xfrm>
-            <a:off x="960120" y="1051560"/>
-            <a:ext cx="3566160" cy="1097280"/>
-          </a:xfrm>
-          <a:prstGeom prst="rect">
-            <a:avLst/>
-          </a:prstGeom>
-          <a:noFill/>
-          <a:ln/>
-        </p:spPr>
-        <p:txBody>
-          <a:bodyPr wrap="square" lIns="0" tIns="0" rIns="0" bIns="0" rtlCol="0" anchor="t"/>
-          <a:lstStyle/>
-          <a:p>
-            <a:pPr indent="0" marL="0">
-              <a:spcAft>
-                <a:spcPts val="200"/>
-              </a:spcAft>
-              <a:buNone/>
-            </a:pPr>
-            <a:r>
-              <a:rPr lang="en-US" sz="1150" b="1" dirty="0">
-                <a:solidFill>
-                  <a:srgbClr val="14213D"/>
-                </a:solidFill>
-                <a:latin typeface="Calibri" pitchFamily="34" charset="0"/>
-                <a:ea typeface="Calibri" pitchFamily="34" charset="-122"/>
-                <a:cs typeface="Calibri" pitchFamily="34" charset="-120"/>
-              </a:rPr>
-              <a:t>Spend the saved latency on planning</a:t>
-            </a:r>
-            <a:endParaRPr lang="en-US" sz="1150" dirty="0"/>
-          </a:p>
-          <a:p>
-            <a:pPr indent="0" marL="0">
-              <a:spcAft>
-                <a:spcPts val="200"/>
-              </a:spcAft>
-              <a:buNone/>
-            </a:pPr>
-            <a:r>
-              <a:rPr lang="en-US" sz="1150" dirty="0">
-                <a:solidFill>
-                  <a:srgbClr val="1B1B1B"/>
-                </a:solidFill>
-                <a:latin typeface="Calibri" pitchFamily="34" charset="0"/>
-                <a:ea typeface="Calibri" pitchFamily="34" charset="-122"/>
-                <a:cs typeface="Calibri" pitchFamily="34" charset="-120"/>
-              </a:rPr>
-              <a:t>Sweep iterations, population and elites at a few ms per plan: map the latency-success frontier, not one point.</a:t>
-            </a:r>
-            <a:endParaRPr lang="en-US" sz="1150" dirty="0"/>
-          </a:p>
-        </p:txBody>
-      </p:sp>
-      <p:sp>
-        <p:nvSpPr>
-          <p:cNvPr id="6" name="Shape 4"/>
-          <p:cNvSpPr/>
-          <p:nvPr/>
-        </p:nvSpPr>
-        <p:spPr>
-          <a:xfrm>
-            <a:off x="4663440" y="1097280"/>
-            <a:ext cx="365760" cy="365760"/>
-          </a:xfrm>
-          <a:prstGeom prst="ellipse">
-            <a:avLst/>
-          </a:prstGeom>
-          <a:solidFill>
-            <a:srgbClr val="2A78D6"/>
-          </a:solidFill>
-          <a:ln w="12700">
-            <a:solidFill>
-              <a:srgbClr val="FFFFFF"/>
-            </a:solidFill>
-            <a:prstDash val="solid"/>
-          </a:ln>
-        </p:spPr>
-      </p:sp>
-      <p:sp>
-        <p:nvSpPr>
-          <p:cNvPr id="7" name="Text 5"/>
-          <p:cNvSpPr txBox="1"/>
-          <p:nvPr/>
-        </p:nvSpPr>
-        <p:spPr>
-          <a:xfrm>
-            <a:off x="4663440" y="1097280"/>
-            <a:ext cx="365760" cy="365760"/>
-          </a:xfrm>
-          <a:prstGeom prst="rect">
-            <a:avLst/>
-          </a:prstGeom>
-          <a:noFill/>
-          <a:ln/>
-        </p:spPr>
-        <p:txBody>
-          <a:bodyPr wrap="square" lIns="0" tIns="0" rIns="0" bIns="0" rtlCol="0" anchor="ctr"/>
-          <a:lstStyle/>
-          <a:p>
-            <a:pPr algn="ctr" indent="0" marL="0">
-              <a:buNone/>
-            </a:pPr>
-            <a:r>
-              <a:rPr lang="en-US" sz="1300" b="1" dirty="0">
-                <a:solidFill>
-                  <a:srgbClr val="FFFFFF"/>
-                </a:solidFill>
-                <a:latin typeface="Cambria" pitchFamily="34" charset="0"/>
-                <a:ea typeface="Cambria" pitchFamily="34" charset="-122"/>
-                <a:cs typeface="Cambria" pitchFamily="34" charset="-120"/>
-              </a:rPr>
-              <a:t>2</a:t>
-            </a:r>
-            <a:endParaRPr lang="en-US" sz="1300" dirty="0"/>
-          </a:p>
-        </p:txBody>
-      </p:sp>
-      <p:sp>
-        <p:nvSpPr>
-          <p:cNvPr id="8" name="Text 6"/>
-          <p:cNvSpPr txBox="1"/>
-          <p:nvPr/>
-        </p:nvSpPr>
-        <p:spPr>
-          <a:xfrm>
-            <a:off x="5166360" y="1051560"/>
-            <a:ext cx="3566160" cy="1097280"/>
-          </a:xfrm>
-          <a:prstGeom prst="rect">
-            <a:avLst/>
-          </a:prstGeom>
-          <a:noFill/>
-          <a:ln/>
-        </p:spPr>
-        <p:txBody>
-          <a:bodyPr wrap="square" lIns="0" tIns="0" rIns="0" bIns="0" rtlCol="0" anchor="t"/>
-          <a:lstStyle/>
-          <a:p>
-            <a:pPr indent="0" marL="0">
-              <a:spcAft>
-                <a:spcPts val="200"/>
-              </a:spcAft>
-              <a:buNone/>
-            </a:pPr>
-            <a:r>
-              <a:rPr lang="en-US" sz="1150" b="1" dirty="0">
-                <a:solidFill>
-                  <a:srgbClr val="14213D"/>
-                </a:solidFill>
-                <a:latin typeface="Calibri" pitchFamily="34" charset="0"/>
-                <a:ea typeface="Calibri" pitchFamily="34" charset="-122"/>
-                <a:cs typeface="Calibri" pitchFamily="34" charset="-120"/>
-              </a:rPr>
-              <a:t>Fewer hand-offs per layer</a:t>
-            </a:r>
-            <a:endParaRPr lang="en-US" sz="1150" dirty="0"/>
-          </a:p>
-          <a:p>
-            <a:pPr indent="0" marL="0">
-              <a:spcAft>
-                <a:spcPts val="200"/>
-              </a:spcAft>
-              <a:buNone/>
-            </a:pPr>
-            <a:r>
-              <a:rPr lang="en-US" sz="1150" dirty="0">
-                <a:solidFill>
-                  <a:srgbClr val="1B1B1B"/>
-                </a:solidFill>
-                <a:latin typeface="Calibri" pitchFamily="34" charset="0"/>
-                <a:ea typeface="Calibri" pitchFamily="34" charset="-122"/>
-                <a:cs typeface="Calibri" pitchFamily="34" charset="-120"/>
-              </a:rPr>
-              <a:t>A single-barrier all-reduce, or one layer per cluster with resident (FP8) weights.</a:t>
-            </a:r>
-            <a:endParaRPr lang="en-US" sz="1150" dirty="0"/>
-          </a:p>
-        </p:txBody>
-      </p:sp>
-      <p:sp>
-        <p:nvSpPr>
-          <p:cNvPr id="9" name="Shape 7"/>
-          <p:cNvSpPr/>
-          <p:nvPr/>
-        </p:nvSpPr>
-        <p:spPr>
-          <a:xfrm>
-            <a:off x="457200" y="2286000"/>
-            <a:ext cx="365760" cy="365760"/>
-          </a:xfrm>
-          <a:prstGeom prst="ellipse">
-            <a:avLst/>
-          </a:prstGeom>
-          <a:solidFill>
-            <a:srgbClr val="2A78D6"/>
-          </a:solidFill>
-          <a:ln w="12700">
-            <a:solidFill>
-              <a:srgbClr val="FFFFFF"/>
-            </a:solidFill>
-            <a:prstDash val="solid"/>
-          </a:ln>
-        </p:spPr>
-      </p:sp>
-      <p:sp>
-        <p:nvSpPr>
-          <p:cNvPr id="10" name="Text 8"/>
-          <p:cNvSpPr txBox="1"/>
-          <p:nvPr/>
-        </p:nvSpPr>
-        <p:spPr>
-          <a:xfrm>
-            <a:off x="457200" y="2286000"/>
-            <a:ext cx="365760" cy="365760"/>
-          </a:xfrm>
-          <a:prstGeom prst="rect">
-            <a:avLst/>
-          </a:prstGeom>
-          <a:noFill/>
-          <a:ln/>
-        </p:spPr>
-        <p:txBody>
-          <a:bodyPr wrap="square" lIns="0" tIns="0" rIns="0" bIns="0" rtlCol="0" anchor="ctr"/>
-          <a:lstStyle/>
-          <a:p>
-            <a:pPr algn="ctr" indent="0" marL="0">
-              <a:buNone/>
-            </a:pPr>
-            <a:r>
-              <a:rPr lang="en-US" sz="1300" b="1" dirty="0">
-                <a:solidFill>
-                  <a:srgbClr val="FFFFFF"/>
-                </a:solidFill>
-                <a:latin typeface="Cambria" pitchFamily="34" charset="0"/>
-                <a:ea typeface="Cambria" pitchFamily="34" charset="-122"/>
-                <a:cs typeface="Cambria" pitchFamily="34" charset="-120"/>
-              </a:rPr>
-              <a:t>3</a:t>
-            </a:r>
-            <a:endParaRPr lang="en-US" sz="1300" dirty="0"/>
-          </a:p>
-        </p:txBody>
-      </p:sp>
-      <p:sp>
-        <p:nvSpPr>
-          <p:cNvPr id="11" name="Text 9"/>
-          <p:cNvSpPr txBox="1"/>
-          <p:nvPr/>
-        </p:nvSpPr>
-        <p:spPr>
-          <a:xfrm>
-            <a:off x="960120" y="2240280"/>
-            <a:ext cx="3566160" cy="1097280"/>
-          </a:xfrm>
-          <a:prstGeom prst="rect">
-            <a:avLst/>
-          </a:prstGeom>
-          <a:noFill/>
-          <a:ln/>
-        </p:spPr>
-        <p:txBody>
-          <a:bodyPr wrap="square" lIns="0" tIns="0" rIns="0" bIns="0" rtlCol="0" anchor="t"/>
-          <a:lstStyle/>
-          <a:p>
-            <a:pPr indent="0" marL="0">
-              <a:spcAft>
-                <a:spcPts val="200"/>
-              </a:spcAft>
-              <a:buNone/>
-            </a:pPr>
-            <a:r>
-              <a:rPr lang="en-US" sz="1150" b="1" dirty="0">
-                <a:solidFill>
-                  <a:srgbClr val="14213D"/>
-                </a:solidFill>
-                <a:latin typeface="Calibri" pitchFamily="34" charset="0"/>
-                <a:ea typeface="Calibri" pitchFamily="34" charset="-122"/>
-                <a:cs typeface="Calibri" pitchFamily="34" charset="-120"/>
-              </a:rPr>
-              <a:t>Compose with model-level speed-ups</a:t>
-            </a:r>
-            <a:endParaRPr lang="en-US" sz="1150" dirty="0"/>
-          </a:p>
-          <a:p>
-            <a:pPr indent="0" marL="0">
-              <a:spcAft>
-                <a:spcPts val="200"/>
-              </a:spcAft>
-              <a:buNone/>
-            </a:pPr>
-            <a:r>
-              <a:rPr lang="en-US" sz="1150" dirty="0">
-                <a:solidFill>
-                  <a:srgbClr val="1B1B1B"/>
-                </a:solidFill>
-                <a:latin typeface="Calibri" pitchFamily="34" charset="0"/>
-                <a:ea typeface="Calibri" pitchFamily="34" charset="-122"/>
-                <a:cs typeface="Calibri" pitchFamily="34" charset="-120"/>
-              </a:rPr>
-              <a:t>Fast-LeWM's parallel prefix prediction would cut the chain from 5 passes per iteration to 1.</a:t>
-            </a:r>
-            <a:endParaRPr lang="en-US" sz="1150" dirty="0"/>
-          </a:p>
-        </p:txBody>
-      </p:sp>
-      <p:sp>
-        <p:nvSpPr>
-          <p:cNvPr id="12" name="Shape 10"/>
-          <p:cNvSpPr/>
-          <p:nvPr/>
-        </p:nvSpPr>
-        <p:spPr>
-          <a:xfrm>
-            <a:off x="4663440" y="2286000"/>
-            <a:ext cx="365760" cy="365760"/>
-          </a:xfrm>
-          <a:prstGeom prst="ellipse">
-            <a:avLst/>
-          </a:prstGeom>
-          <a:solidFill>
-            <a:srgbClr val="2A78D6"/>
-          </a:solidFill>
-          <a:ln w="12700">
-            <a:solidFill>
-              <a:srgbClr val="FFFFFF"/>
-            </a:solidFill>
-            <a:prstDash val="solid"/>
-          </a:ln>
-        </p:spPr>
-      </p:sp>
-      <p:sp>
-        <p:nvSpPr>
-          <p:cNvPr id="13" name="Text 11"/>
-          <p:cNvSpPr txBox="1"/>
-          <p:nvPr/>
-        </p:nvSpPr>
-        <p:spPr>
-          <a:xfrm>
-            <a:off x="4663440" y="2286000"/>
-            <a:ext cx="365760" cy="365760"/>
-          </a:xfrm>
-          <a:prstGeom prst="rect">
-            <a:avLst/>
-          </a:prstGeom>
-          <a:noFill/>
-          <a:ln/>
-        </p:spPr>
-        <p:txBody>
-          <a:bodyPr wrap="square" lIns="0" tIns="0" rIns="0" bIns="0" rtlCol="0" anchor="ctr"/>
-          <a:lstStyle/>
-          <a:p>
-            <a:pPr algn="ctr" indent="0" marL="0">
-              <a:buNone/>
-            </a:pPr>
-            <a:r>
-              <a:rPr lang="en-US" sz="1300" b="1" dirty="0">
-                <a:solidFill>
-                  <a:srgbClr val="FFFFFF"/>
-                </a:solidFill>
-                <a:latin typeface="Cambria" pitchFamily="34" charset="0"/>
-                <a:ea typeface="Cambria" pitchFamily="34" charset="-122"/>
-                <a:cs typeface="Cambria" pitchFamily="34" charset="-120"/>
-              </a:rPr>
-              <a:t>4</a:t>
-            </a:r>
-            <a:endParaRPr lang="en-US" sz="1300" dirty="0"/>
-          </a:p>
-        </p:txBody>
-      </p:sp>
-      <p:sp>
-        <p:nvSpPr>
-          <p:cNvPr id="14" name="Text 12"/>
-          <p:cNvSpPr txBox="1"/>
-          <p:nvPr/>
-        </p:nvSpPr>
-        <p:spPr>
-          <a:xfrm>
-            <a:off x="5166360" y="2240280"/>
-            <a:ext cx="3566160" cy="1097280"/>
-          </a:xfrm>
-          <a:prstGeom prst="rect">
-            <a:avLst/>
-          </a:prstGeom>
-          <a:noFill/>
-          <a:ln/>
-        </p:spPr>
-        <p:txBody>
-          <a:bodyPr wrap="square" lIns="0" tIns="0" rIns="0" bIns="0" rtlCol="0" anchor="t"/>
-          <a:lstStyle/>
-          <a:p>
-            <a:pPr indent="0" marL="0">
-              <a:spcAft>
-                <a:spcPts val="200"/>
-              </a:spcAft>
-              <a:buNone/>
-            </a:pPr>
-            <a:r>
-              <a:rPr lang="en-US" sz="1150" b="1" dirty="0">
-                <a:solidFill>
-                  <a:srgbClr val="14213D"/>
-                </a:solidFill>
-                <a:latin typeface="Calibri" pitchFamily="34" charset="0"/>
-                <a:ea typeface="Calibri" pitchFamily="34" charset="-122"/>
-                <a:cs typeface="Calibri" pitchFamily="34" charset="-120"/>
-              </a:rPr>
-              <a:t>Other world models, other GPUs</a:t>
-            </a:r>
-            <a:endParaRPr lang="en-US" sz="1150" dirty="0"/>
-          </a:p>
-          <a:p>
-            <a:pPr indent="0" marL="0">
-              <a:spcAft>
-                <a:spcPts val="200"/>
-              </a:spcAft>
-              <a:buNone/>
-            </a:pPr>
-            <a:r>
-              <a:rPr lang="en-US" sz="1150" dirty="0">
-                <a:solidFill>
-                  <a:srgbClr val="1B1B1B"/>
-                </a:solidFill>
-                <a:latin typeface="Calibri" pitchFamily="34" charset="0"/>
-                <a:ea typeface="Calibri" pitchFamily="34" charset="-122"/>
-                <a:cs typeface="Calibri" pitchFamily="34" charset="-120"/>
-              </a:rPr>
-              <a:t>DINO-WM and V-JEPA 2-AC push back towards throughput; Blackwell and Jetson Thor change the primitives; automate with megakernel compilers.</a:t>
-            </a:r>
-            <a:endParaRPr lang="en-US" sz="1150" dirty="0"/>
-          </a:p>
-        </p:txBody>
-      </p:sp>
-      <p:sp>
-        <p:nvSpPr>
-          <p:cNvPr id="15" name="Shape 13"/>
-          <p:cNvSpPr/>
-          <p:nvPr/>
-        </p:nvSpPr>
-        <p:spPr>
-          <a:xfrm>
-            <a:off x="457200" y="3474720"/>
-            <a:ext cx="365760" cy="365760"/>
-          </a:xfrm>
-          <a:prstGeom prst="ellipse">
-            <a:avLst/>
-          </a:prstGeom>
-          <a:solidFill>
-            <a:srgbClr val="2A78D6"/>
-          </a:solidFill>
-          <a:ln w="12700">
-            <a:solidFill>
-              <a:srgbClr val="FFFFFF"/>
-            </a:solidFill>
-            <a:prstDash val="solid"/>
-          </a:ln>
-        </p:spPr>
-      </p:sp>
-      <p:sp>
-        <p:nvSpPr>
-          <p:cNvPr id="16" name="Text 14"/>
-          <p:cNvSpPr txBox="1"/>
-          <p:nvPr/>
-        </p:nvSpPr>
-        <p:spPr>
-          <a:xfrm>
-            <a:off x="457200" y="3474720"/>
-            <a:ext cx="365760" cy="365760"/>
-          </a:xfrm>
-          <a:prstGeom prst="rect">
-            <a:avLst/>
-          </a:prstGeom>
-          <a:noFill/>
-          <a:ln/>
-        </p:spPr>
-        <p:txBody>
-          <a:bodyPr wrap="square" lIns="0" tIns="0" rIns="0" bIns="0" rtlCol="0" anchor="ctr"/>
-          <a:lstStyle/>
-          <a:p>
-            <a:pPr algn="ctr" indent="0" marL="0">
-              <a:buNone/>
-            </a:pPr>
-            <a:r>
-              <a:rPr lang="en-US" sz="1300" b="1" dirty="0">
-                <a:solidFill>
-                  <a:srgbClr val="FFFFFF"/>
-                </a:solidFill>
-                <a:latin typeface="Cambria" pitchFamily="34" charset="0"/>
-                <a:ea typeface="Cambria" pitchFamily="34" charset="-122"/>
-                <a:cs typeface="Cambria" pitchFamily="34" charset="-120"/>
-              </a:rPr>
-              <a:t>5</a:t>
-            </a:r>
-            <a:endParaRPr lang="en-US" sz="1300" dirty="0"/>
-          </a:p>
-        </p:txBody>
-      </p:sp>
-      <p:sp>
-        <p:nvSpPr>
-          <p:cNvPr id="17" name="Text 15"/>
-          <p:cNvSpPr txBox="1"/>
-          <p:nvPr/>
-        </p:nvSpPr>
-        <p:spPr>
-          <a:xfrm>
-            <a:off x="960120" y="3429000"/>
-            <a:ext cx="3566160" cy="1097280"/>
-          </a:xfrm>
-          <a:prstGeom prst="rect">
-            <a:avLst/>
-          </a:prstGeom>
-          <a:noFill/>
-          <a:ln/>
-        </p:spPr>
-        <p:txBody>
-          <a:bodyPr wrap="square" lIns="0" tIns="0" rIns="0" bIns="0" rtlCol="0" anchor="t"/>
-          <a:lstStyle/>
-          <a:p>
-            <a:pPr indent="0" marL="0">
-              <a:spcAft>
-                <a:spcPts val="200"/>
-              </a:spcAft>
-              <a:buNone/>
-            </a:pPr>
-            <a:r>
-              <a:rPr lang="en-US" sz="1150" b="1" dirty="0">
-                <a:solidFill>
-                  <a:srgbClr val="14213D"/>
-                </a:solidFill>
-                <a:latin typeface="Calibri" pitchFamily="34" charset="0"/>
-                <a:ea typeface="Calibri" pitchFamily="34" charset="-122"/>
-                <a:cs typeface="Calibri" pitchFamily="34" charset="-120"/>
-              </a:rPr>
-              <a:t>Evaluate at deployment resolution</a:t>
-            </a:r>
-            <a:endParaRPr lang="en-US" sz="1150" dirty="0"/>
-          </a:p>
-          <a:p>
-            <a:pPr indent="0" marL="0">
-              <a:spcAft>
-                <a:spcPts val="200"/>
-              </a:spcAft>
-              <a:buNone/>
-            </a:pPr>
-            <a:r>
-              <a:rPr lang="en-US" sz="1150" dirty="0">
-                <a:solidFill>
-                  <a:srgbClr val="1B1B1B"/>
-                </a:solidFill>
-                <a:latin typeface="Calibri" pitchFamily="34" charset="0"/>
-                <a:ea typeface="Calibri" pitchFamily="34" charset="-122"/>
-                <a:cs typeface="Calibri" pitchFamily="34" charset="-120"/>
-              </a:rPr>
-              <a:t>About 2,400 paired episodes for 2 points, now minutes of planning; then a real robot.</a:t>
-            </a:r>
-            <a:endParaRPr lang="en-US" sz="1150" dirty="0"/>
-          </a:p>
-        </p:txBody>
-      </p:sp>
-      <p:sp>
-        <p:nvSpPr>
-          <p:cNvPr id="18" name="Text 16"/>
-          <p:cNvSpPr txBox="1"/>
-          <p:nvPr/>
-        </p:nvSpPr>
-        <p:spPr>
-          <a:xfrm>
-            <a:off x="4663440" y="3520440"/>
-            <a:ext cx="4023360" cy="1097280"/>
-          </a:xfrm>
-          <a:prstGeom prst="rect">
-            <a:avLst/>
-          </a:prstGeom>
-          <a:noFill/>
-          <a:ln/>
-        </p:spPr>
-        <p:txBody>
-          <a:bodyPr wrap="square" lIns="0" tIns="0" rIns="0" bIns="0" rtlCol="0" anchor="t"/>
-          <a:lstStyle/>
-          <a:p>
-            <a:pPr indent="0" marL="0">
-              <a:buNone/>
-            </a:pPr>
-            <a:r>
-              <a:rPr lang="en-US" sz="1200" i="1" dirty="0">
-                <a:solidFill>
-                  <a:srgbClr val="5A5A5A"/>
-                </a:solidFill>
-                <a:latin typeface="Calibri" pitchFamily="34" charset="0"/>
-                <a:ea typeface="Calibri" pitchFamily="34" charset="-122"/>
-                <a:cs typeface="Calibri" pitchFamily="34" charset="-120"/>
-              </a:rPr>
-              <a:t>Together: world-model planning treated as a systems problem, with the evaluation methodology to show that speed did not cost behaviour.</a:t>
-            </a:r>
-            <a:endParaRPr lang="en-US" sz="1200" dirty="0"/>
-          </a:p>
-        </p:txBody>
-      </p:sp>
-      <p:sp>
-        <p:nvSpPr>
-          <p:cNvPr id="20" name="Text 17"/>
-          <p:cNvSpPr txBox="1"/>
-          <p:nvPr/>
-        </p:nvSpPr>
-        <p:spPr>
-          <a:xfrm>
-            <a:off x="8229600" y="4796028"/>
-            <a:ext cx="457200" cy="228600"/>
-          </a:xfrm>
-          <a:prstGeom prst="rect">
-            <a:avLst/>
-          </a:prstGeom>
-          <a:noFill/>
-          <a:ln/>
-        </p:spPr>
-        <p:txBody>
-          <a:bodyPr wrap="square" lIns="0" tIns="0" rIns="0" bIns="0" rtlCol="0" anchor="ctr"/>
-          <a:lstStyle/>
-          <a:p>
-            <a:pPr algn="r" indent="0" marL="0">
-              <a:buNone/>
-            </a:pPr>
-            <a:r>
-              <a:rPr lang="en-US" sz="900" dirty="0">
-                <a:solidFill>
-                  <a:srgbClr val="5A5A5A"/>
-                </a:solidFill>
-                <a:latin typeface="Calibri" pitchFamily="34" charset="0"/>
-                <a:ea typeface="Calibri" pitchFamily="34" charset="-122"/>
-                <a:cs typeface="Calibri" pitchFamily="34" charset="-120"/>
-              </a:rPr>
-              <a:t>16</a:t>
-            </a:r>
-            <a:endParaRPr lang="en-US" sz="900" dirty="0"/>
-          </a:p>
-        </p:txBody>
-      </p:sp>
-    </p:spTree>
-  </p:cSld>
-  <p:clrMapOvr>
-    <a:masterClrMapping/>
-  </p:clrMapOvr>
-</p:sld>
-</file>
-
-<file path=ppt/slides/slide17.xml><?xml version="1.0" encoding="utf-8"?>
-<p:sld xmlns:a="http://schemas.openxmlformats.org/drawingml/2006/main" xmlns:r="http://schemas.openxmlformats.org/officeDocument/2006/relationships" xmlns:p="http://schemas.openxmlformats.org/presentationml/2006/main">
-  <p:cSld name="Slide 17">
     <p:bg>
       <p:bgPr>
         <a:solidFill>
@@ -6408,7 +4282,7 @@
                 <a:ea typeface="Calibri" pitchFamily="34" charset="-122"/>
                 <a:cs typeface="Calibri" pitchFamily="34" charset="-120"/>
               </a:rPr>
-              <a:t>A JEPA planner at batch 1 is bound by the latency of a long chain of tiny steps, not by FLOPs or bandwidth.</a:t>
+              <a:t>Profile before optimising: the world-model planner's time was overhead, not arithmetic.</a:t>
             </a:r>
             <a:endParaRPr lang="en-US" sz="1700" dirty="0"/>
           </a:p>
@@ -6429,7 +4303,7 @@
                 <a:ea typeface="Calibri" pitchFamily="34" charset="-122"/>
                 <a:cs typeface="Calibri" pitchFamily="34" charset="-120"/>
               </a:rPr>
-              <a:t>Sample-efficient planning (iCEM) only pays once execution stops being launch-bound: 0.92x in eager PyTorch, 1.38x in a kernel.</a:t>
+              <a:t>A one-line fitted model of latency against workload told which fix would pay, and why the smarter search had looked useless.</a:t>
             </a:r>
             <a:endParaRPr lang="en-US" sz="1700" dirty="0"/>
           </a:p>
@@ -6447,7 +4321,7 @@
                 <a:ea typeface="Calibri" pitchFamily="34" charset="-122"/>
                 <a:cs typeface="Calibri" pitchFamily="34" charset="-120"/>
               </a:rPr>
-              <a:t>One persistent kernel per plan: 622 ms -&gt; 46.5 ms on the same H100, same model, same planner, same task success.</a:t>
+              <a:t>One GPU program per plan: 622 ms to 46.5 ms on the same H100, same model, same task success.</a:t>
             </a:r>
             <a:endParaRPr lang="en-US" sz="1700" dirty="0"/>
           </a:p>
@@ -6486,7 +4360,7 @@
                 <a:ea typeface="Calibri" pitchFamily="34" charset="-122"/>
                 <a:cs typeface="Calibri" pitchFamily="34" charset="-120"/>
               </a:rPr>
-              <a:t>Paper, kernel, per-call latency records and per-episode outcomes: docs/paper and megakernel/ in the project repository.</a:t>
+              <a:t>Report, datasets and solution program: docs/paper and solution_pack/ in the project repository.</a:t>
             </a:r>
             <a:endParaRPr lang="en-US" sz="1200" dirty="0"/>
           </a:p>
@@ -6593,7 +4467,7 @@
                 <a:ea typeface="Calibri" pitchFamily="34" charset="-122"/>
                 <a:cs typeface="Calibri" pitchFamily="34" charset="-120"/>
               </a:rPr>
-              <a:t>JEPA world models plan by searching over action sequences in latent space; LeWM is the smallest of them, and its released planner still takes 622 ms per plan for one robot on an H100.</a:t>
+              <a:t>LeWM is a small AI world model that lets a robot plan by imagining thousands of possible futures. One plan still takes 622 ms on an H100 GPU.</a:t>
             </a:r>
             <a:endParaRPr lang="en-US" sz="1400" dirty="0"/>
           </a:p>
@@ -6614,7 +4488,7 @@
                 <a:ea typeface="Calibri" pitchFamily="34" charset="-122"/>
                 <a:cs typeface="Calibri" pitchFamily="34" charset="-120"/>
               </a:rPr>
-              <a:t>Question: how much of that latency can be removed without changing the model, the planner or its task success, and which kinds of change account for it?</a:t>
+              <a:t>Question: where does that time go, and how much can be removed without retraining the model or making the robot less successful?</a:t>
             </a:r>
             <a:endParaRPr lang="en-US" sz="1400" dirty="0"/>
           </a:p>
@@ -6635,7 +4509,7 @@
                 <a:ea typeface="Calibri" pitchFamily="34" charset="-122"/>
                 <a:cs typeface="Calibri" pitchFamily="34" charset="-120"/>
               </a:rPr>
-              <a:t>Method: a seven-rung ladder on one H100, one change per rung, each measured end to end at batch 1 and in closed loop on the same 300 Push-T episodes.</a:t>
+              <a:t>Method: an analytics pipeline over 11,942 timed calls and 900 episode outcomes: profile, model the bottleneck, design, evaluate with paired statistics.</a:t>
             </a:r>
             <a:endParaRPr lang="en-US" sz="1400" dirty="0"/>
           </a:p>
@@ -6656,7 +4530,7 @@
                 <a:ea typeface="Calibri" pitchFamily="34" charset="-122"/>
                 <a:cs typeface="Calibri" pitchFamily="34" charset="-120"/>
               </a:rPr>
-              <a:t>Answer: exact caching gives 1.65x; iCEM is worth nothing in eager PyTorch and 1.38x in a megakernel; one persistent kernel per plan gives 46.5 ms, with success unchanged.</a:t>
+              <a:t>Answer: the time was overhead, not computation. One fused GPU program per plan takes 46.5 ms, with task success unchanged.</a:t>
             </a:r>
             <a:endParaRPr lang="en-US" sz="1400" dirty="0"/>
           </a:p>
@@ -6761,7 +4635,7 @@
                 <a:ea typeface="Calibri" pitchFamily="34" charset="-122"/>
                 <a:cs typeface="Calibri" pitchFamily="34" charset="-120"/>
               </a:rPr>
-              <a:t>reference LeWM,</a:t>
+              <a:t>reference planner</a:t>
             </a:r>
             <a:endParaRPr lang="en-US" sz="1000" dirty="0"/>
           </a:p>
@@ -6778,7 +4652,7 @@
                 <a:ea typeface="Calibri" pitchFamily="34" charset="-122"/>
                 <a:cs typeface="Calibri" pitchFamily="34" charset="-120"/>
               </a:rPr>
-              <a:t>CEM, FP32</a:t>
+              <a:t>(one robot, H100)</a:t>
             </a:r>
             <a:endParaRPr lang="en-US" sz="1000" dirty="0"/>
           </a:p>
@@ -6838,13 +4712,13 @@
             <a:r>
               <a:rPr lang="en-US" sz="2400" b="1" dirty="0">
                 <a:solidFill>
-                  <a:srgbClr val="EB6834"/>
+                  <a:srgbClr val="2A78D6"/>
                 </a:solidFill>
                 <a:latin typeface="Cambria" pitchFamily="34" charset="0"/>
                 <a:ea typeface="Cambria" pitchFamily="34" charset="-122"/>
                 <a:cs typeface="Cambria" pitchFamily="34" charset="-120"/>
               </a:rPr>
-              <a:t>182 ms</a:t>
+              <a:t>46.5 ms</a:t>
             </a:r>
             <a:endParaRPr lang="en-US" sz="2400" dirty="0"/>
           </a:p>
@@ -6883,7 +4757,7 @@
                 <a:ea typeface="Calibri" pitchFamily="34" charset="-122"/>
                 <a:cs typeface="Calibri" pitchFamily="34" charset="-120"/>
               </a:rPr>
-              <a:t>best PyTorch path</a:t>
+              <a:t>LeWM-MK,</a:t>
             </a:r>
             <a:endParaRPr lang="en-US" sz="1000" dirty="0"/>
           </a:p>
@@ -6900,7 +4774,7 @@
                 <a:ea typeface="Calibri" pitchFamily="34" charset="-122"/>
                 <a:cs typeface="Calibri" pitchFamily="34" charset="-120"/>
               </a:rPr>
-              <a:t>(LeWM-Flash)</a:t>
+              <a:t>one GPU launch</a:t>
             </a:r>
             <a:endParaRPr lang="en-US" sz="1000" dirty="0"/>
           </a:p>
@@ -6958,7 +4832,7 @@
               <a:buNone/>
             </a:pPr>
             <a:r>
-              <a:rPr lang="en-US" sz="2400" b="1" dirty="0">
+              <a:rPr lang="en-US" sz="2600" b="1" dirty="0">
                 <a:solidFill>
                   <a:srgbClr val="2A78D6"/>
                 </a:solidFill>
@@ -6966,9 +4840,9 @@
                 <a:ea typeface="Cambria" pitchFamily="34" charset="-122"/>
                 <a:cs typeface="Cambria" pitchFamily="34" charset="-120"/>
               </a:rPr>
-              <a:t>46.5 ms</a:t>
-            </a:r>
-            <a:endParaRPr lang="en-US" sz="2400" dirty="0"/>
+              <a:t>13.4×</a:t>
+            </a:r>
+            <a:endParaRPr lang="en-US" sz="2600" dirty="0"/>
           </a:p>
         </p:txBody>
       </p:sp>
@@ -7005,7 +4879,7 @@
                 <a:ea typeface="Calibri" pitchFamily="34" charset="-122"/>
                 <a:cs typeface="Calibri" pitchFamily="34" charset="-120"/>
               </a:rPr>
-              <a:t>one megakernel</a:t>
+              <a:t>faster than the</a:t>
             </a:r>
             <a:endParaRPr lang="en-US" sz="1000" dirty="0"/>
           </a:p>
@@ -7022,7 +4896,7 @@
                 <a:ea typeface="Calibri" pitchFamily="34" charset="-122"/>
                 <a:cs typeface="Calibri" pitchFamily="34" charset="-120"/>
               </a:rPr>
-              <a:t>launch per plan</a:t>
+              <a:t>reference</a:t>
             </a:r>
             <a:endParaRPr lang="en-US" sz="1000" dirty="0"/>
           </a:p>
@@ -7183,7 +5057,7 @@
                 <a:ea typeface="Calibri" pitchFamily="34" charset="-122"/>
                 <a:cs typeface="Calibri" pitchFamily="34" charset="-120"/>
               </a:rPr>
-              <a:t>One H100, batch 1, end-to-end plan latency (median); 300 paired episodes</a:t>
+              <a:t>Medians of end-to-end planning latency; 95% CI of the speed-up 13.0–13.5×</a:t>
             </a:r>
             <a:endParaRPr lang="en-US" sz="1000" dirty="0"/>
           </a:p>
@@ -7286,7 +5160,7 @@
                 <a:ea typeface="Cambria" pitchFamily="34" charset="-122"/>
                 <a:cs typeface="Cambria" pitchFamily="34" charset="-120"/>
               </a:rPr>
-              <a:t>Why this topic: a latency problem</a:t>
+              <a:t>Why it matters: robots plan against a clock</a:t>
             </a:r>
             <a:endParaRPr lang="en-US" sz="2800" dirty="0"/>
           </a:p>
@@ -7329,7 +5203,7 @@
                 <a:ea typeface="Calibri" pitchFamily="34" charset="-122"/>
                 <a:cs typeface="Calibri" pitchFamily="34" charset="-120"/>
               </a:rPr>
-              <a:t>A controller replans every few steps and must answer within the period it plans for: a 10 Hz loop has 100 ms for sensing, planning and actuation together.</a:t>
+              <a:t>A world model predicts what happens next; a robot plans by imagining many action sequences and executing the best.</a:t>
             </a:r>
             <a:endParaRPr lang="en-US" sz="1400" dirty="0"/>
           </a:p>
@@ -7350,7 +5224,7 @@
                 <a:ea typeface="Calibri" pitchFamily="34" charset="-122"/>
                 <a:cs typeface="Calibri" pitchFamily="34" charset="-120"/>
               </a:rPr>
-              <a:t>LeWM's model is tiny: a cost call for 300 candidates is under 0.1 ms of tensor-core arithmetic, and all its weights fit in the H100's L2 cache.</a:t>
+              <a:t>A controller must finish each plan within its control period: 100 ms at 10 Hz, 50 ms at 20 Hz, for sensing, planning and acting together.</a:t>
             </a:r>
             <a:endParaRPr lang="en-US" sz="1400" dirty="0"/>
           </a:p>
@@ -7371,7 +5245,7 @@
                 <a:ea typeface="Calibri" pitchFamily="34" charset="-122"/>
                 <a:cs typeface="Calibri" pitchFamily="34" charset="-120"/>
               </a:rPr>
-              <a:t>Its plan is slow for other reasons: re-encoding inside every cost call, a host round trip per optimiser iteration, every operator launched from Python, and a chain of 900 dependent layer evaluations per plan.</a:t>
+              <a:t>LeWM made world-model planning cheap by shrinking the model to 15M parameters. Its released planner still takes 622 ms per plan.</a:t>
             </a:r>
             <a:endParaRPr lang="en-US" sz="1400" dirty="0"/>
           </a:p>
@@ -7392,7 +5266,7 @@
                 <a:ea typeface="Calibri" pitchFamily="34" charset="-122"/>
                 <a:cs typeface="Calibri" pitchFamily="34" charset="-120"/>
               </a:rPr>
-              <a:t>Neither FLOPs nor memory bandwidth binds. The latency of each link of the chain does.</a:t>
+              <a:t>The model is tiny: its arithmetic per plan should take milliseconds. Something else is using the time.</a:t>
             </a:r>
             <a:endParaRPr lang="en-US" sz="1400" dirty="0"/>
           </a:p>
@@ -7580,7 +5454,7 @@
                 <a:ea typeface="Cambria" pitchFamily="34" charset="-122"/>
                 <a:cs typeface="Cambria" pitchFamily="34" charset="-120"/>
               </a:rPr>
-              <a:t>2,820</a:t>
+              <a:t>9,000</a:t>
             </a:r>
             <a:endParaRPr lang="en-US" sz="3000" dirty="0"/>
           </a:p>
@@ -7619,7 +5493,7 @@
                 <a:ea typeface="Calibri" pitchFamily="34" charset="-122"/>
                 <a:cs typeface="Calibri" pitchFamily="34" charset="-120"/>
               </a:rPr>
-              <a:t>rollouts per plan</a:t>
+              <a:t>imagined futures</a:t>
             </a:r>
             <a:endParaRPr lang="en-US" sz="1000" dirty="0"/>
           </a:p>
@@ -7636,7 +5510,7 @@
                 <a:ea typeface="Calibri" pitchFamily="34" charset="-122"/>
                 <a:cs typeface="Calibri" pitchFamily="34" charset="-120"/>
               </a:rPr>
-              <a:t>(iCEM; CEM: 9,000)</a:t>
+              <a:t>per reference plan</a:t>
             </a:r>
             <a:endParaRPr lang="en-US" sz="1000" dirty="0"/>
           </a:p>
@@ -7816,7 +5690,7 @@
               <a:buNone/>
             </a:pPr>
             <a:r>
-              <a:rPr lang="en-US" sz="3000" b="1" dirty="0">
+              <a:rPr lang="en-US" sz="2400" b="1" dirty="0">
                 <a:solidFill>
                   <a:srgbClr val="14213D"/>
                 </a:solidFill>
@@ -7824,9 +5698,9 @@
                 <a:ea typeface="Cambria" pitchFamily="34" charset="-122"/>
                 <a:cs typeface="Cambria" pitchFamily="34" charset="-120"/>
               </a:rPr>
-              <a:t>20 ms</a:t>
-            </a:r>
-            <a:endParaRPr lang="en-US" sz="3000" dirty="0"/>
+              <a:t>16–53 s</a:t>
+            </a:r>
+            <a:endParaRPr lang="en-US" sz="2400" dirty="0"/>
           </a:p>
         </p:txBody>
       </p:sp>
@@ -7863,7 +5737,7 @@
                 <a:ea typeface="Calibri" pitchFamily="34" charset="-122"/>
                 <a:cs typeface="Calibri" pitchFamily="34" charset="-120"/>
               </a:rPr>
-              <a:t>one eager cost call,</a:t>
+              <a:t>per plan for larger</a:t>
             </a:r>
             <a:endParaRPr lang="en-US" sz="1000" dirty="0"/>
           </a:p>
@@ -7880,7 +5754,7 @@
                 <a:ea typeface="Calibri" pitchFamily="34" charset="-122"/>
                 <a:cs typeface="Calibri" pitchFamily="34" charset="-120"/>
               </a:rPr>
-              <a:t>at 60 or 300 candidates</a:t>
+              <a:t>world models</a:t>
             </a:r>
             <a:endParaRPr lang="en-US" sz="1000" dirty="0"/>
           </a:p>
@@ -7888,46 +5762,7 @@
       </p:sp>
       <p:sp>
         <p:nvSpPr>
-          <p:cNvPr id="16" name="Text 14"/>
-          <p:cNvSpPr txBox="1"/>
-          <p:nvPr/>
-        </p:nvSpPr>
-        <p:spPr>
-          <a:xfrm>
-            <a:off x="5760720" y="3474720"/>
-            <a:ext cx="2971800" cy="822960"/>
-          </a:xfrm>
-          <a:prstGeom prst="rect">
-            <a:avLst/>
-          </a:prstGeom>
-          <a:noFill/>
-          <a:ln/>
-        </p:spPr>
-        <p:txBody>
-          <a:bodyPr wrap="square" lIns="0" tIns="0" rIns="0" bIns="0" rtlCol="0" anchor="ctr"/>
-          <a:lstStyle/>
-          <a:p>
-            <a:pPr indent="0" marL="0">
-              <a:buNone/>
-            </a:pPr>
-            <a:r>
-              <a:rPr lang="en-US" sz="1100" i="1" dirty="0">
-                <a:solidFill>
-                  <a:srgbClr val="5A5A5A"/>
-                </a:solidFill>
-                <a:latin typeface="Calibri" pitchFamily="34" charset="0"/>
-                <a:ea typeface="Calibri" pitchFamily="34" charset="-122"/>
-                <a:cs typeface="Calibri" pitchFamily="34" charset="-120"/>
-              </a:rPr>
-              <a:t>The released planner is 30 iterations x 5 predictor passes x 6 layers, each link a handful of small kernels. Batch 1 is what a robot runs.</a:t>
-            </a:r>
-            <a:endParaRPr lang="en-US" sz="1100" dirty="0"/>
-          </a:p>
-        </p:txBody>
-      </p:sp>
-      <p:sp>
-        <p:nvSpPr>
-          <p:cNvPr id="18" name="Text 15"/>
+          <p:cNvPr id="17" name="Text 14"/>
           <p:cNvSpPr txBox="1"/>
           <p:nvPr/>
         </p:nvSpPr>
@@ -8022,7 +5857,7 @@
                 <a:ea typeface="Cambria" pitchFamily="34" charset="-122"/>
                 <a:cs typeface="Cambria" pitchFamily="34" charset="-120"/>
               </a:rPr>
-              <a:t>How I got here (reflection)</a:t>
+              <a:t>Aim and objectives</a:t>
             </a:r>
             <a:endParaRPr lang="en-US" sz="2800" dirty="0"/>
           </a:p>
@@ -8036,18 +5871,20 @@
         </p:nvSpPr>
         <p:spPr>
           <a:xfrm>
-            <a:off x="457200" y="1097280"/>
-            <a:ext cx="384048" cy="384048"/>
-          </a:xfrm>
-          <a:prstGeom prst="ellipse">
-            <a:avLst/>
+            <a:off x="457200" y="1051560"/>
+            <a:ext cx="822960" cy="594360"/>
+          </a:xfrm>
+          <a:prstGeom prst="roundRect">
+            <a:avLst>
+              <a:gd name="adj" fmla="val 12308"/>
+            </a:avLst>
           </a:prstGeom>
           <a:solidFill>
             <a:srgbClr val="14213D"/>
           </a:solidFill>
           <a:ln w="12700">
             <a:solidFill>
-              <a:srgbClr val="FFFFFF"/>
+              <a:srgbClr val="14213D"/>
             </a:solidFill>
             <a:prstDash val="solid"/>
           </a:ln>
@@ -8061,8 +5898,8 @@
         </p:nvSpPr>
         <p:spPr>
           <a:xfrm>
-            <a:off x="457200" y="1097280"/>
-            <a:ext cx="384048" cy="384048"/>
+            <a:off x="457200" y="1051560"/>
+            <a:ext cx="822960" cy="594360"/>
           </a:xfrm>
           <a:prstGeom prst="rect">
             <a:avLst/>
@@ -8078,7 +5915,7 @@
               <a:buNone/>
             </a:pPr>
             <a:r>
-              <a:rPr lang="en-US" sz="1400" b="1" dirty="0">
+              <a:rPr lang="en-US" sz="1600" b="1" dirty="0">
                 <a:solidFill>
                   <a:srgbClr val="FFFFFF"/>
                 </a:solidFill>
@@ -8086,9 +5923,9 @@
                 <a:ea typeface="Cambria" pitchFamily="34" charset="-122"/>
                 <a:cs typeface="Cambria" pitchFamily="34" charset="-120"/>
               </a:rPr>
-              <a:t>1</a:t>
-            </a:r>
-            <a:endParaRPr lang="en-US" sz="1400" dirty="0"/>
+              <a:t>O1</a:t>
+            </a:r>
+            <a:endParaRPr lang="en-US" sz="1600" dirty="0"/>
           </a:p>
         </p:txBody>
       </p:sp>
@@ -8100,47 +5937,24 @@
         </p:nvSpPr>
         <p:spPr>
           <a:xfrm>
-            <a:off x="1005840" y="1051560"/>
-            <a:ext cx="7680960" cy="841248"/>
-          </a:xfrm>
-          <a:prstGeom prst="rect">
-            <a:avLst/>
-          </a:prstGeom>
-          <a:noFill/>
-          <a:ln/>
-        </p:spPr>
-        <p:txBody>
-          <a:bodyPr wrap="square" lIns="0" tIns="0" rIns="0" bIns="0" rtlCol="0" anchor="t"/>
+            <a:off x="1463040" y="1051560"/>
+            <a:ext cx="7223760" cy="594360"/>
+          </a:xfrm>
+          <a:prstGeom prst="rect">
+            <a:avLst/>
+          </a:prstGeom>
+          <a:noFill/>
+          <a:ln/>
+        </p:spPr>
+        <p:txBody>
+          <a:bodyPr wrap="square" lIns="0" tIns="0" rIns="0" bIns="0" rtlCol="0" anchor="ctr"/>
           <a:lstStyle/>
           <a:p>
             <a:pPr indent="0" marL="0">
-              <a:spcAft>
-                <a:spcPts val="200"/>
-              </a:spcAft>
-              <a:buNone/>
-            </a:pPr>
-            <a:r>
-              <a:rPr lang="en-US" sz="1200" b="1" dirty="0">
-                <a:solidFill>
-                  <a:srgbClr val="14213D"/>
-                </a:solidFill>
-                <a:latin typeface="Calibri" pitchFamily="34" charset="0"/>
-                <a:ea typeface="Calibri" pitchFamily="34" charset="-122"/>
-                <a:cs typeface="Calibri" pitchFamily="34" charset="-120"/>
-              </a:rPr>
-              <a:t>LeWM-Flash on an L40S</a:t>
-            </a:r>
-            <a:endParaRPr lang="en-US" sz="1200" dirty="0"/>
-          </a:p>
-          <a:p>
-            <a:pPr indent="0" marL="0">
-              <a:spcAft>
-                <a:spcPts val="200"/>
-              </a:spcAft>
-              <a:buNone/>
-            </a:pPr>
-            <a:r>
-              <a:rPr lang="en-US" sz="1200" dirty="0">
+              <a:buNone/>
+            </a:pPr>
+            <a:r>
+              <a:rPr lang="en-US" sz="1350" dirty="0">
                 <a:solidFill>
                   <a:srgbClr val="1B1B1B"/>
                 </a:solidFill>
@@ -8148,9 +5962,9 @@
                 <a:ea typeface="Calibri" pitchFamily="34" charset="-122"/>
                 <a:cs typeface="Calibri" pitchFamily="34" charset="-120"/>
               </a:rPr>
-              <a:t>A ledger of PyTorch-level changes to the released planner, each run as a paired 300-episode sweep: caching, no host syncs, compilation, TF32, iCEM and BF16 accepted; warm starts, whole-loop compile, CEM-GD and static BF16 rejected.</a:t>
-            </a:r>
-            <a:endParaRPr lang="en-US" sz="1200" dirty="0"/>
+              <a:t>Profile: build a stage-by-stage compute profile of the reference planner from measured data, and identify the bottleneck.</a:t>
+            </a:r>
+            <a:endParaRPr lang="en-US" sz="1350" dirty="0"/>
           </a:p>
         </p:txBody>
       </p:sp>
@@ -8162,18 +5976,20 @@
         </p:nvSpPr>
         <p:spPr>
           <a:xfrm>
-            <a:off x="457200" y="1993392"/>
-            <a:ext cx="384048" cy="384048"/>
-          </a:xfrm>
-          <a:prstGeom prst="ellipse">
-            <a:avLst/>
+            <a:off x="457200" y="1828800"/>
+            <a:ext cx="822960" cy="594360"/>
+          </a:xfrm>
+          <a:prstGeom prst="roundRect">
+            <a:avLst>
+              <a:gd name="adj" fmla="val 12308"/>
+            </a:avLst>
           </a:prstGeom>
           <a:solidFill>
             <a:srgbClr val="14213D"/>
           </a:solidFill>
           <a:ln w="12700">
             <a:solidFill>
-              <a:srgbClr val="FFFFFF"/>
+              <a:srgbClr val="14213D"/>
             </a:solidFill>
             <a:prstDash val="solid"/>
           </a:ln>
@@ -8187,8 +6003,8 @@
         </p:nvSpPr>
         <p:spPr>
           <a:xfrm>
-            <a:off x="457200" y="1993392"/>
-            <a:ext cx="384048" cy="384048"/>
+            <a:off x="457200" y="1828800"/>
+            <a:ext cx="822960" cy="594360"/>
           </a:xfrm>
           <a:prstGeom prst="rect">
             <a:avLst/>
@@ -8204,7 +6020,7 @@
               <a:buNone/>
             </a:pPr>
             <a:r>
-              <a:rPr lang="en-US" sz="1400" b="1" dirty="0">
+              <a:rPr lang="en-US" sz="1600" b="1" dirty="0">
                 <a:solidFill>
                   <a:srgbClr val="FFFFFF"/>
                 </a:solidFill>
@@ -8212,9 +6028,9 @@
                 <a:ea typeface="Cambria" pitchFamily="34" charset="-122"/>
                 <a:cs typeface="Cambria" pitchFamily="34" charset="-120"/>
               </a:rPr>
-              <a:t>2</a:t>
-            </a:r>
-            <a:endParaRPr lang="en-US" sz="1400" dirty="0"/>
+              <a:t>O2</a:t>
+            </a:r>
+            <a:endParaRPr lang="en-US" sz="1600" dirty="0"/>
           </a:p>
         </p:txBody>
       </p:sp>
@@ -8226,47 +6042,24 @@
         </p:nvSpPr>
         <p:spPr>
           <a:xfrm>
-            <a:off x="1005840" y="1947672"/>
-            <a:ext cx="7680960" cy="841248"/>
-          </a:xfrm>
-          <a:prstGeom prst="rect">
-            <a:avLst/>
-          </a:prstGeom>
-          <a:noFill/>
-          <a:ln/>
-        </p:spPr>
-        <p:txBody>
-          <a:bodyPr wrap="square" lIns="0" tIns="0" rIns="0" bIns="0" rtlCol="0" anchor="t"/>
+            <a:off x="1463040" y="1828800"/>
+            <a:ext cx="7223760" cy="594360"/>
+          </a:xfrm>
+          <a:prstGeom prst="rect">
+            <a:avLst/>
+          </a:prstGeom>
+          <a:noFill/>
+          <a:ln/>
+        </p:spPr>
+        <p:txBody>
+          <a:bodyPr wrap="square" lIns="0" tIns="0" rIns="0" bIns="0" rtlCol="0" anchor="ctr"/>
           <a:lstStyle/>
           <a:p>
             <a:pPr indent="0" marL="0">
-              <a:spcAft>
-                <a:spcPts val="200"/>
-              </a:spcAft>
-              <a:buNone/>
-            </a:pPr>
-            <a:r>
-              <a:rPr lang="en-US" sz="1200" b="1" dirty="0">
-                <a:solidFill>
-                  <a:srgbClr val="14213D"/>
-                </a:solidFill>
-                <a:latin typeface="Calibri" pitchFamily="34" charset="0"/>
-                <a:ea typeface="Calibri" pitchFamily="34" charset="-122"/>
-                <a:cs typeface="Calibri" pitchFamily="34" charset="-120"/>
-              </a:rPr>
-              <a:t>The wall</a:t>
-            </a:r>
-            <a:endParaRPr lang="en-US" sz="1200" dirty="0"/>
-          </a:p>
-          <a:p>
-            <a:pPr indent="0" marL="0">
-              <a:spcAft>
-                <a:spcPts val="200"/>
-              </a:spcAft>
-              <a:buNone/>
-            </a:pPr>
-            <a:r>
-              <a:rPr lang="en-US" sz="1200" dirty="0">
+              <a:buNone/>
+            </a:pPr>
+            <a:r>
+              <a:rPr lang="en-US" sz="1350" dirty="0">
                 <a:solidFill>
                   <a:srgbClr val="1B1B1B"/>
                 </a:solidFill>
@@ -8274,9 +6067,9 @@
                 <a:ea typeface="Calibri" pitchFamily="34" charset="-122"/>
                 <a:cs typeface="Calibri" pitchFamily="34" charset="-120"/>
               </a:rPr>
-              <a:t>The best PyTorch planner still spent most of its time between kernels: 82 ms per solve on an H100 for a few milliseconds of arithmetic. Compilers fuse operators, not an optimiser loop.</a:t>
-            </a:r>
-            <a:endParaRPr lang="en-US" sz="1200" dirty="0"/>
+              <a:t>Design and implement: remove the bottlenecks without retraining the model or shrinking the planner's search budget.</a:t>
+            </a:r>
+            <a:endParaRPr lang="en-US" sz="1350" dirty="0"/>
           </a:p>
         </p:txBody>
       </p:sp>
@@ -8288,18 +6081,20 @@
         </p:nvSpPr>
         <p:spPr>
           <a:xfrm>
-            <a:off x="457200" y="2889504"/>
-            <a:ext cx="384048" cy="384048"/>
-          </a:xfrm>
-          <a:prstGeom prst="ellipse">
-            <a:avLst/>
+            <a:off x="457200" y="2606040"/>
+            <a:ext cx="822960" cy="594360"/>
+          </a:xfrm>
+          <a:prstGeom prst="roundRect">
+            <a:avLst>
+              <a:gd name="adj" fmla="val 12308"/>
+            </a:avLst>
           </a:prstGeom>
           <a:solidFill>
             <a:srgbClr val="14213D"/>
           </a:solidFill>
           <a:ln w="12700">
             <a:solidFill>
-              <a:srgbClr val="FFFFFF"/>
+              <a:srgbClr val="14213D"/>
             </a:solidFill>
             <a:prstDash val="solid"/>
           </a:ln>
@@ -8313,8 +6108,8 @@
         </p:nvSpPr>
         <p:spPr>
           <a:xfrm>
-            <a:off x="457200" y="2889504"/>
-            <a:ext cx="384048" cy="384048"/>
+            <a:off x="457200" y="2606040"/>
+            <a:ext cx="822960" cy="594360"/>
           </a:xfrm>
           <a:prstGeom prst="rect">
             <a:avLst/>
@@ -8330,7 +6125,7 @@
               <a:buNone/>
             </a:pPr>
             <a:r>
-              <a:rPr lang="en-US" sz="1400" b="1" dirty="0">
+              <a:rPr lang="en-US" sz="1600" b="1" dirty="0">
                 <a:solidFill>
                   <a:srgbClr val="FFFFFF"/>
                 </a:solidFill>
@@ -8338,9 +6133,9 @@
                 <a:ea typeface="Cambria" pitchFamily="34" charset="-122"/>
                 <a:cs typeface="Cambria" pitchFamily="34" charset="-120"/>
               </a:rPr>
-              <a:t>3</a:t>
-            </a:r>
-            <a:endParaRPr lang="en-US" sz="1400" dirty="0"/>
+              <a:t>O3</a:t>
+            </a:r>
+            <a:endParaRPr lang="en-US" sz="1600" dirty="0"/>
           </a:p>
         </p:txBody>
       </p:sp>
@@ -8352,47 +6147,24 @@
         </p:nvSpPr>
         <p:spPr>
           <a:xfrm>
-            <a:off x="1005840" y="2843784"/>
-            <a:ext cx="7680960" cy="841248"/>
-          </a:xfrm>
-          <a:prstGeom prst="rect">
-            <a:avLst/>
-          </a:prstGeom>
-          <a:noFill/>
-          <a:ln/>
-        </p:spPr>
-        <p:txBody>
-          <a:bodyPr wrap="square" lIns="0" tIns="0" rIns="0" bIns="0" rtlCol="0" anchor="t"/>
+            <a:off x="1463040" y="2606040"/>
+            <a:ext cx="7223760" cy="594360"/>
+          </a:xfrm>
+          <a:prstGeom prst="rect">
+            <a:avLst/>
+          </a:prstGeom>
+          <a:noFill/>
+          <a:ln/>
+        </p:spPr>
+        <p:txBody>
+          <a:bodyPr wrap="square" lIns="0" tIns="0" rIns="0" bIns="0" rtlCol="0" anchor="ctr"/>
           <a:lstStyle/>
           <a:p>
             <a:pPr indent="0" marL="0">
-              <a:spcAft>
-                <a:spcPts val="200"/>
-              </a:spcAft>
-              <a:buNone/>
-            </a:pPr>
-            <a:r>
-              <a:rPr lang="en-US" sz="1200" b="1" dirty="0">
-                <a:solidFill>
-                  <a:srgbClr val="14213D"/>
-                </a:solidFill>
-                <a:latin typeface="Calibri" pitchFamily="34" charset="0"/>
-                <a:ea typeface="Calibri" pitchFamily="34" charset="-122"/>
-                <a:cs typeface="Calibri" pitchFamily="34" charset="-120"/>
-              </a:rPr>
-              <a:t>The megakernel</a:t>
-            </a:r>
-            <a:endParaRPr lang="en-US" sz="1200" dirty="0"/>
-          </a:p>
-          <a:p>
-            <a:pPr indent="0" marL="0">
-              <a:spcAft>
-                <a:spcPts val="200"/>
-              </a:spcAft>
-              <a:buNone/>
-            </a:pPr>
-            <a:r>
-              <a:rPr lang="en-US" sz="1200" dirty="0">
+              <a:buNone/>
+            </a:pPr>
+            <a:r>
+              <a:rPr lang="en-US" sz="1350" dirty="0">
                 <a:solidFill>
                   <a:srgbClr val="1B1B1B"/>
                 </a:solidFill>
@@ -8400,9 +6172,9 @@
                 <a:ea typeface="Calibri" pitchFamily="34" charset="-122"/>
                 <a:cs typeface="Calibri" pitchFamily="34" charset="-120"/>
               </a:rPr>
-              <a:t>Rewrite the whole iCEM solve as one persistent ThunderKittens kernel on Hopper, following the LLM-decoding megakernels: 76.9 ms for the first correct kernel, 41.3 ms after five tuning steps.</a:t>
-            </a:r>
-            <a:endParaRPr lang="en-US" sz="1200" dirty="0"/>
+              <a:t>Evaluate: latency and task success against the reference and a strong optimised baseline, on the same GPU, with paired tests.</a:t>
+            </a:r>
+            <a:endParaRPr lang="en-US" sz="1350" dirty="0"/>
           </a:p>
         </p:txBody>
       </p:sp>
@@ -8414,18 +6186,20 @@
         </p:nvSpPr>
         <p:spPr>
           <a:xfrm>
-            <a:off x="457200" y="3785616"/>
-            <a:ext cx="384048" cy="384048"/>
-          </a:xfrm>
-          <a:prstGeom prst="ellipse">
-            <a:avLst/>
+            <a:off x="457200" y="3383280"/>
+            <a:ext cx="822960" cy="594360"/>
+          </a:xfrm>
+          <a:prstGeom prst="roundRect">
+            <a:avLst>
+              <a:gd name="adj" fmla="val 12308"/>
+            </a:avLst>
           </a:prstGeom>
           <a:solidFill>
-            <a:srgbClr val="2A78D6"/>
+            <a:srgbClr val="14213D"/>
           </a:solidFill>
           <a:ln w="12700">
             <a:solidFill>
-              <a:srgbClr val="FFFFFF"/>
+              <a:srgbClr val="14213D"/>
             </a:solidFill>
             <a:prstDash val="solid"/>
           </a:ln>
@@ -8439,8 +6213,8 @@
         </p:nvSpPr>
         <p:spPr>
           <a:xfrm>
-            <a:off x="457200" y="3785616"/>
-            <a:ext cx="384048" cy="384048"/>
+            <a:off x="457200" y="3383280"/>
+            <a:ext cx="822960" cy="594360"/>
           </a:xfrm>
           <a:prstGeom prst="rect">
             <a:avLst/>
@@ -8456,7 +6230,7 @@
               <a:buNone/>
             </a:pPr>
             <a:r>
-              <a:rPr lang="en-US" sz="1400" b="1" dirty="0">
+              <a:rPr lang="en-US" sz="1600" b="1" dirty="0">
                 <a:solidFill>
                   <a:srgbClr val="FFFFFF"/>
                 </a:solidFill>
@@ -8464,9 +6238,9 @@
                 <a:ea typeface="Cambria" pitchFamily="34" charset="-122"/>
                 <a:cs typeface="Cambria" pitchFamily="34" charset="-120"/>
               </a:rPr>
-              <a:t>4</a:t>
-            </a:r>
-            <a:endParaRPr lang="en-US" sz="1400" dirty="0"/>
+              <a:t>O4</a:t>
+            </a:r>
+            <a:endParaRPr lang="en-US" sz="1600" dirty="0"/>
           </a:p>
         </p:txBody>
       </p:sp>
@@ -8478,8 +6252,47 @@
         </p:nvSpPr>
         <p:spPr>
           <a:xfrm>
-            <a:off x="1005840" y="3739896"/>
-            <a:ext cx="7680960" cy="841248"/>
+            <a:off x="1463040" y="3383280"/>
+            <a:ext cx="7223760" cy="594360"/>
+          </a:xfrm>
+          <a:prstGeom prst="rect">
+            <a:avLst/>
+          </a:prstGeom>
+          <a:noFill/>
+          <a:ln/>
+        </p:spPr>
+        <p:txBody>
+          <a:bodyPr wrap="square" lIns="0" tIns="0" rIns="0" bIns="0" rtlCol="0" anchor="ctr"/>
+          <a:lstStyle/>
+          <a:p>
+            <a:pPr indent="0" marL="0">
+              <a:buNone/>
+            </a:pPr>
+            <a:r>
+              <a:rPr lang="en-US" sz="1350" dirty="0">
+                <a:solidFill>
+                  <a:srgbClr val="1B1B1B"/>
+                </a:solidFill>
+                <a:latin typeface="Calibri" pitchFamily="34" charset="0"/>
+                <a:ea typeface="Calibri" pitchFamily="34" charset="-122"/>
+                <a:cs typeface="Calibri" pitchFamily="34" charset="-120"/>
+              </a:rPr>
+              <a:t>Deploy: a planner that plugs into the existing harness, and one program that regenerates every result from the data.</a:t>
+            </a:r>
+            <a:endParaRPr lang="en-US" sz="1350" dirty="0"/>
+          </a:p>
+        </p:txBody>
+      </p:sp>
+      <p:sp>
+        <p:nvSpPr>
+          <p:cNvPr id="15" name="Text 13"/>
+          <p:cNvSpPr txBox="1"/>
+          <p:nvPr/>
+        </p:nvSpPr>
+        <p:spPr>
+          <a:xfrm>
+            <a:off x="457200" y="4206240"/>
+            <a:ext cx="8229600" cy="640080"/>
           </a:xfrm>
           <a:prstGeom prst="rect">
             <a:avLst/>
@@ -8492,13 +6305,10 @@
           <a:lstStyle/>
           <a:p>
             <a:pPr indent="0" marL="0">
-              <a:spcAft>
-                <a:spcPts val="200"/>
-              </a:spcAft>
-              <a:buNone/>
-            </a:pPr>
-            <a:r>
-              <a:rPr lang="en-US" sz="1200" b="1" dirty="0">
+              <a:buNone/>
+            </a:pPr>
+            <a:r>
+              <a:rPr lang="en-US" sz="1150" b="1" dirty="0">
                 <a:solidFill>
                   <a:srgbClr val="14213D"/>
                 </a:solidFill>
@@ -8506,19 +6316,13 @@
                 <a:ea typeface="Calibri" pitchFamily="34" charset="-122"/>
                 <a:cs typeface="Calibri" pitchFamily="34" charset="-120"/>
               </a:rPr>
-              <a:t>The ladder</a:t>
-            </a:r>
-            <a:endParaRPr lang="en-US" sz="1200" dirty="0"/>
-          </a:p>
-          <a:p>
+              <a:t>Data analytics and AI. </a:t>
+            </a:r>
             <a:pPr indent="0" marL="0">
-              <a:spcAft>
-                <a:spcPts val="200"/>
-              </a:spcAft>
-              <a:buNone/>
-            </a:pPr>
-            <a:r>
-              <a:rPr lang="en-US" sz="1200" dirty="0">
+              <a:buNone/>
+            </a:pPr>
+            <a:r>
+              <a:rPr lang="en-US" sz="1150" dirty="0">
                 <a:solidFill>
                   <a:srgbClr val="1B1B1B"/>
                 </a:solidFill>
@@ -8526,15 +6330,15 @@
                 <a:ea typeface="Calibri" pitchFamily="34" charset="-122"/>
                 <a:cs typeface="Calibri" pitchFamily="34" charset="-120"/>
               </a:rPr>
-              <a:t>Measure every step on the same H100 against the reference, at batch 1 end to end, with paired closed-loop success; then fuse the encoder so that a plan is one launch.</a:t>
-            </a:r>
-            <a:endParaRPr lang="en-US" sz="1200" dirty="0"/>
-          </a:p>
-        </p:txBody>
-      </p:sp>
-      <p:sp>
-        <p:nvSpPr>
-          <p:cNvPr id="16" name="Text 13"/>
+              <a:t>The object is an AI system (a self-supervised world model and its search algorithm); the method is an analytics pipeline over its measured behaviour: collection, preparation, pattern discovery with a fitted latency model, statistical evaluation and deployment.</a:t>
+            </a:r>
+            <a:endParaRPr lang="en-US" sz="1150" dirty="0"/>
+          </a:p>
+        </p:txBody>
+      </p:sp>
+      <p:sp>
+        <p:nvSpPr>
+          <p:cNvPr id="17" name="Text 14"/>
           <p:cNvSpPr txBox="1"/>
           <p:nvPr/>
         </p:nvSpPr>
@@ -8629,7 +6433,7 @@
                 <a:ea typeface="Cambria" pitchFamily="34" charset="-122"/>
                 <a:cs typeface="Cambria" pitchFamily="34" charset="-120"/>
               </a:rPr>
-              <a:t>Literature review: three lineages, one gap</a:t>
+              <a:t>Background: three lines of work, one gap</a:t>
             </a:r>
             <a:endParaRPr lang="en-US" sz="2800" dirty="0"/>
           </a:p>
@@ -8644,11 +6448,11 @@
         <p:spPr>
           <a:xfrm>
             <a:off x="457200" y="1051560"/>
-            <a:ext cx="2651760" cy="2651760"/>
+            <a:ext cx="2651760" cy="2606040"/>
           </a:xfrm>
           <a:prstGeom prst="roundRect">
             <a:avLst>
-              <a:gd name="adj" fmla="val 2759"/>
+              <a:gd name="adj" fmla="val 2807"/>
             </a:avLst>
           </a:prstGeom>
           <a:solidFill>
@@ -8695,7 +6499,7 @@
                 <a:ea typeface="Cambria" pitchFamily="34" charset="-122"/>
                 <a:cs typeface="Cambria" pitchFamily="34" charset="-120"/>
               </a:rPr>
-              <a:t>JEPA world models</a:t>
+              <a:t>World models that plan</a:t>
             </a:r>
             <a:endParaRPr lang="en-US" sz="1500" dirty="0"/>
           </a:p>
@@ -8710,7 +6514,7 @@
         <p:spPr>
           <a:xfrm>
             <a:off x="621792" y="1581912"/>
-            <a:ext cx="2331720" cy="2011680"/>
+            <a:ext cx="2331720" cy="1965960"/>
           </a:xfrm>
           <a:prstGeom prst="rect">
             <a:avLst/>
@@ -8734,7 +6538,7 @@
                 <a:ea typeface="Calibri" pitchFamily="34" charset="-122"/>
                 <a:cs typeface="Calibri" pitchFamily="34" charset="-120"/>
               </a:rPr>
-              <a:t>I-JEPA, V-JEPA, DINO-WM, PLDM, V-JEPA 2-AC, LeWM: all plan with CEM-family MPC in latent space. Latency is reported coarsely, if at all (53 s per DINO-WM call, 16 s per V-JEPA 2-AC action, LeWM 'under one second'), and every speed-up changes the model or the planner.</a:t>
+              <a:t>JEPA models (I-JEPA, DINO-WM, V-JEPA 2, LeWM) predict in a learned representation and plan by search. Planning time is reported coarsely and only ever cut by changing the model.</a:t>
             </a:r>
             <a:endParaRPr lang="en-US" sz="1150" dirty="0"/>
           </a:p>
@@ -8749,11 +6553,11 @@
         <p:spPr>
           <a:xfrm>
             <a:off x="3291840" y="1051560"/>
-            <a:ext cx="2651760" cy="2651760"/>
+            <a:ext cx="2651760" cy="2606040"/>
           </a:xfrm>
           <a:prstGeom prst="roundRect">
             <a:avLst>
-              <a:gd name="adj" fmla="val 2759"/>
+              <a:gd name="adj" fmla="val 2807"/>
             </a:avLst>
           </a:prstGeom>
           <a:solidFill>
@@ -8800,7 +6604,7 @@
                 <a:ea typeface="Cambria" pitchFamily="34" charset="-122"/>
                 <a:cs typeface="Cambria" pitchFamily="34" charset="-120"/>
               </a:rPr>
-              <a:t>CEM to iCEM</a:t>
+              <a:t>Sampling-based search</a:t>
             </a:r>
             <a:endParaRPr lang="en-US" sz="1500" dirty="0"/>
           </a:p>
@@ -8815,7 +6619,7 @@
         <p:spPr>
           <a:xfrm>
             <a:off x="3456432" y="1581912"/>
-            <a:ext cx="2331720" cy="2011680"/>
+            <a:ext cx="2331720" cy="1965960"/>
           </a:xfrm>
           <a:prstGeom prst="rect">
             <a:avLst/>
@@ -8839,7 +6643,7 @@
                 <a:ea typeface="Calibri" pitchFamily="34" charset="-122"/>
                 <a:cs typeface="Calibri" pitchFamily="34" charset="-120"/>
               </a:rPr>
-              <a:t>CEM (Rubinstein) and PETS/PlaNet made latent CEM-MPC the standard. iCEM adds a decaying population and elite memory: 2.7-22x fewer samples. CEM-GD shows the catch: fewer samples do not mean less time unless the per-iteration cost falls too.</a:t>
+              <a:t>CEM samples, keeps the best, refits, repeats. iCEM shrinks the population and reuses the best: 2.7–22× fewer samples. But fewer samples need not mean less time (CEM-GD).</a:t>
             </a:r>
             <a:endParaRPr lang="en-US" sz="1150" dirty="0"/>
           </a:p>
@@ -8854,11 +6658,11 @@
         <p:spPr>
           <a:xfrm>
             <a:off x="6126480" y="1051560"/>
-            <a:ext cx="2651760" cy="2651760"/>
+            <a:ext cx="2651760" cy="2606040"/>
           </a:xfrm>
           <a:prstGeom prst="roundRect">
             <a:avLst>
-              <a:gd name="adj" fmla="val 2759"/>
+              <a:gd name="adj" fmla="val 2807"/>
             </a:avLst>
           </a:prstGeom>
           <a:solidFill>
@@ -8905,7 +6709,7 @@
                 <a:ea typeface="Cambria" pitchFamily="34" charset="-122"/>
                 <a:cs typeface="Cambria" pitchFamily="34" charset="-120"/>
               </a:rPr>
-              <a:t>Kernels and fusion</a:t>
+              <a:t>Fast GPU inference</a:t>
             </a:r>
             <a:endParaRPr lang="en-US" sz="1500" dirty="0"/>
           </a:p>
@@ -8920,7 +6724,7 @@
         <p:spPr>
           <a:xfrm>
             <a:off x="6291072" y="1581912"/>
-            <a:ext cx="2331720" cy="2011680"/>
+            <a:ext cx="2331720" cy="1965960"/>
           </a:xfrm>
           <a:prstGeom prst="rect">
             <a:avLst/>
@@ -8944,7 +6748,7 @@
                 <a:ea typeface="Calibri" pitchFamily="34" charset="-122"/>
                 <a:cs typeface="Calibri" pitchFamily="34" charset="-120"/>
               </a:rPr>
-              <a:t>Small-batch inference is launch- and latency-bound. FlashAttention fuses an operator; torch.compile and CUDA graphs fuse regions; megakernels (Hazy Llama-1B, FlashFormer, MPK) fuse a whole LLM forward pass into one launch. None fuses an optimiser loop.</a:t>
+              <a:t>Small models at batch 1 are bound by launch overhead and data movement. Remedies: CUDA Graphs, compilers, FlashAttention, and megakernels: one GPU program for a whole computation.</a:t>
             </a:r>
             <a:endParaRPr lang="en-US" sz="1150" dirty="0"/>
           </a:p>
@@ -8959,7 +6763,7 @@
         <p:spPr>
           <a:xfrm>
             <a:off x="457200" y="3840480"/>
-            <a:ext cx="8229600" cy="1005840"/>
+            <a:ext cx="8229600" cy="914400"/>
           </a:xfrm>
           <a:prstGeom prst="rect">
             <a:avLst/>
@@ -8997,7 +6801,7 @@
                 <a:ea typeface="Calibri" pitchFamily="34" charset="-122"/>
                 <a:cs typeface="Calibri" pitchFamily="34" charset="-120"/>
               </a:rPr>
-              <a:t>No work holds a JEPA world model and its planner fixed and measures what the execution of the planner costs; iCEM has run on LeWM only as an evaluated solver; and no kernel fuses a whole sampling-based planning loop with a neural encoder, a transformer rollout, elite selection and distribution updates. GPU MPC (STORM, cuRobo, MPPI-Generic) is fast only with analytic dynamics.</a:t>
+              <a:t>No one has profiled where a world-model planner's time goes, measured whether sample-efficient search saves time in practice, or fused a whole planning loop, with a neural encoder, rollouts, scoring and elite selection, into one GPU program.</a:t>
             </a:r>
             <a:endParaRPr lang="en-US" sz="1200" dirty="0"/>
           </a:p>
@@ -9100,34 +6904,58 @@
                 <a:ea typeface="Cambria" pitchFamily="34" charset="-122"/>
                 <a:cs typeface="Cambria" pitchFamily="34" charset="-120"/>
               </a:rPr>
-              <a:t>Research questions</a:t>
+              <a:t>Method: an analytics pipeline over the planner</a:t>
             </a:r>
             <a:endParaRPr lang="en-US" sz="2800" dirty="0"/>
           </a:p>
         </p:txBody>
       </p:sp>
-      <p:sp>
-        <p:nvSpPr>
-          <p:cNvPr id="3" name="Shape 1"/>
+      <p:pic>
+        <p:nvPicPr>
+          <p:cNvPr id="3" name="Image 0" descr="preencoded.png">    </p:cNvPr>
+          <p:cNvPicPr>
+            <a:picLocks noChangeAspect="1"/>
+          </p:cNvPicPr>
+          <p:nvPr/>
+        </p:nvPicPr>
+        <p:blipFill>
+          <a:blip r:embed="rId1"/>
+          <a:stretch>
+            <a:fillRect/>
+          </a:stretch>
+        </p:blipFill>
+        <p:spPr>
+          <a:xfrm>
+            <a:off x="1902372" y="960120"/>
+            <a:ext cx="5339255" cy="1828800"/>
+          </a:xfrm>
+          <a:prstGeom prst="rect">
+            <a:avLst/>
+          </a:prstGeom>
+        </p:spPr>
+      </p:pic>
+      <p:sp>
+        <p:nvSpPr>
+          <p:cNvPr id="4" name="Shape 1"/>
           <p:cNvSpPr/>
           <p:nvPr/>
         </p:nvSpPr>
         <p:spPr>
           <a:xfrm>
-            <a:off x="457200" y="1097280"/>
-            <a:ext cx="914400" cy="640080"/>
+            <a:off x="457200" y="2926080"/>
+            <a:ext cx="2651760" cy="1783080"/>
           </a:xfrm>
           <a:prstGeom prst="roundRect">
             <a:avLst>
-              <a:gd name="adj" fmla="val 11429"/>
+              <a:gd name="adj" fmla="val 4103"/>
             </a:avLst>
           </a:prstGeom>
           <a:solidFill>
-            <a:srgbClr val="14213D"/>
+            <a:srgbClr val="E9F1FC"/>
           </a:solidFill>
           <a:ln w="12700">
             <a:solidFill>
-              <a:srgbClr val="14213D"/>
+              <a:srgbClr val="E9F1FC"/>
             </a:solidFill>
             <a:prstDash val="solid"/>
           </a:ln>
@@ -9135,14 +6963,14 @@
       </p:sp>
       <p:sp>
         <p:nvSpPr>
-          <p:cNvPr id="4" name="Text 2"/>
-          <p:cNvSpPr txBox="1"/>
-          <p:nvPr/>
-        </p:nvSpPr>
-        <p:spPr>
-          <a:xfrm>
-            <a:off x="457200" y="1097280"/>
-            <a:ext cx="914400" cy="640080"/>
+          <p:cNvPr id="5" name="Text 2"/>
+          <p:cNvSpPr txBox="1"/>
+          <p:nvPr/>
+        </p:nvSpPr>
+        <p:spPr>
+          <a:xfrm>
+            <a:off x="621792" y="3035808"/>
+            <a:ext cx="2331720" cy="384048"/>
           </a:xfrm>
           <a:prstGeom prst="rect">
             <a:avLst/>
@@ -9154,50 +6982,50 @@
           <a:bodyPr wrap="square" lIns="0" tIns="0" rIns="0" bIns="0" rtlCol="0" anchor="ctr"/>
           <a:lstStyle/>
           <a:p>
-            <a:pPr algn="ctr" indent="0" marL="0">
-              <a:buNone/>
-            </a:pPr>
-            <a:r>
-              <a:rPr lang="en-US" sz="1600" b="1" dirty="0">
-                <a:solidFill>
-                  <a:srgbClr val="FFFFFF"/>
+            <a:pPr indent="0" marL="0">
+              <a:buNone/>
+            </a:pPr>
+            <a:r>
+              <a:rPr lang="en-US" sz="1500" b="1" dirty="0">
+                <a:solidFill>
+                  <a:srgbClr val="14213D"/>
                 </a:solidFill>
                 <a:latin typeface="Cambria" pitchFamily="34" charset="0"/>
                 <a:ea typeface="Cambria" pitchFamily="34" charset="-122"/>
                 <a:cs typeface="Cambria" pitchFamily="34" charset="-120"/>
               </a:rPr>
-              <a:t>RQ1</a:t>
-            </a:r>
-            <a:endParaRPr lang="en-US" sz="1600" dirty="0"/>
-          </a:p>
-        </p:txBody>
-      </p:sp>
-      <p:sp>
-        <p:nvSpPr>
-          <p:cNvPr id="5" name="Text 3"/>
-          <p:cNvSpPr txBox="1"/>
-          <p:nvPr/>
-        </p:nvSpPr>
-        <p:spPr>
-          <a:xfrm>
-            <a:off x="1600200" y="1097280"/>
-            <a:ext cx="7086600" cy="640080"/>
-          </a:xfrm>
-          <a:prstGeom prst="rect">
-            <a:avLst/>
-          </a:prstGeom>
-          <a:noFill/>
-          <a:ln/>
-        </p:spPr>
-        <p:txBody>
-          <a:bodyPr wrap="square" lIns="0" tIns="0" rIns="0" bIns="0" rtlCol="0" anchor="ctr"/>
+              <a:t>Data</a:t>
+            </a:r>
+            <a:endParaRPr lang="en-US" sz="1500" dirty="0"/>
+          </a:p>
+        </p:txBody>
+      </p:sp>
+      <p:sp>
+        <p:nvSpPr>
+          <p:cNvPr id="6" name="Text 3"/>
+          <p:cNvSpPr txBox="1"/>
+          <p:nvPr/>
+        </p:nvSpPr>
+        <p:spPr>
+          <a:xfrm>
+            <a:off x="621792" y="3456432"/>
+            <a:ext cx="2331720" cy="1143000"/>
+          </a:xfrm>
+          <a:prstGeom prst="rect">
+            <a:avLst/>
+          </a:prstGeom>
+          <a:noFill/>
+          <a:ln/>
+        </p:spPr>
+        <p:txBody>
+          <a:bodyPr wrap="square" lIns="0" tIns="0" rIns="0" bIns="0" rtlCol="0" anchor="t"/>
           <a:lstStyle/>
           <a:p>
             <a:pPr indent="0" marL="0">
               <a:buNone/>
             </a:pPr>
             <a:r>
-              <a:rPr lang="en-US" sz="1400" dirty="0">
+              <a:rPr lang="en-US" sz="1050" dirty="0">
                 <a:solidFill>
                   <a:srgbClr val="1B1B1B"/>
                 </a:solidFill>
@@ -9205,34 +7033,34 @@
                 <a:ea typeface="Calibri" pitchFamily="34" charset="-122"/>
                 <a:cs typeface="Calibri" pitchFamily="34" charset="-120"/>
               </a:rPr>
-              <a:t>How much of the reference planner's latency is redundant work that an exact change removes?</a:t>
-            </a:r>
-            <a:endParaRPr lang="en-US" sz="1400" dirty="0"/>
-          </a:p>
-        </p:txBody>
-      </p:sp>
-      <p:sp>
-        <p:nvSpPr>
-          <p:cNvPr id="6" name="Shape 4"/>
+              <a:t>11,942 timed policy calls (61 one-robot episodes × 3 systems + 4 probes), 900 episode outcomes, telemetry, component timings.</a:t>
+            </a:r>
+            <a:endParaRPr lang="en-US" sz="1050" dirty="0"/>
+          </a:p>
+        </p:txBody>
+      </p:sp>
+      <p:sp>
+        <p:nvSpPr>
+          <p:cNvPr id="7" name="Shape 4"/>
           <p:cNvSpPr/>
           <p:nvPr/>
         </p:nvSpPr>
         <p:spPr>
           <a:xfrm>
-            <a:off x="457200" y="1965960"/>
-            <a:ext cx="914400" cy="640080"/>
+            <a:off x="3291840" y="2926080"/>
+            <a:ext cx="2651760" cy="1783080"/>
           </a:xfrm>
           <a:prstGeom prst="roundRect">
             <a:avLst>
-              <a:gd name="adj" fmla="val 11429"/>
+              <a:gd name="adj" fmla="val 4103"/>
             </a:avLst>
           </a:prstGeom>
           <a:solidFill>
-            <a:srgbClr val="14213D"/>
+            <a:srgbClr val="E9F1FC"/>
           </a:solidFill>
           <a:ln w="12700">
             <a:solidFill>
-              <a:srgbClr val="14213D"/>
+              <a:srgbClr val="E9F1FC"/>
             </a:solidFill>
             <a:prstDash val="solid"/>
           </a:ln>
@@ -9240,14 +7068,14 @@
       </p:sp>
       <p:sp>
         <p:nvSpPr>
-          <p:cNvPr id="7" name="Text 5"/>
-          <p:cNvSpPr txBox="1"/>
-          <p:nvPr/>
-        </p:nvSpPr>
-        <p:spPr>
-          <a:xfrm>
-            <a:off x="457200" y="1965960"/>
-            <a:ext cx="914400" cy="640080"/>
+          <p:cNvPr id="8" name="Text 5"/>
+          <p:cNvSpPr txBox="1"/>
+          <p:nvPr/>
+        </p:nvSpPr>
+        <p:spPr>
+          <a:xfrm>
+            <a:off x="3456432" y="3035808"/>
+            <a:ext cx="2331720" cy="384048"/>
           </a:xfrm>
           <a:prstGeom prst="rect">
             <a:avLst/>
@@ -9259,50 +7087,50 @@
           <a:bodyPr wrap="square" lIns="0" tIns="0" rIns="0" bIns="0" rtlCol="0" anchor="ctr"/>
           <a:lstStyle/>
           <a:p>
-            <a:pPr algn="ctr" indent="0" marL="0">
-              <a:buNone/>
-            </a:pPr>
-            <a:r>
-              <a:rPr lang="en-US" sz="1600" b="1" dirty="0">
-                <a:solidFill>
-                  <a:srgbClr val="FFFFFF"/>
+            <a:pPr indent="0" marL="0">
+              <a:buNone/>
+            </a:pPr>
+            <a:r>
+              <a:rPr lang="en-US" sz="1500" b="1" dirty="0">
+                <a:solidFill>
+                  <a:srgbClr val="14213D"/>
                 </a:solidFill>
                 <a:latin typeface="Cambria" pitchFamily="34" charset="0"/>
                 <a:ea typeface="Cambria" pitchFamily="34" charset="-122"/>
                 <a:cs typeface="Cambria" pitchFamily="34" charset="-120"/>
               </a:rPr>
-              <a:t>RQ2</a:t>
-            </a:r>
-            <a:endParaRPr lang="en-US" sz="1600" dirty="0"/>
-          </a:p>
-        </p:txBody>
-      </p:sp>
-      <p:sp>
-        <p:nvSpPr>
-          <p:cNvPr id="8" name="Text 6"/>
-          <p:cNvSpPr txBox="1"/>
-          <p:nvPr/>
-        </p:nvSpPr>
-        <p:spPr>
-          <a:xfrm>
-            <a:off x="1600200" y="1965960"/>
-            <a:ext cx="7086600" cy="640080"/>
-          </a:xfrm>
-          <a:prstGeom prst="rect">
-            <a:avLst/>
-          </a:prstGeom>
-          <a:noFill/>
-          <a:ln/>
-        </p:spPr>
-        <p:txBody>
-          <a:bodyPr wrap="square" lIns="0" tIns="0" rIns="0" bIns="0" rtlCol="0" anchor="ctr"/>
+              <a:t>Analysis</a:t>
+            </a:r>
+            <a:endParaRPr lang="en-US" sz="1500" dirty="0"/>
+          </a:p>
+        </p:txBody>
+      </p:sp>
+      <p:sp>
+        <p:nvSpPr>
+          <p:cNvPr id="9" name="Text 6"/>
+          <p:cNvSpPr txBox="1"/>
+          <p:nvPr/>
+        </p:nvSpPr>
+        <p:spPr>
+          <a:xfrm>
+            <a:off x="3456432" y="3456432"/>
+            <a:ext cx="2331720" cy="1143000"/>
+          </a:xfrm>
+          <a:prstGeom prst="rect">
+            <a:avLst/>
+          </a:prstGeom>
+          <a:noFill/>
+          <a:ln/>
+        </p:spPr>
+        <p:txBody>
+          <a:bodyPr wrap="square" lIns="0" tIns="0" rIns="0" bIns="0" rtlCol="0" anchor="t"/>
           <a:lstStyle/>
           <a:p>
             <a:pPr indent="0" marL="0">
               <a:buNone/>
             </a:pPr>
             <a:r>
-              <a:rPr lang="en-US" sz="1400" dirty="0">
+              <a:rPr lang="en-US" sz="1050" dirty="0">
                 <a:solidFill>
                   <a:srgbClr val="1B1B1B"/>
                 </a:solidFill>
@@ -9310,34 +7138,34 @@
                 <a:ea typeface="Calibri" pitchFamily="34" charset="-122"/>
                 <a:cs typeface="Calibri" pitchFamily="34" charset="-120"/>
               </a:rPr>
-              <a:t>Does iCEM make planning faster, by how much, and does it change task success?</a:t>
-            </a:r>
-            <a:endParaRPr lang="en-US" sz="1400" dirty="0"/>
-          </a:p>
-        </p:txBody>
-      </p:sp>
-      <p:sp>
-        <p:nvSpPr>
-          <p:cNvPr id="9" name="Shape 7"/>
+              <a:t>Warm-up removal and outlier flags; stage decomposition; a fitted model latency = a + b·N separating fixed overhead from work.</a:t>
+            </a:r>
+            <a:endParaRPr lang="en-US" sz="1050" dirty="0"/>
+          </a:p>
+        </p:txBody>
+      </p:sp>
+      <p:sp>
+        <p:nvSpPr>
+          <p:cNvPr id="10" name="Shape 7"/>
           <p:cNvSpPr/>
           <p:nvPr/>
         </p:nvSpPr>
         <p:spPr>
           <a:xfrm>
-            <a:off x="457200" y="2834640"/>
-            <a:ext cx="914400" cy="640080"/>
+            <a:off x="6126480" y="2926080"/>
+            <a:ext cx="2651760" cy="1783080"/>
           </a:xfrm>
           <a:prstGeom prst="roundRect">
             <a:avLst>
-              <a:gd name="adj" fmla="val 11429"/>
+              <a:gd name="adj" fmla="val 4103"/>
             </a:avLst>
           </a:prstGeom>
           <a:solidFill>
-            <a:srgbClr val="14213D"/>
+            <a:srgbClr val="E9F1FC"/>
           </a:solidFill>
           <a:ln w="12700">
             <a:solidFill>
-              <a:srgbClr val="14213D"/>
+              <a:srgbClr val="E9F1FC"/>
             </a:solidFill>
             <a:prstDash val="solid"/>
           </a:ln>
@@ -9345,14 +7173,14 @@
       </p:sp>
       <p:sp>
         <p:nvSpPr>
-          <p:cNvPr id="10" name="Text 8"/>
-          <p:cNvSpPr txBox="1"/>
-          <p:nvPr/>
-        </p:nvSpPr>
-        <p:spPr>
-          <a:xfrm>
-            <a:off x="457200" y="2834640"/>
-            <a:ext cx="914400" cy="640080"/>
+          <p:cNvPr id="11" name="Text 8"/>
+          <p:cNvSpPr txBox="1"/>
+          <p:nvPr/>
+        </p:nvSpPr>
+        <p:spPr>
+          <a:xfrm>
+            <a:off x="6291072" y="3035808"/>
+            <a:ext cx="2331720" cy="384048"/>
           </a:xfrm>
           <a:prstGeom prst="rect">
             <a:avLst/>
@@ -9364,50 +7192,50 @@
           <a:bodyPr wrap="square" lIns="0" tIns="0" rIns="0" bIns="0" rtlCol="0" anchor="ctr"/>
           <a:lstStyle/>
           <a:p>
-            <a:pPr algn="ctr" indent="0" marL="0">
-              <a:buNone/>
-            </a:pPr>
-            <a:r>
-              <a:rPr lang="en-US" sz="1600" b="1" dirty="0">
-                <a:solidFill>
-                  <a:srgbClr val="FFFFFF"/>
+            <a:pPr indent="0" marL="0">
+              <a:buNone/>
+            </a:pPr>
+            <a:r>
+              <a:rPr lang="en-US" sz="1500" b="1" dirty="0">
+                <a:solidFill>
+                  <a:srgbClr val="14213D"/>
                 </a:solidFill>
                 <a:latin typeface="Cambria" pitchFamily="34" charset="0"/>
                 <a:ea typeface="Cambria" pitchFamily="34" charset="-122"/>
                 <a:cs typeface="Cambria" pitchFamily="34" charset="-120"/>
               </a:rPr>
-              <a:t>RQ3</a:t>
-            </a:r>
-            <a:endParaRPr lang="en-US" sz="1600" dirty="0"/>
-          </a:p>
-        </p:txBody>
-      </p:sp>
-      <p:sp>
-        <p:nvSpPr>
-          <p:cNvPr id="11" name="Text 9"/>
-          <p:cNvSpPr txBox="1"/>
-          <p:nvPr/>
-        </p:nvSpPr>
-        <p:spPr>
-          <a:xfrm>
-            <a:off x="1600200" y="2834640"/>
-            <a:ext cx="7086600" cy="640080"/>
-          </a:xfrm>
-          <a:prstGeom prst="rect">
-            <a:avLst/>
-          </a:prstGeom>
-          <a:noFill/>
-          <a:ln/>
-        </p:spPr>
-        <p:txBody>
-          <a:bodyPr wrap="square" lIns="0" tIns="0" rIns="0" bIns="0" rtlCol="0" anchor="ctr"/>
+              <a:t>Evaluation</a:t>
+            </a:r>
+            <a:endParaRPr lang="en-US" sz="1500" dirty="0"/>
+          </a:p>
+        </p:txBody>
+      </p:sp>
+      <p:sp>
+        <p:nvSpPr>
+          <p:cNvPr id="12" name="Text 9"/>
+          <p:cNvSpPr txBox="1"/>
+          <p:nvPr/>
+        </p:nvSpPr>
+        <p:spPr>
+          <a:xfrm>
+            <a:off x="6291072" y="3456432"/>
+            <a:ext cx="2331720" cy="1143000"/>
+          </a:xfrm>
+          <a:prstGeom prst="rect">
+            <a:avLst/>
+          </a:prstGeom>
+          <a:noFill/>
+          <a:ln/>
+        </p:spPr>
+        <p:txBody>
+          <a:bodyPr wrap="square" lIns="0" tIns="0" rIns="0" bIns="0" rtlCol="0" anchor="t"/>
           <a:lstStyle/>
           <a:p>
             <a:pPr indent="0" marL="0">
               <a:buNone/>
             </a:pPr>
             <a:r>
-              <a:rPr lang="en-US" sz="1400" dirty="0">
+              <a:rPr lang="en-US" sz="1050" dirty="0">
                 <a:solidFill>
                   <a:srgbClr val="1B1B1B"/>
                 </a:solidFill>
@@ -9415,159 +7243,15 @@
                 <a:ea typeface="Calibri" pitchFamily="34" charset="-122"/>
                 <a:cs typeface="Calibri" pitchFamily="34" charset="-120"/>
               </a:rPr>
-              <a:t>How much does executing the whole planner as one persistent kernel gain over the best PyTorch implementation of the same planner?</a:t>
-            </a:r>
-            <a:endParaRPr lang="en-US" sz="1400" dirty="0"/>
-          </a:p>
-        </p:txBody>
-      </p:sp>
-      <p:sp>
-        <p:nvSpPr>
-          <p:cNvPr id="12" name="Shape 10"/>
-          <p:cNvSpPr/>
-          <p:nvPr/>
-        </p:nvSpPr>
-        <p:spPr>
-          <a:xfrm>
-            <a:off x="457200" y="3703320"/>
-            <a:ext cx="914400" cy="640080"/>
-          </a:xfrm>
-          <a:prstGeom prst="roundRect">
-            <a:avLst>
-              <a:gd name="adj" fmla="val 11429"/>
-            </a:avLst>
-          </a:prstGeom>
-          <a:solidFill>
-            <a:srgbClr val="14213D"/>
-          </a:solidFill>
-          <a:ln w="12700">
-            <a:solidFill>
-              <a:srgbClr val="14213D"/>
-            </a:solidFill>
-            <a:prstDash val="solid"/>
-          </a:ln>
-        </p:spPr>
-      </p:sp>
-      <p:sp>
-        <p:nvSpPr>
-          <p:cNvPr id="13" name="Text 11"/>
-          <p:cNvSpPr txBox="1"/>
-          <p:nvPr/>
-        </p:nvSpPr>
-        <p:spPr>
-          <a:xfrm>
-            <a:off x="457200" y="3703320"/>
-            <a:ext cx="914400" cy="640080"/>
-          </a:xfrm>
-          <a:prstGeom prst="rect">
-            <a:avLst/>
-          </a:prstGeom>
-          <a:noFill/>
-          <a:ln/>
-        </p:spPr>
-        <p:txBody>
-          <a:bodyPr wrap="square" lIns="0" tIns="0" rIns="0" bIns="0" rtlCol="0" anchor="ctr"/>
-          <a:lstStyle/>
-          <a:p>
-            <a:pPr algn="ctr" indent="0" marL="0">
-              <a:buNone/>
-            </a:pPr>
-            <a:r>
-              <a:rPr lang="en-US" sz="1600" b="1" dirty="0">
-                <a:solidFill>
-                  <a:srgbClr val="FFFFFF"/>
-                </a:solidFill>
-                <a:latin typeface="Cambria" pitchFamily="34" charset="0"/>
-                <a:ea typeface="Cambria" pitchFamily="34" charset="-122"/>
-                <a:cs typeface="Cambria" pitchFamily="34" charset="-120"/>
-              </a:rPr>
-              <a:t>RQ4</a:t>
-            </a:r>
-            <a:endParaRPr lang="en-US" sz="1600" dirty="0"/>
-          </a:p>
-        </p:txBody>
-      </p:sp>
-      <p:sp>
-        <p:nvSpPr>
-          <p:cNvPr id="14" name="Text 12"/>
-          <p:cNvSpPr txBox="1"/>
-          <p:nvPr/>
-        </p:nvSpPr>
-        <p:spPr>
-          <a:xfrm>
-            <a:off x="1600200" y="3703320"/>
-            <a:ext cx="7086600" cy="640080"/>
-          </a:xfrm>
-          <a:prstGeom prst="rect">
-            <a:avLst/>
-          </a:prstGeom>
-          <a:noFill/>
-          <a:ln/>
-        </p:spPr>
-        <p:txBody>
-          <a:bodyPr wrap="square" lIns="0" tIns="0" rIns="0" bIns="0" rtlCol="0" anchor="ctr"/>
-          <a:lstStyle/>
-          <a:p>
-            <a:pPr indent="0" marL="0">
-              <a:buNone/>
-            </a:pPr>
-            <a:r>
-              <a:rPr lang="en-US" sz="1400" dirty="0">
-                <a:solidFill>
-                  <a:srgbClr val="1B1B1B"/>
-                </a:solidFill>
-                <a:latin typeface="Calibri" pitchFamily="34" charset="0"/>
-                <a:ea typeface="Calibri" pitchFamily="34" charset="-122"/>
-                <a:cs typeface="Calibri" pitchFamily="34" charset="-120"/>
-              </a:rPr>
-              <a:t>Do the megakernel's numerics and the fused encoder preserve accuracy, against FP32 on identical inputs and in closed loop?</a:t>
-            </a:r>
-            <a:endParaRPr lang="en-US" sz="1400" dirty="0"/>
-          </a:p>
-        </p:txBody>
-      </p:sp>
-      <p:sp>
-        <p:nvSpPr>
-          <p:cNvPr id="15" name="Text 13"/>
-          <p:cNvSpPr txBox="1"/>
-          <p:nvPr/>
-        </p:nvSpPr>
-        <p:spPr>
-          <a:xfrm>
-            <a:off x="457200" y="4572000"/>
-            <a:ext cx="8229600" cy="274320"/>
-          </a:xfrm>
-          <a:prstGeom prst="rect">
-            <a:avLst/>
-          </a:prstGeom>
-          <a:noFill/>
-          <a:ln/>
-        </p:spPr>
-        <p:txBody>
-          <a:bodyPr wrap="square" lIns="0" tIns="0" rIns="0" bIns="0" rtlCol="0" anchor="ctr"/>
-          <a:lstStyle/>
-          <a:p>
-            <a:pPr indent="0" marL="0">
-              <a:buNone/>
-            </a:pPr>
-            <a:r>
-              <a:rPr lang="en-US" sz="1100" i="1" dirty="0">
-                <a:solidFill>
-                  <a:srgbClr val="5A5A5A"/>
-                </a:solidFill>
-                <a:latin typeface="Calibri" pitchFamily="34" charset="0"/>
-                <a:ea typeface="Calibri" pitchFamily="34" charset="-122"/>
-                <a:cs typeface="Calibri" pitchFamily="34" charset="-120"/>
-              </a:rPr>
-              <a:t>One change per rung, one H100, one container image; primary metric: batch-1 end-to-end plan latency.</a:t>
-            </a:r>
-            <a:endParaRPr lang="en-US" sz="1100" dirty="0"/>
-          </a:p>
-        </p:txBody>
-      </p:sp>
-      <p:sp>
-        <p:nvSpPr>
-          <p:cNvPr id="17" name="Text 14"/>
+              <a:t>Medians with bootstrap CIs; 300 paired episodes, McNemar and paired bootstrap; numerical error against FP32.</a:t>
+            </a:r>
+            <a:endParaRPr lang="en-US" sz="1050" dirty="0"/>
+          </a:p>
+        </p:txBody>
+      </p:sp>
+      <p:sp>
+        <p:nvSpPr>
+          <p:cNvPr id="14" name="Text 10"/>
           <p:cNvSpPr txBox="1"/>
           <p:nvPr/>
         </p:nvSpPr>
@@ -9662,7 +7346,7 @@
                 <a:ea typeface="Cambria" pitchFamily="34" charset="-122"/>
                 <a:cs typeface="Cambria" pitchFamily="34" charset="-120"/>
               </a:rPr>
-              <a:t>Method (1): the system and the ladder</a:t>
+              <a:t>Finding: where a plan's 622 ms goes</a:t>
             </a:r>
             <a:endParaRPr lang="en-US" sz="2800" dirty="0"/>
           </a:p>
@@ -9684,8 +7368,8 @@
         </p:blipFill>
         <p:spPr>
           <a:xfrm>
-            <a:off x="457200" y="1165200"/>
-            <a:ext cx="5120640" cy="2607360"/>
+            <a:off x="797742" y="960120"/>
+            <a:ext cx="4805316" cy="2286000"/>
           </a:xfrm>
           <a:prstGeom prst="rect">
             <a:avLst/>
@@ -9700,8 +7384,8 @@
         </p:nvSpPr>
         <p:spPr>
           <a:xfrm>
-            <a:off x="5806440" y="1051560"/>
-            <a:ext cx="2926080" cy="3657600"/>
+            <a:off x="6126480" y="1051560"/>
+            <a:ext cx="2651760" cy="3566160"/>
           </a:xfrm>
           <a:prstGeom prst="rect">
             <a:avLst/>
@@ -9729,7 +7413,7 @@
                 <a:ea typeface="Calibri" pitchFamily="34" charset="-122"/>
                 <a:cs typeface="Calibri" pitchFamily="34" charset="-120"/>
               </a:rPr>
-              <a:t>R0 reference: CEM 300 x 30, FP32, re-encodes in every cost call.</a:t>
+              <a:t>33%: re-encoding the same two images 60 times per plan (telemetry: 60 encoder calls, 2 distinct images).</a:t>
             </a:r>
             <a:endParaRPr lang="en-US" sz="1150" dirty="0"/>
           </a:p>
@@ -9750,7 +7434,7 @@
                 <a:ea typeface="Calibri" pitchFamily="34" charset="-122"/>
                 <a:cs typeface="Calibri" pitchFamily="34" charset="-120"/>
               </a:rPr>
-              <a:t>R1 + encode once per plan, no host sync (exact).</a:t>
+              <a:t>59%: the search, 12.3 ms per iteration, 409 µs per layer for about 3 µs of arithmetic.</a:t>
             </a:r>
             <a:endParaRPr lang="en-US" sz="1150" dirty="0"/>
           </a:p>
@@ -9771,7 +7455,7 @@
                 <a:ea typeface="Calibri" pitchFamily="34" charset="-122"/>
                 <a:cs typeface="Calibri" pitchFamily="34" charset="-120"/>
               </a:rPr>
-              <a:t>R2 + bucketed iCEM: 300 -&gt; 60 candidates, 5 retained elites (planner).</a:t>
+              <a:t>7%: waiting on the CPU between iterations.</a:t>
             </a:r>
             <a:endParaRPr lang="en-US" sz="1150" dirty="0"/>
           </a:p>
@@ -9792,73 +7476,10 @@
                 <a:ea typeface="Calibri" pitchFamily="34" charset="-122"/>
                 <a:cs typeface="Calibri" pitchFamily="34" charset="-120"/>
               </a:rPr>
-              <a:t>R2b LeWM-Flash: + compile, TF32, BF16 (best PyTorch).</a:t>
+              <a:t>Under 1%: the policy code around the planner.</a:t>
             </a:r>
             <a:endParaRPr lang="en-US" sz="1150" dirty="0"/>
           </a:p>
-          <a:p>
-            <a:pPr marL="177800" indent="-177800">
-              <a:spcAft>
-                <a:spcPts val="700"/>
-              </a:spcAft>
-              <a:buSzPct val="100000"/>
-              <a:buChar char="•"/>
-            </a:pPr>
-            <a:r>
-              <a:rPr lang="en-US" sz="1150" dirty="0">
-                <a:solidFill>
-                  <a:srgbClr val="1B1B1B"/>
-                </a:solidFill>
-                <a:latin typeface="Calibri" pitchFamily="34" charset="0"/>
-                <a:ea typeface="Calibri" pitchFamily="34" charset="-122"/>
-                <a:cs typeface="Calibri" pitchFamily="34" charset="-120"/>
-              </a:rPr>
-              <a:t>R3 megakernel: predictor + all 30 iterations in one launch.</a:t>
-            </a:r>
-            <a:endParaRPr lang="en-US" sz="1150" dirty="0"/>
-          </a:p>
-          <a:p>
-            <a:pPr marL="177800" indent="-177800">
-              <a:spcAft>
-                <a:spcPts val="700"/>
-              </a:spcAft>
-              <a:buSzPct val="100000"/>
-              <a:buChar char="•"/>
-            </a:pPr>
-            <a:r>
-              <a:rPr lang="en-US" sz="1150" dirty="0">
-                <a:solidFill>
-                  <a:srgbClr val="1B1B1B"/>
-                </a:solidFill>
-                <a:latin typeface="Calibri" pitchFamily="34" charset="0"/>
-                <a:ea typeface="Calibri" pitchFamily="34" charset="-122"/>
-                <a:cs typeface="Calibri" pitchFamily="34" charset="-120"/>
-              </a:rPr>
-              <a:t>R4 + ViT encoder fused: one launch per plan.</a:t>
-            </a:r>
-            <a:endParaRPr lang="en-US" sz="1150" dirty="0"/>
-          </a:p>
-          <a:p>
-            <a:pPr marL="177800" indent="-177800">
-              <a:spcAft>
-                <a:spcPts val="700"/>
-              </a:spcAft>
-              <a:buSzPct val="100000"/>
-              <a:buChar char="•"/>
-            </a:pPr>
-            <a:r>
-              <a:rPr lang="en-US" sz="1150" dirty="0">
-                <a:solidFill>
-                  <a:srgbClr val="1B1B1B"/>
-                </a:solidFill>
-                <a:latin typeface="Calibri" pitchFamily="34" charset="0"/>
-                <a:ea typeface="Calibri" pitchFamily="34" charset="-122"/>
-                <a:cs typeface="Calibri" pitchFamily="34" charset="-120"/>
-              </a:rPr>
-              <a:t>Side rung R3-CEM: the megakernel running plain CEM.</a:t>
-            </a:r>
-            <a:endParaRPr lang="en-US" sz="1150" dirty="0"/>
-          </a:p>
         </p:txBody>
       </p:sp>
       <p:sp>
@@ -9869,8 +7490,8 @@
         </p:nvSpPr>
         <p:spPr>
           <a:xfrm>
-            <a:off x="457200" y="4069080"/>
-            <a:ext cx="5120640" cy="274320"/>
+            <a:off x="457200" y="3429000"/>
+            <a:ext cx="5486400" cy="274320"/>
           </a:xfrm>
           <a:prstGeom prst="rect">
             <a:avLst/>
@@ -9894,7 +7515,7 @@
                 <a:ea typeface="Calibri" pitchFamily="34" charset="-122"/>
                 <a:cs typeface="Calibri" pitchFamily="34" charset="-120"/>
               </a:rPr>
-              <a:t>LeWM on Push-T: ViT-tiny encoder, 6-layer AdaLN predictor, 5-step rollout, latent goal cost.</a:t>
+              <a:t>Top bar: reference planner, by stage. Bottom bar: LeWM-MK (Section 6). Stages without a direct measurement attributed by difference.</a:t>
             </a:r>
             <a:endParaRPr lang="en-US" sz="1000" dirty="0"/>
           </a:p>
@@ -9997,7 +7618,7 @@
                 <a:ea typeface="Cambria" pitchFamily="34" charset="-122"/>
                 <a:cs typeface="Cambria" pitchFamily="34" charset="-120"/>
               </a:rPr>
-              <a:t>Method (2): one kernel per plan</a:t>
+              <a:t>Pattern: the search is overhead, not work</a:t>
             </a:r>
             <a:endParaRPr lang="en-US" sz="2800" dirty="0"/>
           </a:p>
@@ -10019,8 +7640,8 @@
         </p:blipFill>
         <p:spPr>
           <a:xfrm>
-            <a:off x="457200" y="1199093"/>
-            <a:ext cx="5394960" cy="3088214"/>
+            <a:off x="606829" y="960120"/>
+            <a:ext cx="5187142" cy="2377440"/>
           </a:xfrm>
           <a:prstGeom prst="rect">
             <a:avLst/>
@@ -10029,14 +7650,258 @@
       </p:pic>
       <p:sp>
         <p:nvSpPr>
-          <p:cNvPr id="4" name="Text 1"/>
-          <p:cNvSpPr txBox="1"/>
-          <p:nvPr/>
-        </p:nvSpPr>
-        <p:spPr>
-          <a:xfrm>
-            <a:off x="6035040" y="1051560"/>
-            <a:ext cx="2743200" cy="3657600"/>
+          <p:cNvPr id="4" name="Shape 1"/>
+          <p:cNvSpPr/>
+          <p:nvPr/>
+        </p:nvSpPr>
+        <p:spPr>
+          <a:xfrm>
+            <a:off x="6217920" y="1051560"/>
+            <a:ext cx="1234440" cy="1051560"/>
+          </a:xfrm>
+          <a:prstGeom prst="roundRect">
+            <a:avLst>
+              <a:gd name="adj" fmla="val 6957"/>
+            </a:avLst>
+          </a:prstGeom>
+          <a:solidFill>
+            <a:srgbClr val="F3F4F6"/>
+          </a:solidFill>
+          <a:ln w="12700">
+            <a:solidFill>
+              <a:srgbClr val="F3F4F6"/>
+            </a:solidFill>
+            <a:prstDash val="solid"/>
+          </a:ln>
+        </p:spPr>
+      </p:sp>
+      <p:sp>
+        <p:nvSpPr>
+          <p:cNvPr id="5" name="Text 2"/>
+          <p:cNvSpPr txBox="1"/>
+          <p:nvPr/>
+        </p:nvSpPr>
+        <p:spPr>
+          <a:xfrm>
+            <a:off x="6355080" y="1143000"/>
+            <a:ext cx="960120" cy="578358"/>
+          </a:xfrm>
+          <a:prstGeom prst="rect">
+            <a:avLst/>
+          </a:prstGeom>
+          <a:noFill/>
+          <a:ln/>
+        </p:spPr>
+        <p:txBody>
+          <a:bodyPr wrap="square" lIns="0" tIns="0" rIns="0" bIns="0" rtlCol="0" anchor="ctr"/>
+          <a:lstStyle/>
+          <a:p>
+            <a:pPr algn="ctr" indent="0" marL="0">
+              <a:buNone/>
+            </a:pPr>
+            <a:r>
+              <a:rPr lang="en-US" sz="2600" b="1" dirty="0">
+                <a:solidFill>
+                  <a:srgbClr val="EB6834"/>
+                </a:solidFill>
+                <a:latin typeface="Cambria" pitchFamily="34" charset="0"/>
+                <a:ea typeface="Cambria" pitchFamily="34" charset="-122"/>
+                <a:cs typeface="Cambria" pitchFamily="34" charset="-120"/>
+              </a:rPr>
+              <a:t>99%</a:t>
+            </a:r>
+            <a:endParaRPr lang="en-US" sz="2600" dirty="0"/>
+          </a:p>
+        </p:txBody>
+      </p:sp>
+      <p:sp>
+        <p:nvSpPr>
+          <p:cNvPr id="6" name="Text 3"/>
+          <p:cNvSpPr txBox="1"/>
+          <p:nvPr/>
+        </p:nvSpPr>
+        <p:spPr>
+          <a:xfrm>
+            <a:off x="6355080" y="1682496"/>
+            <a:ext cx="960120" cy="399593"/>
+          </a:xfrm>
+          <a:prstGeom prst="rect">
+            <a:avLst/>
+          </a:prstGeom>
+          <a:noFill/>
+          <a:ln/>
+        </p:spPr>
+        <p:txBody>
+          <a:bodyPr wrap="square" lIns="0" tIns="0" rIns="0" bIns="0" rtlCol="0" anchor="t"/>
+          <a:lstStyle/>
+          <a:p>
+            <a:pPr algn="ctr" indent="0" marL="0">
+              <a:buNone/>
+            </a:pPr>
+            <a:r>
+              <a:rPr lang="en-US" sz="1000" dirty="0">
+                <a:solidFill>
+                  <a:srgbClr val="5A5A5A"/>
+                </a:solidFill>
+                <a:latin typeface="Calibri" pitchFamily="34" charset="0"/>
+                <a:ea typeface="Calibri" pitchFamily="34" charset="-122"/>
+                <a:cs typeface="Calibri" pitchFamily="34" charset="-120"/>
+              </a:rPr>
+              <a:t>of an eager call</a:t>
+            </a:r>
+            <a:endParaRPr lang="en-US" sz="1000" dirty="0"/>
+          </a:p>
+          <a:p>
+            <a:pPr algn="ctr" indent="0" marL="0">
+              <a:buNone/>
+            </a:pPr>
+            <a:r>
+              <a:rPr lang="en-US" sz="1000" dirty="0">
+                <a:solidFill>
+                  <a:srgbClr val="5A5A5A"/>
+                </a:solidFill>
+                <a:latin typeface="Calibri" pitchFamily="34" charset="0"/>
+                <a:ea typeface="Calibri" pitchFamily="34" charset="-122"/>
+                <a:cs typeface="Calibri" pitchFamily="34" charset="-120"/>
+              </a:rPr>
+              <a:t>is fixed cost</a:t>
+            </a:r>
+            <a:endParaRPr lang="en-US" sz="1000" dirty="0"/>
+          </a:p>
+        </p:txBody>
+      </p:sp>
+      <p:sp>
+        <p:nvSpPr>
+          <p:cNvPr id="7" name="Shape 4"/>
+          <p:cNvSpPr/>
+          <p:nvPr/>
+        </p:nvSpPr>
+        <p:spPr>
+          <a:xfrm>
+            <a:off x="7543800" y="1051560"/>
+            <a:ext cx="1234440" cy="1051560"/>
+          </a:xfrm>
+          <a:prstGeom prst="roundRect">
+            <a:avLst>
+              <a:gd name="adj" fmla="val 6957"/>
+            </a:avLst>
+          </a:prstGeom>
+          <a:solidFill>
+            <a:srgbClr val="F3F4F6"/>
+          </a:solidFill>
+          <a:ln w="12700">
+            <a:solidFill>
+              <a:srgbClr val="F3F4F6"/>
+            </a:solidFill>
+            <a:prstDash val="solid"/>
+          </a:ln>
+        </p:spPr>
+      </p:sp>
+      <p:sp>
+        <p:nvSpPr>
+          <p:cNvPr id="8" name="Text 5"/>
+          <p:cNvSpPr txBox="1"/>
+          <p:nvPr/>
+        </p:nvSpPr>
+        <p:spPr>
+          <a:xfrm>
+            <a:off x="7680960" y="1143000"/>
+            <a:ext cx="960120" cy="578358"/>
+          </a:xfrm>
+          <a:prstGeom prst="rect">
+            <a:avLst/>
+          </a:prstGeom>
+          <a:noFill/>
+          <a:ln/>
+        </p:spPr>
+        <p:txBody>
+          <a:bodyPr wrap="square" lIns="0" tIns="0" rIns="0" bIns="0" rtlCol="0" anchor="ctr"/>
+          <a:lstStyle/>
+          <a:p>
+            <a:pPr algn="ctr" indent="0" marL="0">
+              <a:buNone/>
+            </a:pPr>
+            <a:r>
+              <a:rPr lang="en-US" sz="2400" b="1" dirty="0">
+                <a:solidFill>
+                  <a:srgbClr val="EB6834"/>
+                </a:solidFill>
+                <a:latin typeface="Cambria" pitchFamily="34" charset="0"/>
+                <a:ea typeface="Cambria" pitchFamily="34" charset="-122"/>
+                <a:cs typeface="Cambria" pitchFamily="34" charset="-120"/>
+              </a:rPr>
+              <a:t>1.01×</a:t>
+            </a:r>
+            <a:endParaRPr lang="en-US" sz="2400" dirty="0"/>
+          </a:p>
+        </p:txBody>
+      </p:sp>
+      <p:sp>
+        <p:nvSpPr>
+          <p:cNvPr id="9" name="Text 6"/>
+          <p:cNvSpPr txBox="1"/>
+          <p:nvPr/>
+        </p:nvSpPr>
+        <p:spPr>
+          <a:xfrm>
+            <a:off x="7680960" y="1682496"/>
+            <a:ext cx="960120" cy="399593"/>
+          </a:xfrm>
+          <a:prstGeom prst="rect">
+            <a:avLst/>
+          </a:prstGeom>
+          <a:noFill/>
+          <a:ln/>
+        </p:spPr>
+        <p:txBody>
+          <a:bodyPr wrap="square" lIns="0" tIns="0" rIns="0" bIns="0" rtlCol="0" anchor="t"/>
+          <a:lstStyle/>
+          <a:p>
+            <a:pPr algn="ctr" indent="0" marL="0">
+              <a:buNone/>
+            </a:pPr>
+            <a:r>
+              <a:rPr lang="en-US" sz="1000" dirty="0">
+                <a:solidFill>
+                  <a:srgbClr val="5A5A5A"/>
+                </a:solidFill>
+                <a:latin typeface="Calibri" pitchFamily="34" charset="0"/>
+                <a:ea typeface="Calibri" pitchFamily="34" charset="-122"/>
+                <a:cs typeface="Calibri" pitchFamily="34" charset="-120"/>
+              </a:rPr>
+              <a:t>predicted iCEM</a:t>
+            </a:r>
+            <a:endParaRPr lang="en-US" sz="1000" dirty="0"/>
+          </a:p>
+          <a:p>
+            <a:pPr algn="ctr" indent="0" marL="0">
+              <a:buNone/>
+            </a:pPr>
+            <a:r>
+              <a:rPr lang="en-US" sz="1000" dirty="0">
+                <a:solidFill>
+                  <a:srgbClr val="5A5A5A"/>
+                </a:solidFill>
+                <a:latin typeface="Calibri" pitchFamily="34" charset="0"/>
+                <a:ea typeface="Calibri" pitchFamily="34" charset="-122"/>
+                <a:cs typeface="Calibri" pitchFamily="34" charset="-120"/>
+              </a:rPr>
+              <a:t>gain, eager</a:t>
+            </a:r>
+            <a:endParaRPr lang="en-US" sz="1000" dirty="0"/>
+          </a:p>
+        </p:txBody>
+      </p:sp>
+      <p:sp>
+        <p:nvSpPr>
+          <p:cNvPr id="10" name="Text 7"/>
+          <p:cNvSpPr txBox="1"/>
+          <p:nvPr/>
+        </p:nvSpPr>
+        <p:spPr>
+          <a:xfrm>
+            <a:off x="6217920" y="2286000"/>
+            <a:ext cx="2560320" cy="2377440"/>
           </a:xfrm>
           <a:prstGeom prst="rect">
             <a:avLst/>
@@ -10056,7 +7921,7 @@
               <a:buChar char="•"/>
             </a:pPr>
             <a:r>
-              <a:rPr lang="en-US" sz="1150" dirty="0">
+              <a:rPr lang="en-US" sz="1100" dirty="0">
                 <a:solidFill>
                   <a:srgbClr val="1B1B1B"/>
                 </a:solidFill>
@@ -10064,9 +7929,9 @@
                 <a:ea typeface="Calibri" pitchFamily="34" charset="-122"/>
                 <a:cs typeface="Calibri" pitchFamily="34" charset="-120"/>
               </a:rPr>
-              <a:t>Persistent grid: one CTA per SM, clusters of 8 or 16, grid barriers between iCEM phases; sampling (Philox), top-k and elite updates in the kernel.</a:t>
-            </a:r>
-            <a:endParaRPr lang="en-US" sz="1150" dirty="0"/>
+              <a:t>Fitted model: 20.0 ms fixed + 0.10 ms per 100 candidates. Cost does not depend on how much work is done.</a:t>
+            </a:r>
+            <a:endParaRPr lang="en-US" sz="1100" dirty="0"/>
           </a:p>
           <a:p>
             <a:pPr marL="177800" indent="-177800">
@@ -10077,7 +7942,7 @@
               <a:buChar char="•"/>
             </a:pPr>
             <a:r>
-              <a:rPr lang="en-US" sz="1150" dirty="0">
+              <a:rPr lang="en-US" sz="1100" dirty="0">
                 <a:solidFill>
                   <a:srgbClr val="1B1B1B"/>
                 </a:solidFill>
@@ -10085,9 +7950,9 @@
                 <a:ea typeface="Calibri" pitchFamily="34" charset="-122"/>
                 <a:cs typeface="Calibri" pitchFamily="34" charset="-120"/>
               </a:rPr>
-              <a:t>Cluster tensor parallelism: each CTA owns heads and MLP slices; row owners reduce and broadcast over distributed shared memory.</a:t>
-            </a:r>
-            <a:endParaRPr lang="en-US" sz="1150" dirty="0"/>
+              <a:t>So cutting candidates (iCEM) cannot help here: predicted 1.01×, observed 0.92×.</a:t>
+            </a:r>
+            <a:endParaRPr lang="en-US" sz="1100" dirty="0"/>
           </a:p>
           <a:p>
             <a:pPr marL="177800" indent="-177800">
@@ -10098,7 +7963,7 @@
               <a:buChar char="•"/>
             </a:pPr>
             <a:r>
-              <a:rPr lang="en-US" sz="1150" dirty="0">
+              <a:rPr lang="en-US" sz="1100" dirty="0">
                 <a:solidFill>
                   <a:srgbClr val="1B1B1B"/>
                 </a:solidFill>
@@ -10106,36 +7971,54 @@
                 <a:ea typeface="Calibri" pitchFamily="34" charset="-122"/>
                 <a:cs typeface="Calibri" pitchFamily="34" charset="-120"/>
               </a:rPr>
-              <a:t>Weights as a static stream: pre-swizzled 24 KB panels, cp.async.bulk into a self-refilling ring, no producer warp (keeps 255 registers).</a:t>
-            </a:r>
-            <a:endParaRPr lang="en-US" sz="1150" dirty="0"/>
-          </a:p>
-          <a:p>
-            <a:pPr marL="177800" indent="-177800">
-              <a:spcAft>
-                <a:spcPts val="700"/>
-              </a:spcAft>
-              <a:buSzPct val="100000"/>
-              <a:buChar char="•"/>
-            </a:pPr>
-            <a:r>
-              <a:rPr lang="en-US" sz="1150" dirty="0">
-                <a:solidFill>
-                  <a:srgbClr val="1B1B1B"/>
-                </a:solidFill>
-                <a:latin typeface="Calibri" pitchFamily="34" charset="0"/>
-                <a:ea typeface="Calibri" pitchFamily="34" charset="-122"/>
-                <a:cs typeface="Calibri" pitchFamily="34" charset="-120"/>
-              </a:rPr>
-              <a:t>Exact KV reuse; BF16 operands with FP32 accumulation, residual and costs.</a:t>
-            </a:r>
-            <a:endParaRPr lang="en-US" sz="1150" dirty="0"/>
-          </a:p>
-        </p:txBody>
-      </p:sp>
-      <p:sp>
-        <p:nvSpPr>
-          <p:cNvPr id="6" name="Text 2"/>
+              <a:t>Only an execution with little fixed cost turns fewer candidates into less time.</a:t>
+            </a:r>
+            <a:endParaRPr lang="en-US" sz="1100" dirty="0"/>
+          </a:p>
+        </p:txBody>
+      </p:sp>
+      <p:sp>
+        <p:nvSpPr>
+          <p:cNvPr id="11" name="Text 8"/>
+          <p:cNvSpPr txBox="1"/>
+          <p:nvPr/>
+        </p:nvSpPr>
+        <p:spPr>
+          <a:xfrm>
+            <a:off x="457200" y="3429000"/>
+            <a:ext cx="5486400" cy="274320"/>
+          </a:xfrm>
+          <a:prstGeom prst="rect">
+            <a:avLst/>
+          </a:prstGeom>
+          <a:noFill/>
+          <a:ln/>
+        </p:spPr>
+        <p:txBody>
+          <a:bodyPr wrap="square" lIns="0" tIns="0" rIns="0" bIns="0" rtlCol="0" anchor="ctr"/>
+          <a:lstStyle/>
+          <a:p>
+            <a:pPr indent="0" marL="0">
+              <a:buNone/>
+            </a:pPr>
+            <a:r>
+              <a:rPr lang="en-US" sz="1000" i="1" dirty="0">
+                <a:solidFill>
+                  <a:srgbClr val="5A5A5A"/>
+                </a:solidFill>
+                <a:latin typeface="Calibri" pitchFamily="34" charset="0"/>
+                <a:ea typeface="Calibri" pitchFamily="34" charset="-122"/>
+                <a:cs typeface="Calibri" pitchFamily="34" charset="-120"/>
+              </a:rPr>
+              <a:t>Latency of one scoring call vs number of candidates, with fitted lines a + b·N.</a:t>
+            </a:r>
+            <a:endParaRPr lang="en-US" sz="1000" dirty="0"/>
+          </a:p>
+        </p:txBody>
+      </p:sp>
+      <p:sp>
+        <p:nvSpPr>
+          <p:cNvPr id="13" name="Text 9"/>
           <p:cNvSpPr txBox="1"/>
           <p:nvPr/>
         </p:nvSpPr>
@@ -10230,88 +8113,46 @@
                 <a:ea typeface="Cambria" pitchFamily="34" charset="-122"/>
                 <a:cs typeface="Cambria" pitchFamily="34" charset="-120"/>
               </a:rPr>
-              <a:t>Method (3): measuring what a robot would see</a:t>
+              <a:t>Solution: LeWM-MK, one GPU program per plan</a:t>
             </a:r>
             <a:endParaRPr lang="en-US" sz="2800" dirty="0"/>
           </a:p>
         </p:txBody>
       </p:sp>
-      <p:sp>
-        <p:nvSpPr>
-          <p:cNvPr id="3" name="Shape 1"/>
-          <p:cNvSpPr/>
-          <p:nvPr/>
-        </p:nvSpPr>
-        <p:spPr>
-          <a:xfrm>
-            <a:off x="457200" y="1097280"/>
-            <a:ext cx="2651760" cy="2286000"/>
-          </a:xfrm>
-          <a:prstGeom prst="roundRect">
-            <a:avLst>
-              <a:gd name="adj" fmla="val 3200"/>
-            </a:avLst>
-          </a:prstGeom>
-          <a:solidFill>
-            <a:srgbClr val="E9F1FC"/>
-          </a:solidFill>
-          <a:ln w="12700">
-            <a:solidFill>
-              <a:srgbClr val="E9F1FC"/>
-            </a:solidFill>
-            <a:prstDash val="solid"/>
-          </a:ln>
-        </p:spPr>
-      </p:sp>
-      <p:sp>
-        <p:nvSpPr>
-          <p:cNvPr id="4" name="Text 2"/>
-          <p:cNvSpPr txBox="1"/>
-          <p:nvPr/>
-        </p:nvSpPr>
-        <p:spPr>
-          <a:xfrm>
-            <a:off x="621792" y="1207008"/>
-            <a:ext cx="2331720" cy="384048"/>
-          </a:xfrm>
-          <a:prstGeom prst="rect">
-            <a:avLst/>
-          </a:prstGeom>
-          <a:noFill/>
-          <a:ln/>
-        </p:spPr>
-        <p:txBody>
-          <a:bodyPr wrap="square" lIns="0" tIns="0" rIns="0" bIns="0" rtlCol="0" anchor="ctr"/>
-          <a:lstStyle/>
-          <a:p>
-            <a:pPr indent="0" marL="0">
-              <a:buNone/>
-            </a:pPr>
-            <a:r>
-              <a:rPr lang="en-US" sz="1500" b="1" dirty="0">
-                <a:solidFill>
-                  <a:srgbClr val="14213D"/>
-                </a:solidFill>
-                <a:latin typeface="Cambria" pitchFamily="34" charset="0"/>
-                <a:ea typeface="Cambria" pitchFamily="34" charset="-122"/>
-                <a:cs typeface="Cambria" pitchFamily="34" charset="-120"/>
-              </a:rPr>
-              <a:t>Batch-1 latency</a:t>
-            </a:r>
-            <a:endParaRPr lang="en-US" sz="1500" dirty="0"/>
-          </a:p>
-        </p:txBody>
-      </p:sp>
-      <p:sp>
-        <p:nvSpPr>
-          <p:cNvPr id="5" name="Text 3"/>
-          <p:cNvSpPr txBox="1"/>
-          <p:nvPr/>
-        </p:nvSpPr>
-        <p:spPr>
-          <a:xfrm>
-            <a:off x="621792" y="1627632"/>
-            <a:ext cx="2331720" cy="1645920"/>
+      <p:pic>
+        <p:nvPicPr>
+          <p:cNvPr id="3" name="Image 0" descr="preencoded.png">    </p:cNvPr>
+          <p:cNvPicPr>
+            <a:picLocks noChangeAspect="1"/>
+          </p:cNvPicPr>
+          <p:nvPr/>
+        </p:nvPicPr>
+        <p:blipFill>
+          <a:blip r:embed="rId1"/>
+          <a:stretch>
+            <a:fillRect/>
+          </a:stretch>
+        </p:blipFill>
+        <p:spPr>
+          <a:xfrm>
+            <a:off x="457200" y="1341764"/>
+            <a:ext cx="5394960" cy="2802873"/>
+          </a:xfrm>
+          <a:prstGeom prst="rect">
+            <a:avLst/>
+          </a:prstGeom>
+        </p:spPr>
+      </p:pic>
+      <p:sp>
+        <p:nvSpPr>
+          <p:cNvPr id="4" name="Text 1"/>
+          <p:cNvSpPr txBox="1"/>
+          <p:nvPr/>
+        </p:nvSpPr>
+        <p:spPr>
+          <a:xfrm>
+            <a:off x="6035040" y="1051560"/>
+            <a:ext cx="2743200" cy="3657600"/>
           </a:xfrm>
           <a:prstGeom prst="rect">
             <a:avLst/>
@@ -10323,8 +8164,12 @@
           <a:bodyPr wrap="square" lIns="0" tIns="0" rIns="0" bIns="0" rtlCol="0" anchor="t"/>
           <a:lstStyle/>
           <a:p>
-            <a:pPr indent="0" marL="0">
-              <a:buNone/>
+            <a:pPr marL="177800" indent="-177800">
+              <a:spcAft>
+                <a:spcPts val="700"/>
+              </a:spcAft>
+              <a:buSzPct val="100000"/>
+              <a:buChar char="•"/>
             </a:pPr>
             <a:r>
               <a:rPr lang="en-US" sz="1150" dirty="0">
@@ -10335,101 +8180,17 @@
                 <a:ea typeface="Calibri" pitchFamily="34" charset="-122"/>
                 <a:cs typeface="Calibri" pitchFamily="34" charset="-120"/>
               </a:rPr>
-              <a:t>The whole replanning call (preprocess, encode, solve, action to host) with CUDA events; 61 one-robot episodes per rung, first dropped; 72-76 plans; median with bootstrap CI and p90.</a:t>
+              <a:t>Encode each image once; cache the goal for the episode.</a:t>
             </a:r>
             <a:endParaRPr lang="en-US" sz="1150" dirty="0"/>
           </a:p>
-        </p:txBody>
-      </p:sp>
-      <p:sp>
-        <p:nvSpPr>
-          <p:cNvPr id="6" name="Shape 4"/>
-          <p:cNvSpPr/>
-          <p:nvPr/>
-        </p:nvSpPr>
-        <p:spPr>
-          <a:xfrm>
-            <a:off x="3291840" y="1097280"/>
-            <a:ext cx="2651760" cy="2286000"/>
-          </a:xfrm>
-          <a:prstGeom prst="roundRect">
-            <a:avLst>
-              <a:gd name="adj" fmla="val 3200"/>
-            </a:avLst>
-          </a:prstGeom>
-          <a:solidFill>
-            <a:srgbClr val="E9F1FC"/>
-          </a:solidFill>
-          <a:ln w="12700">
-            <a:solidFill>
-              <a:srgbClr val="E9F1FC"/>
-            </a:solidFill>
-            <a:prstDash val="solid"/>
-          </a:ln>
-        </p:spPr>
-      </p:sp>
-      <p:sp>
-        <p:nvSpPr>
-          <p:cNvPr id="7" name="Text 5"/>
-          <p:cNvSpPr txBox="1"/>
-          <p:nvPr/>
-        </p:nvSpPr>
-        <p:spPr>
-          <a:xfrm>
-            <a:off x="3456432" y="1207008"/>
-            <a:ext cx="2331720" cy="384048"/>
-          </a:xfrm>
-          <a:prstGeom prst="rect">
-            <a:avLst/>
-          </a:prstGeom>
-          <a:noFill/>
-          <a:ln/>
-        </p:spPr>
-        <p:txBody>
-          <a:bodyPr wrap="square" lIns="0" tIns="0" rIns="0" bIns="0" rtlCol="0" anchor="ctr"/>
-          <a:lstStyle/>
-          <a:p>
-            <a:pPr indent="0" marL="0">
-              <a:buNone/>
-            </a:pPr>
-            <a:r>
-              <a:rPr lang="en-US" sz="1500" b="1" dirty="0">
-                <a:solidFill>
-                  <a:srgbClr val="14213D"/>
-                </a:solidFill>
-                <a:latin typeface="Cambria" pitchFamily="34" charset="0"/>
-                <a:ea typeface="Cambria" pitchFamily="34" charset="-122"/>
-                <a:cs typeface="Cambria" pitchFamily="34" charset="-120"/>
-              </a:rPr>
-              <a:t>300 paired episodes</a:t>
-            </a:r>
-            <a:endParaRPr lang="en-US" sz="1500" dirty="0"/>
-          </a:p>
-        </p:txBody>
-      </p:sp>
-      <p:sp>
-        <p:nvSpPr>
-          <p:cNvPr id="8" name="Text 6"/>
-          <p:cNvSpPr txBox="1"/>
-          <p:nvPr/>
-        </p:nvSpPr>
-        <p:spPr>
-          <a:xfrm>
-            <a:off x="3456432" y="1627632"/>
-            <a:ext cx="2331720" cy="1645920"/>
-          </a:xfrm>
-          <a:prstGeom prst="rect">
-            <a:avLst/>
-          </a:prstGeom>
-          <a:noFill/>
-          <a:ln/>
-        </p:spPr>
-        <p:txBody>
-          <a:bodyPr wrap="square" lIns="0" tIns="0" rIns="0" bIns="0" rtlCol="0" anchor="t"/>
-          <a:lstStyle/>
-          <a:p>
-            <a:pPr indent="0" marL="0">
-              <a:buNone/>
+          <a:p>
+            <a:pPr marL="177800" indent="-177800">
+              <a:spcAft>
+                <a:spcPts val="700"/>
+              </a:spcAft>
+              <a:buSzPct val="100000"/>
+              <a:buChar char="•"/>
             </a:pPr>
             <a:r>
               <a:rPr lang="en-US" sz="1150" dirty="0">
@@ -10440,101 +8201,17 @@
                 <a:ea typeface="Calibri" pitchFamily="34" charset="-122"/>
                 <a:cs typeface="Calibri" pitchFamily="34" charset="-120"/>
               </a:rPr>
-              <a:t>Push-T seeds 0-2 x 100 episodes; start states fixed by seed, so every rung sees the same episodes. Wilson intervals, exact McNemar, paired bootstrap of the difference.</a:t>
+              <a:t>iCEM search: 2,820 instead of 9,000 imagined futures.</a:t>
             </a:r>
             <a:endParaRPr lang="en-US" sz="1150" dirty="0"/>
           </a:p>
-        </p:txBody>
-      </p:sp>
-      <p:sp>
-        <p:nvSpPr>
-          <p:cNvPr id="9" name="Shape 7"/>
-          <p:cNvSpPr/>
-          <p:nvPr/>
-        </p:nvSpPr>
-        <p:spPr>
-          <a:xfrm>
-            <a:off x="6126480" y="1097280"/>
-            <a:ext cx="2651760" cy="2286000"/>
-          </a:xfrm>
-          <a:prstGeom prst="roundRect">
-            <a:avLst>
-              <a:gd name="adj" fmla="val 3200"/>
-            </a:avLst>
-          </a:prstGeom>
-          <a:solidFill>
-            <a:srgbClr val="E9F1FC"/>
-          </a:solidFill>
-          <a:ln w="12700">
-            <a:solidFill>
-              <a:srgbClr val="E9F1FC"/>
-            </a:solidFill>
-            <a:prstDash val="solid"/>
-          </a:ln>
-        </p:spPr>
-      </p:sp>
-      <p:sp>
-        <p:nvSpPr>
-          <p:cNvPr id="10" name="Text 8"/>
-          <p:cNvSpPr txBox="1"/>
-          <p:nvPr/>
-        </p:nvSpPr>
-        <p:spPr>
-          <a:xfrm>
-            <a:off x="6291072" y="1207008"/>
-            <a:ext cx="2331720" cy="384048"/>
-          </a:xfrm>
-          <a:prstGeom prst="rect">
-            <a:avLst/>
-          </a:prstGeom>
-          <a:noFill/>
-          <a:ln/>
-        </p:spPr>
-        <p:txBody>
-          <a:bodyPr wrap="square" lIns="0" tIns="0" rIns="0" bIns="0" rtlCol="0" anchor="ctr"/>
-          <a:lstStyle/>
-          <a:p>
-            <a:pPr indent="0" marL="0">
-              <a:buNone/>
-            </a:pPr>
-            <a:r>
-              <a:rPr lang="en-US" sz="1500" b="1" dirty="0">
-                <a:solidFill>
-                  <a:srgbClr val="14213D"/>
-                </a:solidFill>
-                <a:latin typeface="Cambria" pitchFamily="34" charset="0"/>
-                <a:ea typeface="Cambria" pitchFamily="34" charset="-122"/>
-                <a:cs typeface="Cambria" pitchFamily="34" charset="-120"/>
-              </a:rPr>
-              <a:t>Numerical acceptance</a:t>
-            </a:r>
-            <a:endParaRPr lang="en-US" sz="1500" dirty="0"/>
-          </a:p>
-        </p:txBody>
-      </p:sp>
-      <p:sp>
-        <p:nvSpPr>
-          <p:cNvPr id="11" name="Text 9"/>
-          <p:cNvSpPr txBox="1"/>
-          <p:nvPr/>
-        </p:nvSpPr>
-        <p:spPr>
-          <a:xfrm>
-            <a:off x="6291072" y="1627632"/>
-            <a:ext cx="2331720" cy="1645920"/>
-          </a:xfrm>
-          <a:prstGeom prst="rect">
-            <a:avLst/>
-          </a:prstGeom>
-          <a:noFill/>
-          <a:ln/>
-        </p:spPr>
-        <p:txBody>
-          <a:bodyPr wrap="square" lIns="0" tIns="0" rIns="0" bIns="0" rtlCol="0" anchor="t"/>
-          <a:lstStyle/>
-          <a:p>
-            <a:pPr indent="0" marL="0">
-              <a:buNone/>
+          <a:p>
+            <a:pPr marL="177800" indent="-177800">
+              <a:spcAft>
+                <a:spcPts val="700"/>
+              </a:spcAft>
+              <a:buSzPct val="100000"/>
+              <a:buChar char="•"/>
             </a:pPr>
             <a:r>
               <a:rPr lang="en-US" sz="1150" dirty="0">
@@ -10545,52 +8222,20 @@
                 <a:ea typeface="Calibri" pitchFamily="34" charset="-122"/>
                 <a:cs typeface="Calibri" pitchFamily="34" charset="-120"/>
               </a:rPr>
-              <a:t>Before any closed loop: cost error and top-30 overlap against FP32 on identical candidates; the bar is the accepted BF16 autocast path. Encoder: embedding error and cost error.</a:t>
+              <a:t>Whole plan in one persistent kernel: sampling, rollouts, scoring, elite selection, encoder; the CPU waits once.</a:t>
             </a:r>
             <a:endParaRPr lang="en-US" sz="1150" dirty="0"/>
           </a:p>
-        </p:txBody>
-      </p:sp>
-      <p:sp>
-        <p:nvSpPr>
-          <p:cNvPr id="12" name="Text 10"/>
-          <p:cNvSpPr txBox="1"/>
-          <p:nvPr/>
-        </p:nvSpPr>
-        <p:spPr>
-          <a:xfrm>
-            <a:off x="457200" y="3611880"/>
-            <a:ext cx="8229600" cy="1097280"/>
-          </a:xfrm>
-          <a:prstGeom prst="rect">
-            <a:avLst/>
-          </a:prstGeom>
-          <a:noFill/>
-          <a:ln/>
-        </p:spPr>
-        <p:txBody>
-          <a:bodyPr wrap="square" lIns="0" tIns="0" rIns="0" bIns="0" rtlCol="0" anchor="t"/>
-          <a:lstStyle/>
-          <a:p>
-            <a:pPr indent="0" marL="0">
-              <a:buNone/>
-            </a:pPr>
-            <a:r>
-              <a:rPr lang="en-US" sz="1200" b="1" dirty="0">
-                <a:solidFill>
-                  <a:srgbClr val="14213D"/>
-                </a:solidFill>
-                <a:latin typeface="Calibri" pitchFamily="34" charset="0"/>
-                <a:ea typeface="Calibri" pitchFamily="34" charset="-122"/>
-                <a:cs typeface="Calibri" pitchFamily="34" charset="-120"/>
-              </a:rPr>
-              <a:t>What 300 pairs can see. </a:t>
-            </a:r>
-            <a:pPr indent="0" marL="0">
-              <a:buNone/>
-            </a:pPr>
-            <a:r>
-              <a:rPr lang="en-US" sz="1200" dirty="0">
+          <a:p>
+            <a:pPr marL="177800" indent="-177800">
+              <a:spcAft>
+                <a:spcPts val="700"/>
+              </a:spcAft>
+              <a:buSzPct val="100000"/>
+              <a:buChar char="•"/>
+            </a:pPr>
+            <a:r>
+              <a:rPr lang="en-US" sz="1150" dirty="0">
                 <a:solidFill>
                   <a:srgbClr val="1B1B1B"/>
                 </a:solidFill>
@@ -10598,15 +8243,36 @@
                 <a:ea typeface="Calibri" pitchFamily="34" charset="-122"/>
                 <a:cs typeface="Calibri" pitchFamily="34" charset="-120"/>
               </a:rPr>
-              <a:t>At the observed 12-13% discordance, a paired difference of about 6 points is detectable at 80% power; 2 points would need about 2,400 pairs. Every accuracy claim in this work is a claim of no detectable change at that resolution.</a:t>
-            </a:r>
-            <a:endParaRPr lang="en-US" sz="1200" dirty="0"/>
-          </a:p>
-        </p:txBody>
-      </p:sp>
-      <p:sp>
-        <p:nvSpPr>
-          <p:cNvPr id="14" name="Text 11"/>
+              <a:t>Small model spread across a 16-processor cluster; partial results exchanged on chip; barrier 3.6 → 0.65 µs.</a:t>
+            </a:r>
+            <a:endParaRPr lang="en-US" sz="1150" dirty="0"/>
+          </a:p>
+          <a:p>
+            <a:pPr marL="177800" indent="-177800">
+              <a:spcAft>
+                <a:spcPts val="700"/>
+              </a:spcAft>
+              <a:buSzPct val="100000"/>
+              <a:buChar char="•"/>
+            </a:pPr>
+            <a:r>
+              <a:rPr lang="en-US" sz="1150" dirty="0">
+                <a:solidFill>
+                  <a:srgbClr val="1B1B1B"/>
+                </a:solidFill>
+                <a:latin typeface="Calibri" pitchFamily="34" charset="0"/>
+                <a:ea typeface="Calibri" pitchFamily="34" charset="-122"/>
+                <a:cs typeface="Calibri" pitchFamily="34" charset="-120"/>
+              </a:rPr>
+              <a:t>Weights streamed ahead of use; BF16 inputs, FP32 accumulation.</a:t>
+            </a:r>
+            <a:endParaRPr lang="en-US" sz="1150" dirty="0"/>
+          </a:p>
+        </p:txBody>
+      </p:sp>
+      <p:sp>
+        <p:nvSpPr>
+          <p:cNvPr id="6" name="Text 2"/>
           <p:cNvSpPr txBox="1"/>
           <p:nvPr/>
         </p:nvSpPr>

--- a/docs/paper/presentation.pptx
+++ b/docs/paper/presentation.pptx
@@ -515,7 +515,7 @@
           <a:p>
             <a:r>
               <a:rPr lang="en-US" dirty="0"/>
-              <a:t>This project asks why a robot that plans with an AI world model is slow, finds the answer in data, and fixes it. The title is the outcome: planning fast enough for a control loop, with the same model and the same success.</a:t>
+              <a:t>This study profiles the inference latency of a world-model planner, identifies its bottlenecks from measured data, and evaluates a fused GPU implementation that removes them without retraining the model.</a:t>
             </a:r>
             <a:endParaRPr lang="en-US" dirty="0"/>
           </a:p>
@@ -603,7 +603,7 @@
           <a:p>
             <a:r>
               <a:rPr lang="en-US" dirty="0"/>
-              <a:t>The headline. Thirteen times faster than the reference, and almost four times faster than a PyTorch implementation that already uses every standard trick. Just as important for a controller, it is predictable: the spread is under a millisecond.</a:t>
+              <a:t>Latency is reduced 13.4-fold relative to the reference and 3.9-fold relative to an optimised PyTorch implementation using compilation, CUDA Graphs and BF16. Latency variability is also reduced: the interquartile range is 0.7 ms.</a:t>
             </a:r>
             <a:endParaRPr lang="en-US" dirty="0"/>
           </a:p>
@@ -691,7 +691,7 @@
           <a:p>
             <a:r>
               <a:rPr lang="en-US" dirty="0"/>
-              <a:t>The guard rail. The robot succeeds as often as before, within what 300 paired episodes can resolve, about six points. The kernel's arithmetic error matches the half-precision arithmetic that was already accepted.</a:t>
+              <a:t>No detectable change in task success at the resolution of 300 paired episodes (approximately 6 percentage points at 80% power). Numerical error relative to FP32 is within the range of the accepted BF16 implementation.</a:t>
             </a:r>
             <a:endParaRPr lang="en-US" dirty="0"/>
           </a:p>
@@ -779,7 +779,7 @@
           <a:p>
             <a:r>
               <a:rPr lang="en-US" dirty="0"/>
-              <a:t>The objectives were met, and the limits are stated with them. The speed-up is large and stable; the claim about success is bounded by the sample size; the numbers are specific to this model and GPU even though the mechanism is general.</a:t>
+              <a:t>All four objectives were met. The latency reduction is large and reproducible; the task-success result is bounded by sample size; the measured values are specific to this model and GPU, while the identified mechanism is general.</a:t>
             </a:r>
             <a:endParaRPr lang="en-US" dirty="0"/>
           </a:p>
@@ -867,7 +867,7 @@
           <a:p>
             <a:r>
               <a:rPr lang="en-US" dirty="0"/>
-              <a:t>Four directions. The first is the immediate payoff: a fast planner can afford a bigger search. The others push latency further, test generality, and take the result to a real robot.</a:t>
+              <a:t>Four directions: the latency-success trade-off of the search budget, further latency reduction, generalisation to other models and hardware, and higher-resolution and physical evaluation.</a:t>
             </a:r>
             <a:endParaRPr lang="en-US" dirty="0"/>
           </a:p>
@@ -955,7 +955,7 @@
           <a:p>
             <a:r>
               <a:rPr lang="en-US" dirty="0"/>
-              <a:t>Three sentences to end on, then questions.</a:t>
+              <a:t>Summary of findings.</a:t>
             </a:r>
             <a:endParaRPr lang="en-US" dirty="0"/>
           </a:p>
@@ -1043,7 +1043,7 @@
           <a:p>
             <a:r>
               <a:rPr lang="en-US" dirty="0"/>
-              <a:t>Four numbers to keep in mind: 622 milliseconds before, 46.5 after, thirteen times faster, and no change in how often the robot succeeds. The rest of the talk explains how the data led from the first number to the second.</a:t>
+              <a:t>Summary of the study: reference latency 622 ms, final latency 46.5 ms, a 13.4-fold reduction, and no detectable change in task success. The following slides present the profile, the design derived from it, and the evaluation.</a:t>
             </a:r>
             <a:endParaRPr lang="en-US" dirty="0"/>
           </a:p>
@@ -1131,7 +1131,7 @@
           <a:p>
             <a:r>
               <a:rPr lang="en-US" dirty="0"/>
-              <a:t>The motivation is control. Larger world models take tens of seconds per plan. LeWM brought that under a second by being small. But a robot needs tens of milliseconds, and a model this small should be able to deliver that.</a:t>
+              <a:t>Closed-loop control requires planning latency below the control period. Larger world models require tens of seconds per plan; LeWM requires 622 ms on an H100, although its arithmetic content corresponds to milliseconds.</a:t>
             </a:r>
             <a:endParaRPr lang="en-US" dirty="0"/>
           </a:p>
@@ -1219,7 +1219,7 @@
           <a:p>
             <a:r>
               <a:rPr lang="en-US" dirty="0"/>
-              <a:t>Four objectives, one per stage of the work. The project is an analytics project about an AI system: the data are timings and outcomes, the pattern discovery is a fitted model of where time goes, and the evaluation is statistical.</a:t>
+              <a:t>Four objectives, one per stage of the study. The object of study is an AI system; the method is an analytics pipeline over its measured behaviour: data collection and preparation, pattern discovery with a fitted latency model, and statistical evaluation.</a:t>
             </a:r>
             <a:endParaRPr lang="en-US" dirty="0"/>
           </a:p>
@@ -1307,7 +1307,7 @@
           <a:p>
             <a:r>
               <a:rPr lang="en-US" dirty="0"/>
-              <a:t>Three lines of work meet here. World models, where speed has been treated as a property of the model. Sampling-based search, where iCEM cut samples but related work warns that samples are not time. And GPU inference, where the megakernel is the newest tool but has only been used for language models.</a:t>
+              <a:t>Three bodies of work are relevant: JEPA world models, in which planning latency has been reduced only by changing the model; sampling-based search, in which iCEM reduces sample counts but sample count does not determine latency; and GPU inference, in which megakernels have so far been applied only to language models.</a:t>
             </a:r>
             <a:endParaRPr lang="en-US" dirty="0"/>
           </a:p>
@@ -1395,7 +1395,7 @@
           <a:p>
             <a:r>
               <a:rPr lang="en-US" dirty="0"/>
-              <a:t>The pipeline. Collect timings and outcomes, prepare them into tidy tables, discover where the time goes, design against it, evaluate, deploy. Probes are configurations that differ in one respect, used only to isolate an effect. Every design change went back through profiling before it was kept.</a:t>
+              <a:t>Methodology. Timings and outcomes are collected, prepared into tidy tables and analysed to locate the latency; the design follows from the analysis and is evaluated with the same instruments. Probes are configurations that differ from a system in one respect and isolate a single effect. Each design change was re-profiled before adoption.</a:t>
             </a:r>
             <a:endParaRPr lang="en-US" dirty="0"/>
           </a:p>
@@ -1483,7 +1483,7 @@
           <a:p>
             <a:r>
               <a:rPr lang="en-US" dirty="0"/>
-              <a:t>The profile. A third of the time recomputes something that never changes during a plan. Most of the rest is the search, but at about four hundred microseconds per layer evaluation for a few microseconds of arithmetic, it is not computing most of the time.</a:t>
+              <a:t>Compute profile. One third of the latency recomputes image embeddings that are constant within a plan. Most of the remainder is the search, at approximately 409 microseconds per layer evaluation against approximately 3 microseconds of arithmetic.</a:t>
             </a:r>
             <a:endParaRPr lang="en-US" dirty="0"/>
           </a:p>
@@ -1571,7 +1571,7 @@
           <a:p>
             <a:r>
               <a:rPr lang="en-US" dirty="0"/>
-              <a:t>The key pattern. A straight-line model fitted to latency against workload shows the eager planner's cost is almost entirely fixed: a few hundred kernel launches from Python per call. That also explains why the sample-efficient search algorithm looked useless: it reduces work that was not the cost.</a:t>
+              <a:t>Scaling analysis. A linear model of latency against workload shows that the eager planner's cost is almost entirely fixed, consistent with several hundred kernel launches from Python per call. This also explains the absence of a gain from iCEM under eager execution: it reduces work that is not the dominant cost.</a:t>
             </a:r>
             <a:endParaRPr lang="en-US" dirty="0"/>
           </a:p>
@@ -1659,7 +1659,7 @@
           <a:p>
             <a:r>
               <a:rPr lang="en-US" dirty="0"/>
-              <a:t>Each element answers one finding. Encoding once removes the third. iCEM cuts work once overhead is gone. The persistent kernel removes launches and CPU round trips. Spreading the model across a cluster and streaming weights keeps every step of the long chain as short as the hardware allows.</a:t>
+              <a:t>Each design element addresses one finding: single encoding removes the redundant third; iCEM reduces work once fixed overhead is removed; the persistent kernel removes launches and CPU round trips; cluster-level parallelism and weight streaming minimise the latency of each step of the dependent chain.</a:t>
             </a:r>
             <a:endParaRPr lang="en-US" dirty="0"/>
           </a:p>
@@ -2250,7 +2250,7 @@
                 <a:ea typeface="Cambria" pitchFamily="34" charset="-122"/>
                 <a:cs typeface="Cambria" pitchFamily="34" charset="-120"/>
               </a:rPr>
-              <a:t>Evaluation: 622 ms to 46.5 ms on the same GPU</a:t>
+              <a:t>Results: planning latency</a:t>
             </a:r>
             <a:endParaRPr lang="en-US" sz="2800" dirty="0"/>
           </a:p>
@@ -2745,7 +2745,7 @@
                 <a:ea typeface="Cambria" pitchFamily="34" charset="-122"/>
                 <a:cs typeface="Cambria" pitchFamily="34" charset="-120"/>
               </a:rPr>
-              <a:t>Evaluation: the robot succeeds just as often</a:t>
+              <a:t>Results: task success and numerical fidelity</a:t>
             </a:r>
             <a:endParaRPr lang="en-US" sz="2800" dirty="0"/>
           </a:p>
@@ -2854,7 +2854,7 @@
                 <a:ea typeface="Calibri" pitchFamily="34" charset="-122"/>
                 <a:cs typeface="Calibri" pitchFamily="34" charset="-120"/>
               </a:rPr>
-              <a:t>Disagreements are search randomness: the optimised PyTorch planner disagrees on 36.</a:t>
+              <a:t>Discordant episodes reflect stochastic search; the optimised PyTorch planner is discordant on 36.</a:t>
             </a:r>
             <a:endParaRPr lang="en-US" sz="1100" dirty="0"/>
           </a:p>
@@ -3017,7 +3017,7 @@
                 <a:ea typeface="Cambria" pitchFamily="34" charset="-122"/>
                 <a:cs typeface="Cambria" pitchFamily="34" charset="-120"/>
               </a:rPr>
-              <a:t>Conclusions, and what I cannot claim</a:t>
+              <a:t>Conclusions and limitations</a:t>
             </a:r>
             <a:endParaRPr lang="en-US" sz="2800" dirty="0"/>
           </a:p>
@@ -3395,7 +3395,7 @@
                 <a:ea typeface="Cambria" pitchFamily="34" charset="-122"/>
                 <a:cs typeface="Cambria" pitchFamily="34" charset="-120"/>
               </a:rPr>
-              <a:t>Limits</a:t>
+              <a:t>Limitations</a:t>
             </a:r>
             <a:endParaRPr lang="en-US" sz="1500" dirty="0"/>
           </a:p>
@@ -3438,7 +3438,7 @@
                 <a:ea typeface="Calibri" pitchFamily="34" charset="-122"/>
                 <a:cs typeface="Calibri" pitchFamily="34" charset="-120"/>
               </a:rPr>
-              <a:t>300 pairs resolve about 6 points of success, no less.</a:t>
+              <a:t>300 paired episodes resolve differences of about 6 percentage points.</a:t>
             </a:r>
             <a:endParaRPr lang="en-US" sz="1100" dirty="0"/>
           </a:p>
@@ -3459,7 +3459,7 @@
                 <a:ea typeface="Calibri" pitchFamily="34" charset="-122"/>
                 <a:cs typeface="Calibri" pitchFamily="34" charset="-120"/>
               </a:rPr>
-              <a:t>Some profile stages attributed by difference.</a:t>
+              <a:t>Some profile stages are attributed by difference.</a:t>
             </a:r>
             <a:endParaRPr lang="en-US" sz="1100" dirty="0"/>
           </a:p>
@@ -3501,7 +3501,7 @@
                 <a:ea typeface="Calibri" pitchFamily="34" charset="-122"/>
                 <a:cs typeface="Calibri" pitchFamily="34" charset="-120"/>
               </a:rPr>
-              <a:t>Simulation; only the planning call optimised.</a:t>
+              <a:t>Simulation only; only the planning call was optimised.</a:t>
             </a:r>
             <a:endParaRPr lang="en-US" sz="1100" dirty="0"/>
           </a:p>
@@ -3522,7 +3522,7 @@
                 <a:ea typeface="Calibri" pitchFamily="34" charset="-122"/>
                 <a:cs typeface="Calibri" pitchFamily="34" charset="-120"/>
               </a:rPr>
-              <a:t>PyTorch timings vary up to 18% between passes; the kernel's about 2%.</a:t>
+              <a:t>PyTorch latency varied by up to 18% between passes; kernel latency by about 2%.</a:t>
             </a:r>
             <a:endParaRPr lang="en-US" sz="1100" dirty="0"/>
           </a:p>
@@ -3731,7 +3731,7 @@
                 <a:ea typeface="Calibri" pitchFamily="34" charset="-122"/>
                 <a:cs typeface="Calibri" pitchFamily="34" charset="-120"/>
               </a:rPr>
-              <a:t>Spend the saved time on better plans</a:t>
+              <a:t>Search budget versus task success</a:t>
             </a:r>
             <a:endParaRPr lang="en-US" sz="1250" dirty="0"/>
           </a:p>
@@ -3751,7 +3751,7 @@
                 <a:ea typeface="Calibri" pitchFamily="34" charset="-122"/>
                 <a:cs typeface="Calibri" pitchFamily="34" charset="-120"/>
               </a:rPr>
-              <a:t>More iterations or candidates still fit a 100 ms period: map the latency-success trade-off.</a:t>
+              <a:t>Larger iteration and candidate budgets remain within a 100 ms control period; characterise the latency-success trade-off.</a:t>
             </a:r>
             <a:endParaRPr lang="en-US" sz="1250" dirty="0"/>
           </a:p>
@@ -3857,7 +3857,7 @@
                 <a:ea typeface="Calibri" pitchFamily="34" charset="-122"/>
                 <a:cs typeface="Calibri" pitchFamily="34" charset="-120"/>
               </a:rPr>
-              <a:t>Shorten the remaining chain</a:t>
+              <a:t>Reducing the dependent computation chain</a:t>
             </a:r>
             <a:endParaRPr lang="en-US" sz="1250" dirty="0"/>
           </a:p>
@@ -3877,7 +3877,7 @@
                 <a:ea typeface="Calibri" pitchFamily="34" charset="-122"/>
                 <a:cs typeface="Calibri" pitchFamily="34" charset="-120"/>
               </a:rPr>
-              <a:t>Combine with a one-pass rollout model, or one layer per cluster with candidates streaming through.</a:t>
+              <a:t>Combination with single-pass rollout models; layer-per-cluster pipelining.</a:t>
             </a:r>
             <a:endParaRPr lang="en-US" sz="1250" dirty="0"/>
           </a:p>
@@ -3983,7 +3983,7 @@
                 <a:ea typeface="Calibri" pitchFamily="34" charset="-122"/>
                 <a:cs typeface="Calibri" pitchFamily="34" charset="-120"/>
               </a:rPr>
-              <a:t>Other models and hardware</a:t>
+              <a:t>Generalisation to other models and hardware</a:t>
             </a:r>
             <a:endParaRPr lang="en-US" sz="1250" dirty="0"/>
           </a:p>
@@ -4003,7 +4003,7 @@
                 <a:ea typeface="Calibri" pitchFamily="34" charset="-122"/>
                 <a:cs typeface="Calibri" pitchFamily="34" charset="-120"/>
               </a:rPr>
-              <a:t>Larger world models, onboard robot computers; automatic megakernel compilers.</a:t>
+              <a:t>Larger world models, embedded robot computers, automatic megakernel compilation.</a:t>
             </a:r>
             <a:endParaRPr lang="en-US" sz="1250" dirty="0"/>
           </a:p>
@@ -4109,7 +4109,7 @@
                 <a:ea typeface="Calibri" pitchFamily="34" charset="-122"/>
                 <a:cs typeface="Calibri" pitchFamily="34" charset="-120"/>
               </a:rPr>
-              <a:t>Evaluate at deployment resolution</a:t>
+              <a:t>Higher-resolution and physical evaluation</a:t>
             </a:r>
             <a:endParaRPr lang="en-US" sz="1250" dirty="0"/>
           </a:p>
@@ -4129,7 +4129,7 @@
                 <a:ea typeface="Calibri" pitchFamily="34" charset="-122"/>
                 <a:cs typeface="Calibri" pitchFamily="34" charset="-120"/>
               </a:rPr>
-              <a:t>About 2,500 paired episodes for 2 points, now minutes of planning; then a physical robot.</a:t>
+              <a:t>Approximately 2,500 paired episodes to resolve 2 percentage points; evaluation on a physical robot.</a:t>
             </a:r>
             <a:endParaRPr lang="en-US" sz="1250" dirty="0"/>
           </a:p>
@@ -4239,7 +4239,7 @@
                 <a:ea typeface="Cambria" pitchFamily="34" charset="-122"/>
                 <a:cs typeface="Cambria" pitchFamily="34" charset="-120"/>
               </a:rPr>
-              <a:t>Take-home</a:t>
+              <a:t>Summary</a:t>
             </a:r>
             <a:endParaRPr lang="en-US" sz="2800" dirty="0"/>
           </a:p>
@@ -4282,7 +4282,7 @@
                 <a:ea typeface="Calibri" pitchFamily="34" charset="-122"/>
                 <a:cs typeface="Calibri" pitchFamily="34" charset="-120"/>
               </a:rPr>
-              <a:t>Profile before optimising: the world-model planner's time was overhead, not arithmetic.</a:t>
+              <a:t>The reference planner's latency was dominated by execution overhead, not arithmetic.</a:t>
             </a:r>
             <a:endParaRPr lang="en-US" sz="1700" dirty="0"/>
           </a:p>
@@ -4303,7 +4303,7 @@
                 <a:ea typeface="Calibri" pitchFamily="34" charset="-122"/>
                 <a:cs typeface="Calibri" pitchFamily="34" charset="-120"/>
               </a:rPr>
-              <a:t>A one-line fitted model of latency against workload told which fix would pay, and why the smarter search had looked useless.</a:t>
+              <a:t>A linear latency-scaling model identified the bottleneck regime and predicted when iCEM reduces latency.</a:t>
             </a:r>
             <a:endParaRPr lang="en-US" sz="1700" dirty="0"/>
           </a:p>
@@ -4321,7 +4321,7 @@
                 <a:ea typeface="Calibri" pitchFamily="34" charset="-122"/>
                 <a:cs typeface="Calibri" pitchFamily="34" charset="-120"/>
               </a:rPr>
-              <a:t>One GPU program per plan: 622 ms to 46.5 ms on the same H100, same model, same task success.</a:t>
+              <a:t>A single persistent GPU kernel per plan reduces latency from 622 ms to 46.5 ms on the same H100, with the same model and no detectable change in task success.</a:t>
             </a:r>
             <a:endParaRPr lang="en-US" sz="1700" dirty="0"/>
           </a:p>
@@ -4424,7 +4424,7 @@
                 <a:ea typeface="Cambria" pitchFamily="34" charset="-122"/>
                 <a:cs typeface="Cambria" pitchFamily="34" charset="-120"/>
               </a:rPr>
-              <a:t>The project in one slide</a:t>
+              <a:t>Overview</a:t>
             </a:r>
             <a:endParaRPr lang="en-US" sz="2800" dirty="0"/>
           </a:p>
@@ -4467,7 +4467,7 @@
                 <a:ea typeface="Calibri" pitchFamily="34" charset="-122"/>
                 <a:cs typeface="Calibri" pitchFamily="34" charset="-120"/>
               </a:rPr>
-              <a:t>LeWM is a small AI world model that lets a robot plan by imagining thousands of possible futures. One plan still takes 622 ms on an H100 GPU.</a:t>
+              <a:t>LeWM is a 15M-parameter world model that plans by evaluating thousands of predicted action outcomes. One plan takes 622 ms on an H100 GPU.</a:t>
             </a:r>
             <a:endParaRPr lang="en-US" sz="1400" dirty="0"/>
           </a:p>
@@ -4488,7 +4488,7 @@
                 <a:ea typeface="Calibri" pitchFamily="34" charset="-122"/>
                 <a:cs typeface="Calibri" pitchFamily="34" charset="-120"/>
               </a:rPr>
-              <a:t>Question: where does that time go, and how much can be removed without retraining the model or making the robot less successful?</a:t>
+              <a:t>Research question: where is the planning latency spent, and how much can be removed without retraining the model or reducing task success?</a:t>
             </a:r>
             <a:endParaRPr lang="en-US" sz="1400" dirty="0"/>
           </a:p>
@@ -4509,7 +4509,7 @@
                 <a:ea typeface="Calibri" pitchFamily="34" charset="-122"/>
                 <a:cs typeface="Calibri" pitchFamily="34" charset="-120"/>
               </a:rPr>
-              <a:t>Method: an analytics pipeline over 11,942 timed calls and 900 episode outcomes: profile, model the bottleneck, design, evaluate with paired statistics.</a:t>
+              <a:t>Method: compute profiling of 11,942 timed calls, a fitted latency-scaling model, solution design, and paired statistical evaluation on 900 episode outcomes.</a:t>
             </a:r>
             <a:endParaRPr lang="en-US" sz="1400" dirty="0"/>
           </a:p>
@@ -4530,7 +4530,7 @@
                 <a:ea typeface="Calibri" pitchFamily="34" charset="-122"/>
                 <a:cs typeface="Calibri" pitchFamily="34" charset="-120"/>
               </a:rPr>
-              <a:t>Answer: the time was overhead, not computation. One fused GPU program per plan takes 46.5 ms, with task success unchanged.</a:t>
+              <a:t>Result: latency was dominated by execution overhead rather than computation. A single persistent GPU kernel per plan reduces latency to 46.5 ms with no detectable change in task success.</a:t>
             </a:r>
             <a:endParaRPr lang="en-US" sz="1400" dirty="0"/>
           </a:p>
@@ -5160,7 +5160,7 @@
                 <a:ea typeface="Cambria" pitchFamily="34" charset="-122"/>
                 <a:cs typeface="Cambria" pitchFamily="34" charset="-120"/>
               </a:rPr>
-              <a:t>Why it matters: robots plan against a clock</a:t>
+              <a:t>Motivation</a:t>
             </a:r>
             <a:endParaRPr lang="en-US" sz="2800" dirty="0"/>
           </a:p>
@@ -5203,7 +5203,7 @@
                 <a:ea typeface="Calibri" pitchFamily="34" charset="-122"/>
                 <a:cs typeface="Calibri" pitchFamily="34" charset="-120"/>
               </a:rPr>
-              <a:t>A world model predicts what happens next; a robot plans by imagining many action sequences and executing the best.</a:t>
+              <a:t>A world model predicts future states; a planner evaluates many candidate action sequences with it and executes the best.</a:t>
             </a:r>
             <a:endParaRPr lang="en-US" sz="1400" dirty="0"/>
           </a:p>
@@ -5266,7 +5266,7 @@
                 <a:ea typeface="Calibri" pitchFamily="34" charset="-122"/>
                 <a:cs typeface="Calibri" pitchFamily="34" charset="-120"/>
               </a:rPr>
-              <a:t>The model is tiny: its arithmetic per plan should take milliseconds. Something else is using the time.</a:t>
+              <a:t>The arithmetic content of a plan corresponds to milliseconds of GPU time; the remaining latency is not attributable to computation.</a:t>
             </a:r>
             <a:endParaRPr lang="en-US" sz="1400" dirty="0"/>
           </a:p>
@@ -5493,7 +5493,7 @@
                 <a:ea typeface="Calibri" pitchFamily="34" charset="-122"/>
                 <a:cs typeface="Calibri" pitchFamily="34" charset="-120"/>
               </a:rPr>
-              <a:t>imagined futures</a:t>
+              <a:t>rollouts per</a:t>
             </a:r>
             <a:endParaRPr lang="en-US" sz="1000" dirty="0"/>
           </a:p>
@@ -5510,7 +5510,7 @@
                 <a:ea typeface="Calibri" pitchFamily="34" charset="-122"/>
                 <a:cs typeface="Calibri" pitchFamily="34" charset="-120"/>
               </a:rPr>
-              <a:t>per reference plan</a:t>
+              <a:t>reference plan</a:t>
             </a:r>
             <a:endParaRPr lang="en-US" sz="1000" dirty="0"/>
           </a:p>
@@ -6433,7 +6433,7 @@
                 <a:ea typeface="Cambria" pitchFamily="34" charset="-122"/>
                 <a:cs typeface="Cambria" pitchFamily="34" charset="-120"/>
               </a:rPr>
-              <a:t>Background: three lines of work, one gap</a:t>
+              <a:t>Background and research gap</a:t>
             </a:r>
             <a:endParaRPr lang="en-US" sz="2800" dirty="0"/>
           </a:p>
@@ -6787,7 +6787,7 @@
                 <a:ea typeface="Calibri" pitchFamily="34" charset="-122"/>
                 <a:cs typeface="Calibri" pitchFamily="34" charset="-120"/>
               </a:rPr>
-              <a:t>The gap. </a:t>
+              <a:t>Research gap. </a:t>
             </a:r>
             <a:pPr indent="0" marL="0">
               <a:buNone/>
@@ -6801,7 +6801,7 @@
                 <a:ea typeface="Calibri" pitchFamily="34" charset="-122"/>
                 <a:cs typeface="Calibri" pitchFamily="34" charset="-120"/>
               </a:rPr>
-              <a:t>No one has profiled where a world-model planner's time goes, measured whether sample-efficient search saves time in practice, or fused a whole planning loop, with a neural encoder, rollouts, scoring and elite selection, into one GPU program.</a:t>
+              <a:t>No prior work has profiled where a world-model planner's latency is spent, measured whether sample-efficient search saves time in practice, or fused a whole planning loop, with a neural encoder, rollouts, scoring and elite selection, into one GPU program.</a:t>
             </a:r>
             <a:endParaRPr lang="en-US" sz="1200" dirty="0"/>
           </a:p>
@@ -6904,7 +6904,7 @@
                 <a:ea typeface="Cambria" pitchFamily="34" charset="-122"/>
                 <a:cs typeface="Cambria" pitchFamily="34" charset="-120"/>
               </a:rPr>
-              <a:t>Method: an analytics pipeline over the planner</a:t>
+              <a:t>Methodology</a:t>
             </a:r>
             <a:endParaRPr lang="en-US" sz="2800" dirty="0"/>
           </a:p>
@@ -7346,7 +7346,7 @@
                 <a:ea typeface="Cambria" pitchFamily="34" charset="-122"/>
                 <a:cs typeface="Cambria" pitchFamily="34" charset="-120"/>
               </a:rPr>
-              <a:t>Finding: where a plan's 622 ms goes</a:t>
+              <a:t>Compute profile of the reference planner</a:t>
             </a:r>
             <a:endParaRPr lang="en-US" sz="2800" dirty="0"/>
           </a:p>
@@ -7455,7 +7455,7 @@
                 <a:ea typeface="Calibri" pitchFamily="34" charset="-122"/>
                 <a:cs typeface="Calibri" pitchFamily="34" charset="-120"/>
               </a:rPr>
-              <a:t>7%: waiting on the CPU between iterations.</a:t>
+              <a:t>7%: CPU synchronisation between iterations.</a:t>
             </a:r>
             <a:endParaRPr lang="en-US" sz="1150" dirty="0"/>
           </a:p>
@@ -7618,7 +7618,7 @@
                 <a:ea typeface="Cambria" pitchFamily="34" charset="-122"/>
                 <a:cs typeface="Cambria" pitchFamily="34" charset="-120"/>
               </a:rPr>
-              <a:t>Pattern: the search is overhead, not work</a:t>
+              <a:t>Latency scaling analysis</a:t>
             </a:r>
             <a:endParaRPr lang="en-US" sz="2800" dirty="0"/>
           </a:p>
@@ -7929,7 +7929,7 @@
                 <a:ea typeface="Calibri" pitchFamily="34" charset="-122"/>
                 <a:cs typeface="Calibri" pitchFamily="34" charset="-120"/>
               </a:rPr>
-              <a:t>Fitted model: 20.0 ms fixed + 0.10 ms per 100 candidates. Cost does not depend on how much work is done.</a:t>
+              <a:t>Fitted model: 20.0 ms fixed + 0.10 ms per 100 candidates. Latency is effectively independent of workload.</a:t>
             </a:r>
             <a:endParaRPr lang="en-US" sz="1100" dirty="0"/>
           </a:p>
@@ -7950,7 +7950,7 @@
                 <a:ea typeface="Calibri" pitchFamily="34" charset="-122"/>
                 <a:cs typeface="Calibri" pitchFamily="34" charset="-120"/>
               </a:rPr>
-              <a:t>So cutting candidates (iCEM) cannot help here: predicted 1.01×, observed 0.92×.</a:t>
+              <a:t>Reducing the candidate count (iCEM) therefore yields no gain: predicted 1.01×, observed 0.92×.</a:t>
             </a:r>
             <a:endParaRPr lang="en-US" sz="1100" dirty="0"/>
           </a:p>
@@ -7971,7 +7971,7 @@
                 <a:ea typeface="Calibri" pitchFamily="34" charset="-122"/>
                 <a:cs typeface="Calibri" pitchFamily="34" charset="-120"/>
               </a:rPr>
-              <a:t>Only an execution with little fixed cost turns fewer candidates into less time.</a:t>
+              <a:t>A gain requires an execution model with low fixed cost per call.</a:t>
             </a:r>
             <a:endParaRPr lang="en-US" sz="1100" dirty="0"/>
           </a:p>
@@ -8113,7 +8113,7 @@
                 <a:ea typeface="Cambria" pitchFamily="34" charset="-122"/>
                 <a:cs typeface="Cambria" pitchFamily="34" charset="-120"/>
               </a:rPr>
-              <a:t>Solution: LeWM-MK, one GPU program per plan</a:t>
+              <a:t>Solution design: LeWM-MK</a:t>
             </a:r>
             <a:endParaRPr lang="en-US" sz="2800" dirty="0"/>
           </a:p>

--- a/docs/paper/presentation.pptx
+++ b/docs/paper/presentation.pptx
@@ -2272,8 +2272,8 @@
         </p:blipFill>
         <p:spPr>
           <a:xfrm>
-            <a:off x="457200" y="1113174"/>
-            <a:ext cx="5669280" cy="1797011"/>
+            <a:off x="457200" y="1237802"/>
+            <a:ext cx="5669280" cy="1547756"/>
           </a:xfrm>
           <a:prstGeom prst="rect">
             <a:avLst/>
@@ -2642,7 +2642,7 @@
                 <a:ea typeface="Calibri" pitchFamily="34" charset="-122"/>
                 <a:cs typeface="Calibri" pitchFamily="34" charset="-120"/>
               </a:rPr>
-              <a:t>End-to-end planning latency, log scale; points are plans, diamonds medians. Baseline already uses compile, CUDA Graphs and BF16.</a:t>
+              <a:t>End-to-end planning latency, log scale: median, interquartile box, 1.5-IQR whiskers, outlying plans. Baseline uses compile, CUDA Graphs and BF16.</a:t>
             </a:r>
             <a:endParaRPr lang="en-US" sz="1000" dirty="0"/>
           </a:p>

--- a/docs/paper/presentation.pptx
+++ b/docs/paper/presentation.pptx
@@ -19,9 +19,13 @@
     <p:sldId id="267" r:id="rId13"/>
     <p:sldId id="268" r:id="rId14"/>
     <p:sldId id="269" r:id="rId15"/>
+    <p:sldId id="270" r:id="rId16"/>
+    <p:sldId id="271" r:id="rId17"/>
+    <p:sldId id="272" r:id="rId18"/>
+    <p:sldId id="273" r:id="rId19"/>
   </p:sldIdLst>
   <p:notesMasterIdLst>
-    <p:notesMasterId r:id="rId16"/>
+    <p:notesMasterId r:id="rId20"/>
   </p:notesMasterIdLst>
   <p:sldSz cx="9144000" cy="5143500"/>
   <p:notesSz cx="5143500" cy="9144000"/>
@@ -603,7 +607,7 @@
           <a:p>
             <a:r>
               <a:rPr lang="en-US" dirty="0"/>
-              <a:t>Latency is reduced 13.4-fold relative to the reference and 3.9-fold relative to an optimised PyTorch implementation using compilation, CUDA Graphs and BF16. Latency variability is also reduced: the interquartile range is 0.7 ms.</a:t>
+              <a:t>Methodology. Timings and outcomes are collected, prepared into tidy tables and analysed to locate the latency; the design follows from the analysis and is evaluated with the same instruments. Probes are configurations that differ from a system in one respect and isolate a single effect. Each design change was re-profiled before adoption.</a:t>
             </a:r>
             <a:endParaRPr lang="en-US" dirty="0"/>
           </a:p>
@@ -691,7 +695,7 @@
           <a:p>
             <a:r>
               <a:rPr lang="en-US" dirty="0"/>
-              <a:t>No detectable change in task success at the resolution of 300 paired episodes (approximately 6 percentage points at 80% power). Numerical error relative to FP32 is within the range of the accepted BF16 implementation.</a:t>
+              <a:t>Compute profile. One third of the latency recomputes image embeddings that are constant within a plan. Most of the remainder is the search, at approximately 409 microseconds per layer evaluation against approximately 3 microseconds of arithmetic.</a:t>
             </a:r>
             <a:endParaRPr lang="en-US" dirty="0"/>
           </a:p>
@@ -779,7 +783,7 @@
           <a:p>
             <a:r>
               <a:rPr lang="en-US" dirty="0"/>
-              <a:t>All four objectives were met. The latency reduction is large and reproducible; the task-success result is bounded by sample size; the measured values are specific to this model and GPU, while the identified mechanism is general.</a:t>
+              <a:t>Scaling analysis. A linear model of latency against workload shows that the eager planner's cost is almost entirely fixed, consistent with several hundred kernel launches from Python per call. This also explains the absence of a gain from iCEM under eager execution: it reduces work that is not the dominant cost.</a:t>
             </a:r>
             <a:endParaRPr lang="en-US" dirty="0"/>
           </a:p>
@@ -867,7 +871,7 @@
           <a:p>
             <a:r>
               <a:rPr lang="en-US" dirty="0"/>
-              <a:t>Four directions: the latency-success trade-off of the search budget, further latency reduction, generalisation to other models and hardware, and higher-resolution and physical evaluation.</a:t>
+              <a:t>Each design element addresses one finding: single encoding removes the redundant third; iCEM reduces work once fixed overhead is removed; the persistent kernel removes launches and CPU round trips; cluster-level parallelism and weight streaming minimise the latency of each step of the dependent chain.</a:t>
             </a:r>
             <a:endParaRPr lang="en-US" dirty="0"/>
           </a:p>
@@ -955,7 +959,7 @@
           <a:p>
             <a:r>
               <a:rPr lang="en-US" dirty="0"/>
-              <a:t>Summary of findings.</a:t>
+              <a:t>Latency is reduced 13.4-fold relative to the reference and 3.9-fold relative to an optimised PyTorch implementation using compilation, CUDA Graphs and BF16. Latency variability is also reduced: the interquartile range is 0.7 ms.</a:t>
             </a:r>
             <a:endParaRPr lang="en-US" dirty="0"/>
           </a:p>
@@ -979,6 +983,358 @@
             <a:fld id="{F7021451-1387-4CA6-816F-3879F97B5CBC}" type="slidenum">
               <a:rPr lang="en-US"/>
               <a:t>14</a:t>
+            </a:fld>
+            <a:endParaRPr lang="en-US"/>
+          </a:p>
+        </p:txBody>
+      </p:sp>
+    </p:spTree>
+    <p:extLst>
+      <p:ext uri="{BB962C8B-B14F-4D97-AF65-F5344CB8AC3E}">
+        <p14:creationId xmlns:p14="http://schemas.microsoft.com/office/powerpoint/2010/main" val="1024086991"/>
+      </p:ext>
+    </p:extLst>
+  </p:cSld>
+  <p:clrMapOvr>
+    <a:masterClrMapping/>
+  </p:clrMapOvr>
+</p:notes>
+</file>
+
+<file path=ppt/notesSlides/notesSlide15.xml><?xml version="1.0" encoding="utf-8"?>
+<p:notes xmlns:a="http://schemas.openxmlformats.org/drawingml/2006/main" xmlns:r="http://schemas.openxmlformats.org/officeDocument/2006/relationships" xmlns:p="http://schemas.openxmlformats.org/presentationml/2006/main">
+  <p:cSld>
+    <p:spTree>
+      <p:nvGrpSpPr>
+        <p:cNvPr id="1" name=""/>
+        <p:cNvGrpSpPr/>
+        <p:nvPr/>
+      </p:nvGrpSpPr>
+      <p:grpSpPr>
+        <a:xfrm>
+          <a:off x="0" y="0"/>
+          <a:ext cx="0" cy="0"/>
+          <a:chOff x="0" y="0"/>
+          <a:chExt cx="0" cy="0"/>
+        </a:xfrm>
+      </p:grpSpPr>
+      <p:sp>
+        <p:nvSpPr>
+          <p:cNvPr id="2" name="Slide Image Placeholder 1"/>
+          <p:cNvSpPr>
+            <a:spLocks noGrp="1" noRot="1" noChangeAspect="1"/>
+          </p:cNvSpPr>
+          <p:nvPr>
+            <p:ph type="sldImg"/>
+          </p:nvPr>
+        </p:nvSpPr>
+        <p:spPr/>
+      </p:sp>
+      <p:sp>
+        <p:nvSpPr>
+          <p:cNvPr id="3" name="Notes Placeholder 2"/>
+          <p:cNvSpPr>
+            <a:spLocks noGrp="1"/>
+          </p:cNvSpPr>
+          <p:nvPr>
+            <p:ph type="body" idx="1"/>
+          </p:nvPr>
+        </p:nvSpPr>
+        <p:spPr/>
+        <p:txBody>
+          <a:bodyPr/>
+          <a:lstStyle/>
+          <a:p>
+            <a:r>
+              <a:rPr lang="en-US" dirty="0"/>
+              <a:t>No detectable change in task success at the resolution of 300 paired episodes (approximately 6 percentage points at 80% power). Numerical error relative to FP32 is within the range of the accepted BF16 implementation.</a:t>
+            </a:r>
+            <a:endParaRPr lang="en-US" dirty="0"/>
+          </a:p>
+        </p:txBody>
+      </p:sp>
+      <p:sp>
+        <p:nvSpPr>
+          <p:cNvPr id="4" name="Slide Number Placeholder 3"/>
+          <p:cNvSpPr>
+            <a:spLocks noGrp="1"/>
+          </p:cNvSpPr>
+          <p:nvPr>
+            <p:ph type="sldNum" sz="quarter" idx="10"/>
+          </p:nvPr>
+        </p:nvSpPr>
+        <p:spPr/>
+        <p:txBody>
+          <a:bodyPr/>
+          <a:lstStyle/>
+          <a:p>
+            <a:fld id="{F7021451-1387-4CA6-816F-3879F97B5CBC}" type="slidenum">
+              <a:rPr lang="en-US"/>
+              <a:t>15</a:t>
+            </a:fld>
+            <a:endParaRPr lang="en-US"/>
+          </a:p>
+        </p:txBody>
+      </p:sp>
+    </p:spTree>
+    <p:extLst>
+      <p:ext uri="{BB962C8B-B14F-4D97-AF65-F5344CB8AC3E}">
+        <p14:creationId xmlns:p14="http://schemas.microsoft.com/office/powerpoint/2010/main" val="1024086991"/>
+      </p:ext>
+    </p:extLst>
+  </p:cSld>
+  <p:clrMapOvr>
+    <a:masterClrMapping/>
+  </p:clrMapOvr>
+</p:notes>
+</file>
+
+<file path=ppt/notesSlides/notesSlide16.xml><?xml version="1.0" encoding="utf-8"?>
+<p:notes xmlns:a="http://schemas.openxmlformats.org/drawingml/2006/main" xmlns:r="http://schemas.openxmlformats.org/officeDocument/2006/relationships" xmlns:p="http://schemas.openxmlformats.org/presentationml/2006/main">
+  <p:cSld>
+    <p:spTree>
+      <p:nvGrpSpPr>
+        <p:cNvPr id="1" name=""/>
+        <p:cNvGrpSpPr/>
+        <p:nvPr/>
+      </p:nvGrpSpPr>
+      <p:grpSpPr>
+        <a:xfrm>
+          <a:off x="0" y="0"/>
+          <a:ext cx="0" cy="0"/>
+          <a:chOff x="0" y="0"/>
+          <a:chExt cx="0" cy="0"/>
+        </a:xfrm>
+      </p:grpSpPr>
+      <p:sp>
+        <p:nvSpPr>
+          <p:cNvPr id="2" name="Slide Image Placeholder 1"/>
+          <p:cNvSpPr>
+            <a:spLocks noGrp="1" noRot="1" noChangeAspect="1"/>
+          </p:cNvSpPr>
+          <p:nvPr>
+            <p:ph type="sldImg"/>
+          </p:nvPr>
+        </p:nvSpPr>
+        <p:spPr/>
+      </p:sp>
+      <p:sp>
+        <p:nvSpPr>
+          <p:cNvPr id="3" name="Notes Placeholder 2"/>
+          <p:cNvSpPr>
+            <a:spLocks noGrp="1"/>
+          </p:cNvSpPr>
+          <p:nvPr>
+            <p:ph type="body" idx="1"/>
+          </p:nvPr>
+        </p:nvSpPr>
+        <p:spPr/>
+        <p:txBody>
+          <a:bodyPr/>
+          <a:lstStyle/>
+          <a:p>
+            <a:r>
+              <a:rPr lang="en-US" dirty="0"/>
+              <a:t>All four objectives were met. The latency reduction is large and reproducible; the task-success result is bounded by sample size; the measured values are specific to this model and GPU, while the identified mechanism is general.</a:t>
+            </a:r>
+            <a:endParaRPr lang="en-US" dirty="0"/>
+          </a:p>
+        </p:txBody>
+      </p:sp>
+      <p:sp>
+        <p:nvSpPr>
+          <p:cNvPr id="4" name="Slide Number Placeholder 3"/>
+          <p:cNvSpPr>
+            <a:spLocks noGrp="1"/>
+          </p:cNvSpPr>
+          <p:nvPr>
+            <p:ph type="sldNum" sz="quarter" idx="10"/>
+          </p:nvPr>
+        </p:nvSpPr>
+        <p:spPr/>
+        <p:txBody>
+          <a:bodyPr/>
+          <a:lstStyle/>
+          <a:p>
+            <a:fld id="{F7021451-1387-4CA6-816F-3879F97B5CBC}" type="slidenum">
+              <a:rPr lang="en-US"/>
+              <a:t>16</a:t>
+            </a:fld>
+            <a:endParaRPr lang="en-US"/>
+          </a:p>
+        </p:txBody>
+      </p:sp>
+    </p:spTree>
+    <p:extLst>
+      <p:ext uri="{BB962C8B-B14F-4D97-AF65-F5344CB8AC3E}">
+        <p14:creationId xmlns:p14="http://schemas.microsoft.com/office/powerpoint/2010/main" val="1024086991"/>
+      </p:ext>
+    </p:extLst>
+  </p:cSld>
+  <p:clrMapOvr>
+    <a:masterClrMapping/>
+  </p:clrMapOvr>
+</p:notes>
+</file>
+
+<file path=ppt/notesSlides/notesSlide17.xml><?xml version="1.0" encoding="utf-8"?>
+<p:notes xmlns:a="http://schemas.openxmlformats.org/drawingml/2006/main" xmlns:r="http://schemas.openxmlformats.org/officeDocument/2006/relationships" xmlns:p="http://schemas.openxmlformats.org/presentationml/2006/main">
+  <p:cSld>
+    <p:spTree>
+      <p:nvGrpSpPr>
+        <p:cNvPr id="1" name=""/>
+        <p:cNvGrpSpPr/>
+        <p:nvPr/>
+      </p:nvGrpSpPr>
+      <p:grpSpPr>
+        <a:xfrm>
+          <a:off x="0" y="0"/>
+          <a:ext cx="0" cy="0"/>
+          <a:chOff x="0" y="0"/>
+          <a:chExt cx="0" cy="0"/>
+        </a:xfrm>
+      </p:grpSpPr>
+      <p:sp>
+        <p:nvSpPr>
+          <p:cNvPr id="2" name="Slide Image Placeholder 1"/>
+          <p:cNvSpPr>
+            <a:spLocks noGrp="1" noRot="1" noChangeAspect="1"/>
+          </p:cNvSpPr>
+          <p:nvPr>
+            <p:ph type="sldImg"/>
+          </p:nvPr>
+        </p:nvSpPr>
+        <p:spPr/>
+      </p:sp>
+      <p:sp>
+        <p:nvSpPr>
+          <p:cNvPr id="3" name="Notes Placeholder 2"/>
+          <p:cNvSpPr>
+            <a:spLocks noGrp="1"/>
+          </p:cNvSpPr>
+          <p:nvPr>
+            <p:ph type="body" idx="1"/>
+          </p:nvPr>
+        </p:nvSpPr>
+        <p:spPr/>
+        <p:txBody>
+          <a:bodyPr/>
+          <a:lstStyle/>
+          <a:p>
+            <a:r>
+              <a:rPr lang="en-US" dirty="0"/>
+              <a:t>Four directions: the latency-success trade-off of the search budget, further latency reduction, generalisation to other models and hardware, and higher-resolution and physical evaluation.</a:t>
+            </a:r>
+            <a:endParaRPr lang="en-US" dirty="0"/>
+          </a:p>
+        </p:txBody>
+      </p:sp>
+      <p:sp>
+        <p:nvSpPr>
+          <p:cNvPr id="4" name="Slide Number Placeholder 3"/>
+          <p:cNvSpPr>
+            <a:spLocks noGrp="1"/>
+          </p:cNvSpPr>
+          <p:nvPr>
+            <p:ph type="sldNum" sz="quarter" idx="10"/>
+          </p:nvPr>
+        </p:nvSpPr>
+        <p:spPr/>
+        <p:txBody>
+          <a:bodyPr/>
+          <a:lstStyle/>
+          <a:p>
+            <a:fld id="{F7021451-1387-4CA6-816F-3879F97B5CBC}" type="slidenum">
+              <a:rPr lang="en-US"/>
+              <a:t>17</a:t>
+            </a:fld>
+            <a:endParaRPr lang="en-US"/>
+          </a:p>
+        </p:txBody>
+      </p:sp>
+    </p:spTree>
+    <p:extLst>
+      <p:ext uri="{BB962C8B-B14F-4D97-AF65-F5344CB8AC3E}">
+        <p14:creationId xmlns:p14="http://schemas.microsoft.com/office/powerpoint/2010/main" val="1024086991"/>
+      </p:ext>
+    </p:extLst>
+  </p:cSld>
+  <p:clrMapOvr>
+    <a:masterClrMapping/>
+  </p:clrMapOvr>
+</p:notes>
+</file>
+
+<file path=ppt/notesSlides/notesSlide18.xml><?xml version="1.0" encoding="utf-8"?>
+<p:notes xmlns:a="http://schemas.openxmlformats.org/drawingml/2006/main" xmlns:r="http://schemas.openxmlformats.org/officeDocument/2006/relationships" xmlns:p="http://schemas.openxmlformats.org/presentationml/2006/main">
+  <p:cSld>
+    <p:spTree>
+      <p:nvGrpSpPr>
+        <p:cNvPr id="1" name=""/>
+        <p:cNvGrpSpPr/>
+        <p:nvPr/>
+      </p:nvGrpSpPr>
+      <p:grpSpPr>
+        <a:xfrm>
+          <a:off x="0" y="0"/>
+          <a:ext cx="0" cy="0"/>
+          <a:chOff x="0" y="0"/>
+          <a:chExt cx="0" cy="0"/>
+        </a:xfrm>
+      </p:grpSpPr>
+      <p:sp>
+        <p:nvSpPr>
+          <p:cNvPr id="2" name="Slide Image Placeholder 1"/>
+          <p:cNvSpPr>
+            <a:spLocks noGrp="1" noRot="1" noChangeAspect="1"/>
+          </p:cNvSpPr>
+          <p:nvPr>
+            <p:ph type="sldImg"/>
+          </p:nvPr>
+        </p:nvSpPr>
+        <p:spPr/>
+      </p:sp>
+      <p:sp>
+        <p:nvSpPr>
+          <p:cNvPr id="3" name="Notes Placeholder 2"/>
+          <p:cNvSpPr>
+            <a:spLocks noGrp="1"/>
+          </p:cNvSpPr>
+          <p:nvPr>
+            <p:ph type="body" idx="1"/>
+          </p:nvPr>
+        </p:nvSpPr>
+        <p:spPr/>
+        <p:txBody>
+          <a:bodyPr/>
+          <a:lstStyle/>
+          <a:p>
+            <a:r>
+              <a:rPr lang="en-US" dirty="0"/>
+              <a:t>Summary of findings.</a:t>
+            </a:r>
+            <a:endParaRPr lang="en-US" dirty="0"/>
+          </a:p>
+        </p:txBody>
+      </p:sp>
+      <p:sp>
+        <p:nvSpPr>
+          <p:cNvPr id="4" name="Slide Number Placeholder 3"/>
+          <p:cNvSpPr>
+            <a:spLocks noGrp="1"/>
+          </p:cNvSpPr>
+          <p:nvPr>
+            <p:ph type="sldNum" sz="quarter" idx="10"/>
+          </p:nvPr>
+        </p:nvSpPr>
+        <p:spPr/>
+        <p:txBody>
+          <a:bodyPr/>
+          <a:lstStyle/>
+          <a:p>
+            <a:fld id="{F7021451-1387-4CA6-816F-3879F97B5CBC}" type="slidenum">
+              <a:rPr lang="en-US"/>
+              <a:t>18</a:t>
             </a:fld>
             <a:endParaRPr lang="en-US"/>
           </a:p>
@@ -1307,7 +1663,7 @@
           <a:p>
             <a:r>
               <a:rPr lang="en-US" dirty="0"/>
-              <a:t>Three bodies of work are relevant: JEPA world models, in which planning latency has been reduced only by changing the model; sampling-based search, in which iCEM reduces sample counts but sample count does not determine latency; and GPU inference, in which megakernels have so far been applied only to language models.</a:t>
+              <a:t>JEPA world models predict in a learned embedding space. With action conditioning, the predictor becomes a dynamics model, and a goal image defines a target in the same space. Planning latency in this literature has been reduced by changing the model, never by examining execution.</a:t>
             </a:r>
             <a:endParaRPr lang="en-US" dirty="0"/>
           </a:p>
@@ -1395,7 +1751,7 @@
           <a:p>
             <a:r>
               <a:rPr lang="en-US" dirty="0"/>
-              <a:t>Methodology. Timings and outcomes are collected, prepared into tidy tables and analysed to locate the latency; the design follows from the analysis and is evaluated with the same instruments. Probes are configurations that differ from a system in one respect and isolate a single effect. Each design change was re-profiled before adoption.</a:t>
+              <a:t>LeWM plans by rolling candidate action sequences through its predictor in embedding space and scoring the final embedding against the goal. Each plan requires 30 iterations of this rollout for every candidate, which is the computation profiled in this study.</a:t>
             </a:r>
             <a:endParaRPr lang="en-US" dirty="0"/>
           </a:p>
@@ -1483,7 +1839,7 @@
           <a:p>
             <a:r>
               <a:rPr lang="en-US" dirty="0"/>
-              <a:t>Compute profile. One third of the latency recomputes image embeddings that are constant within a plan. Most of the remainder is the search, at approximately 409 microseconds per layer evaluation against approximately 3 microseconds of arithmetic.</a:t>
+              <a:t>The cross-entropy method is the planner used by LeWM and most JEPA world models. iCEM reduces the number of samples, but related work shows that sample count does not determine latency unless the per-iteration cost scales with it, which this study tests directly.</a:t>
             </a:r>
             <a:endParaRPr lang="en-US" dirty="0"/>
           </a:p>
@@ -1571,7 +1927,7 @@
           <a:p>
             <a:r>
               <a:rPr lang="en-US" dirty="0"/>
-              <a:t>Scaling analysis. A linear model of latency against workload shows that the eager planner's cost is almost entirely fixed, consistent with several hundred kernel launches from Python per call. This also explains the absence of a gain from iCEM under eager execution: it reduces work that is not the dominant cost.</a:t>
+              <a:t>Small models at batch size one are limited by the fixed cost of each kernel launch and CPU interaction rather than by arithmetic or memory bandwidth. Standard remedies reduce these costs per operation; megakernels remove them, but have so far been applied only to language-model inference.</a:t>
             </a:r>
             <a:endParaRPr lang="en-US" dirty="0"/>
           </a:p>
@@ -1659,7 +2015,7 @@
           <a:p>
             <a:r>
               <a:rPr lang="en-US" dirty="0"/>
-              <a:t>Each design element addresses one finding: single encoding removes the redundant third; iCEM reduces work once fixed overhead is removed; the persistent kernel removes launches and CPU round trips; cluster-level parallelism and weight streaming minimise the latency of each step of the dependent chain.</a:t>
+              <a:t>This study addresses all three gaps for LeWM: it profiles execution, tests iCEM under two execution models, and fuses the complete planning loop into one persistent GPU kernel.</a:t>
             </a:r>
             <a:endParaRPr lang="en-US" dirty="0"/>
           </a:p>
@@ -2250,7 +2606,7 @@
                 <a:ea typeface="Cambria" pitchFamily="34" charset="-122"/>
                 <a:cs typeface="Cambria" pitchFamily="34" charset="-120"/>
               </a:rPr>
-              <a:t>Results: planning latency</a:t>
+              <a:t>Methodology</a:t>
             </a:r>
             <a:endParaRPr lang="en-US" sz="2800" dirty="0"/>
           </a:p>
@@ -2272,8 +2628,8 @@
         </p:blipFill>
         <p:spPr>
           <a:xfrm>
-            <a:off x="457200" y="1237802"/>
-            <a:ext cx="5669280" cy="1547756"/>
+            <a:off x="1902372" y="960120"/>
+            <a:ext cx="5339255" cy="1828800"/>
           </a:xfrm>
           <a:prstGeom prst="rect">
             <a:avLst/>
@@ -2288,20 +2644,20 @@
         </p:nvSpPr>
         <p:spPr>
           <a:xfrm>
-            <a:off x="6309360" y="1051560"/>
-            <a:ext cx="1188720" cy="1005840"/>
+            <a:off x="457200" y="2926080"/>
+            <a:ext cx="2651760" cy="1783080"/>
           </a:xfrm>
           <a:prstGeom prst="roundRect">
             <a:avLst>
-              <a:gd name="adj" fmla="val 7273"/>
+              <a:gd name="adj" fmla="val 4103"/>
             </a:avLst>
           </a:prstGeom>
           <a:solidFill>
-            <a:srgbClr val="F3F4F6"/>
+            <a:srgbClr val="E9F1FC"/>
           </a:solidFill>
           <a:ln w="12700">
             <a:solidFill>
-              <a:srgbClr val="F3F4F6"/>
+              <a:srgbClr val="E9F1FC"/>
             </a:solidFill>
             <a:prstDash val="solid"/>
           </a:ln>
@@ -2315,8 +2671,8 @@
         </p:nvSpPr>
         <p:spPr>
           <a:xfrm>
-            <a:off x="6446520" y="1143000"/>
-            <a:ext cx="914400" cy="553212"/>
+            <a:off x="621792" y="3035808"/>
+            <a:ext cx="2331720" cy="384048"/>
           </a:xfrm>
           <a:prstGeom prst="rect">
             <a:avLst/>
@@ -2328,21 +2684,21 @@
           <a:bodyPr wrap="square" lIns="0" tIns="0" rIns="0" bIns="0" rtlCol="0" anchor="ctr"/>
           <a:lstStyle/>
           <a:p>
-            <a:pPr algn="ctr" indent="0" marL="0">
-              <a:buNone/>
-            </a:pPr>
-            <a:r>
-              <a:rPr lang="en-US" sz="2400" b="1" dirty="0">
-                <a:solidFill>
-                  <a:srgbClr val="2A78D6"/>
+            <a:pPr indent="0" marL="0">
+              <a:buNone/>
+            </a:pPr>
+            <a:r>
+              <a:rPr lang="en-US" sz="1500" b="1" dirty="0">
+                <a:solidFill>
+                  <a:srgbClr val="14213D"/>
                 </a:solidFill>
                 <a:latin typeface="Cambria" pitchFamily="34" charset="0"/>
                 <a:ea typeface="Cambria" pitchFamily="34" charset="-122"/>
                 <a:cs typeface="Cambria" pitchFamily="34" charset="-120"/>
               </a:rPr>
-              <a:t>13.4×</a:t>
-            </a:r>
-            <a:endParaRPr lang="en-US" sz="2400" dirty="0"/>
+              <a:t>Data</a:t>
+            </a:r>
+            <a:endParaRPr lang="en-US" sz="1500" dirty="0"/>
           </a:p>
         </p:txBody>
       </p:sp>
@@ -2354,8 +2710,8 @@
         </p:nvSpPr>
         <p:spPr>
           <a:xfrm>
-            <a:off x="6446520" y="1655064"/>
-            <a:ext cx="914400" cy="382219"/>
+            <a:off x="621792" y="3456432"/>
+            <a:ext cx="2331720" cy="1143000"/>
           </a:xfrm>
           <a:prstGeom prst="rect">
             <a:avLst/>
@@ -2367,38 +2723,21 @@
           <a:bodyPr wrap="square" lIns="0" tIns="0" rIns="0" bIns="0" rtlCol="0" anchor="t"/>
           <a:lstStyle/>
           <a:p>
-            <a:pPr algn="ctr" indent="0" marL="0">
-              <a:buNone/>
-            </a:pPr>
-            <a:r>
-              <a:rPr lang="en-US" sz="1000" dirty="0">
-                <a:solidFill>
-                  <a:srgbClr val="5A5A5A"/>
-                </a:solidFill>
-                <a:latin typeface="Calibri" pitchFamily="34" charset="0"/>
-                <a:ea typeface="Calibri" pitchFamily="34" charset="-122"/>
-                <a:cs typeface="Calibri" pitchFamily="34" charset="-120"/>
-              </a:rPr>
-              <a:t>vs reference</a:t>
-            </a:r>
-            <a:endParaRPr lang="en-US" sz="1000" dirty="0"/>
-          </a:p>
-          <a:p>
-            <a:pPr algn="ctr" indent="0" marL="0">
-              <a:buNone/>
-            </a:pPr>
-            <a:r>
-              <a:rPr lang="en-US" sz="1000" dirty="0">
-                <a:solidFill>
-                  <a:srgbClr val="5A5A5A"/>
-                </a:solidFill>
-                <a:latin typeface="Calibri" pitchFamily="34" charset="0"/>
-                <a:ea typeface="Calibri" pitchFamily="34" charset="-122"/>
-                <a:cs typeface="Calibri" pitchFamily="34" charset="-120"/>
-              </a:rPr>
-              <a:t>[13.0, 13.5]</a:t>
-            </a:r>
-            <a:endParaRPr lang="en-US" sz="1000" dirty="0"/>
+            <a:pPr indent="0" marL="0">
+              <a:buNone/>
+            </a:pPr>
+            <a:r>
+              <a:rPr lang="en-US" sz="1050" dirty="0">
+                <a:solidFill>
+                  <a:srgbClr val="1B1B1B"/>
+                </a:solidFill>
+                <a:latin typeface="Calibri" pitchFamily="34" charset="0"/>
+                <a:ea typeface="Calibri" pitchFamily="34" charset="-122"/>
+                <a:cs typeface="Calibri" pitchFamily="34" charset="-120"/>
+              </a:rPr>
+              <a:t>11,942 timed policy calls (61 one-robot episodes × 3 systems + 4 probes), 900 episode outcomes, telemetry, component timings.</a:t>
+            </a:r>
+            <a:endParaRPr lang="en-US" sz="1050" dirty="0"/>
           </a:p>
         </p:txBody>
       </p:sp>
@@ -2410,20 +2749,20 @@
         </p:nvSpPr>
         <p:spPr>
           <a:xfrm>
-            <a:off x="7589520" y="1051560"/>
-            <a:ext cx="1188720" cy="1005840"/>
+            <a:off x="3291840" y="2926080"/>
+            <a:ext cx="2651760" cy="1783080"/>
           </a:xfrm>
           <a:prstGeom prst="roundRect">
             <a:avLst>
-              <a:gd name="adj" fmla="val 7273"/>
+              <a:gd name="adj" fmla="val 4103"/>
             </a:avLst>
           </a:prstGeom>
           <a:solidFill>
-            <a:srgbClr val="F3F4F6"/>
+            <a:srgbClr val="E9F1FC"/>
           </a:solidFill>
           <a:ln w="12700">
             <a:solidFill>
-              <a:srgbClr val="F3F4F6"/>
+              <a:srgbClr val="E9F1FC"/>
             </a:solidFill>
             <a:prstDash val="solid"/>
           </a:ln>
@@ -2437,8 +2776,8 @@
         </p:nvSpPr>
         <p:spPr>
           <a:xfrm>
-            <a:off x="7726680" y="1143000"/>
-            <a:ext cx="914400" cy="553212"/>
+            <a:off x="3456432" y="3035808"/>
+            <a:ext cx="2331720" cy="384048"/>
           </a:xfrm>
           <a:prstGeom prst="rect">
             <a:avLst/>
@@ -2450,21 +2789,21 @@
           <a:bodyPr wrap="square" lIns="0" tIns="0" rIns="0" bIns="0" rtlCol="0" anchor="ctr"/>
           <a:lstStyle/>
           <a:p>
-            <a:pPr algn="ctr" indent="0" marL="0">
-              <a:buNone/>
-            </a:pPr>
-            <a:r>
-              <a:rPr lang="en-US" sz="2400" b="1" dirty="0">
-                <a:solidFill>
-                  <a:srgbClr val="2A78D6"/>
+            <a:pPr indent="0" marL="0">
+              <a:buNone/>
+            </a:pPr>
+            <a:r>
+              <a:rPr lang="en-US" sz="1500" b="1" dirty="0">
+                <a:solidFill>
+                  <a:srgbClr val="14213D"/>
                 </a:solidFill>
                 <a:latin typeface="Cambria" pitchFamily="34" charset="0"/>
                 <a:ea typeface="Cambria" pitchFamily="34" charset="-122"/>
                 <a:cs typeface="Cambria" pitchFamily="34" charset="-120"/>
               </a:rPr>
-              <a:t>3.9×</a:t>
-            </a:r>
-            <a:endParaRPr lang="en-US" sz="2400" dirty="0"/>
+              <a:t>Analysis</a:t>
+            </a:r>
+            <a:endParaRPr lang="en-US" sz="1500" dirty="0"/>
           </a:p>
         </p:txBody>
       </p:sp>
@@ -2476,8 +2815,8 @@
         </p:nvSpPr>
         <p:spPr>
           <a:xfrm>
-            <a:off x="7726680" y="1655064"/>
-            <a:ext cx="914400" cy="382219"/>
+            <a:off x="3456432" y="3456432"/>
+            <a:ext cx="2331720" cy="1143000"/>
           </a:xfrm>
           <a:prstGeom prst="rect">
             <a:avLst/>
@@ -2489,51 +2828,100 @@
           <a:bodyPr wrap="square" lIns="0" tIns="0" rIns="0" bIns="0" rtlCol="0" anchor="t"/>
           <a:lstStyle/>
           <a:p>
-            <a:pPr algn="ctr" indent="0" marL="0">
-              <a:buNone/>
-            </a:pPr>
-            <a:r>
-              <a:rPr lang="en-US" sz="1000" dirty="0">
-                <a:solidFill>
-                  <a:srgbClr val="5A5A5A"/>
-                </a:solidFill>
-                <a:latin typeface="Calibri" pitchFamily="34" charset="0"/>
-                <a:ea typeface="Calibri" pitchFamily="34" charset="-122"/>
-                <a:cs typeface="Calibri" pitchFamily="34" charset="-120"/>
-              </a:rPr>
-              <a:t>vs optimised</a:t>
-            </a:r>
-            <a:endParaRPr lang="en-US" sz="1000" dirty="0"/>
-          </a:p>
-          <a:p>
-            <a:pPr algn="ctr" indent="0" marL="0">
-              <a:buNone/>
-            </a:pPr>
-            <a:r>
-              <a:rPr lang="en-US" sz="1000" dirty="0">
-                <a:solidFill>
-                  <a:srgbClr val="5A5A5A"/>
-                </a:solidFill>
-                <a:latin typeface="Calibri" pitchFamily="34" charset="0"/>
-                <a:ea typeface="Calibri" pitchFamily="34" charset="-122"/>
-                <a:cs typeface="Calibri" pitchFamily="34" charset="-120"/>
-              </a:rPr>
-              <a:t>PyTorch</a:t>
-            </a:r>
-            <a:endParaRPr lang="en-US" sz="1000" dirty="0"/>
-          </a:p>
-        </p:txBody>
-      </p:sp>
-      <p:sp>
-        <p:nvSpPr>
-          <p:cNvPr id="10" name="Text 7"/>
-          <p:cNvSpPr txBox="1"/>
-          <p:nvPr/>
-        </p:nvSpPr>
-        <p:spPr>
-          <a:xfrm>
-            <a:off x="6309360" y="2240280"/>
-            <a:ext cx="2468880" cy="2377440"/>
+            <a:pPr indent="0" marL="0">
+              <a:buNone/>
+            </a:pPr>
+            <a:r>
+              <a:rPr lang="en-US" sz="1050" dirty="0">
+                <a:solidFill>
+                  <a:srgbClr val="1B1B1B"/>
+                </a:solidFill>
+                <a:latin typeface="Calibri" pitchFamily="34" charset="0"/>
+                <a:ea typeface="Calibri" pitchFamily="34" charset="-122"/>
+                <a:cs typeface="Calibri" pitchFamily="34" charset="-120"/>
+              </a:rPr>
+              <a:t>Warm-up removal and outlier flags; stage decomposition; a fitted model latency = a + b·N separating fixed overhead from work.</a:t>
+            </a:r>
+            <a:endParaRPr lang="en-US" sz="1050" dirty="0"/>
+          </a:p>
+        </p:txBody>
+      </p:sp>
+      <p:sp>
+        <p:nvSpPr>
+          <p:cNvPr id="10" name="Shape 7"/>
+          <p:cNvSpPr/>
+          <p:nvPr/>
+        </p:nvSpPr>
+        <p:spPr>
+          <a:xfrm>
+            <a:off x="6126480" y="2926080"/>
+            <a:ext cx="2651760" cy="1783080"/>
+          </a:xfrm>
+          <a:prstGeom prst="roundRect">
+            <a:avLst>
+              <a:gd name="adj" fmla="val 4103"/>
+            </a:avLst>
+          </a:prstGeom>
+          <a:solidFill>
+            <a:srgbClr val="E9F1FC"/>
+          </a:solidFill>
+          <a:ln w="12700">
+            <a:solidFill>
+              <a:srgbClr val="E9F1FC"/>
+            </a:solidFill>
+            <a:prstDash val="solid"/>
+          </a:ln>
+        </p:spPr>
+      </p:sp>
+      <p:sp>
+        <p:nvSpPr>
+          <p:cNvPr id="11" name="Text 8"/>
+          <p:cNvSpPr txBox="1"/>
+          <p:nvPr/>
+        </p:nvSpPr>
+        <p:spPr>
+          <a:xfrm>
+            <a:off x="6291072" y="3035808"/>
+            <a:ext cx="2331720" cy="384048"/>
+          </a:xfrm>
+          <a:prstGeom prst="rect">
+            <a:avLst/>
+          </a:prstGeom>
+          <a:noFill/>
+          <a:ln/>
+        </p:spPr>
+        <p:txBody>
+          <a:bodyPr wrap="square" lIns="0" tIns="0" rIns="0" bIns="0" rtlCol="0" anchor="ctr"/>
+          <a:lstStyle/>
+          <a:p>
+            <a:pPr indent="0" marL="0">
+              <a:buNone/>
+            </a:pPr>
+            <a:r>
+              <a:rPr lang="en-US" sz="1500" b="1" dirty="0">
+                <a:solidFill>
+                  <a:srgbClr val="14213D"/>
+                </a:solidFill>
+                <a:latin typeface="Cambria" pitchFamily="34" charset="0"/>
+                <a:ea typeface="Cambria" pitchFamily="34" charset="-122"/>
+                <a:cs typeface="Cambria" pitchFamily="34" charset="-120"/>
+              </a:rPr>
+              <a:t>Evaluation</a:t>
+            </a:r>
+            <a:endParaRPr lang="en-US" sz="1500" dirty="0"/>
+          </a:p>
+        </p:txBody>
+      </p:sp>
+      <p:sp>
+        <p:nvSpPr>
+          <p:cNvPr id="12" name="Text 9"/>
+          <p:cNvSpPr txBox="1"/>
+          <p:nvPr/>
+        </p:nvSpPr>
+        <p:spPr>
+          <a:xfrm>
+            <a:off x="6291072" y="3456432"/>
+            <a:ext cx="2331720" cy="1143000"/>
           </a:xfrm>
           <a:prstGeom prst="rect">
             <a:avLst/>
@@ -2545,15 +2933,11 @@
           <a:bodyPr wrap="square" lIns="0" tIns="0" rIns="0" bIns="0" rtlCol="0" anchor="t"/>
           <a:lstStyle/>
           <a:p>
-            <a:pPr marL="177800" indent="-177800">
-              <a:spcAft>
-                <a:spcPts val="700"/>
-              </a:spcAft>
-              <a:buSzPct val="100000"/>
-              <a:buChar char="•"/>
-            </a:pPr>
-            <a:r>
-              <a:rPr lang="en-US" sz="1100" dirty="0">
+            <a:pPr indent="0" marL="0">
+              <a:buNone/>
+            </a:pPr>
+            <a:r>
+              <a:rPr lang="en-US" sz="1050" dirty="0">
                 <a:solidFill>
                   <a:srgbClr val="1B1B1B"/>
                 </a:solidFill>
@@ -2561,96 +2945,15 @@
                 <a:ea typeface="Calibri" pitchFamily="34" charset="-122"/>
                 <a:cs typeface="Calibri" pitchFamily="34" charset="-120"/>
               </a:rPr>
-              <a:t>90th percentile 47.0 ms; interquartile range 0.7 ms wide.</a:t>
-            </a:r>
-            <a:endParaRPr lang="en-US" sz="1100" dirty="0"/>
-          </a:p>
-          <a:p>
-            <a:pPr marL="177800" indent="-177800">
-              <a:spcAft>
-                <a:spcPts val="700"/>
-              </a:spcAft>
-              <a:buSzPct val="100000"/>
-              <a:buChar char="•"/>
-            </a:pPr>
-            <a:r>
-              <a:rPr lang="en-US" sz="1100" dirty="0">
-                <a:solidFill>
-                  <a:srgbClr val="1B1B1B"/>
-                </a:solidFill>
-                <a:latin typeface="Calibri" pitchFamily="34" charset="0"/>
-                <a:ea typeface="Calibri" pitchFamily="34" charset="-122"/>
-                <a:cs typeface="Calibri" pitchFamily="34" charset="-120"/>
-              </a:rPr>
-              <a:t>Fits a 20 Hz control loop at the median.</a:t>
-            </a:r>
-            <a:endParaRPr lang="en-US" sz="1100" dirty="0"/>
-          </a:p>
-          <a:p>
-            <a:pPr marL="177800" indent="-177800">
-              <a:spcAft>
-                <a:spcPts val="700"/>
-              </a:spcAft>
-              <a:buSzPct val="100000"/>
-              <a:buChar char="•"/>
-            </a:pPr>
-            <a:r>
-              <a:rPr lang="en-US" sz="1100" dirty="0">
-                <a:solidFill>
-                  <a:srgbClr val="1B1B1B"/>
-                </a:solidFill>
-                <a:latin typeface="Calibri" pitchFamily="34" charset="0"/>
-                <a:ea typeface="Calibri" pitchFamily="34" charset="-122"/>
-                <a:cs typeface="Calibri" pitchFamily="34" charset="-120"/>
-              </a:rPr>
-              <a:t>Search now 46 µs per layer (was 409); synchronisation about 7% of it.</a:t>
-            </a:r>
-            <a:endParaRPr lang="en-US" sz="1100" dirty="0"/>
-          </a:p>
-        </p:txBody>
-      </p:sp>
-      <p:sp>
-        <p:nvSpPr>
-          <p:cNvPr id="11" name="Text 8"/>
-          <p:cNvSpPr txBox="1"/>
-          <p:nvPr/>
-        </p:nvSpPr>
-        <p:spPr>
-          <a:xfrm>
-            <a:off x="457200" y="3154680"/>
-            <a:ext cx="5669280" cy="274320"/>
-          </a:xfrm>
-          <a:prstGeom prst="rect">
-            <a:avLst/>
-          </a:prstGeom>
-          <a:noFill/>
-          <a:ln/>
-        </p:spPr>
-        <p:txBody>
-          <a:bodyPr wrap="square" lIns="0" tIns="0" rIns="0" bIns="0" rtlCol="0" anchor="ctr"/>
-          <a:lstStyle/>
-          <a:p>
-            <a:pPr indent="0" marL="0">
-              <a:buNone/>
-            </a:pPr>
-            <a:r>
-              <a:rPr lang="en-US" sz="1000" i="1" dirty="0">
-                <a:solidFill>
-                  <a:srgbClr val="5A5A5A"/>
-                </a:solidFill>
-                <a:latin typeface="Calibri" pitchFamily="34" charset="0"/>
-                <a:ea typeface="Calibri" pitchFamily="34" charset="-122"/>
-                <a:cs typeface="Calibri" pitchFamily="34" charset="-120"/>
-              </a:rPr>
-              <a:t>End-to-end planning latency, log scale: median, interquartile box, 1.5-IQR whiskers, outlying plans. Baseline uses compile, CUDA Graphs and BF16.</a:t>
-            </a:r>
-            <a:endParaRPr lang="en-US" sz="1000" dirty="0"/>
-          </a:p>
-        </p:txBody>
-      </p:sp>
-      <p:sp>
-        <p:nvSpPr>
-          <p:cNvPr id="13" name="Text 9"/>
+              <a:t>Medians with bootstrap CIs; 300 paired episodes, McNemar and paired bootstrap; numerical error against FP32.</a:t>
+            </a:r>
+            <a:endParaRPr lang="en-US" sz="1050" dirty="0"/>
+          </a:p>
+        </p:txBody>
+      </p:sp>
+      <p:sp>
+        <p:nvSpPr>
+          <p:cNvPr id="14" name="Text 10"/>
           <p:cNvSpPr txBox="1"/>
           <p:nvPr/>
         </p:nvSpPr>
@@ -2745,7 +3048,7 @@
                 <a:ea typeface="Cambria" pitchFamily="34" charset="-122"/>
                 <a:cs typeface="Cambria" pitchFamily="34" charset="-120"/>
               </a:rPr>
-              <a:t>Results: task success and numerical fidelity</a:t>
+              <a:t>Compute profile of the reference planner</a:t>
             </a:r>
             <a:endParaRPr lang="en-US" sz="2800" dirty="0"/>
           </a:p>
@@ -2767,8 +3070,8 @@
         </p:blipFill>
         <p:spPr>
           <a:xfrm>
-            <a:off x="457200" y="1060164"/>
-            <a:ext cx="5669280" cy="1628712"/>
+            <a:off x="797742" y="960120"/>
+            <a:ext cx="4805316" cy="2286000"/>
           </a:xfrm>
           <a:prstGeom prst="rect">
             <a:avLst/>
@@ -2783,8 +3086,8 @@
         </p:nvSpPr>
         <p:spPr>
           <a:xfrm>
-            <a:off x="6309360" y="1051560"/>
-            <a:ext cx="2468880" cy="3657600"/>
+            <a:off x="6126480" y="1051560"/>
+            <a:ext cx="2651760" cy="3566160"/>
           </a:xfrm>
           <a:prstGeom prst="rect">
             <a:avLst/>
@@ -2804,7 +3107,7 @@
               <a:buChar char="•"/>
             </a:pPr>
             <a:r>
-              <a:rPr lang="en-US" sz="1100" dirty="0">
+              <a:rPr lang="en-US" sz="1150" dirty="0">
                 <a:solidFill>
                   <a:srgbClr val="1B1B1B"/>
                 </a:solidFill>
@@ -2812,9 +3115,9 @@
                 <a:ea typeface="Calibri" pitchFamily="34" charset="-122"/>
                 <a:cs typeface="Calibri" pitchFamily="34" charset="-120"/>
               </a:rPr>
-              <a:t>261 / 261 / 260 successes of 300 for reference, optimised PyTorch and LeWM-MK.</a:t>
-            </a:r>
-            <a:endParaRPr lang="en-US" sz="1100" dirty="0"/>
+              <a:t>33%: re-encoding the same two images 60 times per plan (telemetry: 60 encoder calls, 2 distinct images).</a:t>
+            </a:r>
+            <a:endParaRPr lang="en-US" sz="1150" dirty="0"/>
           </a:p>
           <a:p>
             <a:pPr marL="177800" indent="-177800">
@@ -2825,7 +3128,7 @@
               <a:buChar char="•"/>
             </a:pPr>
             <a:r>
-              <a:rPr lang="en-US" sz="1100" dirty="0">
+              <a:rPr lang="en-US" sz="1150" dirty="0">
                 <a:solidFill>
                   <a:srgbClr val="1B1B1B"/>
                 </a:solidFill>
@@ -2833,9 +3136,9 @@
                 <a:ea typeface="Calibri" pitchFamily="34" charset="-122"/>
                 <a:cs typeface="Calibri" pitchFamily="34" charset="-120"/>
               </a:rPr>
-              <a:t>LeWM-MK vs reference: 19 won, 20 lost; −0.3 points [−4.3, +3.7]; McNemar p = 1.00.</a:t>
-            </a:r>
-            <a:endParaRPr lang="en-US" sz="1100" dirty="0"/>
+              <a:t>59%: the search, 12.3 ms per iteration, 409 µs per layer for about 3 µs of arithmetic.</a:t>
+            </a:r>
+            <a:endParaRPr lang="en-US" sz="1150" dirty="0"/>
           </a:p>
           <a:p>
             <a:pPr marL="177800" indent="-177800">
@@ -2846,7 +3149,7 @@
               <a:buChar char="•"/>
             </a:pPr>
             <a:r>
-              <a:rPr lang="en-US" sz="1100" dirty="0">
+              <a:rPr lang="en-US" sz="1150" dirty="0">
                 <a:solidFill>
                   <a:srgbClr val="1B1B1B"/>
                 </a:solidFill>
@@ -2854,9 +3157,9 @@
                 <a:ea typeface="Calibri" pitchFamily="34" charset="-122"/>
                 <a:cs typeface="Calibri" pitchFamily="34" charset="-120"/>
               </a:rPr>
-              <a:t>Discordant episodes reflect stochastic search; the optimised PyTorch planner is discordant on 36.</a:t>
-            </a:r>
-            <a:endParaRPr lang="en-US" sz="1100" dirty="0"/>
+              <a:t>7%: CPU synchronisation between iterations.</a:t>
+            </a:r>
+            <a:endParaRPr lang="en-US" sz="1150" dirty="0"/>
           </a:p>
           <a:p>
             <a:pPr marL="177800" indent="-177800">
@@ -2867,7 +3170,7 @@
               <a:buChar char="•"/>
             </a:pPr>
             <a:r>
-              <a:rPr lang="en-US" sz="1100" dirty="0">
+              <a:rPr lang="en-US" sz="1150" dirty="0">
                 <a:solidFill>
                   <a:srgbClr val="1B1B1B"/>
                 </a:solidFill>
@@ -2875,9 +3178,9 @@
                 <a:ea typeface="Calibri" pitchFamily="34" charset="-122"/>
                 <a:cs typeface="Calibri" pitchFamily="34" charset="-120"/>
               </a:rPr>
-              <a:t>Numerical error vs FP32: 0.06–0.32%, matching accepted BF16 (0.05–0.40%).</a:t>
-            </a:r>
-            <a:endParaRPr lang="en-US" sz="1100" dirty="0"/>
+              <a:t>Under 1%: the policy code around the planner.</a:t>
+            </a:r>
+            <a:endParaRPr lang="en-US" sz="1150" dirty="0"/>
           </a:p>
         </p:txBody>
       </p:sp>
@@ -2889,8 +3192,8 @@
         </p:nvSpPr>
         <p:spPr>
           <a:xfrm>
-            <a:off x="457200" y="2926080"/>
-            <a:ext cx="5669280" cy="274320"/>
+            <a:off x="457200" y="3429000"/>
+            <a:ext cx="5486400" cy="274320"/>
           </a:xfrm>
           <a:prstGeom prst="rect">
             <a:avLst/>
@@ -2914,7 +3217,7 @@
                 <a:ea typeface="Calibri" pitchFamily="34" charset="-122"/>
                 <a:cs typeface="Calibri" pitchFamily="34" charset="-120"/>
               </a:rPr>
-              <a:t>Push-T success on the same 300 episodes, Wilson 95% intervals. 300 pairs detect differences of about 6 points.</a:t>
+              <a:t>Top bar: reference planner, by stage. Bottom bar: LeWM-MK (Section 6). Stages without a direct measurement attributed by difference.</a:t>
             </a:r>
             <a:endParaRPr lang="en-US" sz="1000" dirty="0"/>
           </a:p>
@@ -3017,338 +3320,50 @@
                 <a:ea typeface="Cambria" pitchFamily="34" charset="-122"/>
                 <a:cs typeface="Cambria" pitchFamily="34" charset="-120"/>
               </a:rPr>
-              <a:t>Conclusions and limitations</a:t>
+              <a:t>Latency scaling analysis</a:t>
             </a:r>
             <a:endParaRPr lang="en-US" sz="2800" dirty="0"/>
           </a:p>
         </p:txBody>
       </p:sp>
-      <p:sp>
-        <p:nvSpPr>
-          <p:cNvPr id="3" name="Text 1"/>
-          <p:cNvSpPr txBox="1"/>
-          <p:nvPr/>
-        </p:nvSpPr>
-        <p:spPr>
-          <a:xfrm>
-            <a:off x="457200" y="1051560"/>
-            <a:ext cx="640080" cy="502920"/>
-          </a:xfrm>
-          <a:prstGeom prst="rect">
-            <a:avLst/>
-          </a:prstGeom>
-          <a:noFill/>
-          <a:ln/>
-        </p:spPr>
-        <p:txBody>
-          <a:bodyPr wrap="square" lIns="0" tIns="0" rIns="0" bIns="0" rtlCol="0" anchor="t"/>
-          <a:lstStyle/>
-          <a:p>
-            <a:pPr indent="0" marL="0">
-              <a:buNone/>
-            </a:pPr>
-            <a:r>
-              <a:rPr lang="en-US" sz="1400" b="1" dirty="0">
-                <a:solidFill>
-                  <a:srgbClr val="2A78D6"/>
-                </a:solidFill>
-                <a:latin typeface="Cambria" pitchFamily="34" charset="0"/>
-                <a:ea typeface="Cambria" pitchFamily="34" charset="-122"/>
-                <a:cs typeface="Cambria" pitchFamily="34" charset="-120"/>
-              </a:rPr>
-              <a:t>O1</a:t>
-            </a:r>
-            <a:endParaRPr lang="en-US" sz="1400" dirty="0"/>
-          </a:p>
-        </p:txBody>
-      </p:sp>
-      <p:sp>
-        <p:nvSpPr>
-          <p:cNvPr id="4" name="Text 2"/>
-          <p:cNvSpPr txBox="1"/>
-          <p:nvPr/>
-        </p:nvSpPr>
-        <p:spPr>
-          <a:xfrm>
-            <a:off x="1143000" y="1051560"/>
-            <a:ext cx="4160520" cy="713232"/>
-          </a:xfrm>
-          <a:prstGeom prst="rect">
-            <a:avLst/>
-          </a:prstGeom>
-          <a:noFill/>
-          <a:ln/>
-        </p:spPr>
-        <p:txBody>
-          <a:bodyPr wrap="square" lIns="0" tIns="0" rIns="0" bIns="0" rtlCol="0" anchor="t"/>
-          <a:lstStyle/>
-          <a:p>
-            <a:pPr indent="0" marL="0">
-              <a:buNone/>
-            </a:pPr>
-            <a:r>
-              <a:rPr lang="en-US" sz="1150" dirty="0">
-                <a:solidFill>
-                  <a:srgbClr val="1B1B1B"/>
-                </a:solidFill>
-                <a:latin typeface="Calibri" pitchFamily="34" charset="0"/>
-                <a:ea typeface="Calibri" pitchFamily="34" charset="-122"/>
-                <a:cs typeface="Calibri" pitchFamily="34" charset="-120"/>
-              </a:rPr>
-              <a:t>The reference's time was overhead: 33% redundant encoding, a search 99% fixed cost per call, 7% CPU waits.</a:t>
-            </a:r>
-            <a:endParaRPr lang="en-US" sz="1150" dirty="0"/>
-          </a:p>
-        </p:txBody>
-      </p:sp>
-      <p:sp>
-        <p:nvSpPr>
-          <p:cNvPr id="5" name="Text 3"/>
-          <p:cNvSpPr txBox="1"/>
-          <p:nvPr/>
-        </p:nvSpPr>
-        <p:spPr>
-          <a:xfrm>
-            <a:off x="457200" y="1801368"/>
-            <a:ext cx="640080" cy="502920"/>
-          </a:xfrm>
-          <a:prstGeom prst="rect">
-            <a:avLst/>
-          </a:prstGeom>
-          <a:noFill/>
-          <a:ln/>
-        </p:spPr>
-        <p:txBody>
-          <a:bodyPr wrap="square" lIns="0" tIns="0" rIns="0" bIns="0" rtlCol="0" anchor="t"/>
-          <a:lstStyle/>
-          <a:p>
-            <a:pPr indent="0" marL="0">
-              <a:buNone/>
-            </a:pPr>
-            <a:r>
-              <a:rPr lang="en-US" sz="1400" b="1" dirty="0">
-                <a:solidFill>
-                  <a:srgbClr val="2A78D6"/>
-                </a:solidFill>
-                <a:latin typeface="Cambria" pitchFamily="34" charset="0"/>
-                <a:ea typeface="Cambria" pitchFamily="34" charset="-122"/>
-                <a:cs typeface="Cambria" pitchFamily="34" charset="-120"/>
-              </a:rPr>
-              <a:t>O2</a:t>
-            </a:r>
-            <a:endParaRPr lang="en-US" sz="1400" dirty="0"/>
-          </a:p>
-        </p:txBody>
-      </p:sp>
-      <p:sp>
-        <p:nvSpPr>
-          <p:cNvPr id="6" name="Text 4"/>
-          <p:cNvSpPr txBox="1"/>
-          <p:nvPr/>
-        </p:nvSpPr>
-        <p:spPr>
-          <a:xfrm>
-            <a:off x="1143000" y="1801368"/>
-            <a:ext cx="4160520" cy="713232"/>
-          </a:xfrm>
-          <a:prstGeom prst="rect">
-            <a:avLst/>
-          </a:prstGeom>
-          <a:noFill/>
-          <a:ln/>
-        </p:spPr>
-        <p:txBody>
-          <a:bodyPr wrap="square" lIns="0" tIns="0" rIns="0" bIns="0" rtlCol="0" anchor="t"/>
-          <a:lstStyle/>
-          <a:p>
-            <a:pPr indent="0" marL="0">
-              <a:buNone/>
-            </a:pPr>
-            <a:r>
-              <a:rPr lang="en-US" sz="1150" dirty="0">
-                <a:solidFill>
-                  <a:srgbClr val="1B1B1B"/>
-                </a:solidFill>
-                <a:latin typeface="Calibri" pitchFamily="34" charset="0"/>
-                <a:ea typeface="Calibri" pitchFamily="34" charset="-122"/>
-                <a:cs typeface="Calibri" pitchFamily="34" charset="-120"/>
-              </a:rPr>
-              <a:t>LeWM-MK removes each bottleneck with the model and search budget unchanged.</a:t>
-            </a:r>
-            <a:endParaRPr lang="en-US" sz="1150" dirty="0"/>
-          </a:p>
-        </p:txBody>
-      </p:sp>
-      <p:sp>
-        <p:nvSpPr>
-          <p:cNvPr id="7" name="Text 5"/>
-          <p:cNvSpPr txBox="1"/>
-          <p:nvPr/>
-        </p:nvSpPr>
-        <p:spPr>
-          <a:xfrm>
-            <a:off x="457200" y="2551176"/>
-            <a:ext cx="640080" cy="502920"/>
-          </a:xfrm>
-          <a:prstGeom prst="rect">
-            <a:avLst/>
-          </a:prstGeom>
-          <a:noFill/>
-          <a:ln/>
-        </p:spPr>
-        <p:txBody>
-          <a:bodyPr wrap="square" lIns="0" tIns="0" rIns="0" bIns="0" rtlCol="0" anchor="t"/>
-          <a:lstStyle/>
-          <a:p>
-            <a:pPr indent="0" marL="0">
-              <a:buNone/>
-            </a:pPr>
-            <a:r>
-              <a:rPr lang="en-US" sz="1400" b="1" dirty="0">
-                <a:solidFill>
-                  <a:srgbClr val="2A78D6"/>
-                </a:solidFill>
-                <a:latin typeface="Cambria" pitchFamily="34" charset="0"/>
-                <a:ea typeface="Cambria" pitchFamily="34" charset="-122"/>
-                <a:cs typeface="Cambria" pitchFamily="34" charset="-120"/>
-              </a:rPr>
-              <a:t>O3</a:t>
-            </a:r>
-            <a:endParaRPr lang="en-US" sz="1400" dirty="0"/>
-          </a:p>
-        </p:txBody>
-      </p:sp>
-      <p:sp>
-        <p:nvSpPr>
-          <p:cNvPr id="8" name="Text 6"/>
-          <p:cNvSpPr txBox="1"/>
-          <p:nvPr/>
-        </p:nvSpPr>
-        <p:spPr>
-          <a:xfrm>
-            <a:off x="1143000" y="2551176"/>
-            <a:ext cx="4160520" cy="713232"/>
-          </a:xfrm>
-          <a:prstGeom prst="rect">
-            <a:avLst/>
-          </a:prstGeom>
-          <a:noFill/>
-          <a:ln/>
-        </p:spPr>
-        <p:txBody>
-          <a:bodyPr wrap="square" lIns="0" tIns="0" rIns="0" bIns="0" rtlCol="0" anchor="t"/>
-          <a:lstStyle/>
-          <a:p>
-            <a:pPr indent="0" marL="0">
-              <a:buNone/>
-            </a:pPr>
-            <a:r>
-              <a:rPr lang="en-US" sz="1150" dirty="0">
-                <a:solidFill>
-                  <a:srgbClr val="1B1B1B"/>
-                </a:solidFill>
-                <a:latin typeface="Calibri" pitchFamily="34" charset="0"/>
-                <a:ea typeface="Calibri" pitchFamily="34" charset="-122"/>
-                <a:cs typeface="Calibri" pitchFamily="34" charset="-120"/>
-              </a:rPr>
-              <a:t>46.5 ms per plan: 13.4× the reference, 3.9× optimised PyTorch; success unchanged (−0.3 pts).</a:t>
-            </a:r>
-            <a:endParaRPr lang="en-US" sz="1150" dirty="0"/>
-          </a:p>
-        </p:txBody>
-      </p:sp>
-      <p:sp>
-        <p:nvSpPr>
-          <p:cNvPr id="9" name="Text 7"/>
-          <p:cNvSpPr txBox="1"/>
-          <p:nvPr/>
-        </p:nvSpPr>
-        <p:spPr>
-          <a:xfrm>
-            <a:off x="457200" y="3300984"/>
-            <a:ext cx="640080" cy="502920"/>
-          </a:xfrm>
-          <a:prstGeom prst="rect">
-            <a:avLst/>
-          </a:prstGeom>
-          <a:noFill/>
-          <a:ln/>
-        </p:spPr>
-        <p:txBody>
-          <a:bodyPr wrap="square" lIns="0" tIns="0" rIns="0" bIns="0" rtlCol="0" anchor="t"/>
-          <a:lstStyle/>
-          <a:p>
-            <a:pPr indent="0" marL="0">
-              <a:buNone/>
-            </a:pPr>
-            <a:r>
-              <a:rPr lang="en-US" sz="1400" b="1" dirty="0">
-                <a:solidFill>
-                  <a:srgbClr val="2A78D6"/>
-                </a:solidFill>
-                <a:latin typeface="Cambria" pitchFamily="34" charset="0"/>
-                <a:ea typeface="Cambria" pitchFamily="34" charset="-122"/>
-                <a:cs typeface="Cambria" pitchFamily="34" charset="-120"/>
-              </a:rPr>
-              <a:t>O4</a:t>
-            </a:r>
-            <a:endParaRPr lang="en-US" sz="1400" dirty="0"/>
-          </a:p>
-        </p:txBody>
-      </p:sp>
-      <p:sp>
-        <p:nvSpPr>
-          <p:cNvPr id="10" name="Text 8"/>
-          <p:cNvSpPr txBox="1"/>
-          <p:nvPr/>
-        </p:nvSpPr>
-        <p:spPr>
-          <a:xfrm>
-            <a:off x="1143000" y="3300984"/>
-            <a:ext cx="4160520" cy="713232"/>
-          </a:xfrm>
-          <a:prstGeom prst="rect">
-            <a:avLst/>
-          </a:prstGeom>
-          <a:noFill/>
-          <a:ln/>
-        </p:spPr>
-        <p:txBody>
-          <a:bodyPr wrap="square" lIns="0" tIns="0" rIns="0" bIns="0" rtlCol="0" anchor="t"/>
-          <a:lstStyle/>
-          <a:p>
-            <a:pPr indent="0" marL="0">
-              <a:buNone/>
-            </a:pPr>
-            <a:r>
-              <a:rPr lang="en-US" sz="1150" dirty="0">
-                <a:solidFill>
-                  <a:srgbClr val="1B1B1B"/>
-                </a:solidFill>
-                <a:latin typeface="Calibri" pitchFamily="34" charset="0"/>
-                <a:ea typeface="Calibri" pitchFamily="34" charset="-122"/>
-                <a:cs typeface="Calibri" pitchFamily="34" charset="-120"/>
-              </a:rPr>
-              <a:t>Planner plug-in; one program regenerates every result from the data.</a:t>
-            </a:r>
-            <a:endParaRPr lang="en-US" sz="1150" dirty="0"/>
-          </a:p>
-        </p:txBody>
-      </p:sp>
-      <p:sp>
-        <p:nvSpPr>
-          <p:cNvPr id="11" name="Shape 9"/>
+      <p:pic>
+        <p:nvPicPr>
+          <p:cNvPr id="3" name="Image 0" descr="preencoded.png">    </p:cNvPr>
+          <p:cNvPicPr>
+            <a:picLocks noChangeAspect="1"/>
+          </p:cNvPicPr>
+          <p:nvPr/>
+        </p:nvPicPr>
+        <p:blipFill>
+          <a:blip r:embed="rId1"/>
+          <a:stretch>
+            <a:fillRect/>
+          </a:stretch>
+        </p:blipFill>
+        <p:spPr>
+          <a:xfrm>
+            <a:off x="606829" y="960120"/>
+            <a:ext cx="5187142" cy="2377440"/>
+          </a:xfrm>
+          <a:prstGeom prst="rect">
+            <a:avLst/>
+          </a:prstGeom>
+        </p:spPr>
+      </p:pic>
+      <p:sp>
+        <p:nvSpPr>
+          <p:cNvPr id="4" name="Shape 1"/>
           <p:cNvSpPr/>
           <p:nvPr/>
         </p:nvSpPr>
         <p:spPr>
           <a:xfrm>
-            <a:off x="5577840" y="1051560"/>
-            <a:ext cx="3108960" cy="3566160"/>
+            <a:off x="6217920" y="1051560"/>
+            <a:ext cx="1234440" cy="1051560"/>
           </a:xfrm>
           <a:prstGeom prst="roundRect">
             <a:avLst>
-              <a:gd name="adj" fmla="val 2353"/>
+              <a:gd name="adj" fmla="val 6957"/>
             </a:avLst>
           </a:prstGeom>
           <a:solidFill>
@@ -3364,14 +3379,14 @@
       </p:sp>
       <p:sp>
         <p:nvSpPr>
-          <p:cNvPr id="12" name="Text 10"/>
-          <p:cNvSpPr txBox="1"/>
-          <p:nvPr/>
-        </p:nvSpPr>
-        <p:spPr>
-          <a:xfrm>
-            <a:off x="5760720" y="1161288"/>
-            <a:ext cx="2743200" cy="365760"/>
+          <p:cNvPr id="5" name="Text 2"/>
+          <p:cNvSpPr txBox="1"/>
+          <p:nvPr/>
+        </p:nvSpPr>
+        <p:spPr>
+          <a:xfrm>
+            <a:off x="6355080" y="1143000"/>
+            <a:ext cx="960120" cy="578358"/>
           </a:xfrm>
           <a:prstGeom prst="rect">
             <a:avLst/>
@@ -3383,34 +3398,212 @@
           <a:bodyPr wrap="square" lIns="0" tIns="0" rIns="0" bIns="0" rtlCol="0" anchor="ctr"/>
           <a:lstStyle/>
           <a:p>
-            <a:pPr indent="0" marL="0">
-              <a:buNone/>
-            </a:pPr>
-            <a:r>
-              <a:rPr lang="en-US" sz="1500" b="1" dirty="0">
-                <a:solidFill>
-                  <a:srgbClr val="14213D"/>
+            <a:pPr algn="ctr" indent="0" marL="0">
+              <a:buNone/>
+            </a:pPr>
+            <a:r>
+              <a:rPr lang="en-US" sz="2600" b="1" dirty="0">
+                <a:solidFill>
+                  <a:srgbClr val="EB6834"/>
                 </a:solidFill>
                 <a:latin typeface="Cambria" pitchFamily="34" charset="0"/>
                 <a:ea typeface="Cambria" pitchFamily="34" charset="-122"/>
                 <a:cs typeface="Cambria" pitchFamily="34" charset="-120"/>
               </a:rPr>
-              <a:t>Limitations</a:t>
-            </a:r>
-            <a:endParaRPr lang="en-US" sz="1500" dirty="0"/>
-          </a:p>
-        </p:txBody>
-      </p:sp>
-      <p:sp>
-        <p:nvSpPr>
-          <p:cNvPr id="13" name="Text 11"/>
-          <p:cNvSpPr txBox="1"/>
-          <p:nvPr/>
-        </p:nvSpPr>
-        <p:spPr>
-          <a:xfrm>
-            <a:off x="5760720" y="1572768"/>
-            <a:ext cx="2788920" cy="3017520"/>
+              <a:t>99%</a:t>
+            </a:r>
+            <a:endParaRPr lang="en-US" sz="2600" dirty="0"/>
+          </a:p>
+        </p:txBody>
+      </p:sp>
+      <p:sp>
+        <p:nvSpPr>
+          <p:cNvPr id="6" name="Text 3"/>
+          <p:cNvSpPr txBox="1"/>
+          <p:nvPr/>
+        </p:nvSpPr>
+        <p:spPr>
+          <a:xfrm>
+            <a:off x="6355080" y="1682496"/>
+            <a:ext cx="960120" cy="399593"/>
+          </a:xfrm>
+          <a:prstGeom prst="rect">
+            <a:avLst/>
+          </a:prstGeom>
+          <a:noFill/>
+          <a:ln/>
+        </p:spPr>
+        <p:txBody>
+          <a:bodyPr wrap="square" lIns="0" tIns="0" rIns="0" bIns="0" rtlCol="0" anchor="t"/>
+          <a:lstStyle/>
+          <a:p>
+            <a:pPr algn="ctr" indent="0" marL="0">
+              <a:buNone/>
+            </a:pPr>
+            <a:r>
+              <a:rPr lang="en-US" sz="1000" dirty="0">
+                <a:solidFill>
+                  <a:srgbClr val="5A5A5A"/>
+                </a:solidFill>
+                <a:latin typeface="Calibri" pitchFamily="34" charset="0"/>
+                <a:ea typeface="Calibri" pitchFamily="34" charset="-122"/>
+                <a:cs typeface="Calibri" pitchFamily="34" charset="-120"/>
+              </a:rPr>
+              <a:t>of an eager call</a:t>
+            </a:r>
+            <a:endParaRPr lang="en-US" sz="1000" dirty="0"/>
+          </a:p>
+          <a:p>
+            <a:pPr algn="ctr" indent="0" marL="0">
+              <a:buNone/>
+            </a:pPr>
+            <a:r>
+              <a:rPr lang="en-US" sz="1000" dirty="0">
+                <a:solidFill>
+                  <a:srgbClr val="5A5A5A"/>
+                </a:solidFill>
+                <a:latin typeface="Calibri" pitchFamily="34" charset="0"/>
+                <a:ea typeface="Calibri" pitchFamily="34" charset="-122"/>
+                <a:cs typeface="Calibri" pitchFamily="34" charset="-120"/>
+              </a:rPr>
+              <a:t>is fixed cost</a:t>
+            </a:r>
+            <a:endParaRPr lang="en-US" sz="1000" dirty="0"/>
+          </a:p>
+        </p:txBody>
+      </p:sp>
+      <p:sp>
+        <p:nvSpPr>
+          <p:cNvPr id="7" name="Shape 4"/>
+          <p:cNvSpPr/>
+          <p:nvPr/>
+        </p:nvSpPr>
+        <p:spPr>
+          <a:xfrm>
+            <a:off x="7543800" y="1051560"/>
+            <a:ext cx="1234440" cy="1051560"/>
+          </a:xfrm>
+          <a:prstGeom prst="roundRect">
+            <a:avLst>
+              <a:gd name="adj" fmla="val 6957"/>
+            </a:avLst>
+          </a:prstGeom>
+          <a:solidFill>
+            <a:srgbClr val="F3F4F6"/>
+          </a:solidFill>
+          <a:ln w="12700">
+            <a:solidFill>
+              <a:srgbClr val="F3F4F6"/>
+            </a:solidFill>
+            <a:prstDash val="solid"/>
+          </a:ln>
+        </p:spPr>
+      </p:sp>
+      <p:sp>
+        <p:nvSpPr>
+          <p:cNvPr id="8" name="Text 5"/>
+          <p:cNvSpPr txBox="1"/>
+          <p:nvPr/>
+        </p:nvSpPr>
+        <p:spPr>
+          <a:xfrm>
+            <a:off x="7680960" y="1143000"/>
+            <a:ext cx="960120" cy="578358"/>
+          </a:xfrm>
+          <a:prstGeom prst="rect">
+            <a:avLst/>
+          </a:prstGeom>
+          <a:noFill/>
+          <a:ln/>
+        </p:spPr>
+        <p:txBody>
+          <a:bodyPr wrap="square" lIns="0" tIns="0" rIns="0" bIns="0" rtlCol="0" anchor="ctr"/>
+          <a:lstStyle/>
+          <a:p>
+            <a:pPr algn="ctr" indent="0" marL="0">
+              <a:buNone/>
+            </a:pPr>
+            <a:r>
+              <a:rPr lang="en-US" sz="2400" b="1" dirty="0">
+                <a:solidFill>
+                  <a:srgbClr val="EB6834"/>
+                </a:solidFill>
+                <a:latin typeface="Cambria" pitchFamily="34" charset="0"/>
+                <a:ea typeface="Cambria" pitchFamily="34" charset="-122"/>
+                <a:cs typeface="Cambria" pitchFamily="34" charset="-120"/>
+              </a:rPr>
+              <a:t>1.01×</a:t>
+            </a:r>
+            <a:endParaRPr lang="en-US" sz="2400" dirty="0"/>
+          </a:p>
+        </p:txBody>
+      </p:sp>
+      <p:sp>
+        <p:nvSpPr>
+          <p:cNvPr id="9" name="Text 6"/>
+          <p:cNvSpPr txBox="1"/>
+          <p:nvPr/>
+        </p:nvSpPr>
+        <p:spPr>
+          <a:xfrm>
+            <a:off x="7680960" y="1682496"/>
+            <a:ext cx="960120" cy="399593"/>
+          </a:xfrm>
+          <a:prstGeom prst="rect">
+            <a:avLst/>
+          </a:prstGeom>
+          <a:noFill/>
+          <a:ln/>
+        </p:spPr>
+        <p:txBody>
+          <a:bodyPr wrap="square" lIns="0" tIns="0" rIns="0" bIns="0" rtlCol="0" anchor="t"/>
+          <a:lstStyle/>
+          <a:p>
+            <a:pPr algn="ctr" indent="0" marL="0">
+              <a:buNone/>
+            </a:pPr>
+            <a:r>
+              <a:rPr lang="en-US" sz="1000" dirty="0">
+                <a:solidFill>
+                  <a:srgbClr val="5A5A5A"/>
+                </a:solidFill>
+                <a:latin typeface="Calibri" pitchFamily="34" charset="0"/>
+                <a:ea typeface="Calibri" pitchFamily="34" charset="-122"/>
+                <a:cs typeface="Calibri" pitchFamily="34" charset="-120"/>
+              </a:rPr>
+              <a:t>predicted iCEM</a:t>
+            </a:r>
+            <a:endParaRPr lang="en-US" sz="1000" dirty="0"/>
+          </a:p>
+          <a:p>
+            <a:pPr algn="ctr" indent="0" marL="0">
+              <a:buNone/>
+            </a:pPr>
+            <a:r>
+              <a:rPr lang="en-US" sz="1000" dirty="0">
+                <a:solidFill>
+                  <a:srgbClr val="5A5A5A"/>
+                </a:solidFill>
+                <a:latin typeface="Calibri" pitchFamily="34" charset="0"/>
+                <a:ea typeface="Calibri" pitchFamily="34" charset="-122"/>
+                <a:cs typeface="Calibri" pitchFamily="34" charset="-120"/>
+              </a:rPr>
+              <a:t>gain, eager</a:t>
+            </a:r>
+            <a:endParaRPr lang="en-US" sz="1000" dirty="0"/>
+          </a:p>
+        </p:txBody>
+      </p:sp>
+      <p:sp>
+        <p:nvSpPr>
+          <p:cNvPr id="10" name="Text 7"/>
+          <p:cNvSpPr txBox="1"/>
+          <p:nvPr/>
+        </p:nvSpPr>
+        <p:spPr>
+          <a:xfrm>
+            <a:off x="6217920" y="2286000"/>
+            <a:ext cx="2560320" cy="2377440"/>
           </a:xfrm>
           <a:prstGeom prst="rect">
             <a:avLst/>
@@ -3438,7 +3631,7 @@
                 <a:ea typeface="Calibri" pitchFamily="34" charset="-122"/>
                 <a:cs typeface="Calibri" pitchFamily="34" charset="-120"/>
               </a:rPr>
-              <a:t>300 paired episodes resolve differences of about 6 percentage points.</a:t>
+              <a:t>Fitted model: 20.0 ms fixed + 0.10 ms per 100 candidates. Latency is effectively independent of workload.</a:t>
             </a:r>
             <a:endParaRPr lang="en-US" sz="1100" dirty="0"/>
           </a:p>
@@ -3459,7 +3652,7 @@
                 <a:ea typeface="Calibri" pitchFamily="34" charset="-122"/>
                 <a:cs typeface="Calibri" pitchFamily="34" charset="-120"/>
               </a:rPr>
-              <a:t>Some profile stages are attributed by difference.</a:t>
+              <a:t>Reducing the candidate count (iCEM) therefore yields no gain: predicted 1.01×, observed 0.92×.</a:t>
             </a:r>
             <a:endParaRPr lang="en-US" sz="1100" dirty="0"/>
           </a:p>
@@ -3480,57 +3673,54 @@
                 <a:ea typeface="Calibri" pitchFamily="34" charset="-122"/>
                 <a:cs typeface="Calibri" pitchFamily="34" charset="-120"/>
               </a:rPr>
-              <a:t>One model, one task, one GPU type; H100-only kernel.</a:t>
+              <a:t>A gain requires an execution model with low fixed cost per call.</a:t>
             </a:r>
             <a:endParaRPr lang="en-US" sz="1100" dirty="0"/>
           </a:p>
-          <a:p>
-            <a:pPr marL="177800" indent="-177800">
-              <a:spcAft>
-                <a:spcPts val="700"/>
-              </a:spcAft>
-              <a:buSzPct val="100000"/>
-              <a:buChar char="•"/>
-            </a:pPr>
-            <a:r>
-              <a:rPr lang="en-US" sz="1100" dirty="0">
-                <a:solidFill>
-                  <a:srgbClr val="1B1B1B"/>
-                </a:solidFill>
-                <a:latin typeface="Calibri" pitchFamily="34" charset="0"/>
-                <a:ea typeface="Calibri" pitchFamily="34" charset="-122"/>
-                <a:cs typeface="Calibri" pitchFamily="34" charset="-120"/>
-              </a:rPr>
-              <a:t>Simulation only; only the planning call was optimised.</a:t>
-            </a:r>
-            <a:endParaRPr lang="en-US" sz="1100" dirty="0"/>
-          </a:p>
-          <a:p>
-            <a:pPr marL="177800" indent="-177800">
-              <a:spcAft>
-                <a:spcPts val="700"/>
-              </a:spcAft>
-              <a:buSzPct val="100000"/>
-              <a:buChar char="•"/>
-            </a:pPr>
-            <a:r>
-              <a:rPr lang="en-US" sz="1100" dirty="0">
-                <a:solidFill>
-                  <a:srgbClr val="1B1B1B"/>
-                </a:solidFill>
-                <a:latin typeface="Calibri" pitchFamily="34" charset="0"/>
-                <a:ea typeface="Calibri" pitchFamily="34" charset="-122"/>
-                <a:cs typeface="Calibri" pitchFamily="34" charset="-120"/>
-              </a:rPr>
-              <a:t>PyTorch latency varied by up to 18% between passes; kernel latency by about 2%.</a:t>
-            </a:r>
-            <a:endParaRPr lang="en-US" sz="1100" dirty="0"/>
-          </a:p>
-        </p:txBody>
-      </p:sp>
-      <p:sp>
-        <p:nvSpPr>
-          <p:cNvPr id="15" name="Text 12"/>
+        </p:txBody>
+      </p:sp>
+      <p:sp>
+        <p:nvSpPr>
+          <p:cNvPr id="11" name="Text 8"/>
+          <p:cNvSpPr txBox="1"/>
+          <p:nvPr/>
+        </p:nvSpPr>
+        <p:spPr>
+          <a:xfrm>
+            <a:off x="457200" y="3429000"/>
+            <a:ext cx="5486400" cy="274320"/>
+          </a:xfrm>
+          <a:prstGeom prst="rect">
+            <a:avLst/>
+          </a:prstGeom>
+          <a:noFill/>
+          <a:ln/>
+        </p:spPr>
+        <p:txBody>
+          <a:bodyPr wrap="square" lIns="0" tIns="0" rIns="0" bIns="0" rtlCol="0" anchor="ctr"/>
+          <a:lstStyle/>
+          <a:p>
+            <a:pPr indent="0" marL="0">
+              <a:buNone/>
+            </a:pPr>
+            <a:r>
+              <a:rPr lang="en-US" sz="1000" i="1" dirty="0">
+                <a:solidFill>
+                  <a:srgbClr val="5A5A5A"/>
+                </a:solidFill>
+                <a:latin typeface="Calibri" pitchFamily="34" charset="0"/>
+                <a:ea typeface="Calibri" pitchFamily="34" charset="-122"/>
+                <a:cs typeface="Calibri" pitchFamily="34" charset="-120"/>
+              </a:rPr>
+              <a:t>Latency of one scoring call vs number of candidates, with fitted lines a + b·N.</a:t>
+            </a:r>
+            <a:endParaRPr lang="en-US" sz="1000" dirty="0"/>
+          </a:p>
+        </p:txBody>
+      </p:sp>
+      <p:sp>
+        <p:nvSpPr>
+          <p:cNvPr id="13" name="Text 9"/>
           <p:cNvSpPr txBox="1"/>
           <p:nvPr/>
         </p:nvSpPr>
@@ -3625,86 +3815,46 @@
                 <a:ea typeface="Cambria" pitchFamily="34" charset="-122"/>
                 <a:cs typeface="Cambria" pitchFamily="34" charset="-120"/>
               </a:rPr>
-              <a:t>Future work</a:t>
+              <a:t>Solution design: LeWM-MK</a:t>
             </a:r>
             <a:endParaRPr lang="en-US" sz="2800" dirty="0"/>
           </a:p>
         </p:txBody>
       </p:sp>
-      <p:sp>
-        <p:nvSpPr>
-          <p:cNvPr id="3" name="Shape 1"/>
-          <p:cNvSpPr/>
-          <p:nvPr/>
-        </p:nvSpPr>
-        <p:spPr>
-          <a:xfrm>
-            <a:off x="457200" y="1143000"/>
-            <a:ext cx="365760" cy="365760"/>
-          </a:xfrm>
-          <a:prstGeom prst="ellipse">
-            <a:avLst/>
-          </a:prstGeom>
-          <a:solidFill>
-            <a:srgbClr val="2A78D6"/>
-          </a:solidFill>
-          <a:ln w="12700">
-            <a:solidFill>
-              <a:srgbClr val="FFFFFF"/>
-            </a:solidFill>
-            <a:prstDash val="solid"/>
-          </a:ln>
-        </p:spPr>
-      </p:sp>
-      <p:sp>
-        <p:nvSpPr>
-          <p:cNvPr id="4" name="Text 2"/>
-          <p:cNvSpPr txBox="1"/>
-          <p:nvPr/>
-        </p:nvSpPr>
-        <p:spPr>
-          <a:xfrm>
-            <a:off x="457200" y="1143000"/>
-            <a:ext cx="365760" cy="365760"/>
-          </a:xfrm>
-          <a:prstGeom prst="rect">
-            <a:avLst/>
-          </a:prstGeom>
-          <a:noFill/>
-          <a:ln/>
-        </p:spPr>
-        <p:txBody>
-          <a:bodyPr wrap="square" lIns="0" tIns="0" rIns="0" bIns="0" rtlCol="0" anchor="ctr"/>
-          <a:lstStyle/>
-          <a:p>
-            <a:pPr algn="ctr" indent="0" marL="0">
-              <a:buNone/>
-            </a:pPr>
-            <a:r>
-              <a:rPr lang="en-US" sz="1300" b="1" dirty="0">
-                <a:solidFill>
-                  <a:srgbClr val="FFFFFF"/>
-                </a:solidFill>
-                <a:latin typeface="Cambria" pitchFamily="34" charset="0"/>
-                <a:ea typeface="Cambria" pitchFamily="34" charset="-122"/>
-                <a:cs typeface="Cambria" pitchFamily="34" charset="-120"/>
-              </a:rPr>
-              <a:t>1</a:t>
-            </a:r>
-            <a:endParaRPr lang="en-US" sz="1300" dirty="0"/>
-          </a:p>
-        </p:txBody>
-      </p:sp>
-      <p:sp>
-        <p:nvSpPr>
-          <p:cNvPr id="5" name="Text 3"/>
-          <p:cNvSpPr txBox="1"/>
-          <p:nvPr/>
-        </p:nvSpPr>
-        <p:spPr>
-          <a:xfrm>
-            <a:off x="960120" y="1097280"/>
-            <a:ext cx="3566160" cy="1188720"/>
+      <p:pic>
+        <p:nvPicPr>
+          <p:cNvPr id="3" name="Image 0" descr="preencoded.png">    </p:cNvPr>
+          <p:cNvPicPr>
+            <a:picLocks noChangeAspect="1"/>
+          </p:cNvPicPr>
+          <p:nvPr/>
+        </p:nvPicPr>
+        <p:blipFill>
+          <a:blip r:embed="rId1"/>
+          <a:stretch>
+            <a:fillRect/>
+          </a:stretch>
+        </p:blipFill>
+        <p:spPr>
+          <a:xfrm>
+            <a:off x="457200" y="1341764"/>
+            <a:ext cx="5394960" cy="2802873"/>
+          </a:xfrm>
+          <a:prstGeom prst="rect">
+            <a:avLst/>
+          </a:prstGeom>
+        </p:spPr>
+      </p:pic>
+      <p:sp>
+        <p:nvSpPr>
+          <p:cNvPr id="4" name="Text 1"/>
+          <p:cNvSpPr txBox="1"/>
+          <p:nvPr/>
+        </p:nvSpPr>
+        <p:spPr>
+          <a:xfrm>
+            <a:off x="6035040" y="1051560"/>
+            <a:ext cx="2743200" cy="3657600"/>
           </a:xfrm>
           <a:prstGeom prst="rect">
             <a:avLst/>
@@ -3716,34 +3866,36 @@
           <a:bodyPr wrap="square" lIns="0" tIns="0" rIns="0" bIns="0" rtlCol="0" anchor="t"/>
           <a:lstStyle/>
           <a:p>
-            <a:pPr indent="0" marL="0">
+            <a:pPr marL="177800" indent="-177800">
               <a:spcAft>
-                <a:spcPts val="200"/>
+                <a:spcPts val="700"/>
               </a:spcAft>
-              <a:buNone/>
-            </a:pPr>
-            <a:r>
-              <a:rPr lang="en-US" sz="1250" b="1" dirty="0">
-                <a:solidFill>
-                  <a:srgbClr val="14213D"/>
-                </a:solidFill>
-                <a:latin typeface="Calibri" pitchFamily="34" charset="0"/>
-                <a:ea typeface="Calibri" pitchFamily="34" charset="-122"/>
-                <a:cs typeface="Calibri" pitchFamily="34" charset="-120"/>
-              </a:rPr>
-              <a:t>Search budget versus task success</a:t>
-            </a:r>
-            <a:endParaRPr lang="en-US" sz="1250" dirty="0"/>
-          </a:p>
-          <a:p>
-            <a:pPr indent="0" marL="0">
+              <a:buSzPct val="100000"/>
+              <a:buChar char="•"/>
+            </a:pPr>
+            <a:r>
+              <a:rPr lang="en-US" sz="1150" dirty="0">
+                <a:solidFill>
+                  <a:srgbClr val="1B1B1B"/>
+                </a:solidFill>
+                <a:latin typeface="Calibri" pitchFamily="34" charset="0"/>
+                <a:ea typeface="Calibri" pitchFamily="34" charset="-122"/>
+                <a:cs typeface="Calibri" pitchFamily="34" charset="-120"/>
+              </a:rPr>
+              <a:t>Encode each image once; cache the goal for the episode.</a:t>
+            </a:r>
+            <a:endParaRPr lang="en-US" sz="1150" dirty="0"/>
+          </a:p>
+          <a:p>
+            <a:pPr marL="177800" indent="-177800">
               <a:spcAft>
-                <a:spcPts val="200"/>
+                <a:spcPts val="700"/>
               </a:spcAft>
-              <a:buNone/>
-            </a:pPr>
-            <a:r>
-              <a:rPr lang="en-US" sz="1250" dirty="0">
+              <a:buSzPct val="100000"/>
+              <a:buChar char="•"/>
+            </a:pPr>
+            <a:r>
+              <a:rPr lang="en-US" sz="1150" dirty="0">
                 <a:solidFill>
                   <a:srgbClr val="1B1B1B"/>
                 </a:solidFill>
@@ -3751,125 +3903,41 @@
                 <a:ea typeface="Calibri" pitchFamily="34" charset="-122"/>
                 <a:cs typeface="Calibri" pitchFamily="34" charset="-120"/>
               </a:rPr>
-              <a:t>Larger iteration and candidate budgets remain within a 100 ms control period; characterise the latency-success trade-off.</a:t>
-            </a:r>
-            <a:endParaRPr lang="en-US" sz="1250" dirty="0"/>
-          </a:p>
-        </p:txBody>
-      </p:sp>
-      <p:sp>
-        <p:nvSpPr>
-          <p:cNvPr id="6" name="Shape 4"/>
-          <p:cNvSpPr/>
-          <p:nvPr/>
-        </p:nvSpPr>
-        <p:spPr>
-          <a:xfrm>
-            <a:off x="4663440" y="1143000"/>
-            <a:ext cx="365760" cy="365760"/>
-          </a:xfrm>
-          <a:prstGeom prst="ellipse">
-            <a:avLst/>
-          </a:prstGeom>
-          <a:solidFill>
-            <a:srgbClr val="2A78D6"/>
-          </a:solidFill>
-          <a:ln w="12700">
-            <a:solidFill>
-              <a:srgbClr val="FFFFFF"/>
-            </a:solidFill>
-            <a:prstDash val="solid"/>
-          </a:ln>
-        </p:spPr>
-      </p:sp>
-      <p:sp>
-        <p:nvSpPr>
-          <p:cNvPr id="7" name="Text 5"/>
-          <p:cNvSpPr txBox="1"/>
-          <p:nvPr/>
-        </p:nvSpPr>
-        <p:spPr>
-          <a:xfrm>
-            <a:off x="4663440" y="1143000"/>
-            <a:ext cx="365760" cy="365760"/>
-          </a:xfrm>
-          <a:prstGeom prst="rect">
-            <a:avLst/>
-          </a:prstGeom>
-          <a:noFill/>
-          <a:ln/>
-        </p:spPr>
-        <p:txBody>
-          <a:bodyPr wrap="square" lIns="0" tIns="0" rIns="0" bIns="0" rtlCol="0" anchor="ctr"/>
-          <a:lstStyle/>
-          <a:p>
-            <a:pPr algn="ctr" indent="0" marL="0">
-              <a:buNone/>
-            </a:pPr>
-            <a:r>
-              <a:rPr lang="en-US" sz="1300" b="1" dirty="0">
-                <a:solidFill>
-                  <a:srgbClr val="FFFFFF"/>
-                </a:solidFill>
-                <a:latin typeface="Cambria" pitchFamily="34" charset="0"/>
-                <a:ea typeface="Cambria" pitchFamily="34" charset="-122"/>
-                <a:cs typeface="Cambria" pitchFamily="34" charset="-120"/>
-              </a:rPr>
-              <a:t>2</a:t>
-            </a:r>
-            <a:endParaRPr lang="en-US" sz="1300" dirty="0"/>
-          </a:p>
-        </p:txBody>
-      </p:sp>
-      <p:sp>
-        <p:nvSpPr>
-          <p:cNvPr id="8" name="Text 6"/>
-          <p:cNvSpPr txBox="1"/>
-          <p:nvPr/>
-        </p:nvSpPr>
-        <p:spPr>
-          <a:xfrm>
-            <a:off x="5166360" y="1097280"/>
-            <a:ext cx="3566160" cy="1188720"/>
-          </a:xfrm>
-          <a:prstGeom prst="rect">
-            <a:avLst/>
-          </a:prstGeom>
-          <a:noFill/>
-          <a:ln/>
-        </p:spPr>
-        <p:txBody>
-          <a:bodyPr wrap="square" lIns="0" tIns="0" rIns="0" bIns="0" rtlCol="0" anchor="t"/>
-          <a:lstStyle/>
-          <a:p>
-            <a:pPr indent="0" marL="0">
+              <a:t>iCEM search: 2,820 instead of 9,000 imagined futures.</a:t>
+            </a:r>
+            <a:endParaRPr lang="en-US" sz="1150" dirty="0"/>
+          </a:p>
+          <a:p>
+            <a:pPr marL="177800" indent="-177800">
               <a:spcAft>
-                <a:spcPts val="200"/>
+                <a:spcPts val="700"/>
               </a:spcAft>
-              <a:buNone/>
-            </a:pPr>
-            <a:r>
-              <a:rPr lang="en-US" sz="1250" b="1" dirty="0">
-                <a:solidFill>
-                  <a:srgbClr val="14213D"/>
-                </a:solidFill>
-                <a:latin typeface="Calibri" pitchFamily="34" charset="0"/>
-                <a:ea typeface="Calibri" pitchFamily="34" charset="-122"/>
-                <a:cs typeface="Calibri" pitchFamily="34" charset="-120"/>
-              </a:rPr>
-              <a:t>Reducing the dependent computation chain</a:t>
-            </a:r>
-            <a:endParaRPr lang="en-US" sz="1250" dirty="0"/>
-          </a:p>
-          <a:p>
-            <a:pPr indent="0" marL="0">
+              <a:buSzPct val="100000"/>
+              <a:buChar char="•"/>
+            </a:pPr>
+            <a:r>
+              <a:rPr lang="en-US" sz="1150" dirty="0">
+                <a:solidFill>
+                  <a:srgbClr val="1B1B1B"/>
+                </a:solidFill>
+                <a:latin typeface="Calibri" pitchFamily="34" charset="0"/>
+                <a:ea typeface="Calibri" pitchFamily="34" charset="-122"/>
+                <a:cs typeface="Calibri" pitchFamily="34" charset="-120"/>
+              </a:rPr>
+              <a:t>Whole plan in one persistent kernel: sampling, rollouts, scoring, elite selection, encoder; the CPU waits once.</a:t>
+            </a:r>
+            <a:endParaRPr lang="en-US" sz="1150" dirty="0"/>
+          </a:p>
+          <a:p>
+            <a:pPr marL="177800" indent="-177800">
               <a:spcAft>
-                <a:spcPts val="200"/>
+                <a:spcPts val="700"/>
               </a:spcAft>
-              <a:buNone/>
-            </a:pPr>
-            <a:r>
-              <a:rPr lang="en-US" sz="1250" dirty="0">
+              <a:buSzPct val="100000"/>
+              <a:buChar char="•"/>
+            </a:pPr>
+            <a:r>
+              <a:rPr lang="en-US" sz="1150" dirty="0">
                 <a:solidFill>
                   <a:srgbClr val="1B1B1B"/>
                 </a:solidFill>
@@ -3877,125 +3945,20 @@
                 <a:ea typeface="Calibri" pitchFamily="34" charset="-122"/>
                 <a:cs typeface="Calibri" pitchFamily="34" charset="-120"/>
               </a:rPr>
-              <a:t>Combination with single-pass rollout models; layer-per-cluster pipelining.</a:t>
-            </a:r>
-            <a:endParaRPr lang="en-US" sz="1250" dirty="0"/>
-          </a:p>
-        </p:txBody>
-      </p:sp>
-      <p:sp>
-        <p:nvSpPr>
-          <p:cNvPr id="9" name="Shape 7"/>
-          <p:cNvSpPr/>
-          <p:nvPr/>
-        </p:nvSpPr>
-        <p:spPr>
-          <a:xfrm>
-            <a:off x="457200" y="2606040"/>
-            <a:ext cx="365760" cy="365760"/>
-          </a:xfrm>
-          <a:prstGeom prst="ellipse">
-            <a:avLst/>
-          </a:prstGeom>
-          <a:solidFill>
-            <a:srgbClr val="2A78D6"/>
-          </a:solidFill>
-          <a:ln w="12700">
-            <a:solidFill>
-              <a:srgbClr val="FFFFFF"/>
-            </a:solidFill>
-            <a:prstDash val="solid"/>
-          </a:ln>
-        </p:spPr>
-      </p:sp>
-      <p:sp>
-        <p:nvSpPr>
-          <p:cNvPr id="10" name="Text 8"/>
-          <p:cNvSpPr txBox="1"/>
-          <p:nvPr/>
-        </p:nvSpPr>
-        <p:spPr>
-          <a:xfrm>
-            <a:off x="457200" y="2606040"/>
-            <a:ext cx="365760" cy="365760"/>
-          </a:xfrm>
-          <a:prstGeom prst="rect">
-            <a:avLst/>
-          </a:prstGeom>
-          <a:noFill/>
-          <a:ln/>
-        </p:spPr>
-        <p:txBody>
-          <a:bodyPr wrap="square" lIns="0" tIns="0" rIns="0" bIns="0" rtlCol="0" anchor="ctr"/>
-          <a:lstStyle/>
-          <a:p>
-            <a:pPr algn="ctr" indent="0" marL="0">
-              <a:buNone/>
-            </a:pPr>
-            <a:r>
-              <a:rPr lang="en-US" sz="1300" b="1" dirty="0">
-                <a:solidFill>
-                  <a:srgbClr val="FFFFFF"/>
-                </a:solidFill>
-                <a:latin typeface="Cambria" pitchFamily="34" charset="0"/>
-                <a:ea typeface="Cambria" pitchFamily="34" charset="-122"/>
-                <a:cs typeface="Cambria" pitchFamily="34" charset="-120"/>
-              </a:rPr>
-              <a:t>3</a:t>
-            </a:r>
-            <a:endParaRPr lang="en-US" sz="1300" dirty="0"/>
-          </a:p>
-        </p:txBody>
-      </p:sp>
-      <p:sp>
-        <p:nvSpPr>
-          <p:cNvPr id="11" name="Text 9"/>
-          <p:cNvSpPr txBox="1"/>
-          <p:nvPr/>
-        </p:nvSpPr>
-        <p:spPr>
-          <a:xfrm>
-            <a:off x="960120" y="2560320"/>
-            <a:ext cx="3566160" cy="1188720"/>
-          </a:xfrm>
-          <a:prstGeom prst="rect">
-            <a:avLst/>
-          </a:prstGeom>
-          <a:noFill/>
-          <a:ln/>
-        </p:spPr>
-        <p:txBody>
-          <a:bodyPr wrap="square" lIns="0" tIns="0" rIns="0" bIns="0" rtlCol="0" anchor="t"/>
-          <a:lstStyle/>
-          <a:p>
-            <a:pPr indent="0" marL="0">
+              <a:t>Small model spread across a 16-processor cluster; partial results exchanged on chip; barrier 3.6 → 0.65 µs.</a:t>
+            </a:r>
+            <a:endParaRPr lang="en-US" sz="1150" dirty="0"/>
+          </a:p>
+          <a:p>
+            <a:pPr marL="177800" indent="-177800">
               <a:spcAft>
-                <a:spcPts val="200"/>
+                <a:spcPts val="700"/>
               </a:spcAft>
-              <a:buNone/>
-            </a:pPr>
-            <a:r>
-              <a:rPr lang="en-US" sz="1250" b="1" dirty="0">
-                <a:solidFill>
-                  <a:srgbClr val="14213D"/>
-                </a:solidFill>
-                <a:latin typeface="Calibri" pitchFamily="34" charset="0"/>
-                <a:ea typeface="Calibri" pitchFamily="34" charset="-122"/>
-                <a:cs typeface="Calibri" pitchFamily="34" charset="-120"/>
-              </a:rPr>
-              <a:t>Generalisation to other models and hardware</a:t>
-            </a:r>
-            <a:endParaRPr lang="en-US" sz="1250" dirty="0"/>
-          </a:p>
-          <a:p>
-            <a:pPr indent="0" marL="0">
-              <a:spcAft>
-                <a:spcPts val="200"/>
-              </a:spcAft>
-              <a:buNone/>
-            </a:pPr>
-            <a:r>
-              <a:rPr lang="en-US" sz="1250" dirty="0">
+              <a:buSzPct val="100000"/>
+              <a:buChar char="•"/>
+            </a:pPr>
+            <a:r>
+              <a:rPr lang="en-US" sz="1150" dirty="0">
                 <a:solidFill>
                   <a:srgbClr val="1B1B1B"/>
                 </a:solidFill>
@@ -4003,141 +3966,15 @@
                 <a:ea typeface="Calibri" pitchFamily="34" charset="-122"/>
                 <a:cs typeface="Calibri" pitchFamily="34" charset="-120"/>
               </a:rPr>
-              <a:t>Larger world models, embedded robot computers, automatic megakernel compilation.</a:t>
-            </a:r>
-            <a:endParaRPr lang="en-US" sz="1250" dirty="0"/>
-          </a:p>
-        </p:txBody>
-      </p:sp>
-      <p:sp>
-        <p:nvSpPr>
-          <p:cNvPr id="12" name="Shape 10"/>
-          <p:cNvSpPr/>
-          <p:nvPr/>
-        </p:nvSpPr>
-        <p:spPr>
-          <a:xfrm>
-            <a:off x="4663440" y="2606040"/>
-            <a:ext cx="365760" cy="365760"/>
-          </a:xfrm>
-          <a:prstGeom prst="ellipse">
-            <a:avLst/>
-          </a:prstGeom>
-          <a:solidFill>
-            <a:srgbClr val="2A78D6"/>
-          </a:solidFill>
-          <a:ln w="12700">
-            <a:solidFill>
-              <a:srgbClr val="FFFFFF"/>
-            </a:solidFill>
-            <a:prstDash val="solid"/>
-          </a:ln>
-        </p:spPr>
-      </p:sp>
-      <p:sp>
-        <p:nvSpPr>
-          <p:cNvPr id="13" name="Text 11"/>
-          <p:cNvSpPr txBox="1"/>
-          <p:nvPr/>
-        </p:nvSpPr>
-        <p:spPr>
-          <a:xfrm>
-            <a:off x="4663440" y="2606040"/>
-            <a:ext cx="365760" cy="365760"/>
-          </a:xfrm>
-          <a:prstGeom prst="rect">
-            <a:avLst/>
-          </a:prstGeom>
-          <a:noFill/>
-          <a:ln/>
-        </p:spPr>
-        <p:txBody>
-          <a:bodyPr wrap="square" lIns="0" tIns="0" rIns="0" bIns="0" rtlCol="0" anchor="ctr"/>
-          <a:lstStyle/>
-          <a:p>
-            <a:pPr algn="ctr" indent="0" marL="0">
-              <a:buNone/>
-            </a:pPr>
-            <a:r>
-              <a:rPr lang="en-US" sz="1300" b="1" dirty="0">
-                <a:solidFill>
-                  <a:srgbClr val="FFFFFF"/>
-                </a:solidFill>
-                <a:latin typeface="Cambria" pitchFamily="34" charset="0"/>
-                <a:ea typeface="Cambria" pitchFamily="34" charset="-122"/>
-                <a:cs typeface="Cambria" pitchFamily="34" charset="-120"/>
-              </a:rPr>
-              <a:t>4</a:t>
-            </a:r>
-            <a:endParaRPr lang="en-US" sz="1300" dirty="0"/>
-          </a:p>
-        </p:txBody>
-      </p:sp>
-      <p:sp>
-        <p:nvSpPr>
-          <p:cNvPr id="14" name="Text 12"/>
-          <p:cNvSpPr txBox="1"/>
-          <p:nvPr/>
-        </p:nvSpPr>
-        <p:spPr>
-          <a:xfrm>
-            <a:off x="5166360" y="2560320"/>
-            <a:ext cx="3566160" cy="1188720"/>
-          </a:xfrm>
-          <a:prstGeom prst="rect">
-            <a:avLst/>
-          </a:prstGeom>
-          <a:noFill/>
-          <a:ln/>
-        </p:spPr>
-        <p:txBody>
-          <a:bodyPr wrap="square" lIns="0" tIns="0" rIns="0" bIns="0" rtlCol="0" anchor="t"/>
-          <a:lstStyle/>
-          <a:p>
-            <a:pPr indent="0" marL="0">
-              <a:spcAft>
-                <a:spcPts val="200"/>
-              </a:spcAft>
-              <a:buNone/>
-            </a:pPr>
-            <a:r>
-              <a:rPr lang="en-US" sz="1250" b="1" dirty="0">
-                <a:solidFill>
-                  <a:srgbClr val="14213D"/>
-                </a:solidFill>
-                <a:latin typeface="Calibri" pitchFamily="34" charset="0"/>
-                <a:ea typeface="Calibri" pitchFamily="34" charset="-122"/>
-                <a:cs typeface="Calibri" pitchFamily="34" charset="-120"/>
-              </a:rPr>
-              <a:t>Higher-resolution and physical evaluation</a:t>
-            </a:r>
-            <a:endParaRPr lang="en-US" sz="1250" dirty="0"/>
-          </a:p>
-          <a:p>
-            <a:pPr indent="0" marL="0">
-              <a:spcAft>
-                <a:spcPts val="200"/>
-              </a:spcAft>
-              <a:buNone/>
-            </a:pPr>
-            <a:r>
-              <a:rPr lang="en-US" sz="1250" dirty="0">
-                <a:solidFill>
-                  <a:srgbClr val="1B1B1B"/>
-                </a:solidFill>
-                <a:latin typeface="Calibri" pitchFamily="34" charset="0"/>
-                <a:ea typeface="Calibri" pitchFamily="34" charset="-122"/>
-                <a:cs typeface="Calibri" pitchFamily="34" charset="-120"/>
-              </a:rPr>
-              <a:t>Approximately 2,500 paired episodes to resolve 2 percentage points; evaluation on a physical robot.</a:t>
-            </a:r>
-            <a:endParaRPr lang="en-US" sz="1250" dirty="0"/>
-          </a:p>
-        </p:txBody>
-      </p:sp>
-      <p:sp>
-        <p:nvSpPr>
-          <p:cNvPr id="16" name="Text 13"/>
+              <a:t>Weights streamed ahead of use; BF16 inputs, FP32 accumulation.</a:t>
+            </a:r>
+            <a:endParaRPr lang="en-US" sz="1150" dirty="0"/>
+          </a:p>
+        </p:txBody>
+      </p:sp>
+      <p:sp>
+        <p:nvSpPr>
+          <p:cNvPr id="6" name="Text 2"/>
           <p:cNvSpPr txBox="1"/>
           <p:nvPr/>
         </p:nvSpPr>
@@ -4185,6 +4022,1988 @@
 <file path=ppt/slides/slide14.xml><?xml version="1.0" encoding="utf-8"?>
 <p:sld xmlns:a="http://schemas.openxmlformats.org/drawingml/2006/main" xmlns:r="http://schemas.openxmlformats.org/officeDocument/2006/relationships" xmlns:p="http://schemas.openxmlformats.org/presentationml/2006/main">
   <p:cSld name="Slide 14">
+    <p:spTree>
+      <p:nvGrpSpPr>
+        <p:cNvPr id="1" name=""/>
+        <p:cNvGrpSpPr/>
+        <p:nvPr/>
+      </p:nvGrpSpPr>
+      <p:grpSpPr>
+        <a:xfrm>
+          <a:off x="0" y="0"/>
+          <a:ext cx="0" cy="0"/>
+          <a:chOff x="0" y="0"/>
+          <a:chExt cx="0" cy="0"/>
+        </a:xfrm>
+      </p:grpSpPr>
+      <p:sp>
+        <p:nvSpPr>
+          <p:cNvPr id="2" name="Text 0"/>
+          <p:cNvSpPr txBox="1"/>
+          <p:nvPr/>
+        </p:nvSpPr>
+        <p:spPr>
+          <a:xfrm>
+            <a:off x="457200" y="292608"/>
+            <a:ext cx="8229600" cy="640080"/>
+          </a:xfrm>
+          <a:prstGeom prst="rect">
+            <a:avLst/>
+          </a:prstGeom>
+          <a:noFill/>
+          <a:ln/>
+        </p:spPr>
+        <p:txBody>
+          <a:bodyPr wrap="square" lIns="0" tIns="0" rIns="0" bIns="0" rtlCol="0" anchor="ctr"/>
+          <a:lstStyle/>
+          <a:p>
+            <a:pPr indent="0" marL="0">
+              <a:buNone/>
+            </a:pPr>
+            <a:r>
+              <a:rPr lang="en-US" sz="2800" b="1" dirty="0">
+                <a:solidFill>
+                  <a:srgbClr val="14213D"/>
+                </a:solidFill>
+                <a:latin typeface="Cambria" pitchFamily="34" charset="0"/>
+                <a:ea typeface="Cambria" pitchFamily="34" charset="-122"/>
+                <a:cs typeface="Cambria" pitchFamily="34" charset="-120"/>
+              </a:rPr>
+              <a:t>Results: planning latency</a:t>
+            </a:r>
+            <a:endParaRPr lang="en-US" sz="2800" dirty="0"/>
+          </a:p>
+        </p:txBody>
+      </p:sp>
+      <p:pic>
+        <p:nvPicPr>
+          <p:cNvPr id="3" name="Image 0" descr="preencoded.png">    </p:cNvPr>
+          <p:cNvPicPr>
+            <a:picLocks noChangeAspect="1"/>
+          </p:cNvPicPr>
+          <p:nvPr/>
+        </p:nvPicPr>
+        <p:blipFill>
+          <a:blip r:embed="rId1"/>
+          <a:stretch>
+            <a:fillRect/>
+          </a:stretch>
+        </p:blipFill>
+        <p:spPr>
+          <a:xfrm>
+            <a:off x="457200" y="1237802"/>
+            <a:ext cx="5669280" cy="1547756"/>
+          </a:xfrm>
+          <a:prstGeom prst="rect">
+            <a:avLst/>
+          </a:prstGeom>
+        </p:spPr>
+      </p:pic>
+      <p:sp>
+        <p:nvSpPr>
+          <p:cNvPr id="4" name="Shape 1"/>
+          <p:cNvSpPr/>
+          <p:nvPr/>
+        </p:nvSpPr>
+        <p:spPr>
+          <a:xfrm>
+            <a:off x="6309360" y="1051560"/>
+            <a:ext cx="1188720" cy="1005840"/>
+          </a:xfrm>
+          <a:prstGeom prst="roundRect">
+            <a:avLst>
+              <a:gd name="adj" fmla="val 7273"/>
+            </a:avLst>
+          </a:prstGeom>
+          <a:solidFill>
+            <a:srgbClr val="F3F4F6"/>
+          </a:solidFill>
+          <a:ln w="12700">
+            <a:solidFill>
+              <a:srgbClr val="F3F4F6"/>
+            </a:solidFill>
+            <a:prstDash val="solid"/>
+          </a:ln>
+        </p:spPr>
+      </p:sp>
+      <p:sp>
+        <p:nvSpPr>
+          <p:cNvPr id="5" name="Text 2"/>
+          <p:cNvSpPr txBox="1"/>
+          <p:nvPr/>
+        </p:nvSpPr>
+        <p:spPr>
+          <a:xfrm>
+            <a:off x="6446520" y="1143000"/>
+            <a:ext cx="914400" cy="553212"/>
+          </a:xfrm>
+          <a:prstGeom prst="rect">
+            <a:avLst/>
+          </a:prstGeom>
+          <a:noFill/>
+          <a:ln/>
+        </p:spPr>
+        <p:txBody>
+          <a:bodyPr wrap="square" lIns="0" tIns="0" rIns="0" bIns="0" rtlCol="0" anchor="ctr"/>
+          <a:lstStyle/>
+          <a:p>
+            <a:pPr algn="ctr" indent="0" marL="0">
+              <a:buNone/>
+            </a:pPr>
+            <a:r>
+              <a:rPr lang="en-US" sz="2400" b="1" dirty="0">
+                <a:solidFill>
+                  <a:srgbClr val="2A78D6"/>
+                </a:solidFill>
+                <a:latin typeface="Cambria" pitchFamily="34" charset="0"/>
+                <a:ea typeface="Cambria" pitchFamily="34" charset="-122"/>
+                <a:cs typeface="Cambria" pitchFamily="34" charset="-120"/>
+              </a:rPr>
+              <a:t>13.4×</a:t>
+            </a:r>
+            <a:endParaRPr lang="en-US" sz="2400" dirty="0"/>
+          </a:p>
+        </p:txBody>
+      </p:sp>
+      <p:sp>
+        <p:nvSpPr>
+          <p:cNvPr id="6" name="Text 3"/>
+          <p:cNvSpPr txBox="1"/>
+          <p:nvPr/>
+        </p:nvSpPr>
+        <p:spPr>
+          <a:xfrm>
+            <a:off x="6446520" y="1655064"/>
+            <a:ext cx="914400" cy="382219"/>
+          </a:xfrm>
+          <a:prstGeom prst="rect">
+            <a:avLst/>
+          </a:prstGeom>
+          <a:noFill/>
+          <a:ln/>
+        </p:spPr>
+        <p:txBody>
+          <a:bodyPr wrap="square" lIns="0" tIns="0" rIns="0" bIns="0" rtlCol="0" anchor="t"/>
+          <a:lstStyle/>
+          <a:p>
+            <a:pPr algn="ctr" indent="0" marL="0">
+              <a:buNone/>
+            </a:pPr>
+            <a:r>
+              <a:rPr lang="en-US" sz="1000" dirty="0">
+                <a:solidFill>
+                  <a:srgbClr val="5A5A5A"/>
+                </a:solidFill>
+                <a:latin typeface="Calibri" pitchFamily="34" charset="0"/>
+                <a:ea typeface="Calibri" pitchFamily="34" charset="-122"/>
+                <a:cs typeface="Calibri" pitchFamily="34" charset="-120"/>
+              </a:rPr>
+              <a:t>vs reference</a:t>
+            </a:r>
+            <a:endParaRPr lang="en-US" sz="1000" dirty="0"/>
+          </a:p>
+          <a:p>
+            <a:pPr algn="ctr" indent="0" marL="0">
+              <a:buNone/>
+            </a:pPr>
+            <a:r>
+              <a:rPr lang="en-US" sz="1000" dirty="0">
+                <a:solidFill>
+                  <a:srgbClr val="5A5A5A"/>
+                </a:solidFill>
+                <a:latin typeface="Calibri" pitchFamily="34" charset="0"/>
+                <a:ea typeface="Calibri" pitchFamily="34" charset="-122"/>
+                <a:cs typeface="Calibri" pitchFamily="34" charset="-120"/>
+              </a:rPr>
+              <a:t>[13.0, 13.5]</a:t>
+            </a:r>
+            <a:endParaRPr lang="en-US" sz="1000" dirty="0"/>
+          </a:p>
+        </p:txBody>
+      </p:sp>
+      <p:sp>
+        <p:nvSpPr>
+          <p:cNvPr id="7" name="Shape 4"/>
+          <p:cNvSpPr/>
+          <p:nvPr/>
+        </p:nvSpPr>
+        <p:spPr>
+          <a:xfrm>
+            <a:off x="7589520" y="1051560"/>
+            <a:ext cx="1188720" cy="1005840"/>
+          </a:xfrm>
+          <a:prstGeom prst="roundRect">
+            <a:avLst>
+              <a:gd name="adj" fmla="val 7273"/>
+            </a:avLst>
+          </a:prstGeom>
+          <a:solidFill>
+            <a:srgbClr val="F3F4F6"/>
+          </a:solidFill>
+          <a:ln w="12700">
+            <a:solidFill>
+              <a:srgbClr val="F3F4F6"/>
+            </a:solidFill>
+            <a:prstDash val="solid"/>
+          </a:ln>
+        </p:spPr>
+      </p:sp>
+      <p:sp>
+        <p:nvSpPr>
+          <p:cNvPr id="8" name="Text 5"/>
+          <p:cNvSpPr txBox="1"/>
+          <p:nvPr/>
+        </p:nvSpPr>
+        <p:spPr>
+          <a:xfrm>
+            <a:off x="7726680" y="1143000"/>
+            <a:ext cx="914400" cy="553212"/>
+          </a:xfrm>
+          <a:prstGeom prst="rect">
+            <a:avLst/>
+          </a:prstGeom>
+          <a:noFill/>
+          <a:ln/>
+        </p:spPr>
+        <p:txBody>
+          <a:bodyPr wrap="square" lIns="0" tIns="0" rIns="0" bIns="0" rtlCol="0" anchor="ctr"/>
+          <a:lstStyle/>
+          <a:p>
+            <a:pPr algn="ctr" indent="0" marL="0">
+              <a:buNone/>
+            </a:pPr>
+            <a:r>
+              <a:rPr lang="en-US" sz="2400" b="1" dirty="0">
+                <a:solidFill>
+                  <a:srgbClr val="2A78D6"/>
+                </a:solidFill>
+                <a:latin typeface="Cambria" pitchFamily="34" charset="0"/>
+                <a:ea typeface="Cambria" pitchFamily="34" charset="-122"/>
+                <a:cs typeface="Cambria" pitchFamily="34" charset="-120"/>
+              </a:rPr>
+              <a:t>3.9×</a:t>
+            </a:r>
+            <a:endParaRPr lang="en-US" sz="2400" dirty="0"/>
+          </a:p>
+        </p:txBody>
+      </p:sp>
+      <p:sp>
+        <p:nvSpPr>
+          <p:cNvPr id="9" name="Text 6"/>
+          <p:cNvSpPr txBox="1"/>
+          <p:nvPr/>
+        </p:nvSpPr>
+        <p:spPr>
+          <a:xfrm>
+            <a:off x="7726680" y="1655064"/>
+            <a:ext cx="914400" cy="382219"/>
+          </a:xfrm>
+          <a:prstGeom prst="rect">
+            <a:avLst/>
+          </a:prstGeom>
+          <a:noFill/>
+          <a:ln/>
+        </p:spPr>
+        <p:txBody>
+          <a:bodyPr wrap="square" lIns="0" tIns="0" rIns="0" bIns="0" rtlCol="0" anchor="t"/>
+          <a:lstStyle/>
+          <a:p>
+            <a:pPr algn="ctr" indent="0" marL="0">
+              <a:buNone/>
+            </a:pPr>
+            <a:r>
+              <a:rPr lang="en-US" sz="1000" dirty="0">
+                <a:solidFill>
+                  <a:srgbClr val="5A5A5A"/>
+                </a:solidFill>
+                <a:latin typeface="Calibri" pitchFamily="34" charset="0"/>
+                <a:ea typeface="Calibri" pitchFamily="34" charset="-122"/>
+                <a:cs typeface="Calibri" pitchFamily="34" charset="-120"/>
+              </a:rPr>
+              <a:t>vs optimised</a:t>
+            </a:r>
+            <a:endParaRPr lang="en-US" sz="1000" dirty="0"/>
+          </a:p>
+          <a:p>
+            <a:pPr algn="ctr" indent="0" marL="0">
+              <a:buNone/>
+            </a:pPr>
+            <a:r>
+              <a:rPr lang="en-US" sz="1000" dirty="0">
+                <a:solidFill>
+                  <a:srgbClr val="5A5A5A"/>
+                </a:solidFill>
+                <a:latin typeface="Calibri" pitchFamily="34" charset="0"/>
+                <a:ea typeface="Calibri" pitchFamily="34" charset="-122"/>
+                <a:cs typeface="Calibri" pitchFamily="34" charset="-120"/>
+              </a:rPr>
+              <a:t>PyTorch</a:t>
+            </a:r>
+            <a:endParaRPr lang="en-US" sz="1000" dirty="0"/>
+          </a:p>
+        </p:txBody>
+      </p:sp>
+      <p:sp>
+        <p:nvSpPr>
+          <p:cNvPr id="10" name="Text 7"/>
+          <p:cNvSpPr txBox="1"/>
+          <p:nvPr/>
+        </p:nvSpPr>
+        <p:spPr>
+          <a:xfrm>
+            <a:off x="6309360" y="2240280"/>
+            <a:ext cx="2468880" cy="2377440"/>
+          </a:xfrm>
+          <a:prstGeom prst="rect">
+            <a:avLst/>
+          </a:prstGeom>
+          <a:noFill/>
+          <a:ln/>
+        </p:spPr>
+        <p:txBody>
+          <a:bodyPr wrap="square" lIns="0" tIns="0" rIns="0" bIns="0" rtlCol="0" anchor="t"/>
+          <a:lstStyle/>
+          <a:p>
+            <a:pPr marL="177800" indent="-177800">
+              <a:spcAft>
+                <a:spcPts val="700"/>
+              </a:spcAft>
+              <a:buSzPct val="100000"/>
+              <a:buChar char="•"/>
+            </a:pPr>
+            <a:r>
+              <a:rPr lang="en-US" sz="1100" dirty="0">
+                <a:solidFill>
+                  <a:srgbClr val="1B1B1B"/>
+                </a:solidFill>
+                <a:latin typeface="Calibri" pitchFamily="34" charset="0"/>
+                <a:ea typeface="Calibri" pitchFamily="34" charset="-122"/>
+                <a:cs typeface="Calibri" pitchFamily="34" charset="-120"/>
+              </a:rPr>
+              <a:t>90th percentile 47.0 ms; interquartile range 0.7 ms wide.</a:t>
+            </a:r>
+            <a:endParaRPr lang="en-US" sz="1100" dirty="0"/>
+          </a:p>
+          <a:p>
+            <a:pPr marL="177800" indent="-177800">
+              <a:spcAft>
+                <a:spcPts val="700"/>
+              </a:spcAft>
+              <a:buSzPct val="100000"/>
+              <a:buChar char="•"/>
+            </a:pPr>
+            <a:r>
+              <a:rPr lang="en-US" sz="1100" dirty="0">
+                <a:solidFill>
+                  <a:srgbClr val="1B1B1B"/>
+                </a:solidFill>
+                <a:latin typeface="Calibri" pitchFamily="34" charset="0"/>
+                <a:ea typeface="Calibri" pitchFamily="34" charset="-122"/>
+                <a:cs typeface="Calibri" pitchFamily="34" charset="-120"/>
+              </a:rPr>
+              <a:t>Fits a 20 Hz control loop at the median.</a:t>
+            </a:r>
+            <a:endParaRPr lang="en-US" sz="1100" dirty="0"/>
+          </a:p>
+          <a:p>
+            <a:pPr marL="177800" indent="-177800">
+              <a:spcAft>
+                <a:spcPts val="700"/>
+              </a:spcAft>
+              <a:buSzPct val="100000"/>
+              <a:buChar char="•"/>
+            </a:pPr>
+            <a:r>
+              <a:rPr lang="en-US" sz="1100" dirty="0">
+                <a:solidFill>
+                  <a:srgbClr val="1B1B1B"/>
+                </a:solidFill>
+                <a:latin typeface="Calibri" pitchFamily="34" charset="0"/>
+                <a:ea typeface="Calibri" pitchFamily="34" charset="-122"/>
+                <a:cs typeface="Calibri" pitchFamily="34" charset="-120"/>
+              </a:rPr>
+              <a:t>Search now 46 µs per layer (was 409); synchronisation about 7% of it.</a:t>
+            </a:r>
+            <a:endParaRPr lang="en-US" sz="1100" dirty="0"/>
+          </a:p>
+        </p:txBody>
+      </p:sp>
+      <p:sp>
+        <p:nvSpPr>
+          <p:cNvPr id="11" name="Text 8"/>
+          <p:cNvSpPr txBox="1"/>
+          <p:nvPr/>
+        </p:nvSpPr>
+        <p:spPr>
+          <a:xfrm>
+            <a:off x="457200" y="3154680"/>
+            <a:ext cx="5669280" cy="274320"/>
+          </a:xfrm>
+          <a:prstGeom prst="rect">
+            <a:avLst/>
+          </a:prstGeom>
+          <a:noFill/>
+          <a:ln/>
+        </p:spPr>
+        <p:txBody>
+          <a:bodyPr wrap="square" lIns="0" tIns="0" rIns="0" bIns="0" rtlCol="0" anchor="ctr"/>
+          <a:lstStyle/>
+          <a:p>
+            <a:pPr indent="0" marL="0">
+              <a:buNone/>
+            </a:pPr>
+            <a:r>
+              <a:rPr lang="en-US" sz="1000" i="1" dirty="0">
+                <a:solidFill>
+                  <a:srgbClr val="5A5A5A"/>
+                </a:solidFill>
+                <a:latin typeface="Calibri" pitchFamily="34" charset="0"/>
+                <a:ea typeface="Calibri" pitchFamily="34" charset="-122"/>
+                <a:cs typeface="Calibri" pitchFamily="34" charset="-120"/>
+              </a:rPr>
+              <a:t>End-to-end planning latency, log scale: median, interquartile box, 1.5-IQR whiskers, outlying plans. Baseline uses compile, CUDA Graphs and BF16.</a:t>
+            </a:r>
+            <a:endParaRPr lang="en-US" sz="1000" dirty="0"/>
+          </a:p>
+        </p:txBody>
+      </p:sp>
+      <p:sp>
+        <p:nvSpPr>
+          <p:cNvPr id="13" name="Text 9"/>
+          <p:cNvSpPr txBox="1"/>
+          <p:nvPr/>
+        </p:nvSpPr>
+        <p:spPr>
+          <a:xfrm>
+            <a:off x="8229600" y="4796028"/>
+            <a:ext cx="457200" cy="228600"/>
+          </a:xfrm>
+          <a:prstGeom prst="rect">
+            <a:avLst/>
+          </a:prstGeom>
+          <a:noFill/>
+          <a:ln/>
+        </p:spPr>
+        <p:txBody>
+          <a:bodyPr wrap="square" lIns="0" tIns="0" rIns="0" bIns="0" rtlCol="0" anchor="ctr"/>
+          <a:lstStyle/>
+          <a:p>
+            <a:pPr algn="r" indent="0" marL="0">
+              <a:buNone/>
+            </a:pPr>
+            <a:r>
+              <a:rPr lang="en-US" sz="900" dirty="0">
+                <a:solidFill>
+                  <a:srgbClr val="5A5A5A"/>
+                </a:solidFill>
+                <a:latin typeface="Calibri" pitchFamily="34" charset="0"/>
+                <a:ea typeface="Calibri" pitchFamily="34" charset="-122"/>
+                <a:cs typeface="Calibri" pitchFamily="34" charset="-120"/>
+              </a:rPr>
+              <a:t>14</a:t>
+            </a:r>
+            <a:endParaRPr lang="en-US" sz="900" dirty="0"/>
+          </a:p>
+        </p:txBody>
+      </p:sp>
+    </p:spTree>
+  </p:cSld>
+  <p:clrMapOvr>
+    <a:masterClrMapping/>
+  </p:clrMapOvr>
+</p:sld>
+</file>
+
+<file path=ppt/slides/slide15.xml><?xml version="1.0" encoding="utf-8"?>
+<p:sld xmlns:a="http://schemas.openxmlformats.org/drawingml/2006/main" xmlns:r="http://schemas.openxmlformats.org/officeDocument/2006/relationships" xmlns:p="http://schemas.openxmlformats.org/presentationml/2006/main">
+  <p:cSld name="Slide 15">
+    <p:spTree>
+      <p:nvGrpSpPr>
+        <p:cNvPr id="1" name=""/>
+        <p:cNvGrpSpPr/>
+        <p:nvPr/>
+      </p:nvGrpSpPr>
+      <p:grpSpPr>
+        <a:xfrm>
+          <a:off x="0" y="0"/>
+          <a:ext cx="0" cy="0"/>
+          <a:chOff x="0" y="0"/>
+          <a:chExt cx="0" cy="0"/>
+        </a:xfrm>
+      </p:grpSpPr>
+      <p:sp>
+        <p:nvSpPr>
+          <p:cNvPr id="2" name="Text 0"/>
+          <p:cNvSpPr txBox="1"/>
+          <p:nvPr/>
+        </p:nvSpPr>
+        <p:spPr>
+          <a:xfrm>
+            <a:off x="457200" y="292608"/>
+            <a:ext cx="8229600" cy="640080"/>
+          </a:xfrm>
+          <a:prstGeom prst="rect">
+            <a:avLst/>
+          </a:prstGeom>
+          <a:noFill/>
+          <a:ln/>
+        </p:spPr>
+        <p:txBody>
+          <a:bodyPr wrap="square" lIns="0" tIns="0" rIns="0" bIns="0" rtlCol="0" anchor="ctr"/>
+          <a:lstStyle/>
+          <a:p>
+            <a:pPr indent="0" marL="0">
+              <a:buNone/>
+            </a:pPr>
+            <a:r>
+              <a:rPr lang="en-US" sz="2800" b="1" dirty="0">
+                <a:solidFill>
+                  <a:srgbClr val="14213D"/>
+                </a:solidFill>
+                <a:latin typeface="Cambria" pitchFamily="34" charset="0"/>
+                <a:ea typeface="Cambria" pitchFamily="34" charset="-122"/>
+                <a:cs typeface="Cambria" pitchFamily="34" charset="-120"/>
+              </a:rPr>
+              <a:t>Results: task success and numerical fidelity</a:t>
+            </a:r>
+            <a:endParaRPr lang="en-US" sz="2800" dirty="0"/>
+          </a:p>
+        </p:txBody>
+      </p:sp>
+      <p:pic>
+        <p:nvPicPr>
+          <p:cNvPr id="3" name="Image 0" descr="preencoded.png">    </p:cNvPr>
+          <p:cNvPicPr>
+            <a:picLocks noChangeAspect="1"/>
+          </p:cNvPicPr>
+          <p:nvPr/>
+        </p:nvPicPr>
+        <p:blipFill>
+          <a:blip r:embed="rId1"/>
+          <a:stretch>
+            <a:fillRect/>
+          </a:stretch>
+        </p:blipFill>
+        <p:spPr>
+          <a:xfrm>
+            <a:off x="457200" y="1060164"/>
+            <a:ext cx="5669280" cy="1628712"/>
+          </a:xfrm>
+          <a:prstGeom prst="rect">
+            <a:avLst/>
+          </a:prstGeom>
+        </p:spPr>
+      </p:pic>
+      <p:sp>
+        <p:nvSpPr>
+          <p:cNvPr id="4" name="Text 1"/>
+          <p:cNvSpPr txBox="1"/>
+          <p:nvPr/>
+        </p:nvSpPr>
+        <p:spPr>
+          <a:xfrm>
+            <a:off x="6309360" y="1051560"/>
+            <a:ext cx="2468880" cy="3657600"/>
+          </a:xfrm>
+          <a:prstGeom prst="rect">
+            <a:avLst/>
+          </a:prstGeom>
+          <a:noFill/>
+          <a:ln/>
+        </p:spPr>
+        <p:txBody>
+          <a:bodyPr wrap="square" lIns="0" tIns="0" rIns="0" bIns="0" rtlCol="0" anchor="t"/>
+          <a:lstStyle/>
+          <a:p>
+            <a:pPr marL="177800" indent="-177800">
+              <a:spcAft>
+                <a:spcPts val="700"/>
+              </a:spcAft>
+              <a:buSzPct val="100000"/>
+              <a:buChar char="•"/>
+            </a:pPr>
+            <a:r>
+              <a:rPr lang="en-US" sz="1100" dirty="0">
+                <a:solidFill>
+                  <a:srgbClr val="1B1B1B"/>
+                </a:solidFill>
+                <a:latin typeface="Calibri" pitchFamily="34" charset="0"/>
+                <a:ea typeface="Calibri" pitchFamily="34" charset="-122"/>
+                <a:cs typeface="Calibri" pitchFamily="34" charset="-120"/>
+              </a:rPr>
+              <a:t>261 / 261 / 260 successes of 300 for reference, optimised PyTorch and LeWM-MK.</a:t>
+            </a:r>
+            <a:endParaRPr lang="en-US" sz="1100" dirty="0"/>
+          </a:p>
+          <a:p>
+            <a:pPr marL="177800" indent="-177800">
+              <a:spcAft>
+                <a:spcPts val="700"/>
+              </a:spcAft>
+              <a:buSzPct val="100000"/>
+              <a:buChar char="•"/>
+            </a:pPr>
+            <a:r>
+              <a:rPr lang="en-US" sz="1100" dirty="0">
+                <a:solidFill>
+                  <a:srgbClr val="1B1B1B"/>
+                </a:solidFill>
+                <a:latin typeface="Calibri" pitchFamily="34" charset="0"/>
+                <a:ea typeface="Calibri" pitchFamily="34" charset="-122"/>
+                <a:cs typeface="Calibri" pitchFamily="34" charset="-120"/>
+              </a:rPr>
+              <a:t>LeWM-MK vs reference: 19 won, 20 lost; −0.3 points [−4.3, +3.7]; McNemar p = 1.00.</a:t>
+            </a:r>
+            <a:endParaRPr lang="en-US" sz="1100" dirty="0"/>
+          </a:p>
+          <a:p>
+            <a:pPr marL="177800" indent="-177800">
+              <a:spcAft>
+                <a:spcPts val="700"/>
+              </a:spcAft>
+              <a:buSzPct val="100000"/>
+              <a:buChar char="•"/>
+            </a:pPr>
+            <a:r>
+              <a:rPr lang="en-US" sz="1100" dirty="0">
+                <a:solidFill>
+                  <a:srgbClr val="1B1B1B"/>
+                </a:solidFill>
+                <a:latin typeface="Calibri" pitchFamily="34" charset="0"/>
+                <a:ea typeface="Calibri" pitchFamily="34" charset="-122"/>
+                <a:cs typeface="Calibri" pitchFamily="34" charset="-120"/>
+              </a:rPr>
+              <a:t>Discordant episodes reflect stochastic search; the optimised PyTorch planner is discordant on 36.</a:t>
+            </a:r>
+            <a:endParaRPr lang="en-US" sz="1100" dirty="0"/>
+          </a:p>
+          <a:p>
+            <a:pPr marL="177800" indent="-177800">
+              <a:spcAft>
+                <a:spcPts val="700"/>
+              </a:spcAft>
+              <a:buSzPct val="100000"/>
+              <a:buChar char="•"/>
+            </a:pPr>
+            <a:r>
+              <a:rPr lang="en-US" sz="1100" dirty="0">
+                <a:solidFill>
+                  <a:srgbClr val="1B1B1B"/>
+                </a:solidFill>
+                <a:latin typeface="Calibri" pitchFamily="34" charset="0"/>
+                <a:ea typeface="Calibri" pitchFamily="34" charset="-122"/>
+                <a:cs typeface="Calibri" pitchFamily="34" charset="-120"/>
+              </a:rPr>
+              <a:t>Numerical error vs FP32: 0.06–0.32%, matching accepted BF16 (0.05–0.40%).</a:t>
+            </a:r>
+            <a:endParaRPr lang="en-US" sz="1100" dirty="0"/>
+          </a:p>
+        </p:txBody>
+      </p:sp>
+      <p:sp>
+        <p:nvSpPr>
+          <p:cNvPr id="5" name="Text 2"/>
+          <p:cNvSpPr txBox="1"/>
+          <p:nvPr/>
+        </p:nvSpPr>
+        <p:spPr>
+          <a:xfrm>
+            <a:off x="457200" y="2926080"/>
+            <a:ext cx="5669280" cy="274320"/>
+          </a:xfrm>
+          <a:prstGeom prst="rect">
+            <a:avLst/>
+          </a:prstGeom>
+          <a:noFill/>
+          <a:ln/>
+        </p:spPr>
+        <p:txBody>
+          <a:bodyPr wrap="square" lIns="0" tIns="0" rIns="0" bIns="0" rtlCol="0" anchor="ctr"/>
+          <a:lstStyle/>
+          <a:p>
+            <a:pPr indent="0" marL="0">
+              <a:buNone/>
+            </a:pPr>
+            <a:r>
+              <a:rPr lang="en-US" sz="1000" i="1" dirty="0">
+                <a:solidFill>
+                  <a:srgbClr val="5A5A5A"/>
+                </a:solidFill>
+                <a:latin typeface="Calibri" pitchFamily="34" charset="0"/>
+                <a:ea typeface="Calibri" pitchFamily="34" charset="-122"/>
+                <a:cs typeface="Calibri" pitchFamily="34" charset="-120"/>
+              </a:rPr>
+              <a:t>Push-T success on the same 300 episodes, Wilson 95% intervals. 300 pairs detect differences of about 6 points.</a:t>
+            </a:r>
+            <a:endParaRPr lang="en-US" sz="1000" dirty="0"/>
+          </a:p>
+        </p:txBody>
+      </p:sp>
+      <p:sp>
+        <p:nvSpPr>
+          <p:cNvPr id="7" name="Text 3"/>
+          <p:cNvSpPr txBox="1"/>
+          <p:nvPr/>
+        </p:nvSpPr>
+        <p:spPr>
+          <a:xfrm>
+            <a:off x="8229600" y="4796028"/>
+            <a:ext cx="457200" cy="228600"/>
+          </a:xfrm>
+          <a:prstGeom prst="rect">
+            <a:avLst/>
+          </a:prstGeom>
+          <a:noFill/>
+          <a:ln/>
+        </p:spPr>
+        <p:txBody>
+          <a:bodyPr wrap="square" lIns="0" tIns="0" rIns="0" bIns="0" rtlCol="0" anchor="ctr"/>
+          <a:lstStyle/>
+          <a:p>
+            <a:pPr algn="r" indent="0" marL="0">
+              <a:buNone/>
+            </a:pPr>
+            <a:r>
+              <a:rPr lang="en-US" sz="900" dirty="0">
+                <a:solidFill>
+                  <a:srgbClr val="5A5A5A"/>
+                </a:solidFill>
+                <a:latin typeface="Calibri" pitchFamily="34" charset="0"/>
+                <a:ea typeface="Calibri" pitchFamily="34" charset="-122"/>
+                <a:cs typeface="Calibri" pitchFamily="34" charset="-120"/>
+              </a:rPr>
+              <a:t>15</a:t>
+            </a:r>
+            <a:endParaRPr lang="en-US" sz="900" dirty="0"/>
+          </a:p>
+        </p:txBody>
+      </p:sp>
+    </p:spTree>
+  </p:cSld>
+  <p:clrMapOvr>
+    <a:masterClrMapping/>
+  </p:clrMapOvr>
+</p:sld>
+</file>
+
+<file path=ppt/slides/slide16.xml><?xml version="1.0" encoding="utf-8"?>
+<p:sld xmlns:a="http://schemas.openxmlformats.org/drawingml/2006/main" xmlns:r="http://schemas.openxmlformats.org/officeDocument/2006/relationships" xmlns:p="http://schemas.openxmlformats.org/presentationml/2006/main">
+  <p:cSld name="Slide 16">
+    <p:spTree>
+      <p:nvGrpSpPr>
+        <p:cNvPr id="1" name=""/>
+        <p:cNvGrpSpPr/>
+        <p:nvPr/>
+      </p:nvGrpSpPr>
+      <p:grpSpPr>
+        <a:xfrm>
+          <a:off x="0" y="0"/>
+          <a:ext cx="0" cy="0"/>
+          <a:chOff x="0" y="0"/>
+          <a:chExt cx="0" cy="0"/>
+        </a:xfrm>
+      </p:grpSpPr>
+      <p:sp>
+        <p:nvSpPr>
+          <p:cNvPr id="2" name="Text 0"/>
+          <p:cNvSpPr txBox="1"/>
+          <p:nvPr/>
+        </p:nvSpPr>
+        <p:spPr>
+          <a:xfrm>
+            <a:off x="457200" y="292608"/>
+            <a:ext cx="8229600" cy="640080"/>
+          </a:xfrm>
+          <a:prstGeom prst="rect">
+            <a:avLst/>
+          </a:prstGeom>
+          <a:noFill/>
+          <a:ln/>
+        </p:spPr>
+        <p:txBody>
+          <a:bodyPr wrap="square" lIns="0" tIns="0" rIns="0" bIns="0" rtlCol="0" anchor="ctr"/>
+          <a:lstStyle/>
+          <a:p>
+            <a:pPr indent="0" marL="0">
+              <a:buNone/>
+            </a:pPr>
+            <a:r>
+              <a:rPr lang="en-US" sz="2800" b="1" dirty="0">
+                <a:solidFill>
+                  <a:srgbClr val="14213D"/>
+                </a:solidFill>
+                <a:latin typeface="Cambria" pitchFamily="34" charset="0"/>
+                <a:ea typeface="Cambria" pitchFamily="34" charset="-122"/>
+                <a:cs typeface="Cambria" pitchFamily="34" charset="-120"/>
+              </a:rPr>
+              <a:t>Conclusions and limitations</a:t>
+            </a:r>
+            <a:endParaRPr lang="en-US" sz="2800" dirty="0"/>
+          </a:p>
+        </p:txBody>
+      </p:sp>
+      <p:sp>
+        <p:nvSpPr>
+          <p:cNvPr id="3" name="Text 1"/>
+          <p:cNvSpPr txBox="1"/>
+          <p:nvPr/>
+        </p:nvSpPr>
+        <p:spPr>
+          <a:xfrm>
+            <a:off x="457200" y="1051560"/>
+            <a:ext cx="640080" cy="502920"/>
+          </a:xfrm>
+          <a:prstGeom prst="rect">
+            <a:avLst/>
+          </a:prstGeom>
+          <a:noFill/>
+          <a:ln/>
+        </p:spPr>
+        <p:txBody>
+          <a:bodyPr wrap="square" lIns="0" tIns="0" rIns="0" bIns="0" rtlCol="0" anchor="t"/>
+          <a:lstStyle/>
+          <a:p>
+            <a:pPr indent="0" marL="0">
+              <a:buNone/>
+            </a:pPr>
+            <a:r>
+              <a:rPr lang="en-US" sz="1400" b="1" dirty="0">
+                <a:solidFill>
+                  <a:srgbClr val="2A78D6"/>
+                </a:solidFill>
+                <a:latin typeface="Cambria" pitchFamily="34" charset="0"/>
+                <a:ea typeface="Cambria" pitchFamily="34" charset="-122"/>
+                <a:cs typeface="Cambria" pitchFamily="34" charset="-120"/>
+              </a:rPr>
+              <a:t>O1</a:t>
+            </a:r>
+            <a:endParaRPr lang="en-US" sz="1400" dirty="0"/>
+          </a:p>
+        </p:txBody>
+      </p:sp>
+      <p:sp>
+        <p:nvSpPr>
+          <p:cNvPr id="4" name="Text 2"/>
+          <p:cNvSpPr txBox="1"/>
+          <p:nvPr/>
+        </p:nvSpPr>
+        <p:spPr>
+          <a:xfrm>
+            <a:off x="1143000" y="1051560"/>
+            <a:ext cx="4160520" cy="713232"/>
+          </a:xfrm>
+          <a:prstGeom prst="rect">
+            <a:avLst/>
+          </a:prstGeom>
+          <a:noFill/>
+          <a:ln/>
+        </p:spPr>
+        <p:txBody>
+          <a:bodyPr wrap="square" lIns="0" tIns="0" rIns="0" bIns="0" rtlCol="0" anchor="t"/>
+          <a:lstStyle/>
+          <a:p>
+            <a:pPr indent="0" marL="0">
+              <a:buNone/>
+            </a:pPr>
+            <a:r>
+              <a:rPr lang="en-US" sz="1150" dirty="0">
+                <a:solidFill>
+                  <a:srgbClr val="1B1B1B"/>
+                </a:solidFill>
+                <a:latin typeface="Calibri" pitchFamily="34" charset="0"/>
+                <a:ea typeface="Calibri" pitchFamily="34" charset="-122"/>
+                <a:cs typeface="Calibri" pitchFamily="34" charset="-120"/>
+              </a:rPr>
+              <a:t>The reference's time was overhead: 33% redundant encoding, a search 99% fixed cost per call, 7% CPU waits.</a:t>
+            </a:r>
+            <a:endParaRPr lang="en-US" sz="1150" dirty="0"/>
+          </a:p>
+        </p:txBody>
+      </p:sp>
+      <p:sp>
+        <p:nvSpPr>
+          <p:cNvPr id="5" name="Text 3"/>
+          <p:cNvSpPr txBox="1"/>
+          <p:nvPr/>
+        </p:nvSpPr>
+        <p:spPr>
+          <a:xfrm>
+            <a:off x="457200" y="1801368"/>
+            <a:ext cx="640080" cy="502920"/>
+          </a:xfrm>
+          <a:prstGeom prst="rect">
+            <a:avLst/>
+          </a:prstGeom>
+          <a:noFill/>
+          <a:ln/>
+        </p:spPr>
+        <p:txBody>
+          <a:bodyPr wrap="square" lIns="0" tIns="0" rIns="0" bIns="0" rtlCol="0" anchor="t"/>
+          <a:lstStyle/>
+          <a:p>
+            <a:pPr indent="0" marL="0">
+              <a:buNone/>
+            </a:pPr>
+            <a:r>
+              <a:rPr lang="en-US" sz="1400" b="1" dirty="0">
+                <a:solidFill>
+                  <a:srgbClr val="2A78D6"/>
+                </a:solidFill>
+                <a:latin typeface="Cambria" pitchFamily="34" charset="0"/>
+                <a:ea typeface="Cambria" pitchFamily="34" charset="-122"/>
+                <a:cs typeface="Cambria" pitchFamily="34" charset="-120"/>
+              </a:rPr>
+              <a:t>O2</a:t>
+            </a:r>
+            <a:endParaRPr lang="en-US" sz="1400" dirty="0"/>
+          </a:p>
+        </p:txBody>
+      </p:sp>
+      <p:sp>
+        <p:nvSpPr>
+          <p:cNvPr id="6" name="Text 4"/>
+          <p:cNvSpPr txBox="1"/>
+          <p:nvPr/>
+        </p:nvSpPr>
+        <p:spPr>
+          <a:xfrm>
+            <a:off x="1143000" y="1801368"/>
+            <a:ext cx="4160520" cy="713232"/>
+          </a:xfrm>
+          <a:prstGeom prst="rect">
+            <a:avLst/>
+          </a:prstGeom>
+          <a:noFill/>
+          <a:ln/>
+        </p:spPr>
+        <p:txBody>
+          <a:bodyPr wrap="square" lIns="0" tIns="0" rIns="0" bIns="0" rtlCol="0" anchor="t"/>
+          <a:lstStyle/>
+          <a:p>
+            <a:pPr indent="0" marL="0">
+              <a:buNone/>
+            </a:pPr>
+            <a:r>
+              <a:rPr lang="en-US" sz="1150" dirty="0">
+                <a:solidFill>
+                  <a:srgbClr val="1B1B1B"/>
+                </a:solidFill>
+                <a:latin typeface="Calibri" pitchFamily="34" charset="0"/>
+                <a:ea typeface="Calibri" pitchFamily="34" charset="-122"/>
+                <a:cs typeface="Calibri" pitchFamily="34" charset="-120"/>
+              </a:rPr>
+              <a:t>LeWM-MK removes each bottleneck with the model and search budget unchanged.</a:t>
+            </a:r>
+            <a:endParaRPr lang="en-US" sz="1150" dirty="0"/>
+          </a:p>
+        </p:txBody>
+      </p:sp>
+      <p:sp>
+        <p:nvSpPr>
+          <p:cNvPr id="7" name="Text 5"/>
+          <p:cNvSpPr txBox="1"/>
+          <p:nvPr/>
+        </p:nvSpPr>
+        <p:spPr>
+          <a:xfrm>
+            <a:off x="457200" y="2551176"/>
+            <a:ext cx="640080" cy="502920"/>
+          </a:xfrm>
+          <a:prstGeom prst="rect">
+            <a:avLst/>
+          </a:prstGeom>
+          <a:noFill/>
+          <a:ln/>
+        </p:spPr>
+        <p:txBody>
+          <a:bodyPr wrap="square" lIns="0" tIns="0" rIns="0" bIns="0" rtlCol="0" anchor="t"/>
+          <a:lstStyle/>
+          <a:p>
+            <a:pPr indent="0" marL="0">
+              <a:buNone/>
+            </a:pPr>
+            <a:r>
+              <a:rPr lang="en-US" sz="1400" b="1" dirty="0">
+                <a:solidFill>
+                  <a:srgbClr val="2A78D6"/>
+                </a:solidFill>
+                <a:latin typeface="Cambria" pitchFamily="34" charset="0"/>
+                <a:ea typeface="Cambria" pitchFamily="34" charset="-122"/>
+                <a:cs typeface="Cambria" pitchFamily="34" charset="-120"/>
+              </a:rPr>
+              <a:t>O3</a:t>
+            </a:r>
+            <a:endParaRPr lang="en-US" sz="1400" dirty="0"/>
+          </a:p>
+        </p:txBody>
+      </p:sp>
+      <p:sp>
+        <p:nvSpPr>
+          <p:cNvPr id="8" name="Text 6"/>
+          <p:cNvSpPr txBox="1"/>
+          <p:nvPr/>
+        </p:nvSpPr>
+        <p:spPr>
+          <a:xfrm>
+            <a:off x="1143000" y="2551176"/>
+            <a:ext cx="4160520" cy="713232"/>
+          </a:xfrm>
+          <a:prstGeom prst="rect">
+            <a:avLst/>
+          </a:prstGeom>
+          <a:noFill/>
+          <a:ln/>
+        </p:spPr>
+        <p:txBody>
+          <a:bodyPr wrap="square" lIns="0" tIns="0" rIns="0" bIns="0" rtlCol="0" anchor="t"/>
+          <a:lstStyle/>
+          <a:p>
+            <a:pPr indent="0" marL="0">
+              <a:buNone/>
+            </a:pPr>
+            <a:r>
+              <a:rPr lang="en-US" sz="1150" dirty="0">
+                <a:solidFill>
+                  <a:srgbClr val="1B1B1B"/>
+                </a:solidFill>
+                <a:latin typeface="Calibri" pitchFamily="34" charset="0"/>
+                <a:ea typeface="Calibri" pitchFamily="34" charset="-122"/>
+                <a:cs typeface="Calibri" pitchFamily="34" charset="-120"/>
+              </a:rPr>
+              <a:t>46.5 ms per plan: 13.4× the reference, 3.9× optimised PyTorch; success unchanged (−0.3 pts).</a:t>
+            </a:r>
+            <a:endParaRPr lang="en-US" sz="1150" dirty="0"/>
+          </a:p>
+        </p:txBody>
+      </p:sp>
+      <p:sp>
+        <p:nvSpPr>
+          <p:cNvPr id="9" name="Text 7"/>
+          <p:cNvSpPr txBox="1"/>
+          <p:nvPr/>
+        </p:nvSpPr>
+        <p:spPr>
+          <a:xfrm>
+            <a:off x="457200" y="3300984"/>
+            <a:ext cx="640080" cy="502920"/>
+          </a:xfrm>
+          <a:prstGeom prst="rect">
+            <a:avLst/>
+          </a:prstGeom>
+          <a:noFill/>
+          <a:ln/>
+        </p:spPr>
+        <p:txBody>
+          <a:bodyPr wrap="square" lIns="0" tIns="0" rIns="0" bIns="0" rtlCol="0" anchor="t"/>
+          <a:lstStyle/>
+          <a:p>
+            <a:pPr indent="0" marL="0">
+              <a:buNone/>
+            </a:pPr>
+            <a:r>
+              <a:rPr lang="en-US" sz="1400" b="1" dirty="0">
+                <a:solidFill>
+                  <a:srgbClr val="2A78D6"/>
+                </a:solidFill>
+                <a:latin typeface="Cambria" pitchFamily="34" charset="0"/>
+                <a:ea typeface="Cambria" pitchFamily="34" charset="-122"/>
+                <a:cs typeface="Cambria" pitchFamily="34" charset="-120"/>
+              </a:rPr>
+              <a:t>O4</a:t>
+            </a:r>
+            <a:endParaRPr lang="en-US" sz="1400" dirty="0"/>
+          </a:p>
+        </p:txBody>
+      </p:sp>
+      <p:sp>
+        <p:nvSpPr>
+          <p:cNvPr id="10" name="Text 8"/>
+          <p:cNvSpPr txBox="1"/>
+          <p:nvPr/>
+        </p:nvSpPr>
+        <p:spPr>
+          <a:xfrm>
+            <a:off x="1143000" y="3300984"/>
+            <a:ext cx="4160520" cy="713232"/>
+          </a:xfrm>
+          <a:prstGeom prst="rect">
+            <a:avLst/>
+          </a:prstGeom>
+          <a:noFill/>
+          <a:ln/>
+        </p:spPr>
+        <p:txBody>
+          <a:bodyPr wrap="square" lIns="0" tIns="0" rIns="0" bIns="0" rtlCol="0" anchor="t"/>
+          <a:lstStyle/>
+          <a:p>
+            <a:pPr indent="0" marL="0">
+              <a:buNone/>
+            </a:pPr>
+            <a:r>
+              <a:rPr lang="en-US" sz="1150" dirty="0">
+                <a:solidFill>
+                  <a:srgbClr val="1B1B1B"/>
+                </a:solidFill>
+                <a:latin typeface="Calibri" pitchFamily="34" charset="0"/>
+                <a:ea typeface="Calibri" pitchFamily="34" charset="-122"/>
+                <a:cs typeface="Calibri" pitchFamily="34" charset="-120"/>
+              </a:rPr>
+              <a:t>Planner plug-in; one program regenerates every result from the data.</a:t>
+            </a:r>
+            <a:endParaRPr lang="en-US" sz="1150" dirty="0"/>
+          </a:p>
+        </p:txBody>
+      </p:sp>
+      <p:sp>
+        <p:nvSpPr>
+          <p:cNvPr id="11" name="Shape 9"/>
+          <p:cNvSpPr/>
+          <p:nvPr/>
+        </p:nvSpPr>
+        <p:spPr>
+          <a:xfrm>
+            <a:off x="5577840" y="1051560"/>
+            <a:ext cx="3108960" cy="3566160"/>
+          </a:xfrm>
+          <a:prstGeom prst="roundRect">
+            <a:avLst>
+              <a:gd name="adj" fmla="val 2353"/>
+            </a:avLst>
+          </a:prstGeom>
+          <a:solidFill>
+            <a:srgbClr val="F3F4F6"/>
+          </a:solidFill>
+          <a:ln w="12700">
+            <a:solidFill>
+              <a:srgbClr val="F3F4F6"/>
+            </a:solidFill>
+            <a:prstDash val="solid"/>
+          </a:ln>
+        </p:spPr>
+      </p:sp>
+      <p:sp>
+        <p:nvSpPr>
+          <p:cNvPr id="12" name="Text 10"/>
+          <p:cNvSpPr txBox="1"/>
+          <p:nvPr/>
+        </p:nvSpPr>
+        <p:spPr>
+          <a:xfrm>
+            <a:off x="5760720" y="1161288"/>
+            <a:ext cx="2743200" cy="365760"/>
+          </a:xfrm>
+          <a:prstGeom prst="rect">
+            <a:avLst/>
+          </a:prstGeom>
+          <a:noFill/>
+          <a:ln/>
+        </p:spPr>
+        <p:txBody>
+          <a:bodyPr wrap="square" lIns="0" tIns="0" rIns="0" bIns="0" rtlCol="0" anchor="ctr"/>
+          <a:lstStyle/>
+          <a:p>
+            <a:pPr indent="0" marL="0">
+              <a:buNone/>
+            </a:pPr>
+            <a:r>
+              <a:rPr lang="en-US" sz="1500" b="1" dirty="0">
+                <a:solidFill>
+                  <a:srgbClr val="14213D"/>
+                </a:solidFill>
+                <a:latin typeface="Cambria" pitchFamily="34" charset="0"/>
+                <a:ea typeface="Cambria" pitchFamily="34" charset="-122"/>
+                <a:cs typeface="Cambria" pitchFamily="34" charset="-120"/>
+              </a:rPr>
+              <a:t>Limitations</a:t>
+            </a:r>
+            <a:endParaRPr lang="en-US" sz="1500" dirty="0"/>
+          </a:p>
+        </p:txBody>
+      </p:sp>
+      <p:sp>
+        <p:nvSpPr>
+          <p:cNvPr id="13" name="Text 11"/>
+          <p:cNvSpPr txBox="1"/>
+          <p:nvPr/>
+        </p:nvSpPr>
+        <p:spPr>
+          <a:xfrm>
+            <a:off x="5760720" y="1572768"/>
+            <a:ext cx="2788920" cy="3017520"/>
+          </a:xfrm>
+          <a:prstGeom prst="rect">
+            <a:avLst/>
+          </a:prstGeom>
+          <a:noFill/>
+          <a:ln/>
+        </p:spPr>
+        <p:txBody>
+          <a:bodyPr wrap="square" lIns="0" tIns="0" rIns="0" bIns="0" rtlCol="0" anchor="t"/>
+          <a:lstStyle/>
+          <a:p>
+            <a:pPr marL="177800" indent="-177800">
+              <a:spcAft>
+                <a:spcPts val="700"/>
+              </a:spcAft>
+              <a:buSzPct val="100000"/>
+              <a:buChar char="•"/>
+            </a:pPr>
+            <a:r>
+              <a:rPr lang="en-US" sz="1100" dirty="0">
+                <a:solidFill>
+                  <a:srgbClr val="1B1B1B"/>
+                </a:solidFill>
+                <a:latin typeface="Calibri" pitchFamily="34" charset="0"/>
+                <a:ea typeface="Calibri" pitchFamily="34" charset="-122"/>
+                <a:cs typeface="Calibri" pitchFamily="34" charset="-120"/>
+              </a:rPr>
+              <a:t>300 paired episodes resolve differences of about 6 percentage points.</a:t>
+            </a:r>
+            <a:endParaRPr lang="en-US" sz="1100" dirty="0"/>
+          </a:p>
+          <a:p>
+            <a:pPr marL="177800" indent="-177800">
+              <a:spcAft>
+                <a:spcPts val="700"/>
+              </a:spcAft>
+              <a:buSzPct val="100000"/>
+              <a:buChar char="•"/>
+            </a:pPr>
+            <a:r>
+              <a:rPr lang="en-US" sz="1100" dirty="0">
+                <a:solidFill>
+                  <a:srgbClr val="1B1B1B"/>
+                </a:solidFill>
+                <a:latin typeface="Calibri" pitchFamily="34" charset="0"/>
+                <a:ea typeface="Calibri" pitchFamily="34" charset="-122"/>
+                <a:cs typeface="Calibri" pitchFamily="34" charset="-120"/>
+              </a:rPr>
+              <a:t>Some profile stages are attributed by difference.</a:t>
+            </a:r>
+            <a:endParaRPr lang="en-US" sz="1100" dirty="0"/>
+          </a:p>
+          <a:p>
+            <a:pPr marL="177800" indent="-177800">
+              <a:spcAft>
+                <a:spcPts val="700"/>
+              </a:spcAft>
+              <a:buSzPct val="100000"/>
+              <a:buChar char="•"/>
+            </a:pPr>
+            <a:r>
+              <a:rPr lang="en-US" sz="1100" dirty="0">
+                <a:solidFill>
+                  <a:srgbClr val="1B1B1B"/>
+                </a:solidFill>
+                <a:latin typeface="Calibri" pitchFamily="34" charset="0"/>
+                <a:ea typeface="Calibri" pitchFamily="34" charset="-122"/>
+                <a:cs typeface="Calibri" pitchFamily="34" charset="-120"/>
+              </a:rPr>
+              <a:t>One model, one task, one GPU type; H100-only kernel.</a:t>
+            </a:r>
+            <a:endParaRPr lang="en-US" sz="1100" dirty="0"/>
+          </a:p>
+          <a:p>
+            <a:pPr marL="177800" indent="-177800">
+              <a:spcAft>
+                <a:spcPts val="700"/>
+              </a:spcAft>
+              <a:buSzPct val="100000"/>
+              <a:buChar char="•"/>
+            </a:pPr>
+            <a:r>
+              <a:rPr lang="en-US" sz="1100" dirty="0">
+                <a:solidFill>
+                  <a:srgbClr val="1B1B1B"/>
+                </a:solidFill>
+                <a:latin typeface="Calibri" pitchFamily="34" charset="0"/>
+                <a:ea typeface="Calibri" pitchFamily="34" charset="-122"/>
+                <a:cs typeface="Calibri" pitchFamily="34" charset="-120"/>
+              </a:rPr>
+              <a:t>Simulation only; only the planning call was optimised.</a:t>
+            </a:r>
+            <a:endParaRPr lang="en-US" sz="1100" dirty="0"/>
+          </a:p>
+          <a:p>
+            <a:pPr marL="177800" indent="-177800">
+              <a:spcAft>
+                <a:spcPts val="700"/>
+              </a:spcAft>
+              <a:buSzPct val="100000"/>
+              <a:buChar char="•"/>
+            </a:pPr>
+            <a:r>
+              <a:rPr lang="en-US" sz="1100" dirty="0">
+                <a:solidFill>
+                  <a:srgbClr val="1B1B1B"/>
+                </a:solidFill>
+                <a:latin typeface="Calibri" pitchFamily="34" charset="0"/>
+                <a:ea typeface="Calibri" pitchFamily="34" charset="-122"/>
+                <a:cs typeface="Calibri" pitchFamily="34" charset="-120"/>
+              </a:rPr>
+              <a:t>PyTorch latency varied by up to 18% between passes; kernel latency by about 2%.</a:t>
+            </a:r>
+            <a:endParaRPr lang="en-US" sz="1100" dirty="0"/>
+          </a:p>
+        </p:txBody>
+      </p:sp>
+      <p:sp>
+        <p:nvSpPr>
+          <p:cNvPr id="15" name="Text 12"/>
+          <p:cNvSpPr txBox="1"/>
+          <p:nvPr/>
+        </p:nvSpPr>
+        <p:spPr>
+          <a:xfrm>
+            <a:off x="8229600" y="4796028"/>
+            <a:ext cx="457200" cy="228600"/>
+          </a:xfrm>
+          <a:prstGeom prst="rect">
+            <a:avLst/>
+          </a:prstGeom>
+          <a:noFill/>
+          <a:ln/>
+        </p:spPr>
+        <p:txBody>
+          <a:bodyPr wrap="square" lIns="0" tIns="0" rIns="0" bIns="0" rtlCol="0" anchor="ctr"/>
+          <a:lstStyle/>
+          <a:p>
+            <a:pPr algn="r" indent="0" marL="0">
+              <a:buNone/>
+            </a:pPr>
+            <a:r>
+              <a:rPr lang="en-US" sz="900" dirty="0">
+                <a:solidFill>
+                  <a:srgbClr val="5A5A5A"/>
+                </a:solidFill>
+                <a:latin typeface="Calibri" pitchFamily="34" charset="0"/>
+                <a:ea typeface="Calibri" pitchFamily="34" charset="-122"/>
+                <a:cs typeface="Calibri" pitchFamily="34" charset="-120"/>
+              </a:rPr>
+              <a:t>16</a:t>
+            </a:r>
+            <a:endParaRPr lang="en-US" sz="900" dirty="0"/>
+          </a:p>
+        </p:txBody>
+      </p:sp>
+    </p:spTree>
+  </p:cSld>
+  <p:clrMapOvr>
+    <a:masterClrMapping/>
+  </p:clrMapOvr>
+</p:sld>
+</file>
+
+<file path=ppt/slides/slide17.xml><?xml version="1.0" encoding="utf-8"?>
+<p:sld xmlns:a="http://schemas.openxmlformats.org/drawingml/2006/main" xmlns:r="http://schemas.openxmlformats.org/officeDocument/2006/relationships" xmlns:p="http://schemas.openxmlformats.org/presentationml/2006/main">
+  <p:cSld name="Slide 17">
+    <p:spTree>
+      <p:nvGrpSpPr>
+        <p:cNvPr id="1" name=""/>
+        <p:cNvGrpSpPr/>
+        <p:nvPr/>
+      </p:nvGrpSpPr>
+      <p:grpSpPr>
+        <a:xfrm>
+          <a:off x="0" y="0"/>
+          <a:ext cx="0" cy="0"/>
+          <a:chOff x="0" y="0"/>
+          <a:chExt cx="0" cy="0"/>
+        </a:xfrm>
+      </p:grpSpPr>
+      <p:sp>
+        <p:nvSpPr>
+          <p:cNvPr id="2" name="Text 0"/>
+          <p:cNvSpPr txBox="1"/>
+          <p:nvPr/>
+        </p:nvSpPr>
+        <p:spPr>
+          <a:xfrm>
+            <a:off x="457200" y="292608"/>
+            <a:ext cx="8229600" cy="640080"/>
+          </a:xfrm>
+          <a:prstGeom prst="rect">
+            <a:avLst/>
+          </a:prstGeom>
+          <a:noFill/>
+          <a:ln/>
+        </p:spPr>
+        <p:txBody>
+          <a:bodyPr wrap="square" lIns="0" tIns="0" rIns="0" bIns="0" rtlCol="0" anchor="ctr"/>
+          <a:lstStyle/>
+          <a:p>
+            <a:pPr indent="0" marL="0">
+              <a:buNone/>
+            </a:pPr>
+            <a:r>
+              <a:rPr lang="en-US" sz="2800" b="1" dirty="0">
+                <a:solidFill>
+                  <a:srgbClr val="14213D"/>
+                </a:solidFill>
+                <a:latin typeface="Cambria" pitchFamily="34" charset="0"/>
+                <a:ea typeface="Cambria" pitchFamily="34" charset="-122"/>
+                <a:cs typeface="Cambria" pitchFamily="34" charset="-120"/>
+              </a:rPr>
+              <a:t>Future work</a:t>
+            </a:r>
+            <a:endParaRPr lang="en-US" sz="2800" dirty="0"/>
+          </a:p>
+        </p:txBody>
+      </p:sp>
+      <p:sp>
+        <p:nvSpPr>
+          <p:cNvPr id="3" name="Shape 1"/>
+          <p:cNvSpPr/>
+          <p:nvPr/>
+        </p:nvSpPr>
+        <p:spPr>
+          <a:xfrm>
+            <a:off x="457200" y="1143000"/>
+            <a:ext cx="365760" cy="365760"/>
+          </a:xfrm>
+          <a:prstGeom prst="ellipse">
+            <a:avLst/>
+          </a:prstGeom>
+          <a:solidFill>
+            <a:srgbClr val="2A78D6"/>
+          </a:solidFill>
+          <a:ln w="12700">
+            <a:solidFill>
+              <a:srgbClr val="FFFFFF"/>
+            </a:solidFill>
+            <a:prstDash val="solid"/>
+          </a:ln>
+        </p:spPr>
+      </p:sp>
+      <p:sp>
+        <p:nvSpPr>
+          <p:cNvPr id="4" name="Text 2"/>
+          <p:cNvSpPr txBox="1"/>
+          <p:nvPr/>
+        </p:nvSpPr>
+        <p:spPr>
+          <a:xfrm>
+            <a:off x="457200" y="1143000"/>
+            <a:ext cx="365760" cy="365760"/>
+          </a:xfrm>
+          <a:prstGeom prst="rect">
+            <a:avLst/>
+          </a:prstGeom>
+          <a:noFill/>
+          <a:ln/>
+        </p:spPr>
+        <p:txBody>
+          <a:bodyPr wrap="square" lIns="0" tIns="0" rIns="0" bIns="0" rtlCol="0" anchor="ctr"/>
+          <a:lstStyle/>
+          <a:p>
+            <a:pPr algn="ctr" indent="0" marL="0">
+              <a:buNone/>
+            </a:pPr>
+            <a:r>
+              <a:rPr lang="en-US" sz="1300" b="1" dirty="0">
+                <a:solidFill>
+                  <a:srgbClr val="FFFFFF"/>
+                </a:solidFill>
+                <a:latin typeface="Cambria" pitchFamily="34" charset="0"/>
+                <a:ea typeface="Cambria" pitchFamily="34" charset="-122"/>
+                <a:cs typeface="Cambria" pitchFamily="34" charset="-120"/>
+              </a:rPr>
+              <a:t>1</a:t>
+            </a:r>
+            <a:endParaRPr lang="en-US" sz="1300" dirty="0"/>
+          </a:p>
+        </p:txBody>
+      </p:sp>
+      <p:sp>
+        <p:nvSpPr>
+          <p:cNvPr id="5" name="Text 3"/>
+          <p:cNvSpPr txBox="1"/>
+          <p:nvPr/>
+        </p:nvSpPr>
+        <p:spPr>
+          <a:xfrm>
+            <a:off x="960120" y="1097280"/>
+            <a:ext cx="3566160" cy="1188720"/>
+          </a:xfrm>
+          <a:prstGeom prst="rect">
+            <a:avLst/>
+          </a:prstGeom>
+          <a:noFill/>
+          <a:ln/>
+        </p:spPr>
+        <p:txBody>
+          <a:bodyPr wrap="square" lIns="0" tIns="0" rIns="0" bIns="0" rtlCol="0" anchor="t"/>
+          <a:lstStyle/>
+          <a:p>
+            <a:pPr indent="0" marL="0">
+              <a:spcAft>
+                <a:spcPts val="200"/>
+              </a:spcAft>
+              <a:buNone/>
+            </a:pPr>
+            <a:r>
+              <a:rPr lang="en-US" sz="1250" b="1" dirty="0">
+                <a:solidFill>
+                  <a:srgbClr val="14213D"/>
+                </a:solidFill>
+                <a:latin typeface="Calibri" pitchFamily="34" charset="0"/>
+                <a:ea typeface="Calibri" pitchFamily="34" charset="-122"/>
+                <a:cs typeface="Calibri" pitchFamily="34" charset="-120"/>
+              </a:rPr>
+              <a:t>Search budget versus task success</a:t>
+            </a:r>
+            <a:endParaRPr lang="en-US" sz="1250" dirty="0"/>
+          </a:p>
+          <a:p>
+            <a:pPr indent="0" marL="0">
+              <a:spcAft>
+                <a:spcPts val="200"/>
+              </a:spcAft>
+              <a:buNone/>
+            </a:pPr>
+            <a:r>
+              <a:rPr lang="en-US" sz="1250" dirty="0">
+                <a:solidFill>
+                  <a:srgbClr val="1B1B1B"/>
+                </a:solidFill>
+                <a:latin typeface="Calibri" pitchFamily="34" charset="0"/>
+                <a:ea typeface="Calibri" pitchFamily="34" charset="-122"/>
+                <a:cs typeface="Calibri" pitchFamily="34" charset="-120"/>
+              </a:rPr>
+              <a:t>Larger iteration and candidate budgets remain within a 100 ms control period; characterise the latency-success trade-off.</a:t>
+            </a:r>
+            <a:endParaRPr lang="en-US" sz="1250" dirty="0"/>
+          </a:p>
+        </p:txBody>
+      </p:sp>
+      <p:sp>
+        <p:nvSpPr>
+          <p:cNvPr id="6" name="Shape 4"/>
+          <p:cNvSpPr/>
+          <p:nvPr/>
+        </p:nvSpPr>
+        <p:spPr>
+          <a:xfrm>
+            <a:off x="4663440" y="1143000"/>
+            <a:ext cx="365760" cy="365760"/>
+          </a:xfrm>
+          <a:prstGeom prst="ellipse">
+            <a:avLst/>
+          </a:prstGeom>
+          <a:solidFill>
+            <a:srgbClr val="2A78D6"/>
+          </a:solidFill>
+          <a:ln w="12700">
+            <a:solidFill>
+              <a:srgbClr val="FFFFFF"/>
+            </a:solidFill>
+            <a:prstDash val="solid"/>
+          </a:ln>
+        </p:spPr>
+      </p:sp>
+      <p:sp>
+        <p:nvSpPr>
+          <p:cNvPr id="7" name="Text 5"/>
+          <p:cNvSpPr txBox="1"/>
+          <p:nvPr/>
+        </p:nvSpPr>
+        <p:spPr>
+          <a:xfrm>
+            <a:off x="4663440" y="1143000"/>
+            <a:ext cx="365760" cy="365760"/>
+          </a:xfrm>
+          <a:prstGeom prst="rect">
+            <a:avLst/>
+          </a:prstGeom>
+          <a:noFill/>
+          <a:ln/>
+        </p:spPr>
+        <p:txBody>
+          <a:bodyPr wrap="square" lIns="0" tIns="0" rIns="0" bIns="0" rtlCol="0" anchor="ctr"/>
+          <a:lstStyle/>
+          <a:p>
+            <a:pPr algn="ctr" indent="0" marL="0">
+              <a:buNone/>
+            </a:pPr>
+            <a:r>
+              <a:rPr lang="en-US" sz="1300" b="1" dirty="0">
+                <a:solidFill>
+                  <a:srgbClr val="FFFFFF"/>
+                </a:solidFill>
+                <a:latin typeface="Cambria" pitchFamily="34" charset="0"/>
+                <a:ea typeface="Cambria" pitchFamily="34" charset="-122"/>
+                <a:cs typeface="Cambria" pitchFamily="34" charset="-120"/>
+              </a:rPr>
+              <a:t>2</a:t>
+            </a:r>
+            <a:endParaRPr lang="en-US" sz="1300" dirty="0"/>
+          </a:p>
+        </p:txBody>
+      </p:sp>
+      <p:sp>
+        <p:nvSpPr>
+          <p:cNvPr id="8" name="Text 6"/>
+          <p:cNvSpPr txBox="1"/>
+          <p:nvPr/>
+        </p:nvSpPr>
+        <p:spPr>
+          <a:xfrm>
+            <a:off x="5166360" y="1097280"/>
+            <a:ext cx="3566160" cy="1188720"/>
+          </a:xfrm>
+          <a:prstGeom prst="rect">
+            <a:avLst/>
+          </a:prstGeom>
+          <a:noFill/>
+          <a:ln/>
+        </p:spPr>
+        <p:txBody>
+          <a:bodyPr wrap="square" lIns="0" tIns="0" rIns="0" bIns="0" rtlCol="0" anchor="t"/>
+          <a:lstStyle/>
+          <a:p>
+            <a:pPr indent="0" marL="0">
+              <a:spcAft>
+                <a:spcPts val="200"/>
+              </a:spcAft>
+              <a:buNone/>
+            </a:pPr>
+            <a:r>
+              <a:rPr lang="en-US" sz="1250" b="1" dirty="0">
+                <a:solidFill>
+                  <a:srgbClr val="14213D"/>
+                </a:solidFill>
+                <a:latin typeface="Calibri" pitchFamily="34" charset="0"/>
+                <a:ea typeface="Calibri" pitchFamily="34" charset="-122"/>
+                <a:cs typeface="Calibri" pitchFamily="34" charset="-120"/>
+              </a:rPr>
+              <a:t>Reducing the dependent computation chain</a:t>
+            </a:r>
+            <a:endParaRPr lang="en-US" sz="1250" dirty="0"/>
+          </a:p>
+          <a:p>
+            <a:pPr indent="0" marL="0">
+              <a:spcAft>
+                <a:spcPts val="200"/>
+              </a:spcAft>
+              <a:buNone/>
+            </a:pPr>
+            <a:r>
+              <a:rPr lang="en-US" sz="1250" dirty="0">
+                <a:solidFill>
+                  <a:srgbClr val="1B1B1B"/>
+                </a:solidFill>
+                <a:latin typeface="Calibri" pitchFamily="34" charset="0"/>
+                <a:ea typeface="Calibri" pitchFamily="34" charset="-122"/>
+                <a:cs typeface="Calibri" pitchFamily="34" charset="-120"/>
+              </a:rPr>
+              <a:t>Combination with single-pass rollout models; layer-per-cluster pipelining.</a:t>
+            </a:r>
+            <a:endParaRPr lang="en-US" sz="1250" dirty="0"/>
+          </a:p>
+        </p:txBody>
+      </p:sp>
+      <p:sp>
+        <p:nvSpPr>
+          <p:cNvPr id="9" name="Shape 7"/>
+          <p:cNvSpPr/>
+          <p:nvPr/>
+        </p:nvSpPr>
+        <p:spPr>
+          <a:xfrm>
+            <a:off x="457200" y="2606040"/>
+            <a:ext cx="365760" cy="365760"/>
+          </a:xfrm>
+          <a:prstGeom prst="ellipse">
+            <a:avLst/>
+          </a:prstGeom>
+          <a:solidFill>
+            <a:srgbClr val="2A78D6"/>
+          </a:solidFill>
+          <a:ln w="12700">
+            <a:solidFill>
+              <a:srgbClr val="FFFFFF"/>
+            </a:solidFill>
+            <a:prstDash val="solid"/>
+          </a:ln>
+        </p:spPr>
+      </p:sp>
+      <p:sp>
+        <p:nvSpPr>
+          <p:cNvPr id="10" name="Text 8"/>
+          <p:cNvSpPr txBox="1"/>
+          <p:nvPr/>
+        </p:nvSpPr>
+        <p:spPr>
+          <a:xfrm>
+            <a:off x="457200" y="2606040"/>
+            <a:ext cx="365760" cy="365760"/>
+          </a:xfrm>
+          <a:prstGeom prst="rect">
+            <a:avLst/>
+          </a:prstGeom>
+          <a:noFill/>
+          <a:ln/>
+        </p:spPr>
+        <p:txBody>
+          <a:bodyPr wrap="square" lIns="0" tIns="0" rIns="0" bIns="0" rtlCol="0" anchor="ctr"/>
+          <a:lstStyle/>
+          <a:p>
+            <a:pPr algn="ctr" indent="0" marL="0">
+              <a:buNone/>
+            </a:pPr>
+            <a:r>
+              <a:rPr lang="en-US" sz="1300" b="1" dirty="0">
+                <a:solidFill>
+                  <a:srgbClr val="FFFFFF"/>
+                </a:solidFill>
+                <a:latin typeface="Cambria" pitchFamily="34" charset="0"/>
+                <a:ea typeface="Cambria" pitchFamily="34" charset="-122"/>
+                <a:cs typeface="Cambria" pitchFamily="34" charset="-120"/>
+              </a:rPr>
+              <a:t>3</a:t>
+            </a:r>
+            <a:endParaRPr lang="en-US" sz="1300" dirty="0"/>
+          </a:p>
+        </p:txBody>
+      </p:sp>
+      <p:sp>
+        <p:nvSpPr>
+          <p:cNvPr id="11" name="Text 9"/>
+          <p:cNvSpPr txBox="1"/>
+          <p:nvPr/>
+        </p:nvSpPr>
+        <p:spPr>
+          <a:xfrm>
+            <a:off x="960120" y="2560320"/>
+            <a:ext cx="3566160" cy="1188720"/>
+          </a:xfrm>
+          <a:prstGeom prst="rect">
+            <a:avLst/>
+          </a:prstGeom>
+          <a:noFill/>
+          <a:ln/>
+        </p:spPr>
+        <p:txBody>
+          <a:bodyPr wrap="square" lIns="0" tIns="0" rIns="0" bIns="0" rtlCol="0" anchor="t"/>
+          <a:lstStyle/>
+          <a:p>
+            <a:pPr indent="0" marL="0">
+              <a:spcAft>
+                <a:spcPts val="200"/>
+              </a:spcAft>
+              <a:buNone/>
+            </a:pPr>
+            <a:r>
+              <a:rPr lang="en-US" sz="1250" b="1" dirty="0">
+                <a:solidFill>
+                  <a:srgbClr val="14213D"/>
+                </a:solidFill>
+                <a:latin typeface="Calibri" pitchFamily="34" charset="0"/>
+                <a:ea typeface="Calibri" pitchFamily="34" charset="-122"/>
+                <a:cs typeface="Calibri" pitchFamily="34" charset="-120"/>
+              </a:rPr>
+              <a:t>Generalisation to other models and hardware</a:t>
+            </a:r>
+            <a:endParaRPr lang="en-US" sz="1250" dirty="0"/>
+          </a:p>
+          <a:p>
+            <a:pPr indent="0" marL="0">
+              <a:spcAft>
+                <a:spcPts val="200"/>
+              </a:spcAft>
+              <a:buNone/>
+            </a:pPr>
+            <a:r>
+              <a:rPr lang="en-US" sz="1250" dirty="0">
+                <a:solidFill>
+                  <a:srgbClr val="1B1B1B"/>
+                </a:solidFill>
+                <a:latin typeface="Calibri" pitchFamily="34" charset="0"/>
+                <a:ea typeface="Calibri" pitchFamily="34" charset="-122"/>
+                <a:cs typeface="Calibri" pitchFamily="34" charset="-120"/>
+              </a:rPr>
+              <a:t>Larger world models, embedded robot computers, automatic megakernel compilation.</a:t>
+            </a:r>
+            <a:endParaRPr lang="en-US" sz="1250" dirty="0"/>
+          </a:p>
+        </p:txBody>
+      </p:sp>
+      <p:sp>
+        <p:nvSpPr>
+          <p:cNvPr id="12" name="Shape 10"/>
+          <p:cNvSpPr/>
+          <p:nvPr/>
+        </p:nvSpPr>
+        <p:spPr>
+          <a:xfrm>
+            <a:off x="4663440" y="2606040"/>
+            <a:ext cx="365760" cy="365760"/>
+          </a:xfrm>
+          <a:prstGeom prst="ellipse">
+            <a:avLst/>
+          </a:prstGeom>
+          <a:solidFill>
+            <a:srgbClr val="2A78D6"/>
+          </a:solidFill>
+          <a:ln w="12700">
+            <a:solidFill>
+              <a:srgbClr val="FFFFFF"/>
+            </a:solidFill>
+            <a:prstDash val="solid"/>
+          </a:ln>
+        </p:spPr>
+      </p:sp>
+      <p:sp>
+        <p:nvSpPr>
+          <p:cNvPr id="13" name="Text 11"/>
+          <p:cNvSpPr txBox="1"/>
+          <p:nvPr/>
+        </p:nvSpPr>
+        <p:spPr>
+          <a:xfrm>
+            <a:off x="4663440" y="2606040"/>
+            <a:ext cx="365760" cy="365760"/>
+          </a:xfrm>
+          <a:prstGeom prst="rect">
+            <a:avLst/>
+          </a:prstGeom>
+          <a:noFill/>
+          <a:ln/>
+        </p:spPr>
+        <p:txBody>
+          <a:bodyPr wrap="square" lIns="0" tIns="0" rIns="0" bIns="0" rtlCol="0" anchor="ctr"/>
+          <a:lstStyle/>
+          <a:p>
+            <a:pPr algn="ctr" indent="0" marL="0">
+              <a:buNone/>
+            </a:pPr>
+            <a:r>
+              <a:rPr lang="en-US" sz="1300" b="1" dirty="0">
+                <a:solidFill>
+                  <a:srgbClr val="FFFFFF"/>
+                </a:solidFill>
+                <a:latin typeface="Cambria" pitchFamily="34" charset="0"/>
+                <a:ea typeface="Cambria" pitchFamily="34" charset="-122"/>
+                <a:cs typeface="Cambria" pitchFamily="34" charset="-120"/>
+              </a:rPr>
+              <a:t>4</a:t>
+            </a:r>
+            <a:endParaRPr lang="en-US" sz="1300" dirty="0"/>
+          </a:p>
+        </p:txBody>
+      </p:sp>
+      <p:sp>
+        <p:nvSpPr>
+          <p:cNvPr id="14" name="Text 12"/>
+          <p:cNvSpPr txBox="1"/>
+          <p:nvPr/>
+        </p:nvSpPr>
+        <p:spPr>
+          <a:xfrm>
+            <a:off x="5166360" y="2560320"/>
+            <a:ext cx="3566160" cy="1188720"/>
+          </a:xfrm>
+          <a:prstGeom prst="rect">
+            <a:avLst/>
+          </a:prstGeom>
+          <a:noFill/>
+          <a:ln/>
+        </p:spPr>
+        <p:txBody>
+          <a:bodyPr wrap="square" lIns="0" tIns="0" rIns="0" bIns="0" rtlCol="0" anchor="t"/>
+          <a:lstStyle/>
+          <a:p>
+            <a:pPr indent="0" marL="0">
+              <a:spcAft>
+                <a:spcPts val="200"/>
+              </a:spcAft>
+              <a:buNone/>
+            </a:pPr>
+            <a:r>
+              <a:rPr lang="en-US" sz="1250" b="1" dirty="0">
+                <a:solidFill>
+                  <a:srgbClr val="14213D"/>
+                </a:solidFill>
+                <a:latin typeface="Calibri" pitchFamily="34" charset="0"/>
+                <a:ea typeface="Calibri" pitchFamily="34" charset="-122"/>
+                <a:cs typeface="Calibri" pitchFamily="34" charset="-120"/>
+              </a:rPr>
+              <a:t>Higher-resolution and physical evaluation</a:t>
+            </a:r>
+            <a:endParaRPr lang="en-US" sz="1250" dirty="0"/>
+          </a:p>
+          <a:p>
+            <a:pPr indent="0" marL="0">
+              <a:spcAft>
+                <a:spcPts val="200"/>
+              </a:spcAft>
+              <a:buNone/>
+            </a:pPr>
+            <a:r>
+              <a:rPr lang="en-US" sz="1250" dirty="0">
+                <a:solidFill>
+                  <a:srgbClr val="1B1B1B"/>
+                </a:solidFill>
+                <a:latin typeface="Calibri" pitchFamily="34" charset="0"/>
+                <a:ea typeface="Calibri" pitchFamily="34" charset="-122"/>
+                <a:cs typeface="Calibri" pitchFamily="34" charset="-120"/>
+              </a:rPr>
+              <a:t>Approximately 2,500 paired episodes to resolve 2 percentage points; evaluation on a physical robot.</a:t>
+            </a:r>
+            <a:endParaRPr lang="en-US" sz="1250" dirty="0"/>
+          </a:p>
+        </p:txBody>
+      </p:sp>
+      <p:sp>
+        <p:nvSpPr>
+          <p:cNvPr id="16" name="Text 13"/>
+          <p:cNvSpPr txBox="1"/>
+          <p:nvPr/>
+        </p:nvSpPr>
+        <p:spPr>
+          <a:xfrm>
+            <a:off x="8229600" y="4796028"/>
+            <a:ext cx="457200" cy="228600"/>
+          </a:xfrm>
+          <a:prstGeom prst="rect">
+            <a:avLst/>
+          </a:prstGeom>
+          <a:noFill/>
+          <a:ln/>
+        </p:spPr>
+        <p:txBody>
+          <a:bodyPr wrap="square" lIns="0" tIns="0" rIns="0" bIns="0" rtlCol="0" anchor="ctr"/>
+          <a:lstStyle/>
+          <a:p>
+            <a:pPr algn="r" indent="0" marL="0">
+              <a:buNone/>
+            </a:pPr>
+            <a:r>
+              <a:rPr lang="en-US" sz="900" dirty="0">
+                <a:solidFill>
+                  <a:srgbClr val="5A5A5A"/>
+                </a:solidFill>
+                <a:latin typeface="Calibri" pitchFamily="34" charset="0"/>
+                <a:ea typeface="Calibri" pitchFamily="34" charset="-122"/>
+                <a:cs typeface="Calibri" pitchFamily="34" charset="-120"/>
+              </a:rPr>
+              <a:t>17</a:t>
+            </a:r>
+            <a:endParaRPr lang="en-US" sz="900" dirty="0"/>
+          </a:p>
+        </p:txBody>
+      </p:sp>
+    </p:spTree>
+  </p:cSld>
+  <p:clrMapOvr>
+    <a:masterClrMapping/>
+  </p:clrMapOvr>
+</p:sld>
+</file>
+
+<file path=ppt/slides/slide18.xml><?xml version="1.0" encoding="utf-8"?>
+<p:sld xmlns:a="http://schemas.openxmlformats.org/drawingml/2006/main" xmlns:r="http://schemas.openxmlformats.org/officeDocument/2006/relationships" xmlns:p="http://schemas.openxmlformats.org/presentationml/2006/main">
+  <p:cSld name="Slide 18">
     <p:bg>
       <p:bgPr>
         <a:solidFill>
@@ -6433,7 +8252,7 @@
                 <a:ea typeface="Cambria" pitchFamily="34" charset="-122"/>
                 <a:cs typeface="Cambria" pitchFamily="34" charset="-120"/>
               </a:rPr>
-              <a:t>Background and research gap</a:t>
+              <a:t>Background: JEPA world models</a:t>
             </a:r>
             <a:endParaRPr lang="en-US" sz="2800" dirty="0"/>
           </a:p>
@@ -6447,35 +8266,57 @@
         </p:nvSpPr>
         <p:spPr>
           <a:xfrm>
-            <a:off x="457200" y="1051560"/>
-            <a:ext cx="2651760" cy="2606040"/>
-          </a:xfrm>
-          <a:prstGeom prst="roundRect">
-            <a:avLst>
-              <a:gd name="adj" fmla="val 2807"/>
-            </a:avLst>
+            <a:off x="457200" y="1005840"/>
+            <a:ext cx="5120640" cy="3017520"/>
+          </a:xfrm>
+          <a:prstGeom prst="rect">
+            <a:avLst/>
           </a:prstGeom>
           <a:solidFill>
-            <a:srgbClr val="F3F4F6"/>
+            <a:srgbClr val="000000"/>
           </a:solidFill>
           <a:ln w="12700">
             <a:solidFill>
-              <a:srgbClr val="F3F4F6"/>
+              <a:srgbClr val="000000"/>
             </a:solidFill>
             <a:prstDash val="solid"/>
           </a:ln>
         </p:spPr>
       </p:sp>
-      <p:sp>
-        <p:nvSpPr>
-          <p:cNvPr id="4" name="Text 2"/>
-          <p:cNvSpPr txBox="1"/>
-          <p:nvPr/>
-        </p:nvSpPr>
-        <p:spPr>
-          <a:xfrm>
-            <a:off x="621792" y="1161288"/>
-            <a:ext cx="2331720" cy="384048"/>
+      <p:pic>
+        <p:nvPicPr>
+          <p:cNvPr id="4" name="Image 0" descr="preencoded.png">    </p:cNvPr>
+          <p:cNvPicPr>
+            <a:picLocks noChangeAspect="1"/>
+          </p:cNvPicPr>
+          <p:nvPr/>
+        </p:nvPicPr>
+        <p:blipFill>
+          <a:blip r:embed="rId1"/>
+          <a:stretch>
+            <a:fillRect/>
+          </a:stretch>
+        </p:blipFill>
+        <p:spPr>
+          <a:xfrm>
+            <a:off x="544515" y="1005840"/>
+            <a:ext cx="4946010" cy="3017520"/>
+          </a:xfrm>
+          <a:prstGeom prst="rect">
+            <a:avLst/>
+          </a:prstGeom>
+        </p:spPr>
+      </p:pic>
+      <p:sp>
+        <p:nvSpPr>
+          <p:cNvPr id="5" name="Text 2"/>
+          <p:cNvSpPr txBox="1"/>
+          <p:nvPr/>
+        </p:nvSpPr>
+        <p:spPr>
+          <a:xfrm>
+            <a:off x="457200" y="4096512"/>
+            <a:ext cx="5120640" cy="274320"/>
           </a:xfrm>
           <a:prstGeom prst="rect">
             <a:avLst/>
@@ -6491,30 +8332,30 @@
               <a:buNone/>
             </a:pPr>
             <a:r>
-              <a:rPr lang="en-US" sz="1500" b="1" dirty="0">
-                <a:solidFill>
-                  <a:srgbClr val="14213D"/>
-                </a:solidFill>
-                <a:latin typeface="Cambria" pitchFamily="34" charset="0"/>
-                <a:ea typeface="Cambria" pitchFamily="34" charset="-122"/>
-                <a:cs typeface="Cambria" pitchFamily="34" charset="-120"/>
-              </a:rPr>
-              <a:t>World models that plan</a:t>
-            </a:r>
-            <a:endParaRPr lang="en-US" sz="1500" dirty="0"/>
-          </a:p>
-        </p:txBody>
-      </p:sp>
-      <p:sp>
-        <p:nvSpPr>
-          <p:cNvPr id="5" name="Text 3"/>
-          <p:cNvSpPr txBox="1"/>
-          <p:nvPr/>
-        </p:nvSpPr>
-        <p:spPr>
-          <a:xfrm>
-            <a:off x="621792" y="1581912"/>
-            <a:ext cx="2331720" cy="1965960"/>
+              <a:rPr lang="en-US" sz="950" i="1" dirty="0">
+                <a:solidFill>
+                  <a:srgbClr val="5A5A5A"/>
+                </a:solidFill>
+                <a:latin typeface="Calibri" pitchFamily="34" charset="0"/>
+                <a:ea typeface="Calibri" pitchFamily="34" charset="-122"/>
+                <a:cs typeface="Calibri" pitchFamily="34" charset="-120"/>
+              </a:rPr>
+              <a:t>Joint-embedding predictive architecture (V-JEPA 2-AC): the predictor is trained to predict the next frame's embedding from past frames and actions. Image source: [add attribution].</a:t>
+            </a:r>
+            <a:endParaRPr lang="en-US" sz="950" dirty="0"/>
+          </a:p>
+        </p:txBody>
+      </p:sp>
+      <p:sp>
+        <p:nvSpPr>
+          <p:cNvPr id="6" name="Text 3"/>
+          <p:cNvSpPr txBox="1"/>
+          <p:nvPr/>
+        </p:nvSpPr>
+        <p:spPr>
+          <a:xfrm>
+            <a:off x="5852160" y="1051560"/>
+            <a:ext cx="2926080" cy="3657600"/>
           </a:xfrm>
           <a:prstGeom prst="rect">
             <a:avLst/>
@@ -6526,11 +8367,15 @@
           <a:bodyPr wrap="square" lIns="0" tIns="0" rIns="0" bIns="0" rtlCol="0" anchor="t"/>
           <a:lstStyle/>
           <a:p>
-            <a:pPr indent="0" marL="0">
-              <a:buNone/>
-            </a:pPr>
-            <a:r>
-              <a:rPr lang="en-US" sz="1150" dirty="0">
+            <a:pPr marL="177800" indent="-177800">
+              <a:spcAft>
+                <a:spcPts val="700"/>
+              </a:spcAft>
+              <a:buSzPct val="100000"/>
+              <a:buChar char="•"/>
+            </a:pPr>
+            <a:r>
+              <a:rPr lang="en-US" sz="1200" dirty="0">
                 <a:solidFill>
                   <a:srgbClr val="1B1B1B"/>
                 </a:solidFill>
@@ -6538,104 +8383,20 @@
                 <a:ea typeface="Calibri" pitchFamily="34" charset="-122"/>
                 <a:cs typeface="Calibri" pitchFamily="34" charset="-120"/>
               </a:rPr>
-              <a:t>JEPA models (I-JEPA, DINO-WM, V-JEPA 2, LeWM) predict in a learned representation and plan by search. Planning time is reported coarsely and only ever cut by changing the model.</a:t>
-            </a:r>
-            <a:endParaRPr lang="en-US" sz="1150" dirty="0"/>
-          </a:p>
-        </p:txBody>
-      </p:sp>
-      <p:sp>
-        <p:nvSpPr>
-          <p:cNvPr id="6" name="Shape 4"/>
-          <p:cNvSpPr/>
-          <p:nvPr/>
-        </p:nvSpPr>
-        <p:spPr>
-          <a:xfrm>
-            <a:off x="3291840" y="1051560"/>
-            <a:ext cx="2651760" cy="2606040"/>
-          </a:xfrm>
-          <a:prstGeom prst="roundRect">
-            <a:avLst>
-              <a:gd name="adj" fmla="val 2807"/>
-            </a:avLst>
-          </a:prstGeom>
-          <a:solidFill>
-            <a:srgbClr val="F3F4F6"/>
-          </a:solidFill>
-          <a:ln w="12700">
-            <a:solidFill>
-              <a:srgbClr val="F3F4F6"/>
-            </a:solidFill>
-            <a:prstDash val="solid"/>
-          </a:ln>
-        </p:spPr>
-      </p:sp>
-      <p:sp>
-        <p:nvSpPr>
-          <p:cNvPr id="7" name="Text 5"/>
-          <p:cNvSpPr txBox="1"/>
-          <p:nvPr/>
-        </p:nvSpPr>
-        <p:spPr>
-          <a:xfrm>
-            <a:off x="3456432" y="1161288"/>
-            <a:ext cx="2331720" cy="384048"/>
-          </a:xfrm>
-          <a:prstGeom prst="rect">
-            <a:avLst/>
-          </a:prstGeom>
-          <a:noFill/>
-          <a:ln/>
-        </p:spPr>
-        <p:txBody>
-          <a:bodyPr wrap="square" lIns="0" tIns="0" rIns="0" bIns="0" rtlCol="0" anchor="ctr"/>
-          <a:lstStyle/>
-          <a:p>
-            <a:pPr indent="0" marL="0">
-              <a:buNone/>
-            </a:pPr>
-            <a:r>
-              <a:rPr lang="en-US" sz="1500" b="1" dirty="0">
-                <a:solidFill>
-                  <a:srgbClr val="14213D"/>
-                </a:solidFill>
-                <a:latin typeface="Cambria" pitchFamily="34" charset="0"/>
-                <a:ea typeface="Cambria" pitchFamily="34" charset="-122"/>
-                <a:cs typeface="Cambria" pitchFamily="34" charset="-120"/>
-              </a:rPr>
-              <a:t>Sampling-based search</a:t>
-            </a:r>
-            <a:endParaRPr lang="en-US" sz="1500" dirty="0"/>
-          </a:p>
-        </p:txBody>
-      </p:sp>
-      <p:sp>
-        <p:nvSpPr>
-          <p:cNvPr id="8" name="Text 6"/>
-          <p:cNvSpPr txBox="1"/>
-          <p:nvPr/>
-        </p:nvSpPr>
-        <p:spPr>
-          <a:xfrm>
-            <a:off x="3456432" y="1581912"/>
-            <a:ext cx="2331720" cy="1965960"/>
-          </a:xfrm>
-          <a:prstGeom prst="rect">
-            <a:avLst/>
-          </a:prstGeom>
-          <a:noFill/>
-          <a:ln/>
-        </p:spPr>
-        <p:txBody>
-          <a:bodyPr wrap="square" lIns="0" tIns="0" rIns="0" bIns="0" rtlCol="0" anchor="t"/>
-          <a:lstStyle/>
-          <a:p>
-            <a:pPr indent="0" marL="0">
-              <a:buNone/>
-            </a:pPr>
-            <a:r>
-              <a:rPr lang="en-US" sz="1150" dirty="0">
+              <a:t>A JEPA learns an encoder and a predictor; prediction error is measured in embedding space, not in pixels.</a:t>
+            </a:r>
+            <a:endParaRPr lang="en-US" sz="1200" dirty="0"/>
+          </a:p>
+          <a:p>
+            <a:pPr marL="177800" indent="-177800">
+              <a:spcAft>
+                <a:spcPts val="700"/>
+              </a:spcAft>
+              <a:buSzPct val="100000"/>
+              <a:buChar char="•"/>
+            </a:pPr>
+            <a:r>
+              <a:rPr lang="en-US" sz="1200" dirty="0">
                 <a:solidFill>
                   <a:srgbClr val="1B1B1B"/>
                 </a:solidFill>
@@ -6643,104 +8404,20 @@
                 <a:ea typeface="Calibri" pitchFamily="34" charset="-122"/>
                 <a:cs typeface="Calibri" pitchFamily="34" charset="-120"/>
               </a:rPr>
-              <a:t>CEM samples, keeps the best, refits, repeats. iCEM shrinks the population and reuses the best: 2.7–22× fewer samples. But fewer samples need not mean less time (CEM-GD).</a:t>
-            </a:r>
-            <a:endParaRPr lang="en-US" sz="1150" dirty="0"/>
-          </a:p>
-        </p:txBody>
-      </p:sp>
-      <p:sp>
-        <p:nvSpPr>
-          <p:cNvPr id="9" name="Shape 7"/>
-          <p:cNvSpPr/>
-          <p:nvPr/>
-        </p:nvSpPr>
-        <p:spPr>
-          <a:xfrm>
-            <a:off x="6126480" y="1051560"/>
-            <a:ext cx="2651760" cy="2606040"/>
-          </a:xfrm>
-          <a:prstGeom prst="roundRect">
-            <a:avLst>
-              <a:gd name="adj" fmla="val 2807"/>
-            </a:avLst>
-          </a:prstGeom>
-          <a:solidFill>
-            <a:srgbClr val="F3F4F6"/>
-          </a:solidFill>
-          <a:ln w="12700">
-            <a:solidFill>
-              <a:srgbClr val="F3F4F6"/>
-            </a:solidFill>
-            <a:prstDash val="solid"/>
-          </a:ln>
-        </p:spPr>
-      </p:sp>
-      <p:sp>
-        <p:nvSpPr>
-          <p:cNvPr id="10" name="Text 8"/>
-          <p:cNvSpPr txBox="1"/>
-          <p:nvPr/>
-        </p:nvSpPr>
-        <p:spPr>
-          <a:xfrm>
-            <a:off x="6291072" y="1161288"/>
-            <a:ext cx="2331720" cy="384048"/>
-          </a:xfrm>
-          <a:prstGeom prst="rect">
-            <a:avLst/>
-          </a:prstGeom>
-          <a:noFill/>
-          <a:ln/>
-        </p:spPr>
-        <p:txBody>
-          <a:bodyPr wrap="square" lIns="0" tIns="0" rIns="0" bIns="0" rtlCol="0" anchor="ctr"/>
-          <a:lstStyle/>
-          <a:p>
-            <a:pPr indent="0" marL="0">
-              <a:buNone/>
-            </a:pPr>
-            <a:r>
-              <a:rPr lang="en-US" sz="1500" b="1" dirty="0">
-                <a:solidFill>
-                  <a:srgbClr val="14213D"/>
-                </a:solidFill>
-                <a:latin typeface="Cambria" pitchFamily="34" charset="0"/>
-                <a:ea typeface="Cambria" pitchFamily="34" charset="-122"/>
-                <a:cs typeface="Cambria" pitchFamily="34" charset="-120"/>
-              </a:rPr>
-              <a:t>Fast GPU inference</a:t>
-            </a:r>
-            <a:endParaRPr lang="en-US" sz="1500" dirty="0"/>
-          </a:p>
-        </p:txBody>
-      </p:sp>
-      <p:sp>
-        <p:nvSpPr>
-          <p:cNvPr id="11" name="Text 9"/>
-          <p:cNvSpPr txBox="1"/>
-          <p:nvPr/>
-        </p:nvSpPr>
-        <p:spPr>
-          <a:xfrm>
-            <a:off x="6291072" y="1581912"/>
-            <a:ext cx="2331720" cy="1965960"/>
-          </a:xfrm>
-          <a:prstGeom prst="rect">
-            <a:avLst/>
-          </a:prstGeom>
-          <a:noFill/>
-          <a:ln/>
-        </p:spPr>
-        <p:txBody>
-          <a:bodyPr wrap="square" lIns="0" tIns="0" rIns="0" bIns="0" rtlCol="0" anchor="t"/>
-          <a:lstStyle/>
-          <a:p>
-            <a:pPr indent="0" marL="0">
-              <a:buNone/>
-            </a:pPr>
-            <a:r>
-              <a:rPr lang="en-US" sz="1150" dirty="0">
+              <a:t>Conditioning the predictor on actions yields a world model that can be used for planning.</a:t>
+            </a:r>
+            <a:endParaRPr lang="en-US" sz="1200" dirty="0"/>
+          </a:p>
+          <a:p>
+            <a:pPr marL="177800" indent="-177800">
+              <a:spcAft>
+                <a:spcPts val="700"/>
+              </a:spcAft>
+              <a:buSzPct val="100000"/>
+              <a:buChar char="•"/>
+            </a:pPr>
+            <a:r>
+              <a:rPr lang="en-US" sz="1200" dirty="0">
                 <a:solidFill>
                   <a:srgbClr val="1B1B1B"/>
                 </a:solidFill>
@@ -6748,49 +8425,17 @@
                 <a:ea typeface="Calibri" pitchFamily="34" charset="-122"/>
                 <a:cs typeface="Calibri" pitchFamily="34" charset="-120"/>
               </a:rPr>
-              <a:t>Small models at batch 1 are bound by launch overhead and data movement. Remedies: CUDA Graphs, compilers, FlashAttention, and megakernels: one GPU program for a whole computation.</a:t>
-            </a:r>
-            <a:endParaRPr lang="en-US" sz="1150" dirty="0"/>
-          </a:p>
-        </p:txBody>
-      </p:sp>
-      <p:sp>
-        <p:nvSpPr>
-          <p:cNvPr id="12" name="Text 10"/>
-          <p:cNvSpPr txBox="1"/>
-          <p:nvPr/>
-        </p:nvSpPr>
-        <p:spPr>
-          <a:xfrm>
-            <a:off x="457200" y="3840480"/>
-            <a:ext cx="8229600" cy="914400"/>
-          </a:xfrm>
-          <a:prstGeom prst="rect">
-            <a:avLst/>
-          </a:prstGeom>
-          <a:noFill/>
-          <a:ln/>
-        </p:spPr>
-        <p:txBody>
-          <a:bodyPr wrap="square" lIns="0" tIns="0" rIns="0" bIns="0" rtlCol="0" anchor="t"/>
-          <a:lstStyle/>
-          <a:p>
-            <a:pPr indent="0" marL="0">
-              <a:buNone/>
-            </a:pPr>
-            <a:r>
-              <a:rPr lang="en-US" sz="1200" b="1" dirty="0">
-                <a:solidFill>
-                  <a:srgbClr val="14213D"/>
-                </a:solidFill>
-                <a:latin typeface="Calibri" pitchFamily="34" charset="0"/>
-                <a:ea typeface="Calibri" pitchFamily="34" charset="-122"/>
-                <a:cs typeface="Calibri" pitchFamily="34" charset="-120"/>
-              </a:rPr>
-              <a:t>Research gap. </a:t>
-            </a:r>
-            <a:pPr indent="0" marL="0">
-              <a:buNone/>
+              <a:t>Lineage: I-JEPA, V-JEPA, DINO-WM, PLDM, V-JEPA 2-AC, LeWM.</a:t>
+            </a:r>
+            <a:endParaRPr lang="en-US" sz="1200" dirty="0"/>
+          </a:p>
+          <a:p>
+            <a:pPr marL="177800" indent="-177800">
+              <a:spcAft>
+                <a:spcPts val="700"/>
+              </a:spcAft>
+              <a:buSzPct val="100000"/>
+              <a:buChar char="•"/>
             </a:pPr>
             <a:r>
               <a:rPr lang="en-US" sz="1200" dirty="0">
@@ -6801,7 +8446,7 @@
                 <a:ea typeface="Calibri" pitchFamily="34" charset="-122"/>
                 <a:cs typeface="Calibri" pitchFamily="34" charset="-120"/>
               </a:rPr>
-              <a:t>No prior work has profiled where a world-model planner's latency is spent, measured whether sample-efficient search saves time in practice, or fused a whole planning loop, with a neural encoder, rollouts, scoring and elite selection, into one GPU program.</a:t>
+              <a:t>Reported planning latency: 53 s per call (DINO-WM), 16 s per action (V-JEPA 2-AC).</a:t>
             </a:r>
             <a:endParaRPr lang="en-US" sz="1200" dirty="0"/>
           </a:p>
@@ -6809,7 +8454,7 @@
       </p:sp>
       <p:sp>
         <p:nvSpPr>
-          <p:cNvPr id="14" name="Text 11"/>
+          <p:cNvPr id="8" name="Text 4"/>
           <p:cNvSpPr txBox="1"/>
           <p:nvPr/>
         </p:nvSpPr>
@@ -6904,15 +8549,40 @@
                 <a:ea typeface="Cambria" pitchFamily="34" charset="-122"/>
                 <a:cs typeface="Cambria" pitchFamily="34" charset="-120"/>
               </a:rPr>
-              <a:t>Methodology</a:t>
+              <a:t>Background: planning with LeWM</a:t>
             </a:r>
             <a:endParaRPr lang="en-US" sz="2800" dirty="0"/>
           </a:p>
         </p:txBody>
+      </p:sp>
+      <p:sp>
+        <p:nvSpPr>
+          <p:cNvPr id="3" name="Shape 1"/>
+          <p:cNvSpPr/>
+          <p:nvPr/>
+        </p:nvSpPr>
+        <p:spPr>
+          <a:xfrm>
+            <a:off x="457200" y="1005840"/>
+            <a:ext cx="5120640" cy="3017520"/>
+          </a:xfrm>
+          <a:prstGeom prst="rect">
+            <a:avLst/>
+          </a:prstGeom>
+          <a:solidFill>
+            <a:srgbClr val="000000"/>
+          </a:solidFill>
+          <a:ln w="12700">
+            <a:solidFill>
+              <a:srgbClr val="000000"/>
+            </a:solidFill>
+            <a:prstDash val="solid"/>
+          </a:ln>
+        </p:spPr>
       </p:sp>
       <p:pic>
         <p:nvPicPr>
-          <p:cNvPr id="3" name="Image 0" descr="preencoded.png">    </p:cNvPr>
+          <p:cNvPr id="4" name="Image 0" descr="preencoded.png">    </p:cNvPr>
           <p:cNvPicPr>
             <a:picLocks noChangeAspect="1"/>
           </p:cNvPicPr>
@@ -6926,8 +8596,8 @@
         </p:blipFill>
         <p:spPr>
           <a:xfrm>
-            <a:off x="1902372" y="960120"/>
-            <a:ext cx="5339255" cy="1828800"/>
+            <a:off x="457200" y="1194755"/>
+            <a:ext cx="5120640" cy="2639690"/>
           </a:xfrm>
           <a:prstGeom prst="rect">
             <a:avLst/>
@@ -6936,41 +8606,14 @@
       </p:pic>
       <p:sp>
         <p:nvSpPr>
-          <p:cNvPr id="4" name="Shape 1"/>
-          <p:cNvSpPr/>
-          <p:nvPr/>
-        </p:nvSpPr>
-        <p:spPr>
-          <a:xfrm>
-            <a:off x="457200" y="2926080"/>
-            <a:ext cx="2651760" cy="1783080"/>
-          </a:xfrm>
-          <a:prstGeom prst="roundRect">
-            <a:avLst>
-              <a:gd name="adj" fmla="val 4103"/>
-            </a:avLst>
-          </a:prstGeom>
-          <a:solidFill>
-            <a:srgbClr val="E9F1FC"/>
-          </a:solidFill>
-          <a:ln w="12700">
-            <a:solidFill>
-              <a:srgbClr val="E9F1FC"/>
-            </a:solidFill>
-            <a:prstDash val="solid"/>
-          </a:ln>
-        </p:spPr>
-      </p:sp>
-      <p:sp>
-        <p:nvSpPr>
           <p:cNvPr id="5" name="Text 2"/>
           <p:cNvSpPr txBox="1"/>
           <p:nvPr/>
         </p:nvSpPr>
         <p:spPr>
           <a:xfrm>
-            <a:off x="621792" y="3035808"/>
-            <a:ext cx="2331720" cy="384048"/>
+            <a:off x="457200" y="4096512"/>
+            <a:ext cx="5120640" cy="274320"/>
           </a:xfrm>
           <a:prstGeom prst="rect">
             <a:avLst/>
@@ -6986,17 +8629,17 @@
               <a:buNone/>
             </a:pPr>
             <a:r>
-              <a:rPr lang="en-US" sz="1500" b="1" dirty="0">
-                <a:solidFill>
-                  <a:srgbClr val="14213D"/>
-                </a:solidFill>
-                <a:latin typeface="Cambria" pitchFamily="34" charset="0"/>
-                <a:ea typeface="Cambria" pitchFamily="34" charset="-122"/>
-                <a:cs typeface="Cambria" pitchFamily="34" charset="-120"/>
-              </a:rPr>
-              <a:t>Data</a:t>
-            </a:r>
-            <a:endParaRPr lang="en-US" sz="1500" dirty="0"/>
+              <a:rPr lang="en-US" sz="950" i="1" dirty="0">
+                <a:solidFill>
+                  <a:srgbClr val="5A5A5A"/>
+                </a:solidFill>
+                <a:latin typeface="Calibri" pitchFamily="34" charset="0"/>
+                <a:ea typeface="Calibri" pitchFamily="34" charset="-122"/>
+                <a:cs typeface="Calibri" pitchFamily="34" charset="-120"/>
+              </a:rPr>
+              <a:t>Latent rollout: the encoder maps the start frame to an embedding; the predictor advances it one action at a time. The decoder is shown for visualisation only. Image source: [add attribution].</a:t>
+            </a:r>
+            <a:endParaRPr lang="en-US" sz="950" dirty="0"/>
           </a:p>
         </p:txBody>
       </p:sp>
@@ -7008,8 +8651,8 @@
         </p:nvSpPr>
         <p:spPr>
           <a:xfrm>
-            <a:off x="621792" y="3456432"/>
-            <a:ext cx="2331720" cy="1143000"/>
+            <a:off x="5852160" y="1051560"/>
+            <a:ext cx="2926080" cy="3657600"/>
           </a:xfrm>
           <a:prstGeom prst="rect">
             <a:avLst/>
@@ -7021,11 +8664,15 @@
           <a:bodyPr wrap="square" lIns="0" tIns="0" rIns="0" bIns="0" rtlCol="0" anchor="t"/>
           <a:lstStyle/>
           <a:p>
-            <a:pPr indent="0" marL="0">
-              <a:buNone/>
-            </a:pPr>
-            <a:r>
-              <a:rPr lang="en-US" sz="1050" dirty="0">
+            <a:pPr marL="177800" indent="-177800">
+              <a:spcAft>
+                <a:spcPts val="700"/>
+              </a:spcAft>
+              <a:buSzPct val="100000"/>
+              <a:buChar char="•"/>
+            </a:pPr>
+            <a:r>
+              <a:rPr lang="en-US" sz="1200" dirty="0">
                 <a:solidFill>
                   <a:srgbClr val="1B1B1B"/>
                 </a:solidFill>
@@ -7033,104 +8680,20 @@
                 <a:ea typeface="Calibri" pitchFamily="34" charset="-122"/>
                 <a:cs typeface="Calibri" pitchFamily="34" charset="-120"/>
               </a:rPr>
-              <a:t>11,942 timed policy calls (61 one-robot episodes × 3 systems + 4 probes), 900 episode outcomes, telemetry, component timings.</a:t>
-            </a:r>
-            <a:endParaRPr lang="en-US" sz="1050" dirty="0"/>
-          </a:p>
-        </p:txBody>
-      </p:sp>
-      <p:sp>
-        <p:nvSpPr>
-          <p:cNvPr id="7" name="Shape 4"/>
-          <p:cNvSpPr/>
-          <p:nvPr/>
-        </p:nvSpPr>
-        <p:spPr>
-          <a:xfrm>
-            <a:off x="3291840" y="2926080"/>
-            <a:ext cx="2651760" cy="1783080"/>
-          </a:xfrm>
-          <a:prstGeom prst="roundRect">
-            <a:avLst>
-              <a:gd name="adj" fmla="val 4103"/>
-            </a:avLst>
-          </a:prstGeom>
-          <a:solidFill>
-            <a:srgbClr val="E9F1FC"/>
-          </a:solidFill>
-          <a:ln w="12700">
-            <a:solidFill>
-              <a:srgbClr val="E9F1FC"/>
-            </a:solidFill>
-            <a:prstDash val="solid"/>
-          </a:ln>
-        </p:spPr>
-      </p:sp>
-      <p:sp>
-        <p:nvSpPr>
-          <p:cNvPr id="8" name="Text 5"/>
-          <p:cNvSpPr txBox="1"/>
-          <p:nvPr/>
-        </p:nvSpPr>
-        <p:spPr>
-          <a:xfrm>
-            <a:off x="3456432" y="3035808"/>
-            <a:ext cx="2331720" cy="384048"/>
-          </a:xfrm>
-          <a:prstGeom prst="rect">
-            <a:avLst/>
-          </a:prstGeom>
-          <a:noFill/>
-          <a:ln/>
-        </p:spPr>
-        <p:txBody>
-          <a:bodyPr wrap="square" lIns="0" tIns="0" rIns="0" bIns="0" rtlCol="0" anchor="ctr"/>
-          <a:lstStyle/>
-          <a:p>
-            <a:pPr indent="0" marL="0">
-              <a:buNone/>
-            </a:pPr>
-            <a:r>
-              <a:rPr lang="en-US" sz="1500" b="1" dirty="0">
-                <a:solidFill>
-                  <a:srgbClr val="14213D"/>
-                </a:solidFill>
-                <a:latin typeface="Cambria" pitchFamily="34" charset="0"/>
-                <a:ea typeface="Cambria" pitchFamily="34" charset="-122"/>
-                <a:cs typeface="Cambria" pitchFamily="34" charset="-120"/>
-              </a:rPr>
-              <a:t>Analysis</a:t>
-            </a:r>
-            <a:endParaRPr lang="en-US" sz="1500" dirty="0"/>
-          </a:p>
-        </p:txBody>
-      </p:sp>
-      <p:sp>
-        <p:nvSpPr>
-          <p:cNvPr id="9" name="Text 6"/>
-          <p:cNvSpPr txBox="1"/>
-          <p:nvPr/>
-        </p:nvSpPr>
-        <p:spPr>
-          <a:xfrm>
-            <a:off x="3456432" y="3456432"/>
-            <a:ext cx="2331720" cy="1143000"/>
-          </a:xfrm>
-          <a:prstGeom prst="rect">
-            <a:avLst/>
-          </a:prstGeom>
-          <a:noFill/>
-          <a:ln/>
-        </p:spPr>
-        <p:txBody>
-          <a:bodyPr wrap="square" lIns="0" tIns="0" rIns="0" bIns="0" rtlCol="0" anchor="t"/>
-          <a:lstStyle/>
-          <a:p>
-            <a:pPr indent="0" marL="0">
-              <a:buNone/>
-            </a:pPr>
-            <a:r>
-              <a:rPr lang="en-US" sz="1050" dirty="0">
+              <a:t>LeWM: 15M parameters; ViT-tiny encoder; one 192-dimensional embedding per image.</a:t>
+            </a:r>
+            <a:endParaRPr lang="en-US" sz="1200" dirty="0"/>
+          </a:p>
+          <a:p>
+            <a:pPr marL="177800" indent="-177800">
+              <a:spcAft>
+                <a:spcPts val="700"/>
+              </a:spcAft>
+              <a:buSzPct val="100000"/>
+              <a:buChar char="•"/>
+            </a:pPr>
+            <a:r>
+              <a:rPr lang="en-US" sz="1200" dirty="0">
                 <a:solidFill>
                   <a:srgbClr val="1B1B1B"/>
                 </a:solidFill>
@@ -7138,104 +8701,20 @@
                 <a:ea typeface="Calibri" pitchFamily="34" charset="-122"/>
                 <a:cs typeface="Calibri" pitchFamily="34" charset="-120"/>
               </a:rPr>
-              <a:t>Warm-up removal and outlier flags; stage decomposition; a fitted model latency = a + b·N separating fixed overhead from work.</a:t>
-            </a:r>
-            <a:endParaRPr lang="en-US" sz="1050" dirty="0"/>
-          </a:p>
-        </p:txBody>
-      </p:sp>
-      <p:sp>
-        <p:nvSpPr>
-          <p:cNvPr id="10" name="Shape 7"/>
-          <p:cNvSpPr/>
-          <p:nvPr/>
-        </p:nvSpPr>
-        <p:spPr>
-          <a:xfrm>
-            <a:off x="6126480" y="2926080"/>
-            <a:ext cx="2651760" cy="1783080"/>
-          </a:xfrm>
-          <a:prstGeom prst="roundRect">
-            <a:avLst>
-              <a:gd name="adj" fmla="val 4103"/>
-            </a:avLst>
-          </a:prstGeom>
-          <a:solidFill>
-            <a:srgbClr val="E9F1FC"/>
-          </a:solidFill>
-          <a:ln w="12700">
-            <a:solidFill>
-              <a:srgbClr val="E9F1FC"/>
-            </a:solidFill>
-            <a:prstDash val="solid"/>
-          </a:ln>
-        </p:spPr>
-      </p:sp>
-      <p:sp>
-        <p:nvSpPr>
-          <p:cNvPr id="11" name="Text 8"/>
-          <p:cNvSpPr txBox="1"/>
-          <p:nvPr/>
-        </p:nvSpPr>
-        <p:spPr>
-          <a:xfrm>
-            <a:off x="6291072" y="3035808"/>
-            <a:ext cx="2331720" cy="384048"/>
-          </a:xfrm>
-          <a:prstGeom prst="rect">
-            <a:avLst/>
-          </a:prstGeom>
-          <a:noFill/>
-          <a:ln/>
-        </p:spPr>
-        <p:txBody>
-          <a:bodyPr wrap="square" lIns="0" tIns="0" rIns="0" bIns="0" rtlCol="0" anchor="ctr"/>
-          <a:lstStyle/>
-          <a:p>
-            <a:pPr indent="0" marL="0">
-              <a:buNone/>
-            </a:pPr>
-            <a:r>
-              <a:rPr lang="en-US" sz="1500" b="1" dirty="0">
-                <a:solidFill>
-                  <a:srgbClr val="14213D"/>
-                </a:solidFill>
-                <a:latin typeface="Cambria" pitchFamily="34" charset="0"/>
-                <a:ea typeface="Cambria" pitchFamily="34" charset="-122"/>
-                <a:cs typeface="Cambria" pitchFamily="34" charset="-120"/>
-              </a:rPr>
-              <a:t>Evaluation</a:t>
-            </a:r>
-            <a:endParaRPr lang="en-US" sz="1500" dirty="0"/>
-          </a:p>
-        </p:txBody>
-      </p:sp>
-      <p:sp>
-        <p:nvSpPr>
-          <p:cNvPr id="12" name="Text 9"/>
-          <p:cNvSpPr txBox="1"/>
-          <p:nvPr/>
-        </p:nvSpPr>
-        <p:spPr>
-          <a:xfrm>
-            <a:off x="6291072" y="3456432"/>
-            <a:ext cx="2331720" cy="1143000"/>
-          </a:xfrm>
-          <a:prstGeom prst="rect">
-            <a:avLst/>
-          </a:prstGeom>
-          <a:noFill/>
-          <a:ln/>
-        </p:spPr>
-        <p:txBody>
-          <a:bodyPr wrap="square" lIns="0" tIns="0" rIns="0" bIns="0" rtlCol="0" anchor="t"/>
-          <a:lstStyle/>
-          <a:p>
-            <a:pPr indent="0" marL="0">
-              <a:buNone/>
-            </a:pPr>
-            <a:r>
-              <a:rPr lang="en-US" sz="1050" dirty="0">
+              <a:t>The predictor (6-layer transformer, AdaLN action conditioning) rolls a candidate forward 5 steps.</a:t>
+            </a:r>
+            <a:endParaRPr lang="en-US" sz="1200" dirty="0"/>
+          </a:p>
+          <a:p>
+            <a:pPr marL="177800" indent="-177800">
+              <a:spcAft>
+                <a:spcPts val="700"/>
+              </a:spcAft>
+              <a:buSzPct val="100000"/>
+              <a:buChar char="•"/>
+            </a:pPr>
+            <a:r>
+              <a:rPr lang="en-US" sz="1200" dirty="0">
                 <a:solidFill>
                   <a:srgbClr val="1B1B1B"/>
                 </a:solidFill>
@@ -7243,15 +8722,36 @@
                 <a:ea typeface="Calibri" pitchFamily="34" charset="-122"/>
                 <a:cs typeface="Calibri" pitchFamily="34" charset="-120"/>
               </a:rPr>
-              <a:t>Medians with bootstrap CIs; 300 paired episodes, McNemar and paired bootstrap; numerical error against FP32.</a:t>
-            </a:r>
-            <a:endParaRPr lang="en-US" sz="1050" dirty="0"/>
-          </a:p>
-        </p:txBody>
-      </p:sp>
-      <p:sp>
-        <p:nvSpPr>
-          <p:cNvPr id="14" name="Text 10"/>
+              <a:t>Cost: distance between the final predicted embedding and the goal embedding.</a:t>
+            </a:r>
+            <a:endParaRPr lang="en-US" sz="1200" dirty="0"/>
+          </a:p>
+          <a:p>
+            <a:pPr marL="177800" indent="-177800">
+              <a:spcAft>
+                <a:spcPts val="700"/>
+              </a:spcAft>
+              <a:buSzPct val="100000"/>
+              <a:buChar char="•"/>
+            </a:pPr>
+            <a:r>
+              <a:rPr lang="en-US" sz="1200" dirty="0">
+                <a:solidFill>
+                  <a:srgbClr val="1B1B1B"/>
+                </a:solidFill>
+                <a:latin typeface="Calibri" pitchFamily="34" charset="0"/>
+                <a:ea typeface="Calibri" pitchFamily="34" charset="-122"/>
+                <a:cs typeface="Calibri" pitchFamily="34" charset="-120"/>
+              </a:rPr>
+              <a:t>No decoding during planning; the search operates entirely in embedding space.</a:t>
+            </a:r>
+            <a:endParaRPr lang="en-US" sz="1200" dirty="0"/>
+          </a:p>
+        </p:txBody>
+      </p:sp>
+      <p:sp>
+        <p:nvSpPr>
+          <p:cNvPr id="8" name="Text 4"/>
           <p:cNvSpPr txBox="1"/>
           <p:nvPr/>
         </p:nvSpPr>
@@ -7346,15 +8846,40 @@
                 <a:ea typeface="Cambria" pitchFamily="34" charset="-122"/>
                 <a:cs typeface="Cambria" pitchFamily="34" charset="-120"/>
               </a:rPr>
-              <a:t>Compute profile of the reference planner</a:t>
+              <a:t>Background: CEM and iCEM planning</a:t>
             </a:r>
             <a:endParaRPr lang="en-US" sz="2800" dirty="0"/>
           </a:p>
         </p:txBody>
+      </p:sp>
+      <p:sp>
+        <p:nvSpPr>
+          <p:cNvPr id="3" name="Shape 1"/>
+          <p:cNvSpPr/>
+          <p:nvPr/>
+        </p:nvSpPr>
+        <p:spPr>
+          <a:xfrm>
+            <a:off x="457200" y="1005840"/>
+            <a:ext cx="5120640" cy="3017520"/>
+          </a:xfrm>
+          <a:prstGeom prst="rect">
+            <a:avLst/>
+          </a:prstGeom>
+          <a:solidFill>
+            <a:srgbClr val="000000"/>
+          </a:solidFill>
+          <a:ln w="12700">
+            <a:solidFill>
+              <a:srgbClr val="000000"/>
+            </a:solidFill>
+            <a:prstDash val="solid"/>
+          </a:ln>
+        </p:spPr>
       </p:sp>
       <p:pic>
         <p:nvPicPr>
-          <p:cNvPr id="3" name="Image 0" descr="preencoded.png">    </p:cNvPr>
+          <p:cNvPr id="4" name="Image 0" descr="preencoded.png">    </p:cNvPr>
           <p:cNvPicPr>
             <a:picLocks noChangeAspect="1"/>
           </p:cNvPicPr>
@@ -7368,8 +8893,8 @@
         </p:blipFill>
         <p:spPr>
           <a:xfrm>
-            <a:off x="797742" y="960120"/>
-            <a:ext cx="4805316" cy="2286000"/>
+            <a:off x="1108535" y="1005840"/>
+            <a:ext cx="3817969" cy="3017520"/>
           </a:xfrm>
           <a:prstGeom prst="rect">
             <a:avLst/>
@@ -7378,14 +8903,53 @@
       </p:pic>
       <p:sp>
         <p:nvSpPr>
-          <p:cNvPr id="4" name="Text 1"/>
-          <p:cNvSpPr txBox="1"/>
-          <p:nvPr/>
-        </p:nvSpPr>
-        <p:spPr>
-          <a:xfrm>
-            <a:off x="6126480" y="1051560"/>
-            <a:ext cx="2651760" cy="3566160"/>
+          <p:cNvPr id="5" name="Text 2"/>
+          <p:cNvSpPr txBox="1"/>
+          <p:nvPr/>
+        </p:nvSpPr>
+        <p:spPr>
+          <a:xfrm>
+            <a:off x="457200" y="4096512"/>
+            <a:ext cx="5120640" cy="274320"/>
+          </a:xfrm>
+          <a:prstGeom prst="rect">
+            <a:avLst/>
+          </a:prstGeom>
+          <a:noFill/>
+          <a:ln/>
+        </p:spPr>
+        <p:txBody>
+          <a:bodyPr wrap="square" lIns="0" tIns="0" rIns="0" bIns="0" rtlCol="0" anchor="ctr"/>
+          <a:lstStyle/>
+          <a:p>
+            <a:pPr indent="0" marL="0">
+              <a:buNone/>
+            </a:pPr>
+            <a:r>
+              <a:rPr lang="en-US" sz="950" i="1" dirty="0">
+                <a:solidFill>
+                  <a:srgbClr val="5A5A5A"/>
+                </a:solidFill>
+                <a:latin typeface="Calibri" pitchFamily="34" charset="0"/>
+                <a:ea typeface="Calibri" pitchFamily="34" charset="-122"/>
+                <a:cs typeface="Calibri" pitchFamily="34" charset="-120"/>
+              </a:rPr>
+              <a:t>Cross-entropy method: many candidate action trajectories are sampled from a Gaussian (magenta); the distribution is refitted to the best and resampled. Orange: the selected plan. Image source: [add attribution].</a:t>
+            </a:r>
+            <a:endParaRPr lang="en-US" sz="950" dirty="0"/>
+          </a:p>
+        </p:txBody>
+      </p:sp>
+      <p:sp>
+        <p:nvSpPr>
+          <p:cNvPr id="6" name="Text 3"/>
+          <p:cNvSpPr txBox="1"/>
+          <p:nvPr/>
+        </p:nvSpPr>
+        <p:spPr>
+          <a:xfrm>
+            <a:off x="5852160" y="1051560"/>
+            <a:ext cx="2926080" cy="3657600"/>
           </a:xfrm>
           <a:prstGeom prst="rect">
             <a:avLst/>
@@ -7405,7 +8969,7 @@
               <a:buChar char="•"/>
             </a:pPr>
             <a:r>
-              <a:rPr lang="en-US" sz="1150" dirty="0">
+              <a:rPr lang="en-US" sz="1200" dirty="0">
                 <a:solidFill>
                   <a:srgbClr val="1B1B1B"/>
                 </a:solidFill>
@@ -7413,9 +8977,9 @@
                 <a:ea typeface="Calibri" pitchFamily="34" charset="-122"/>
                 <a:cs typeface="Calibri" pitchFamily="34" charset="-120"/>
               </a:rPr>
-              <a:t>33%: re-encoding the same two images 60 times per plan (telemetry: 60 encoder calls, 2 distinct images).</a:t>
-            </a:r>
-            <a:endParaRPr lang="en-US" sz="1150" dirty="0"/>
+              <a:t>CEM: sample candidates, score them, keep the top elites, refit the Gaussian, repeat.</a:t>
+            </a:r>
+            <a:endParaRPr lang="en-US" sz="1200" dirty="0"/>
           </a:p>
           <a:p>
             <a:pPr marL="177800" indent="-177800">
@@ -7426,7 +8990,7 @@
               <a:buChar char="•"/>
             </a:pPr>
             <a:r>
-              <a:rPr lang="en-US" sz="1150" dirty="0">
+              <a:rPr lang="en-US" sz="1200" dirty="0">
                 <a:solidFill>
                   <a:srgbClr val="1B1B1B"/>
                 </a:solidFill>
@@ -7434,9 +8998,9 @@
                 <a:ea typeface="Calibri" pitchFamily="34" charset="-122"/>
                 <a:cs typeface="Calibri" pitchFamily="34" charset="-120"/>
               </a:rPr>
-              <a:t>59%: the search, 12.3 ms per iteration, 409 µs per layer for about 3 µs of arithmetic.</a:t>
-            </a:r>
-            <a:endParaRPr lang="en-US" sz="1150" dirty="0"/>
+              <a:t>LeWM reference: 300 candidates × 30 iterations = 9,000 rollouts per plan.</a:t>
+            </a:r>
+            <a:endParaRPr lang="en-US" sz="1200" dirty="0"/>
           </a:p>
           <a:p>
             <a:pPr marL="177800" indent="-177800">
@@ -7447,7 +9011,7 @@
               <a:buChar char="•"/>
             </a:pPr>
             <a:r>
-              <a:rPr lang="en-US" sz="1150" dirty="0">
+              <a:rPr lang="en-US" sz="1200" dirty="0">
                 <a:solidFill>
                   <a:srgbClr val="1B1B1B"/>
                 </a:solidFill>
@@ -7455,9 +9019,9 @@
                 <a:ea typeface="Calibri" pitchFamily="34" charset="-122"/>
                 <a:cs typeface="Calibri" pitchFamily="34" charset="-120"/>
               </a:rPr>
-              <a:t>7%: CPU synchronisation between iterations.</a:t>
-            </a:r>
-            <a:endParaRPr lang="en-US" sz="1150" dirty="0"/>
+              <a:t>iCEM: shrinking population and elite reuse; 2.7–22× fewer samples (Pinneri et al., 2021).</a:t>
+            </a:r>
+            <a:endParaRPr lang="en-US" sz="1200" dirty="0"/>
           </a:p>
           <a:p>
             <a:pPr marL="177800" indent="-177800">
@@ -7468,7 +9032,7 @@
               <a:buChar char="•"/>
             </a:pPr>
             <a:r>
-              <a:rPr lang="en-US" sz="1150" dirty="0">
+              <a:rPr lang="en-US" sz="1200" dirty="0">
                 <a:solidFill>
                   <a:srgbClr val="1B1B1B"/>
                 </a:solidFill>
@@ -7476,54 +9040,15 @@
                 <a:ea typeface="Calibri" pitchFamily="34" charset="-122"/>
                 <a:cs typeface="Calibri" pitchFamily="34" charset="-120"/>
               </a:rPr>
-              <a:t>Under 1%: the policy code around the planner.</a:t>
-            </a:r>
-            <a:endParaRPr lang="en-US" sz="1150" dirty="0"/>
-          </a:p>
-        </p:txBody>
-      </p:sp>
-      <p:sp>
-        <p:nvSpPr>
-          <p:cNvPr id="5" name="Text 2"/>
-          <p:cNvSpPr txBox="1"/>
-          <p:nvPr/>
-        </p:nvSpPr>
-        <p:spPr>
-          <a:xfrm>
-            <a:off x="457200" y="3429000"/>
-            <a:ext cx="5486400" cy="274320"/>
-          </a:xfrm>
-          <a:prstGeom prst="rect">
-            <a:avLst/>
-          </a:prstGeom>
-          <a:noFill/>
-          <a:ln/>
-        </p:spPr>
-        <p:txBody>
-          <a:bodyPr wrap="square" lIns="0" tIns="0" rIns="0" bIns="0" rtlCol="0" anchor="ctr"/>
-          <a:lstStyle/>
-          <a:p>
-            <a:pPr indent="0" marL="0">
-              <a:buNone/>
-            </a:pPr>
-            <a:r>
-              <a:rPr lang="en-US" sz="1000" i="1" dirty="0">
-                <a:solidFill>
-                  <a:srgbClr val="5A5A5A"/>
-                </a:solidFill>
-                <a:latin typeface="Calibri" pitchFamily="34" charset="0"/>
-                <a:ea typeface="Calibri" pitchFamily="34" charset="-122"/>
-                <a:cs typeface="Calibri" pitchFamily="34" charset="-120"/>
-              </a:rPr>
-              <a:t>Top bar: reference planner, by stage. Bottom bar: LeWM-MK (Section 6). Stages without a direct measurement attributed by difference.</a:t>
-            </a:r>
-            <a:endParaRPr lang="en-US" sz="1000" dirty="0"/>
-          </a:p>
-        </p:txBody>
-      </p:sp>
-      <p:sp>
-        <p:nvSpPr>
-          <p:cNvPr id="7" name="Text 3"/>
+              <a:t>Fewer samples reduce latency only if per-iteration cost scales with sample count (Huang et al., 2021).</a:t>
+            </a:r>
+            <a:endParaRPr lang="en-US" sz="1200" dirty="0"/>
+          </a:p>
+        </p:txBody>
+      </p:sp>
+      <p:sp>
+        <p:nvSpPr>
+          <p:cNvPr id="8" name="Text 4"/>
           <p:cNvSpPr txBox="1"/>
           <p:nvPr/>
         </p:nvSpPr>
@@ -7618,50 +9143,26 @@
                 <a:ea typeface="Cambria" pitchFamily="34" charset="-122"/>
                 <a:cs typeface="Cambria" pitchFamily="34" charset="-120"/>
               </a:rPr>
-              <a:t>Latency scaling analysis</a:t>
+              <a:t>Background: GPU inference at small batch</a:t>
             </a:r>
             <a:endParaRPr lang="en-US" sz="2800" dirty="0"/>
           </a:p>
         </p:txBody>
       </p:sp>
-      <p:pic>
-        <p:nvPicPr>
-          <p:cNvPr id="3" name="Image 0" descr="preencoded.png">    </p:cNvPr>
-          <p:cNvPicPr>
-            <a:picLocks noChangeAspect="1"/>
-          </p:cNvPicPr>
-          <p:nvPr/>
-        </p:nvPicPr>
-        <p:blipFill>
-          <a:blip r:embed="rId1"/>
-          <a:stretch>
-            <a:fillRect/>
-          </a:stretch>
-        </p:blipFill>
-        <p:spPr>
-          <a:xfrm>
-            <a:off x="606829" y="960120"/>
-            <a:ext cx="5187142" cy="2377440"/>
-          </a:xfrm>
-          <a:prstGeom prst="rect">
-            <a:avLst/>
-          </a:prstGeom>
-        </p:spPr>
-      </p:pic>
-      <p:sp>
-        <p:nvSpPr>
-          <p:cNvPr id="4" name="Shape 1"/>
+      <p:sp>
+        <p:nvSpPr>
+          <p:cNvPr id="3" name="Shape 1"/>
           <p:cNvSpPr/>
           <p:nvPr/>
         </p:nvSpPr>
         <p:spPr>
           <a:xfrm>
-            <a:off x="6217920" y="1051560"/>
-            <a:ext cx="1234440" cy="1051560"/>
+            <a:off x="457200" y="1051560"/>
+            <a:ext cx="2651760" cy="2103120"/>
           </a:xfrm>
           <a:prstGeom prst="roundRect">
             <a:avLst>
-              <a:gd name="adj" fmla="val 6957"/>
+              <a:gd name="adj" fmla="val 3478"/>
             </a:avLst>
           </a:prstGeom>
           <a:solidFill>
@@ -7677,14 +9178,14 @@
       </p:sp>
       <p:sp>
         <p:nvSpPr>
-          <p:cNvPr id="5" name="Text 2"/>
-          <p:cNvSpPr txBox="1"/>
-          <p:nvPr/>
-        </p:nvSpPr>
-        <p:spPr>
-          <a:xfrm>
-            <a:off x="6355080" y="1143000"/>
-            <a:ext cx="960120" cy="578358"/>
+          <p:cNvPr id="4" name="Text 2"/>
+          <p:cNvSpPr txBox="1"/>
+          <p:nvPr/>
+        </p:nvSpPr>
+        <p:spPr>
+          <a:xfrm>
+            <a:off x="621792" y="1161288"/>
+            <a:ext cx="2331720" cy="384048"/>
           </a:xfrm>
           <a:prstGeom prst="rect">
             <a:avLst/>
@@ -7696,34 +9197,34 @@
           <a:bodyPr wrap="square" lIns="0" tIns="0" rIns="0" bIns="0" rtlCol="0" anchor="ctr"/>
           <a:lstStyle/>
           <a:p>
-            <a:pPr algn="ctr" indent="0" marL="0">
-              <a:buNone/>
-            </a:pPr>
-            <a:r>
-              <a:rPr lang="en-US" sz="2600" b="1" dirty="0">
-                <a:solidFill>
-                  <a:srgbClr val="EB6834"/>
+            <a:pPr indent="0" marL="0">
+              <a:buNone/>
+            </a:pPr>
+            <a:r>
+              <a:rPr lang="en-US" sz="1500" b="1" dirty="0">
+                <a:solidFill>
+                  <a:srgbClr val="14213D"/>
                 </a:solidFill>
                 <a:latin typeface="Cambria" pitchFamily="34" charset="0"/>
                 <a:ea typeface="Cambria" pitchFamily="34" charset="-122"/>
                 <a:cs typeface="Cambria" pitchFamily="34" charset="-120"/>
               </a:rPr>
-              <a:t>99%</a:t>
-            </a:r>
-            <a:endParaRPr lang="en-US" sz="2600" dirty="0"/>
-          </a:p>
-        </p:txBody>
-      </p:sp>
-      <p:sp>
-        <p:nvSpPr>
-          <p:cNvPr id="6" name="Text 3"/>
-          <p:cNvSpPr txBox="1"/>
-          <p:nvPr/>
-        </p:nvSpPr>
-        <p:spPr>
-          <a:xfrm>
-            <a:off x="6355080" y="1682496"/>
-            <a:ext cx="960120" cy="399593"/>
+              <a:t>Launch-bound execution</a:t>
+            </a:r>
+            <a:endParaRPr lang="en-US" sz="1500" dirty="0"/>
+          </a:p>
+        </p:txBody>
+      </p:sp>
+      <p:sp>
+        <p:nvSpPr>
+          <p:cNvPr id="5" name="Text 3"/>
+          <p:cNvSpPr txBox="1"/>
+          <p:nvPr/>
+        </p:nvSpPr>
+        <p:spPr>
+          <a:xfrm>
+            <a:off x="621792" y="1581912"/>
+            <a:ext cx="2331720" cy="1463040"/>
           </a:xfrm>
           <a:prstGeom prst="rect">
             <a:avLst/>
@@ -7735,55 +9236,38 @@
           <a:bodyPr wrap="square" lIns="0" tIns="0" rIns="0" bIns="0" rtlCol="0" anchor="t"/>
           <a:lstStyle/>
           <a:p>
-            <a:pPr algn="ctr" indent="0" marL="0">
-              <a:buNone/>
-            </a:pPr>
-            <a:r>
-              <a:rPr lang="en-US" sz="1000" dirty="0">
-                <a:solidFill>
-                  <a:srgbClr val="5A5A5A"/>
-                </a:solidFill>
-                <a:latin typeface="Calibri" pitchFamily="34" charset="0"/>
-                <a:ea typeface="Calibri" pitchFamily="34" charset="-122"/>
-                <a:cs typeface="Calibri" pitchFamily="34" charset="-120"/>
-              </a:rPr>
-              <a:t>of an eager call</a:t>
-            </a:r>
-            <a:endParaRPr lang="en-US" sz="1000" dirty="0"/>
-          </a:p>
-          <a:p>
-            <a:pPr algn="ctr" indent="0" marL="0">
-              <a:buNone/>
-            </a:pPr>
-            <a:r>
-              <a:rPr lang="en-US" sz="1000" dirty="0">
-                <a:solidFill>
-                  <a:srgbClr val="5A5A5A"/>
-                </a:solidFill>
-                <a:latin typeface="Calibri" pitchFamily="34" charset="0"/>
-                <a:ea typeface="Calibri" pitchFamily="34" charset="-122"/>
-                <a:cs typeface="Calibri" pitchFamily="34" charset="-120"/>
-              </a:rPr>
-              <a:t>is fixed cost</a:t>
-            </a:r>
-            <a:endParaRPr lang="en-US" sz="1000" dirty="0"/>
-          </a:p>
-        </p:txBody>
-      </p:sp>
-      <p:sp>
-        <p:nvSpPr>
-          <p:cNvPr id="7" name="Shape 4"/>
+            <a:pPr indent="0" marL="0">
+              <a:buNone/>
+            </a:pPr>
+            <a:r>
+              <a:rPr lang="en-US" sz="1200" dirty="0">
+                <a:solidFill>
+                  <a:srgbClr val="1B1B1B"/>
+                </a:solidFill>
+                <a:latin typeface="Calibri" pitchFamily="34" charset="0"/>
+                <a:ea typeface="Calibri" pitchFamily="34" charset="-122"/>
+                <a:cs typeface="Calibri" pitchFamily="34" charset="-120"/>
+              </a:rPr>
+              <a:t>Each operation is a GPU kernel launched by the CPU. At batch 1, kernels finish in microseconds and launch overhead, Python dispatch and CPU synchronisation dominate.</a:t>
+            </a:r>
+            <a:endParaRPr lang="en-US" sz="1200" dirty="0"/>
+          </a:p>
+        </p:txBody>
+      </p:sp>
+      <p:sp>
+        <p:nvSpPr>
+          <p:cNvPr id="6" name="Shape 4"/>
           <p:cNvSpPr/>
           <p:nvPr/>
         </p:nvSpPr>
         <p:spPr>
           <a:xfrm>
-            <a:off x="7543800" y="1051560"/>
-            <a:ext cx="1234440" cy="1051560"/>
+            <a:off x="3291840" y="1051560"/>
+            <a:ext cx="2651760" cy="2103120"/>
           </a:xfrm>
           <a:prstGeom prst="roundRect">
             <a:avLst>
-              <a:gd name="adj" fmla="val 6957"/>
+              <a:gd name="adj" fmla="val 3478"/>
             </a:avLst>
           </a:prstGeom>
           <a:solidFill>
@@ -7799,14 +9283,14 @@
       </p:sp>
       <p:sp>
         <p:nvSpPr>
-          <p:cNvPr id="8" name="Text 5"/>
-          <p:cNvSpPr txBox="1"/>
-          <p:nvPr/>
-        </p:nvSpPr>
-        <p:spPr>
-          <a:xfrm>
-            <a:off x="7680960" y="1143000"/>
-            <a:ext cx="960120" cy="578358"/>
+          <p:cNvPr id="7" name="Text 5"/>
+          <p:cNvSpPr txBox="1"/>
+          <p:nvPr/>
+        </p:nvSpPr>
+        <p:spPr>
+          <a:xfrm>
+            <a:off x="3456432" y="1161288"/>
+            <a:ext cx="2331720" cy="384048"/>
           </a:xfrm>
           <a:prstGeom prst="rect">
             <a:avLst/>
@@ -7818,34 +9302,34 @@
           <a:bodyPr wrap="square" lIns="0" tIns="0" rIns="0" bIns="0" rtlCol="0" anchor="ctr"/>
           <a:lstStyle/>
           <a:p>
-            <a:pPr algn="ctr" indent="0" marL="0">
-              <a:buNone/>
-            </a:pPr>
-            <a:r>
-              <a:rPr lang="en-US" sz="2400" b="1" dirty="0">
-                <a:solidFill>
-                  <a:srgbClr val="EB6834"/>
+            <a:pPr indent="0" marL="0">
+              <a:buNone/>
+            </a:pPr>
+            <a:r>
+              <a:rPr lang="en-US" sz="1500" b="1" dirty="0">
+                <a:solidFill>
+                  <a:srgbClr val="14213D"/>
                 </a:solidFill>
                 <a:latin typeface="Cambria" pitchFamily="34" charset="0"/>
                 <a:ea typeface="Cambria" pitchFamily="34" charset="-122"/>
                 <a:cs typeface="Cambria" pitchFamily="34" charset="-120"/>
               </a:rPr>
-              <a:t>1.01×</a:t>
-            </a:r>
-            <a:endParaRPr lang="en-US" sz="2400" dirty="0"/>
-          </a:p>
-        </p:txBody>
-      </p:sp>
-      <p:sp>
-        <p:nvSpPr>
-          <p:cNvPr id="9" name="Text 6"/>
-          <p:cNvSpPr txBox="1"/>
-          <p:nvPr/>
-        </p:nvSpPr>
-        <p:spPr>
-          <a:xfrm>
-            <a:off x="7680960" y="1682496"/>
-            <a:ext cx="960120" cy="399593"/>
+              <a:t>Standard remedies</a:t>
+            </a:r>
+            <a:endParaRPr lang="en-US" sz="1500" dirty="0"/>
+          </a:p>
+        </p:txBody>
+      </p:sp>
+      <p:sp>
+        <p:nvSpPr>
+          <p:cNvPr id="8" name="Text 6"/>
+          <p:cNvSpPr txBox="1"/>
+          <p:nvPr/>
+        </p:nvSpPr>
+        <p:spPr>
+          <a:xfrm>
+            <a:off x="3456432" y="1581912"/>
+            <a:ext cx="2331720" cy="1463040"/>
           </a:xfrm>
           <a:prstGeom prst="rect">
             <a:avLst/>
@@ -7857,11 +9341,155 @@
           <a:bodyPr wrap="square" lIns="0" tIns="0" rIns="0" bIns="0" rtlCol="0" anchor="t"/>
           <a:lstStyle/>
           <a:p>
-            <a:pPr algn="ctr" indent="0" marL="0">
-              <a:buNone/>
-            </a:pPr>
-            <a:r>
-              <a:rPr lang="en-US" sz="1000" dirty="0">
+            <a:pPr indent="0" marL="0">
+              <a:buNone/>
+            </a:pPr>
+            <a:r>
+              <a:rPr lang="en-US" sz="1200" dirty="0">
+                <a:solidFill>
+                  <a:srgbClr val="1B1B1B"/>
+                </a:solidFill>
+                <a:latin typeface="Calibri" pitchFamily="34" charset="0"/>
+                <a:ea typeface="Calibri" pitchFamily="34" charset="-122"/>
+                <a:cs typeface="Calibri" pitchFamily="34" charset="-120"/>
+              </a:rPr>
+              <a:t>CUDA Graphs reduce launch cost; torch.compile fuses operators; FlashAttention fuses attention on chip. The optimiser loop remains on the CPU.</a:t>
+            </a:r>
+            <a:endParaRPr lang="en-US" sz="1200" dirty="0"/>
+          </a:p>
+        </p:txBody>
+      </p:sp>
+      <p:sp>
+        <p:nvSpPr>
+          <p:cNvPr id="9" name="Shape 7"/>
+          <p:cNvSpPr/>
+          <p:nvPr/>
+        </p:nvSpPr>
+        <p:spPr>
+          <a:xfrm>
+            <a:off x="6126480" y="1051560"/>
+            <a:ext cx="2651760" cy="2103120"/>
+          </a:xfrm>
+          <a:prstGeom prst="roundRect">
+            <a:avLst>
+              <a:gd name="adj" fmla="val 3478"/>
+            </a:avLst>
+          </a:prstGeom>
+          <a:solidFill>
+            <a:srgbClr val="F3F4F6"/>
+          </a:solidFill>
+          <a:ln w="12700">
+            <a:solidFill>
+              <a:srgbClr val="F3F4F6"/>
+            </a:solidFill>
+            <a:prstDash val="solid"/>
+          </a:ln>
+        </p:spPr>
+      </p:sp>
+      <p:sp>
+        <p:nvSpPr>
+          <p:cNvPr id="10" name="Text 8"/>
+          <p:cNvSpPr txBox="1"/>
+          <p:nvPr/>
+        </p:nvSpPr>
+        <p:spPr>
+          <a:xfrm>
+            <a:off x="6291072" y="1161288"/>
+            <a:ext cx="2331720" cy="384048"/>
+          </a:xfrm>
+          <a:prstGeom prst="rect">
+            <a:avLst/>
+          </a:prstGeom>
+          <a:noFill/>
+          <a:ln/>
+        </p:spPr>
+        <p:txBody>
+          <a:bodyPr wrap="square" lIns="0" tIns="0" rIns="0" bIns="0" rtlCol="0" anchor="ctr"/>
+          <a:lstStyle/>
+          <a:p>
+            <a:pPr indent="0" marL="0">
+              <a:buNone/>
+            </a:pPr>
+            <a:r>
+              <a:rPr lang="en-US" sz="1500" b="1" dirty="0">
+                <a:solidFill>
+                  <a:srgbClr val="14213D"/>
+                </a:solidFill>
+                <a:latin typeface="Cambria" pitchFamily="34" charset="0"/>
+                <a:ea typeface="Cambria" pitchFamily="34" charset="-122"/>
+                <a:cs typeface="Cambria" pitchFamily="34" charset="-120"/>
+              </a:rPr>
+              <a:t>Megakernels</a:t>
+            </a:r>
+            <a:endParaRPr lang="en-US" sz="1500" dirty="0"/>
+          </a:p>
+        </p:txBody>
+      </p:sp>
+      <p:sp>
+        <p:nvSpPr>
+          <p:cNvPr id="11" name="Text 9"/>
+          <p:cNvSpPr txBox="1"/>
+          <p:nvPr/>
+        </p:nvSpPr>
+        <p:spPr>
+          <a:xfrm>
+            <a:off x="6291072" y="1581912"/>
+            <a:ext cx="2331720" cy="1463040"/>
+          </a:xfrm>
+          <a:prstGeom prst="rect">
+            <a:avLst/>
+          </a:prstGeom>
+          <a:noFill/>
+          <a:ln/>
+        </p:spPr>
+        <p:txBody>
+          <a:bodyPr wrap="square" lIns="0" tIns="0" rIns="0" bIns="0" rtlCol="0" anchor="t"/>
+          <a:lstStyle/>
+          <a:p>
+            <a:pPr indent="0" marL="0">
+              <a:buNone/>
+            </a:pPr>
+            <a:r>
+              <a:rPr lang="en-US" sz="1200" dirty="0">
+                <a:solidFill>
+                  <a:srgbClr val="1B1B1B"/>
+                </a:solidFill>
+                <a:latin typeface="Calibri" pitchFamily="34" charset="0"/>
+                <a:ea typeface="Calibri" pitchFamily="34" charset="-122"/>
+                <a:cs typeface="Calibri" pitchFamily="34" charset="-120"/>
+              </a:rPr>
+              <a:t>One persistent GPU program for an entire computation: no launches, no gaps. Demonstrated for language-model inference (Hazy Research, FlashFormer, MPK).</a:t>
+            </a:r>
+            <a:endParaRPr lang="en-US" sz="1200" dirty="0"/>
+          </a:p>
+        </p:txBody>
+      </p:sp>
+      <p:sp>
+        <p:nvSpPr>
+          <p:cNvPr id="12" name="Text 10"/>
+          <p:cNvSpPr txBox="1"/>
+          <p:nvPr/>
+        </p:nvSpPr>
+        <p:spPr>
+          <a:xfrm>
+            <a:off x="457200" y="3383280"/>
+            <a:ext cx="8229600" cy="548640"/>
+          </a:xfrm>
+          <a:prstGeom prst="rect">
+            <a:avLst/>
+          </a:prstGeom>
+          <a:noFill/>
+          <a:ln/>
+        </p:spPr>
+        <p:txBody>
+          <a:bodyPr wrap="square" lIns="0" tIns="0" rIns="0" bIns="0" rtlCol="0" anchor="ctr"/>
+          <a:lstStyle/>
+          <a:p>
+            <a:pPr indent="0" marL="0">
+              <a:buNone/>
+            </a:pPr>
+            <a:r>
+              <a:rPr lang="en-US" sz="1150" i="1" dirty="0">
                 <a:solidFill>
                   <a:srgbClr val="5A5A5A"/>
                 </a:solidFill>
@@ -7869,156 +9497,15 @@
                 <a:ea typeface="Calibri" pitchFamily="34" charset="-122"/>
                 <a:cs typeface="Calibri" pitchFamily="34" charset="-120"/>
               </a:rPr>
-              <a:t>predicted iCEM</a:t>
-            </a:r>
-            <a:endParaRPr lang="en-US" sz="1000" dirty="0"/>
-          </a:p>
-          <a:p>
-            <a:pPr algn="ctr" indent="0" marL="0">
-              <a:buNone/>
-            </a:pPr>
-            <a:r>
-              <a:rPr lang="en-US" sz="1000" dirty="0">
-                <a:solidFill>
-                  <a:srgbClr val="5A5A5A"/>
-                </a:solidFill>
-                <a:latin typeface="Calibri" pitchFamily="34" charset="0"/>
-                <a:ea typeface="Calibri" pitchFamily="34" charset="-122"/>
-                <a:cs typeface="Calibri" pitchFamily="34" charset="-120"/>
-              </a:rPr>
-              <a:t>gain, eager</a:t>
-            </a:r>
-            <a:endParaRPr lang="en-US" sz="1000" dirty="0"/>
-          </a:p>
-        </p:txBody>
-      </p:sp>
-      <p:sp>
-        <p:nvSpPr>
-          <p:cNvPr id="10" name="Text 7"/>
-          <p:cNvSpPr txBox="1"/>
-          <p:nvPr/>
-        </p:nvSpPr>
-        <p:spPr>
-          <a:xfrm>
-            <a:off x="6217920" y="2286000"/>
-            <a:ext cx="2560320" cy="2377440"/>
-          </a:xfrm>
-          <a:prstGeom prst="rect">
-            <a:avLst/>
-          </a:prstGeom>
-          <a:noFill/>
-          <a:ln/>
-        </p:spPr>
-        <p:txBody>
-          <a:bodyPr wrap="square" lIns="0" tIns="0" rIns="0" bIns="0" rtlCol="0" anchor="t"/>
-          <a:lstStyle/>
-          <a:p>
-            <a:pPr marL="177800" indent="-177800">
-              <a:spcAft>
-                <a:spcPts val="700"/>
-              </a:spcAft>
-              <a:buSzPct val="100000"/>
-              <a:buChar char="•"/>
-            </a:pPr>
-            <a:r>
-              <a:rPr lang="en-US" sz="1100" dirty="0">
-                <a:solidFill>
-                  <a:srgbClr val="1B1B1B"/>
-                </a:solidFill>
-                <a:latin typeface="Calibri" pitchFamily="34" charset="0"/>
-                <a:ea typeface="Calibri" pitchFamily="34" charset="-122"/>
-                <a:cs typeface="Calibri" pitchFamily="34" charset="-120"/>
-              </a:rPr>
-              <a:t>Fitted model: 20.0 ms fixed + 0.10 ms per 100 candidates. Latency is effectively independent of workload.</a:t>
-            </a:r>
-            <a:endParaRPr lang="en-US" sz="1100" dirty="0"/>
-          </a:p>
-          <a:p>
-            <a:pPr marL="177800" indent="-177800">
-              <a:spcAft>
-                <a:spcPts val="700"/>
-              </a:spcAft>
-              <a:buSzPct val="100000"/>
-              <a:buChar char="•"/>
-            </a:pPr>
-            <a:r>
-              <a:rPr lang="en-US" sz="1100" dirty="0">
-                <a:solidFill>
-                  <a:srgbClr val="1B1B1B"/>
-                </a:solidFill>
-                <a:latin typeface="Calibri" pitchFamily="34" charset="0"/>
-                <a:ea typeface="Calibri" pitchFamily="34" charset="-122"/>
-                <a:cs typeface="Calibri" pitchFamily="34" charset="-120"/>
-              </a:rPr>
-              <a:t>Reducing the candidate count (iCEM) therefore yields no gain: predicted 1.01×, observed 0.92×.</a:t>
-            </a:r>
-            <a:endParaRPr lang="en-US" sz="1100" dirty="0"/>
-          </a:p>
-          <a:p>
-            <a:pPr marL="177800" indent="-177800">
-              <a:spcAft>
-                <a:spcPts val="700"/>
-              </a:spcAft>
-              <a:buSzPct val="100000"/>
-              <a:buChar char="•"/>
-            </a:pPr>
-            <a:r>
-              <a:rPr lang="en-US" sz="1100" dirty="0">
-                <a:solidFill>
-                  <a:srgbClr val="1B1B1B"/>
-                </a:solidFill>
-                <a:latin typeface="Calibri" pitchFamily="34" charset="0"/>
-                <a:ea typeface="Calibri" pitchFamily="34" charset="-122"/>
-                <a:cs typeface="Calibri" pitchFamily="34" charset="-120"/>
-              </a:rPr>
-              <a:t>A gain requires an execution model with low fixed cost per call.</a:t>
-            </a:r>
-            <a:endParaRPr lang="en-US" sz="1100" dirty="0"/>
-          </a:p>
-        </p:txBody>
-      </p:sp>
-      <p:sp>
-        <p:nvSpPr>
-          <p:cNvPr id="11" name="Text 8"/>
-          <p:cNvSpPr txBox="1"/>
-          <p:nvPr/>
-        </p:nvSpPr>
-        <p:spPr>
-          <a:xfrm>
-            <a:off x="457200" y="3429000"/>
-            <a:ext cx="5486400" cy="274320"/>
-          </a:xfrm>
-          <a:prstGeom prst="rect">
-            <a:avLst/>
-          </a:prstGeom>
-          <a:noFill/>
-          <a:ln/>
-        </p:spPr>
-        <p:txBody>
-          <a:bodyPr wrap="square" lIns="0" tIns="0" rIns="0" bIns="0" rtlCol="0" anchor="ctr"/>
-          <a:lstStyle/>
-          <a:p>
-            <a:pPr indent="0" marL="0">
-              <a:buNone/>
-            </a:pPr>
-            <a:r>
-              <a:rPr lang="en-US" sz="1000" i="1" dirty="0">
-                <a:solidFill>
-                  <a:srgbClr val="5A5A5A"/>
-                </a:solidFill>
-                <a:latin typeface="Calibri" pitchFamily="34" charset="0"/>
-                <a:ea typeface="Calibri" pitchFamily="34" charset="-122"/>
-                <a:cs typeface="Calibri" pitchFamily="34" charset="-120"/>
-              </a:rPr>
-              <a:t>Latency of one scoring call vs number of candidates, with fitted lines a + b·N.</a:t>
-            </a:r>
-            <a:endParaRPr lang="en-US" sz="1000" dirty="0"/>
-          </a:p>
-        </p:txBody>
-      </p:sp>
-      <p:sp>
-        <p:nvSpPr>
-          <p:cNvPr id="13" name="Text 9"/>
+              <a:t>Hopper (H100) features used here: tensor-core WGMMA instructions, bulk asynchronous copies, thread-block clusters with distributed shared memory (ThunderKittens).</a:t>
+            </a:r>
+            <a:endParaRPr lang="en-US" sz="1150" dirty="0"/>
+          </a:p>
+        </p:txBody>
+      </p:sp>
+      <p:sp>
+        <p:nvSpPr>
+          <p:cNvPr id="14" name="Text 11"/>
           <p:cNvSpPr txBox="1"/>
           <p:nvPr/>
         </p:nvSpPr>
@@ -8113,66 +9600,104 @@
                 <a:ea typeface="Cambria" pitchFamily="34" charset="-122"/>
                 <a:cs typeface="Cambria" pitchFamily="34" charset="-120"/>
               </a:rPr>
-              <a:t>Solution design: LeWM-MK</a:t>
+              <a:t>Research gap</a:t>
             </a:r>
             <a:endParaRPr lang="en-US" sz="2800" dirty="0"/>
           </a:p>
         </p:txBody>
       </p:sp>
-      <p:pic>
-        <p:nvPicPr>
-          <p:cNvPr id="3" name="Image 0" descr="preencoded.png">    </p:cNvPr>
-          <p:cNvPicPr>
-            <a:picLocks noChangeAspect="1"/>
-          </p:cNvPicPr>
-          <p:nvPr/>
-        </p:nvPicPr>
-        <p:blipFill>
-          <a:blip r:embed="rId1"/>
-          <a:stretch>
-            <a:fillRect/>
-          </a:stretch>
-        </p:blipFill>
-        <p:spPr>
-          <a:xfrm>
-            <a:off x="457200" y="1341764"/>
-            <a:ext cx="5394960" cy="2802873"/>
-          </a:xfrm>
-          <a:prstGeom prst="rect">
-            <a:avLst/>
-          </a:prstGeom>
-        </p:spPr>
-      </p:pic>
-      <p:sp>
-        <p:nvSpPr>
-          <p:cNvPr id="4" name="Text 1"/>
-          <p:cNvSpPr txBox="1"/>
-          <p:nvPr/>
-        </p:nvSpPr>
-        <p:spPr>
-          <a:xfrm>
-            <a:off x="6035040" y="1051560"/>
-            <a:ext cx="2743200" cy="3657600"/>
-          </a:xfrm>
-          <a:prstGeom prst="rect">
-            <a:avLst/>
-          </a:prstGeom>
-          <a:noFill/>
-          <a:ln/>
-        </p:spPr>
-        <p:txBody>
-          <a:bodyPr wrap="square" lIns="0" tIns="0" rIns="0" bIns="0" rtlCol="0" anchor="t"/>
-          <a:lstStyle/>
-          <a:p>
-            <a:pPr marL="177800" indent="-177800">
-              <a:spcAft>
-                <a:spcPts val="700"/>
-              </a:spcAft>
-              <a:buSzPct val="100000"/>
-              <a:buChar char="•"/>
-            </a:pPr>
-            <a:r>
-              <a:rPr lang="en-US" sz="1150" dirty="0">
+      <p:sp>
+        <p:nvSpPr>
+          <p:cNvPr id="3" name="Shape 1"/>
+          <p:cNvSpPr/>
+          <p:nvPr/>
+        </p:nvSpPr>
+        <p:spPr>
+          <a:xfrm>
+            <a:off x="457200" y="1143000"/>
+            <a:ext cx="640080" cy="640080"/>
+          </a:xfrm>
+          <a:prstGeom prst="roundRect">
+            <a:avLst>
+              <a:gd name="adj" fmla="val 11429"/>
+            </a:avLst>
+          </a:prstGeom>
+          <a:solidFill>
+            <a:srgbClr val="14213D"/>
+          </a:solidFill>
+          <a:ln w="12700">
+            <a:solidFill>
+              <a:srgbClr val="14213D"/>
+            </a:solidFill>
+            <a:prstDash val="solid"/>
+          </a:ln>
+        </p:spPr>
+      </p:sp>
+      <p:sp>
+        <p:nvSpPr>
+          <p:cNvPr id="4" name="Text 2"/>
+          <p:cNvSpPr txBox="1"/>
+          <p:nvPr/>
+        </p:nvSpPr>
+        <p:spPr>
+          <a:xfrm>
+            <a:off x="457200" y="1143000"/>
+            <a:ext cx="640080" cy="640080"/>
+          </a:xfrm>
+          <a:prstGeom prst="rect">
+            <a:avLst/>
+          </a:prstGeom>
+          <a:noFill/>
+          <a:ln/>
+        </p:spPr>
+        <p:txBody>
+          <a:bodyPr wrap="square" lIns="0" tIns="0" rIns="0" bIns="0" rtlCol="0" anchor="ctr"/>
+          <a:lstStyle/>
+          <a:p>
+            <a:pPr algn="ctr" indent="0" marL="0">
+              <a:buNone/>
+            </a:pPr>
+            <a:r>
+              <a:rPr lang="en-US" sz="1800" b="1" dirty="0">
+                <a:solidFill>
+                  <a:srgbClr val="FFFFFF"/>
+                </a:solidFill>
+                <a:latin typeface="Cambria" pitchFamily="34" charset="0"/>
+                <a:ea typeface="Cambria" pitchFamily="34" charset="-122"/>
+                <a:cs typeface="Cambria" pitchFamily="34" charset="-120"/>
+              </a:rPr>
+              <a:t>1</a:t>
+            </a:r>
+            <a:endParaRPr lang="en-US" sz="1800" dirty="0"/>
+          </a:p>
+        </p:txBody>
+      </p:sp>
+      <p:sp>
+        <p:nvSpPr>
+          <p:cNvPr id="5" name="Text 3"/>
+          <p:cNvSpPr txBox="1"/>
+          <p:nvPr/>
+        </p:nvSpPr>
+        <p:spPr>
+          <a:xfrm>
+            <a:off x="1325880" y="1143000"/>
+            <a:ext cx="7360920" cy="640080"/>
+          </a:xfrm>
+          <a:prstGeom prst="rect">
+            <a:avLst/>
+          </a:prstGeom>
+          <a:noFill/>
+          <a:ln/>
+        </p:spPr>
+        <p:txBody>
+          <a:bodyPr wrap="square" lIns="0" tIns="0" rIns="0" bIns="0" rtlCol="0" anchor="ctr"/>
+          <a:lstStyle/>
+          <a:p>
+            <a:pPr indent="0" marL="0">
+              <a:buNone/>
+            </a:pPr>
+            <a:r>
+              <a:rPr lang="en-US" sz="1400" dirty="0">
                 <a:solidFill>
                   <a:srgbClr val="1B1B1B"/>
                 </a:solidFill>
@@ -8180,99 +9705,264 @@
                 <a:ea typeface="Calibri" pitchFamily="34" charset="-122"/>
                 <a:cs typeface="Calibri" pitchFamily="34" charset="-120"/>
               </a:rPr>
-              <a:t>Encode each image once; cache the goal for the episode.</a:t>
+              <a:t>No prior work has profiled where a world-model planner's latency is spent during execution.</a:t>
+            </a:r>
+            <a:endParaRPr lang="en-US" sz="1400" dirty="0"/>
+          </a:p>
+        </p:txBody>
+      </p:sp>
+      <p:sp>
+        <p:nvSpPr>
+          <p:cNvPr id="6" name="Shape 4"/>
+          <p:cNvSpPr/>
+          <p:nvPr/>
+        </p:nvSpPr>
+        <p:spPr>
+          <a:xfrm>
+            <a:off x="457200" y="2103120"/>
+            <a:ext cx="640080" cy="640080"/>
+          </a:xfrm>
+          <a:prstGeom prst="roundRect">
+            <a:avLst>
+              <a:gd name="adj" fmla="val 11429"/>
+            </a:avLst>
+          </a:prstGeom>
+          <a:solidFill>
+            <a:srgbClr val="14213D"/>
+          </a:solidFill>
+          <a:ln w="12700">
+            <a:solidFill>
+              <a:srgbClr val="14213D"/>
+            </a:solidFill>
+            <a:prstDash val="solid"/>
+          </a:ln>
+        </p:spPr>
+      </p:sp>
+      <p:sp>
+        <p:nvSpPr>
+          <p:cNvPr id="7" name="Text 5"/>
+          <p:cNvSpPr txBox="1"/>
+          <p:nvPr/>
+        </p:nvSpPr>
+        <p:spPr>
+          <a:xfrm>
+            <a:off x="457200" y="2103120"/>
+            <a:ext cx="640080" cy="640080"/>
+          </a:xfrm>
+          <a:prstGeom prst="rect">
+            <a:avLst/>
+          </a:prstGeom>
+          <a:noFill/>
+          <a:ln/>
+        </p:spPr>
+        <p:txBody>
+          <a:bodyPr wrap="square" lIns="0" tIns="0" rIns="0" bIns="0" rtlCol="0" anchor="ctr"/>
+          <a:lstStyle/>
+          <a:p>
+            <a:pPr algn="ctr" indent="0" marL="0">
+              <a:buNone/>
+            </a:pPr>
+            <a:r>
+              <a:rPr lang="en-US" sz="1800" b="1" dirty="0">
+                <a:solidFill>
+                  <a:srgbClr val="FFFFFF"/>
+                </a:solidFill>
+                <a:latin typeface="Cambria" pitchFamily="34" charset="0"/>
+                <a:ea typeface="Cambria" pitchFamily="34" charset="-122"/>
+                <a:cs typeface="Cambria" pitchFamily="34" charset="-120"/>
+              </a:rPr>
+              <a:t>2</a:t>
+            </a:r>
+            <a:endParaRPr lang="en-US" sz="1800" dirty="0"/>
+          </a:p>
+        </p:txBody>
+      </p:sp>
+      <p:sp>
+        <p:nvSpPr>
+          <p:cNvPr id="8" name="Text 6"/>
+          <p:cNvSpPr txBox="1"/>
+          <p:nvPr/>
+        </p:nvSpPr>
+        <p:spPr>
+          <a:xfrm>
+            <a:off x="1325880" y="2103120"/>
+            <a:ext cx="7360920" cy="640080"/>
+          </a:xfrm>
+          <a:prstGeom prst="rect">
+            <a:avLst/>
+          </a:prstGeom>
+          <a:noFill/>
+          <a:ln/>
+        </p:spPr>
+        <p:txBody>
+          <a:bodyPr wrap="square" lIns="0" tIns="0" rIns="0" bIns="0" rtlCol="0" anchor="ctr"/>
+          <a:lstStyle/>
+          <a:p>
+            <a:pPr indent="0" marL="0">
+              <a:buNone/>
+            </a:pPr>
+            <a:r>
+              <a:rPr lang="en-US" sz="1400" dirty="0">
+                <a:solidFill>
+                  <a:srgbClr val="1B1B1B"/>
+                </a:solidFill>
+                <a:latin typeface="Calibri" pitchFamily="34" charset="0"/>
+                <a:ea typeface="Calibri" pitchFamily="34" charset="-122"/>
+                <a:cs typeface="Calibri" pitchFamily="34" charset="-120"/>
+              </a:rPr>
+              <a:t>No prior work has measured whether sample-efficient search (iCEM) reduces latency in practice, or under which execution model.</a:t>
+            </a:r>
+            <a:endParaRPr lang="en-US" sz="1400" dirty="0"/>
+          </a:p>
+        </p:txBody>
+      </p:sp>
+      <p:sp>
+        <p:nvSpPr>
+          <p:cNvPr id="9" name="Shape 7"/>
+          <p:cNvSpPr/>
+          <p:nvPr/>
+        </p:nvSpPr>
+        <p:spPr>
+          <a:xfrm>
+            <a:off x="457200" y="3063240"/>
+            <a:ext cx="640080" cy="640080"/>
+          </a:xfrm>
+          <a:prstGeom prst="roundRect">
+            <a:avLst>
+              <a:gd name="adj" fmla="val 11429"/>
+            </a:avLst>
+          </a:prstGeom>
+          <a:solidFill>
+            <a:srgbClr val="14213D"/>
+          </a:solidFill>
+          <a:ln w="12700">
+            <a:solidFill>
+              <a:srgbClr val="14213D"/>
+            </a:solidFill>
+            <a:prstDash val="solid"/>
+          </a:ln>
+        </p:spPr>
+      </p:sp>
+      <p:sp>
+        <p:nvSpPr>
+          <p:cNvPr id="10" name="Text 8"/>
+          <p:cNvSpPr txBox="1"/>
+          <p:nvPr/>
+        </p:nvSpPr>
+        <p:spPr>
+          <a:xfrm>
+            <a:off x="457200" y="3063240"/>
+            <a:ext cx="640080" cy="640080"/>
+          </a:xfrm>
+          <a:prstGeom prst="rect">
+            <a:avLst/>
+          </a:prstGeom>
+          <a:noFill/>
+          <a:ln/>
+        </p:spPr>
+        <p:txBody>
+          <a:bodyPr wrap="square" lIns="0" tIns="0" rIns="0" bIns="0" rtlCol="0" anchor="ctr"/>
+          <a:lstStyle/>
+          <a:p>
+            <a:pPr algn="ctr" indent="0" marL="0">
+              <a:buNone/>
+            </a:pPr>
+            <a:r>
+              <a:rPr lang="en-US" sz="1800" b="1" dirty="0">
+                <a:solidFill>
+                  <a:srgbClr val="FFFFFF"/>
+                </a:solidFill>
+                <a:latin typeface="Cambria" pitchFamily="34" charset="0"/>
+                <a:ea typeface="Cambria" pitchFamily="34" charset="-122"/>
+                <a:cs typeface="Cambria" pitchFamily="34" charset="-120"/>
+              </a:rPr>
+              <a:t>3</a:t>
+            </a:r>
+            <a:endParaRPr lang="en-US" sz="1800" dirty="0"/>
+          </a:p>
+        </p:txBody>
+      </p:sp>
+      <p:sp>
+        <p:nvSpPr>
+          <p:cNvPr id="11" name="Text 9"/>
+          <p:cNvSpPr txBox="1"/>
+          <p:nvPr/>
+        </p:nvSpPr>
+        <p:spPr>
+          <a:xfrm>
+            <a:off x="1325880" y="3063240"/>
+            <a:ext cx="7360920" cy="640080"/>
+          </a:xfrm>
+          <a:prstGeom prst="rect">
+            <a:avLst/>
+          </a:prstGeom>
+          <a:noFill/>
+          <a:ln/>
+        </p:spPr>
+        <p:txBody>
+          <a:bodyPr wrap="square" lIns="0" tIns="0" rIns="0" bIns="0" rtlCol="0" anchor="ctr"/>
+          <a:lstStyle/>
+          <a:p>
+            <a:pPr indent="0" marL="0">
+              <a:buNone/>
+            </a:pPr>
+            <a:r>
+              <a:rPr lang="en-US" sz="1400" dirty="0">
+                <a:solidFill>
+                  <a:srgbClr val="1B1B1B"/>
+                </a:solidFill>
+                <a:latin typeface="Calibri" pitchFamily="34" charset="0"/>
+                <a:ea typeface="Calibri" pitchFamily="34" charset="-122"/>
+                <a:cs typeface="Calibri" pitchFamily="34" charset="-120"/>
+              </a:rPr>
+              <a:t>No prior work has fused a complete planning loop (neural encoder, transformer rollouts, scoring, elite selection, distribution updates) into one GPU program.</a:t>
+            </a:r>
+            <a:endParaRPr lang="en-US" sz="1400" dirty="0"/>
+          </a:p>
+        </p:txBody>
+      </p:sp>
+      <p:sp>
+        <p:nvSpPr>
+          <p:cNvPr id="12" name="Text 10"/>
+          <p:cNvSpPr txBox="1"/>
+          <p:nvPr/>
+        </p:nvSpPr>
+        <p:spPr>
+          <a:xfrm>
+            <a:off x="457200" y="4114800"/>
+            <a:ext cx="8229600" cy="457200"/>
+          </a:xfrm>
+          <a:prstGeom prst="rect">
+            <a:avLst/>
+          </a:prstGeom>
+          <a:noFill/>
+          <a:ln/>
+        </p:spPr>
+        <p:txBody>
+          <a:bodyPr wrap="square" lIns="0" tIns="0" rIns="0" bIns="0" rtlCol="0" anchor="ctr"/>
+          <a:lstStyle/>
+          <a:p>
+            <a:pPr indent="0" marL="0">
+              <a:buNone/>
+            </a:pPr>
+            <a:r>
+              <a:rPr lang="en-US" sz="1150" i="1" dirty="0">
+                <a:solidFill>
+                  <a:srgbClr val="5A5A5A"/>
+                </a:solidFill>
+                <a:latin typeface="Calibri" pitchFamily="34" charset="0"/>
+                <a:ea typeface="Calibri" pitchFamily="34" charset="-122"/>
+                <a:cs typeface="Calibri" pitchFamily="34" charset="-120"/>
+              </a:rPr>
+              <a:t>Fast GPU planning exists in robotics with hand-written dynamics (MPPI, STORM, cuRobo, MPPI-Generic), not with learned world models.</a:t>
             </a:r>
             <a:endParaRPr lang="en-US" sz="1150" dirty="0"/>
           </a:p>
-          <a:p>
-            <a:pPr marL="177800" indent="-177800">
-              <a:spcAft>
-                <a:spcPts val="700"/>
-              </a:spcAft>
-              <a:buSzPct val="100000"/>
-              <a:buChar char="•"/>
-            </a:pPr>
-            <a:r>
-              <a:rPr lang="en-US" sz="1150" dirty="0">
-                <a:solidFill>
-                  <a:srgbClr val="1B1B1B"/>
-                </a:solidFill>
-                <a:latin typeface="Calibri" pitchFamily="34" charset="0"/>
-                <a:ea typeface="Calibri" pitchFamily="34" charset="-122"/>
-                <a:cs typeface="Calibri" pitchFamily="34" charset="-120"/>
-              </a:rPr>
-              <a:t>iCEM search: 2,820 instead of 9,000 imagined futures.</a:t>
-            </a:r>
-            <a:endParaRPr lang="en-US" sz="1150" dirty="0"/>
-          </a:p>
-          <a:p>
-            <a:pPr marL="177800" indent="-177800">
-              <a:spcAft>
-                <a:spcPts val="700"/>
-              </a:spcAft>
-              <a:buSzPct val="100000"/>
-              <a:buChar char="•"/>
-            </a:pPr>
-            <a:r>
-              <a:rPr lang="en-US" sz="1150" dirty="0">
-                <a:solidFill>
-                  <a:srgbClr val="1B1B1B"/>
-                </a:solidFill>
-                <a:latin typeface="Calibri" pitchFamily="34" charset="0"/>
-                <a:ea typeface="Calibri" pitchFamily="34" charset="-122"/>
-                <a:cs typeface="Calibri" pitchFamily="34" charset="-120"/>
-              </a:rPr>
-              <a:t>Whole plan in one persistent kernel: sampling, rollouts, scoring, elite selection, encoder; the CPU waits once.</a:t>
-            </a:r>
-            <a:endParaRPr lang="en-US" sz="1150" dirty="0"/>
-          </a:p>
-          <a:p>
-            <a:pPr marL="177800" indent="-177800">
-              <a:spcAft>
-                <a:spcPts val="700"/>
-              </a:spcAft>
-              <a:buSzPct val="100000"/>
-              <a:buChar char="•"/>
-            </a:pPr>
-            <a:r>
-              <a:rPr lang="en-US" sz="1150" dirty="0">
-                <a:solidFill>
-                  <a:srgbClr val="1B1B1B"/>
-                </a:solidFill>
-                <a:latin typeface="Calibri" pitchFamily="34" charset="0"/>
-                <a:ea typeface="Calibri" pitchFamily="34" charset="-122"/>
-                <a:cs typeface="Calibri" pitchFamily="34" charset="-120"/>
-              </a:rPr>
-              <a:t>Small model spread across a 16-processor cluster; partial results exchanged on chip; barrier 3.6 → 0.65 µs.</a:t>
-            </a:r>
-            <a:endParaRPr lang="en-US" sz="1150" dirty="0"/>
-          </a:p>
-          <a:p>
-            <a:pPr marL="177800" indent="-177800">
-              <a:spcAft>
-                <a:spcPts val="700"/>
-              </a:spcAft>
-              <a:buSzPct val="100000"/>
-              <a:buChar char="•"/>
-            </a:pPr>
-            <a:r>
-              <a:rPr lang="en-US" sz="1150" dirty="0">
-                <a:solidFill>
-                  <a:srgbClr val="1B1B1B"/>
-                </a:solidFill>
-                <a:latin typeface="Calibri" pitchFamily="34" charset="0"/>
-                <a:ea typeface="Calibri" pitchFamily="34" charset="-122"/>
-                <a:cs typeface="Calibri" pitchFamily="34" charset="-120"/>
-              </a:rPr>
-              <a:t>Weights streamed ahead of use; BF16 inputs, FP32 accumulation.</a:t>
-            </a:r>
-            <a:endParaRPr lang="en-US" sz="1150" dirty="0"/>
-          </a:p>
-        </p:txBody>
-      </p:sp>
-      <p:sp>
-        <p:nvSpPr>
-          <p:cNvPr id="6" name="Text 2"/>
+        </p:txBody>
+      </p:sp>
+      <p:sp>
+        <p:nvSpPr>
+          <p:cNvPr id="14" name="Text 11"/>
           <p:cNvSpPr txBox="1"/>
           <p:nvPr/>
         </p:nvSpPr>
